--- a/storeinsight/public/FLASHTEMPLATE.pptx
+++ b/storeinsight/public/FLASHTEMPLATE.pptx
@@ -1,22 +1,22 @@
 
 <file path=ppt/presentation.xml><?xml version="1.0" encoding="utf-8"?>
-<p:presentation xmlns:a="http://schemas.openxmlformats.org/drawingml/2006/main" xmlns:r="http://schemas.openxmlformats.org/officeDocument/2006/relationships" xmlns:p="http://schemas.openxmlformats.org/presentationml/2006/main" saveSubsetFonts="1" embedTrueTypeFonts="true">
+<p:presentation xmlns:a="http://schemas.openxmlformats.org/drawingml/2006/main" xmlns:r="http://schemas.openxmlformats.org/officeDocument/2006/relationships" xmlns:p="http://schemas.openxmlformats.org/presentationml/2006/main" embedTrueTypeFonts="1" saveSubsetFonts="1">
   <p:sldMasterIdLst>
     <p:sldMasterId id="2147483648" r:id="rId1"/>
   </p:sldMasterIdLst>
   <p:sldIdLst>
-    <p:sldId id="256" r:id="rId6"/>
+    <p:sldId id="256" r:id="rId2"/>
   </p:sldIdLst>
   <p:sldSz cx="7772400" cy="10058400"/>
   <p:notesSz cx="6858000" cy="9144000"/>
   <p:embeddedFontLst>
     <p:embeddedFont>
-      <p:font typeface="Arimo" charset="1" panose="020B0604020202020204"/>
-      <p:regular r:id="rId7"/>
+      <p:font typeface="Avenir" panose="020B0604020202020204" charset="0"/>
+      <p:regular r:id="rId3"/>
     </p:embeddedFont>
     <p:embeddedFont>
-      <p:font typeface="Arimo Bold" charset="1" panose="020B0704020202020204"/>
-      <p:regular r:id="rId8"/>
+      <p:font typeface="Avenir Bold" panose="020B0604020202020204" charset="0"/>
+      <p:regular r:id="rId4"/>
     </p:embeddedFont>
   </p:embeddedFontLst>
   <p:defaultTextStyle>
@@ -114,6 +114,22 @@
       </a:defRPr>
     </a:lvl9pPr>
   </p:defaultTextStyle>
+  <p:extLst>
+    <p:ext uri="{EFAFB233-063F-42B5-8137-9DF3F51BA10A}">
+      <p15:sldGuideLst xmlns:p15="http://schemas.microsoft.com/office/powerpoint/2012/main">
+        <p15:guide id="1" orient="horz" pos="2160">
+          <p15:clr>
+            <a:srgbClr val="A4A3A4"/>
+          </p15:clr>
+        </p15:guide>
+        <p15:guide id="2" pos="2880">
+          <p15:clr>
+            <a:srgbClr val="A4A3A4"/>
+          </p15:clr>
+        </p15:guide>
+      </p15:sldGuideLst>
+    </p:ext>
+  </p:extLst>
 </p:presentation>
 </file>
 
@@ -155,10 +171,9 @@
           <a:lstStyle/>
           <a:p>
             <a:r>
-              <a:rPr lang="en-US" smtClean="0"/>
+              <a:rPr lang="en-US"/>
               <a:t>Click to edit Master title style</a:t>
             </a:r>
-            <a:endParaRPr lang="en-US"/>
           </a:p>
         </p:txBody>
       </p:sp>
@@ -274,10 +289,9 @@
           </a:lstStyle>
           <a:p>
             <a:r>
-              <a:rPr lang="en-US" smtClean="0"/>
+              <a:rPr lang="en-US"/>
               <a:t>Click to edit Master subtitle style</a:t>
             </a:r>
-            <a:endParaRPr lang="en-US"/>
           </a:p>
         </p:txBody>
       </p:sp>
@@ -299,7 +313,7 @@
             <a:fld id="{1D8BD707-D9CF-40AE-B4C6-C98DA3205C09}" type="datetimeFigureOut">
               <a:rPr lang="en-US" smtClean="0"/>
               <a:pPr/>
-              <a:t>8/1/2011</a:t>
+              <a:t>11/19/2025</a:t>
             </a:fld>
             <a:endParaRPr lang="en-US"/>
           </a:p>
@@ -389,10 +403,9 @@
           <a:lstStyle/>
           <a:p>
             <a:r>
-              <a:rPr lang="en-US" smtClean="0"/>
+              <a:rPr lang="en-US"/>
               <a:t>Click to edit Master title style</a:t>
             </a:r>
-            <a:endParaRPr lang="en-US"/>
           </a:p>
         </p:txBody>
       </p:sp>
@@ -413,38 +426,37 @@
           <a:p>
             <a:pPr lvl="0"/>
             <a:r>
-              <a:rPr lang="en-US" smtClean="0"/>
+              <a:rPr lang="en-US"/>
               <a:t>Click to edit Master text styles</a:t>
             </a:r>
           </a:p>
           <a:p>
             <a:pPr lvl="1"/>
             <a:r>
-              <a:rPr lang="en-US" smtClean="0"/>
+              <a:rPr lang="en-US"/>
               <a:t>Second level</a:t>
             </a:r>
           </a:p>
           <a:p>
             <a:pPr lvl="2"/>
             <a:r>
-              <a:rPr lang="en-US" smtClean="0"/>
+              <a:rPr lang="en-US"/>
               <a:t>Third level</a:t>
             </a:r>
           </a:p>
           <a:p>
             <a:pPr lvl="3"/>
             <a:r>
-              <a:rPr lang="en-US" smtClean="0"/>
+              <a:rPr lang="en-US"/>
               <a:t>Fourth level</a:t>
             </a:r>
           </a:p>
           <a:p>
             <a:pPr lvl="4"/>
             <a:r>
-              <a:rPr lang="en-US" smtClean="0"/>
+              <a:rPr lang="en-US"/>
               <a:t>Fifth level</a:t>
             </a:r>
-            <a:endParaRPr lang="en-US"/>
           </a:p>
         </p:txBody>
       </p:sp>
@@ -466,7 +478,7 @@
             <a:fld id="{1D8BD707-D9CF-40AE-B4C6-C98DA3205C09}" type="datetimeFigureOut">
               <a:rPr lang="en-US" smtClean="0"/>
               <a:pPr/>
-              <a:t>8/1/2011</a:t>
+              <a:t>11/19/2025</a:t>
             </a:fld>
             <a:endParaRPr lang="en-US"/>
           </a:p>
@@ -561,10 +573,9 @@
           <a:lstStyle/>
           <a:p>
             <a:r>
-              <a:rPr lang="en-US" smtClean="0"/>
+              <a:rPr lang="en-US"/>
               <a:t>Click to edit Master title style</a:t>
             </a:r>
-            <a:endParaRPr lang="en-US"/>
           </a:p>
         </p:txBody>
       </p:sp>
@@ -590,38 +601,37 @@
           <a:p>
             <a:pPr lvl="0"/>
             <a:r>
-              <a:rPr lang="en-US" smtClean="0"/>
+              <a:rPr lang="en-US"/>
               <a:t>Click to edit Master text styles</a:t>
             </a:r>
           </a:p>
           <a:p>
             <a:pPr lvl="1"/>
             <a:r>
-              <a:rPr lang="en-US" smtClean="0"/>
+              <a:rPr lang="en-US"/>
               <a:t>Second level</a:t>
             </a:r>
           </a:p>
           <a:p>
             <a:pPr lvl="2"/>
             <a:r>
-              <a:rPr lang="en-US" smtClean="0"/>
+              <a:rPr lang="en-US"/>
               <a:t>Third level</a:t>
             </a:r>
           </a:p>
           <a:p>
             <a:pPr lvl="3"/>
             <a:r>
-              <a:rPr lang="en-US" smtClean="0"/>
+              <a:rPr lang="en-US"/>
               <a:t>Fourth level</a:t>
             </a:r>
           </a:p>
           <a:p>
             <a:pPr lvl="4"/>
             <a:r>
-              <a:rPr lang="en-US" smtClean="0"/>
+              <a:rPr lang="en-US"/>
               <a:t>Fifth level</a:t>
             </a:r>
-            <a:endParaRPr lang="en-US"/>
           </a:p>
         </p:txBody>
       </p:sp>
@@ -643,7 +653,7 @@
             <a:fld id="{1D8BD707-D9CF-40AE-B4C6-C98DA3205C09}" type="datetimeFigureOut">
               <a:rPr lang="en-US" smtClean="0"/>
               <a:pPr/>
-              <a:t>8/1/2011</a:t>
+              <a:t>11/19/2025</a:t>
             </a:fld>
             <a:endParaRPr lang="en-US"/>
           </a:p>
@@ -733,10 +743,9 @@
           <a:lstStyle/>
           <a:p>
             <a:r>
-              <a:rPr lang="en-US" smtClean="0"/>
+              <a:rPr lang="en-US"/>
               <a:t>Click to edit Master title style</a:t>
             </a:r>
-            <a:endParaRPr lang="en-US"/>
           </a:p>
         </p:txBody>
       </p:sp>
@@ -757,38 +766,37 @@
           <a:p>
             <a:pPr lvl="0"/>
             <a:r>
-              <a:rPr lang="en-US" smtClean="0"/>
+              <a:rPr lang="en-US"/>
               <a:t>Click to edit Master text styles</a:t>
             </a:r>
           </a:p>
           <a:p>
             <a:pPr lvl="1"/>
             <a:r>
-              <a:rPr lang="en-US" smtClean="0"/>
+              <a:rPr lang="en-US"/>
               <a:t>Second level</a:t>
             </a:r>
           </a:p>
           <a:p>
             <a:pPr lvl="2"/>
             <a:r>
-              <a:rPr lang="en-US" smtClean="0"/>
+              <a:rPr lang="en-US"/>
               <a:t>Third level</a:t>
             </a:r>
           </a:p>
           <a:p>
             <a:pPr lvl="3"/>
             <a:r>
-              <a:rPr lang="en-US" smtClean="0"/>
+              <a:rPr lang="en-US"/>
               <a:t>Fourth level</a:t>
             </a:r>
           </a:p>
           <a:p>
             <a:pPr lvl="4"/>
             <a:r>
-              <a:rPr lang="en-US" smtClean="0"/>
+              <a:rPr lang="en-US"/>
               <a:t>Fifth level</a:t>
             </a:r>
-            <a:endParaRPr lang="en-US"/>
           </a:p>
         </p:txBody>
       </p:sp>
@@ -810,7 +818,7 @@
             <a:fld id="{1D8BD707-D9CF-40AE-B4C6-C98DA3205C09}" type="datetimeFigureOut">
               <a:rPr lang="en-US" smtClean="0"/>
               <a:pPr/>
-              <a:t>8/1/2011</a:t>
+              <a:t>11/19/2025</a:t>
             </a:fld>
             <a:endParaRPr lang="en-US"/>
           </a:p>
@@ -909,10 +917,9 @@
           </a:lstStyle>
           <a:p>
             <a:r>
-              <a:rPr lang="en-US" smtClean="0"/>
+              <a:rPr lang="en-US"/>
               <a:t>Click to edit Master title style</a:t>
             </a:r>
-            <a:endParaRPr lang="en-US"/>
           </a:p>
         </p:txBody>
       </p:sp>
@@ -1029,7 +1036,7 @@
           <a:p>
             <a:pPr lvl="0"/>
             <a:r>
-              <a:rPr lang="en-US" smtClean="0"/>
+              <a:rPr lang="en-US"/>
               <a:t>Click to edit Master text styles</a:t>
             </a:r>
           </a:p>
@@ -1053,7 +1060,7 @@
             <a:fld id="{1D8BD707-D9CF-40AE-B4C6-C98DA3205C09}" type="datetimeFigureOut">
               <a:rPr lang="en-US" smtClean="0"/>
               <a:pPr/>
-              <a:t>8/1/2011</a:t>
+              <a:t>11/19/2025</a:t>
             </a:fld>
             <a:endParaRPr lang="en-US"/>
           </a:p>
@@ -1143,10 +1150,9 @@
           <a:lstStyle/>
           <a:p>
             <a:r>
-              <a:rPr lang="en-US" smtClean="0"/>
+              <a:rPr lang="en-US"/>
               <a:t>Click to edit Master title style</a:t>
             </a:r>
-            <a:endParaRPr lang="en-US"/>
           </a:p>
         </p:txBody>
       </p:sp>
@@ -1200,38 +1206,37 @@
           <a:p>
             <a:pPr lvl="0"/>
             <a:r>
-              <a:rPr lang="en-US" smtClean="0"/>
+              <a:rPr lang="en-US"/>
               <a:t>Click to edit Master text styles</a:t>
             </a:r>
           </a:p>
           <a:p>
             <a:pPr lvl="1"/>
             <a:r>
-              <a:rPr lang="en-US" smtClean="0"/>
+              <a:rPr lang="en-US"/>
               <a:t>Second level</a:t>
             </a:r>
           </a:p>
           <a:p>
             <a:pPr lvl="2"/>
             <a:r>
-              <a:rPr lang="en-US" smtClean="0"/>
+              <a:rPr lang="en-US"/>
               <a:t>Third level</a:t>
             </a:r>
           </a:p>
           <a:p>
             <a:pPr lvl="3"/>
             <a:r>
-              <a:rPr lang="en-US" smtClean="0"/>
+              <a:rPr lang="en-US"/>
               <a:t>Fourth level</a:t>
             </a:r>
           </a:p>
           <a:p>
             <a:pPr lvl="4"/>
             <a:r>
-              <a:rPr lang="en-US" smtClean="0"/>
+              <a:rPr lang="en-US"/>
               <a:t>Fifth level</a:t>
             </a:r>
-            <a:endParaRPr lang="en-US"/>
           </a:p>
         </p:txBody>
       </p:sp>
@@ -1285,38 +1290,37 @@
           <a:p>
             <a:pPr lvl="0"/>
             <a:r>
-              <a:rPr lang="en-US" smtClean="0"/>
+              <a:rPr lang="en-US"/>
               <a:t>Click to edit Master text styles</a:t>
             </a:r>
           </a:p>
           <a:p>
             <a:pPr lvl="1"/>
             <a:r>
-              <a:rPr lang="en-US" smtClean="0"/>
+              <a:rPr lang="en-US"/>
               <a:t>Second level</a:t>
             </a:r>
           </a:p>
           <a:p>
             <a:pPr lvl="2"/>
             <a:r>
-              <a:rPr lang="en-US" smtClean="0"/>
+              <a:rPr lang="en-US"/>
               <a:t>Third level</a:t>
             </a:r>
           </a:p>
           <a:p>
             <a:pPr lvl="3"/>
             <a:r>
-              <a:rPr lang="en-US" smtClean="0"/>
+              <a:rPr lang="en-US"/>
               <a:t>Fourth level</a:t>
             </a:r>
           </a:p>
           <a:p>
             <a:pPr lvl="4"/>
             <a:r>
-              <a:rPr lang="en-US" smtClean="0"/>
+              <a:rPr lang="en-US"/>
               <a:t>Fifth level</a:t>
             </a:r>
-            <a:endParaRPr lang="en-US"/>
           </a:p>
         </p:txBody>
       </p:sp>
@@ -1338,7 +1342,7 @@
             <a:fld id="{1D8BD707-D9CF-40AE-B4C6-C98DA3205C09}" type="datetimeFigureOut">
               <a:rPr lang="en-US" smtClean="0"/>
               <a:pPr/>
-              <a:t>8/1/2011</a:t>
+              <a:t>11/19/2025</a:t>
             </a:fld>
             <a:endParaRPr lang="en-US"/>
           </a:p>
@@ -1432,10 +1436,9 @@
           </a:lstStyle>
           <a:p>
             <a:r>
-              <a:rPr lang="en-US" smtClean="0"/>
+              <a:rPr lang="en-US"/>
               <a:t>Click to edit Master title style</a:t>
             </a:r>
-            <a:endParaRPr lang="en-US"/>
           </a:p>
         </p:txBody>
       </p:sp>
@@ -1498,7 +1501,7 @@
           <a:p>
             <a:pPr lvl="0"/>
             <a:r>
-              <a:rPr lang="en-US" smtClean="0"/>
+              <a:rPr lang="en-US"/>
               <a:t>Click to edit Master text styles</a:t>
             </a:r>
           </a:p>
@@ -1554,38 +1557,37 @@
           <a:p>
             <a:pPr lvl="0"/>
             <a:r>
-              <a:rPr lang="en-US" smtClean="0"/>
+              <a:rPr lang="en-US"/>
               <a:t>Click to edit Master text styles</a:t>
             </a:r>
           </a:p>
           <a:p>
             <a:pPr lvl="1"/>
             <a:r>
-              <a:rPr lang="en-US" smtClean="0"/>
+              <a:rPr lang="en-US"/>
               <a:t>Second level</a:t>
             </a:r>
           </a:p>
           <a:p>
             <a:pPr lvl="2"/>
             <a:r>
-              <a:rPr lang="en-US" smtClean="0"/>
+              <a:rPr lang="en-US"/>
               <a:t>Third level</a:t>
             </a:r>
           </a:p>
           <a:p>
             <a:pPr lvl="3"/>
             <a:r>
-              <a:rPr lang="en-US" smtClean="0"/>
+              <a:rPr lang="en-US"/>
               <a:t>Fourth level</a:t>
             </a:r>
           </a:p>
           <a:p>
             <a:pPr lvl="4"/>
             <a:r>
-              <a:rPr lang="en-US" smtClean="0"/>
+              <a:rPr lang="en-US"/>
               <a:t>Fifth level</a:t>
             </a:r>
-            <a:endParaRPr lang="en-US"/>
           </a:p>
         </p:txBody>
       </p:sp>
@@ -1648,7 +1650,7 @@
           <a:p>
             <a:pPr lvl="0"/>
             <a:r>
-              <a:rPr lang="en-US" smtClean="0"/>
+              <a:rPr lang="en-US"/>
               <a:t>Click to edit Master text styles</a:t>
             </a:r>
           </a:p>
@@ -1704,38 +1706,37 @@
           <a:p>
             <a:pPr lvl="0"/>
             <a:r>
-              <a:rPr lang="en-US" smtClean="0"/>
+              <a:rPr lang="en-US"/>
               <a:t>Click to edit Master text styles</a:t>
             </a:r>
           </a:p>
           <a:p>
             <a:pPr lvl="1"/>
             <a:r>
-              <a:rPr lang="en-US" smtClean="0"/>
+              <a:rPr lang="en-US"/>
               <a:t>Second level</a:t>
             </a:r>
           </a:p>
           <a:p>
             <a:pPr lvl="2"/>
             <a:r>
-              <a:rPr lang="en-US" smtClean="0"/>
+              <a:rPr lang="en-US"/>
               <a:t>Third level</a:t>
             </a:r>
           </a:p>
           <a:p>
             <a:pPr lvl="3"/>
             <a:r>
-              <a:rPr lang="en-US" smtClean="0"/>
+              <a:rPr lang="en-US"/>
               <a:t>Fourth level</a:t>
             </a:r>
           </a:p>
           <a:p>
             <a:pPr lvl="4"/>
             <a:r>
-              <a:rPr lang="en-US" smtClean="0"/>
+              <a:rPr lang="en-US"/>
               <a:t>Fifth level</a:t>
             </a:r>
-            <a:endParaRPr lang="en-US"/>
           </a:p>
         </p:txBody>
       </p:sp>
@@ -1757,7 +1758,7 @@
             <a:fld id="{1D8BD707-D9CF-40AE-B4C6-C98DA3205C09}" type="datetimeFigureOut">
               <a:rPr lang="en-US" smtClean="0"/>
               <a:pPr/>
-              <a:t>8/1/2011</a:t>
+              <a:t>11/19/2025</a:t>
             </a:fld>
             <a:endParaRPr lang="en-US"/>
           </a:p>
@@ -1847,10 +1848,9 @@
           <a:lstStyle/>
           <a:p>
             <a:r>
-              <a:rPr lang="en-US" smtClean="0"/>
+              <a:rPr lang="en-US"/>
               <a:t>Click to edit Master title style</a:t>
             </a:r>
-            <a:endParaRPr lang="en-US"/>
           </a:p>
         </p:txBody>
       </p:sp>
@@ -1872,7 +1872,7 @@
             <a:fld id="{1D8BD707-D9CF-40AE-B4C6-C98DA3205C09}" type="datetimeFigureOut">
               <a:rPr lang="en-US" smtClean="0"/>
               <a:pPr/>
-              <a:t>8/1/2011</a:t>
+              <a:t>11/19/2025</a:t>
             </a:fld>
             <a:endParaRPr lang="en-US"/>
           </a:p>
@@ -1964,7 +1964,7 @@
             <a:fld id="{1D8BD707-D9CF-40AE-B4C6-C98DA3205C09}" type="datetimeFigureOut">
               <a:rPr lang="en-US" smtClean="0"/>
               <a:pPr/>
-              <a:t>8/1/2011</a:t>
+              <a:t>11/19/2025</a:t>
             </a:fld>
             <a:endParaRPr lang="en-US"/>
           </a:p>
@@ -2063,10 +2063,9 @@
           </a:lstStyle>
           <a:p>
             <a:r>
-              <a:rPr lang="en-US" smtClean="0"/>
+              <a:rPr lang="en-US"/>
               <a:t>Click to edit Master title style</a:t>
             </a:r>
-            <a:endParaRPr lang="en-US"/>
           </a:p>
         </p:txBody>
       </p:sp>
@@ -2120,38 +2119,37 @@
           <a:p>
             <a:pPr lvl="0"/>
             <a:r>
-              <a:rPr lang="en-US" smtClean="0"/>
+              <a:rPr lang="en-US"/>
               <a:t>Click to edit Master text styles</a:t>
             </a:r>
           </a:p>
           <a:p>
             <a:pPr lvl="1"/>
             <a:r>
-              <a:rPr lang="en-US" smtClean="0"/>
+              <a:rPr lang="en-US"/>
               <a:t>Second level</a:t>
             </a:r>
           </a:p>
           <a:p>
             <a:pPr lvl="2"/>
             <a:r>
-              <a:rPr lang="en-US" smtClean="0"/>
+              <a:rPr lang="en-US"/>
               <a:t>Third level</a:t>
             </a:r>
           </a:p>
           <a:p>
             <a:pPr lvl="3"/>
             <a:r>
-              <a:rPr lang="en-US" smtClean="0"/>
+              <a:rPr lang="en-US"/>
               <a:t>Fourth level</a:t>
             </a:r>
           </a:p>
           <a:p>
             <a:pPr lvl="4"/>
             <a:r>
-              <a:rPr lang="en-US" smtClean="0"/>
+              <a:rPr lang="en-US"/>
               <a:t>Fifth level</a:t>
             </a:r>
-            <a:endParaRPr lang="en-US"/>
           </a:p>
         </p:txBody>
       </p:sp>
@@ -2214,7 +2212,7 @@
           <a:p>
             <a:pPr lvl="0"/>
             <a:r>
-              <a:rPr lang="en-US" smtClean="0"/>
+              <a:rPr lang="en-US"/>
               <a:t>Click to edit Master text styles</a:t>
             </a:r>
           </a:p>
@@ -2238,7 +2236,7 @@
             <a:fld id="{1D8BD707-D9CF-40AE-B4C6-C98DA3205C09}" type="datetimeFigureOut">
               <a:rPr lang="en-US" smtClean="0"/>
               <a:pPr/>
-              <a:t>8/1/2011</a:t>
+              <a:t>11/19/2025</a:t>
             </a:fld>
             <a:endParaRPr lang="en-US"/>
           </a:p>
@@ -2337,10 +2335,9 @@
           </a:lstStyle>
           <a:p>
             <a:r>
-              <a:rPr lang="en-US" smtClean="0"/>
+              <a:rPr lang="en-US"/>
               <a:t>Click to edit Master title style</a:t>
             </a:r>
-            <a:endParaRPr lang="en-US"/>
           </a:p>
         </p:txBody>
       </p:sp>
@@ -2464,7 +2461,7 @@
           <a:p>
             <a:pPr lvl="0"/>
             <a:r>
-              <a:rPr lang="en-US" smtClean="0"/>
+              <a:rPr lang="en-US"/>
               <a:t>Click to edit Master text styles</a:t>
             </a:r>
           </a:p>
@@ -2488,7 +2485,7 @@
             <a:fld id="{1D8BD707-D9CF-40AE-B4C6-C98DA3205C09}" type="datetimeFigureOut">
               <a:rPr lang="en-US" smtClean="0"/>
               <a:pPr/>
-              <a:t>8/1/2011</a:t>
+              <a:t>11/19/2025</a:t>
             </a:fld>
             <a:endParaRPr lang="en-US"/>
           </a:p>
@@ -2593,10 +2590,9 @@
           <a:lstStyle/>
           <a:p>
             <a:r>
-              <a:rPr lang="en-US" smtClean="0"/>
+              <a:rPr lang="en-US"/>
               <a:t>Click to edit Master title style</a:t>
             </a:r>
-            <a:endParaRPr lang="en-US"/>
           </a:p>
         </p:txBody>
       </p:sp>
@@ -2627,38 +2623,37 @@
           <a:p>
             <a:pPr lvl="0"/>
             <a:r>
-              <a:rPr lang="en-US" smtClean="0"/>
+              <a:rPr lang="en-US"/>
               <a:t>Click to edit Master text styles</a:t>
             </a:r>
           </a:p>
           <a:p>
             <a:pPr lvl="1"/>
             <a:r>
-              <a:rPr lang="en-US" smtClean="0"/>
+              <a:rPr lang="en-US"/>
               <a:t>Second level</a:t>
             </a:r>
           </a:p>
           <a:p>
             <a:pPr lvl="2"/>
             <a:r>
-              <a:rPr lang="en-US" smtClean="0"/>
+              <a:rPr lang="en-US"/>
               <a:t>Third level</a:t>
             </a:r>
           </a:p>
           <a:p>
             <a:pPr lvl="3"/>
             <a:r>
-              <a:rPr lang="en-US" smtClean="0"/>
+              <a:rPr lang="en-US"/>
               <a:t>Fourth level</a:t>
             </a:r>
           </a:p>
           <a:p>
             <a:pPr lvl="4"/>
             <a:r>
-              <a:rPr lang="en-US" smtClean="0"/>
+              <a:rPr lang="en-US"/>
               <a:t>Fifth level</a:t>
             </a:r>
-            <a:endParaRPr lang="en-US"/>
           </a:p>
         </p:txBody>
       </p:sp>
@@ -2698,7 +2693,7 @@
             <a:fld id="{1D8BD707-D9CF-40AE-B4C6-C98DA3205C09}" type="datetimeFigureOut">
               <a:rPr lang="en-US" smtClean="0"/>
               <a:pPr/>
-              <a:t>8/1/2011</a:t>
+              <a:t>11/19/2025</a:t>
             </a:fld>
             <a:endParaRPr lang="en-US"/>
           </a:p>
@@ -3053,7 +3048,7 @@
 </file>
 
 <file path=ppt/slides/slide1.xml><?xml version="1.0" encoding="utf-8"?>
-<p:sld xmlns:p="http://schemas.openxmlformats.org/presentationml/2006/main" xmlns:a="http://schemas.openxmlformats.org/drawingml/2006/main" xmlns:r="http://schemas.openxmlformats.org/officeDocument/2006/relationships">
+<p:sld xmlns:a="http://schemas.openxmlformats.org/drawingml/2006/main" xmlns:r="http://schemas.openxmlformats.org/officeDocument/2006/relationships" xmlns:p="http://schemas.openxmlformats.org/presentationml/2006/main">
   <p:cSld>
     <p:spTree>
       <p:nvGrpSpPr>
@@ -3071,12 +3066,12 @@
       </p:grpSpPr>
       <p:grpSp>
         <p:nvGrpSpPr>
-          <p:cNvPr name="Group 2" id="2"/>
+          <p:cNvPr id="2" name="Group 2"/>
           <p:cNvGrpSpPr/>
           <p:nvPr/>
         </p:nvGrpSpPr>
         <p:grpSpPr>
-          <a:xfrm rot="0">
+          <a:xfrm>
             <a:off x="596302" y="1054996"/>
             <a:ext cx="6605195" cy="9556"/>
             <a:chOff x="0" y="0"/>
@@ -3085,12 +3080,12 @@
         </p:grpSpPr>
         <p:sp>
           <p:nvSpPr>
-            <p:cNvPr name="Freeform 3" id="3"/>
+            <p:cNvPr id="3" name="Freeform 3"/>
             <p:cNvSpPr/>
             <p:nvPr/>
           </p:nvSpPr>
           <p:spPr>
-            <a:xfrm flipH="false" flipV="false" rot="0">
+            <a:xfrm>
               <a:off x="0" y="0"/>
               <a:ext cx="8806942" cy="12700"/>
             </a:xfrm>
@@ -3099,9 +3094,9 @@
               <a:gdLst/>
               <a:ahLst/>
               <a:cxnLst/>
-              <a:rect r="r" b="b" t="t" l="l"/>
+              <a:rect l="l" t="t" r="r" b="b"/>
               <a:pathLst>
-                <a:path h="12700" w="8806942">
+                <a:path w="8806942" h="12700">
                   <a:moveTo>
                     <a:pt x="0" y="0"/>
                   </a:moveTo>
@@ -3119,24 +3114,33 @@
               </a:pathLst>
             </a:custGeom>
             <a:solidFill>
-              <a:srgbClr val="C7C7CC"/>
+              <a:srgbClr val="1D2A5C"/>
             </a:solidFill>
             <a:ln w="12700">
               <a:solidFill>
-                <a:srgbClr val="000000"/>
+                <a:schemeClr val="bg1">
+                  <a:lumMod val="85000"/>
+                </a:schemeClr>
               </a:solidFill>
             </a:ln>
           </p:spPr>
+          <p:txBody>
+            <a:bodyPr/>
+            <a:lstStyle/>
+            <a:p>
+              <a:endParaRPr lang="en-US"/>
+            </a:p>
+          </p:txBody>
         </p:sp>
       </p:grpSp>
       <p:grpSp>
         <p:nvGrpSpPr>
-          <p:cNvPr name="Group 4" id="4"/>
+          <p:cNvPr id="4" name="Group 4"/>
           <p:cNvGrpSpPr/>
           <p:nvPr/>
         </p:nvGrpSpPr>
         <p:grpSpPr>
-          <a:xfrm rot="0">
+          <a:xfrm>
             <a:off x="586151" y="1233696"/>
             <a:ext cx="6620125" cy="422381"/>
             <a:chOff x="0" y="0"/>
@@ -3145,12 +3149,12 @@
         </p:grpSpPr>
         <p:sp>
           <p:nvSpPr>
-            <p:cNvPr name="Freeform 5" id="5"/>
+            <p:cNvPr id="5" name="Freeform 5"/>
             <p:cNvSpPr/>
             <p:nvPr/>
           </p:nvSpPr>
           <p:spPr>
-            <a:xfrm flipH="false" flipV="false" rot="0">
+            <a:xfrm>
               <a:off x="6355" y="6350"/>
               <a:ext cx="8814097" cy="550418"/>
             </a:xfrm>
@@ -3159,9 +3163,9 @@
               <a:gdLst/>
               <a:ahLst/>
               <a:cxnLst/>
-              <a:rect r="r" b="b" t="t" l="l"/>
+              <a:rect l="l" t="t" r="r" b="b"/>
               <a:pathLst>
-                <a:path h="550418" w="8814097">
+                <a:path w="8814097" h="550418">
                   <a:moveTo>
                     <a:pt x="0" y="91821"/>
                   </a:moveTo>
@@ -3203,19 +3207,26 @@
             </a:solidFill>
             <a:ln w="12700">
               <a:solidFill>
-                <a:srgbClr val="000000"/>
+                <a:schemeClr val="bg1"/>
               </a:solidFill>
             </a:ln>
           </p:spPr>
+          <p:txBody>
+            <a:bodyPr/>
+            <a:lstStyle/>
+            <a:p>
+              <a:endParaRPr lang="en-US"/>
+            </a:p>
+          </p:txBody>
         </p:sp>
         <p:sp>
           <p:nvSpPr>
-            <p:cNvPr name="Freeform 6" id="6"/>
+            <p:cNvPr id="6" name="Freeform 6"/>
             <p:cNvSpPr/>
             <p:nvPr/>
           </p:nvSpPr>
           <p:spPr>
-            <a:xfrm flipH="false" flipV="false" rot="0">
+            <a:xfrm>
               <a:off x="0" y="0"/>
               <a:ext cx="8826807" cy="563245"/>
             </a:xfrm>
@@ -3224,9 +3235,9 @@
               <a:gdLst/>
               <a:ahLst/>
               <a:cxnLst/>
-              <a:rect r="r" b="b" t="t" l="l"/>
+              <a:rect l="l" t="t" r="r" b="b"/>
               <a:pathLst>
-                <a:path h="563245" w="8826807">
+                <a:path w="8826807" h="563245">
                   <a:moveTo>
                     <a:pt x="0" y="98171"/>
                   </a:moveTo>
@@ -3354,28 +3365,40 @@
             </a:solidFill>
             <a:ln w="12700">
               <a:solidFill>
-                <a:srgbClr val="000000"/>
+                <a:schemeClr val="bg1"/>
               </a:solidFill>
             </a:ln>
           </p:spPr>
+          <p:txBody>
+            <a:bodyPr/>
+            <a:lstStyle/>
+            <a:p>
+              <a:endParaRPr lang="en-US"/>
+            </a:p>
+          </p:txBody>
         </p:sp>
         <p:sp>
           <p:nvSpPr>
-            <p:cNvPr name="TextBox 7" id="7"/>
-            <p:cNvSpPr txBox="true"/>
+            <p:cNvPr id="7" name="TextBox 7"/>
+            <p:cNvSpPr txBox="1"/>
             <p:nvPr/>
           </p:nvSpPr>
           <p:spPr>
             <a:xfrm>
-              <a:off x="0" y="-19050"/>
-              <a:ext cx="8826833" cy="582224"/>
+              <a:off x="0" y="-28575"/>
+              <a:ext cx="8826833" cy="591749"/>
             </a:xfrm>
             <a:prstGeom prst="rect">
               <a:avLst/>
             </a:prstGeom>
+            <a:ln>
+              <a:solidFill>
+                <a:schemeClr val="bg1"/>
+              </a:solidFill>
+            </a:ln>
           </p:spPr>
           <p:txBody>
-            <a:bodyPr anchor="ctr" rtlCol="false" tIns="50800" lIns="50800" bIns="50800" rIns="50800"/>
+            <a:bodyPr lIns="50800" tIns="50800" rIns="50800" bIns="50800" rtlCol="0" anchor="ctr"/>
             <a:lstStyle/>
             <a:p>
               <a:pPr algn="ctr">
@@ -3388,10 +3411,10 @@
                   <a:solidFill>
                     <a:srgbClr val="FFFFFF"/>
                   </a:solidFill>
-                  <a:latin typeface="Arimo"/>
-                  <a:ea typeface="Arimo"/>
-                  <a:cs typeface="Arimo"/>
-                  <a:sym typeface="Arimo"/>
+                  <a:latin typeface="Avenir"/>
+                  <a:ea typeface="Avenir"/>
+                  <a:cs typeface="Avenir"/>
+                  <a:sym typeface="Avenir"/>
                 </a:rPr>
                 <a:t>{{FACILITYCODE}} · {{FACILITYSHORTNAME}}</a:t>
               </a:r>
@@ -3401,33 +3424,75 @@
       </p:grpSp>
       <p:graphicFrame>
         <p:nvGraphicFramePr>
-          <p:cNvPr name="Table 8" id="8"/>
+          <p:cNvPr id="8" name="Table 8"/>
           <p:cNvGraphicFramePr>
-            <a:graphicFrameLocks noGrp="true"/>
+            <a:graphicFrameLocks noGrp="1"/>
           </p:cNvGraphicFramePr>
           <p:nvPr/>
         </p:nvGraphicFramePr>
         <p:xfrm>
           <a:off x="596302" y="3571838"/>
-          <a:ext cx="6600099" cy="1081088"/>
+          <a:ext cx="6600102" cy="1042987"/>
         </p:xfrm>
         <a:graphic>
           <a:graphicData uri="http://schemas.openxmlformats.org/drawingml/2006/table">
             <a:tbl>
               <a:tblPr/>
               <a:tblGrid>
-                <a:gridCol w="942871"/>
-                <a:gridCol w="942871"/>
-                <a:gridCol w="942871"/>
-                <a:gridCol w="942871"/>
-                <a:gridCol w="942871"/>
-                <a:gridCol w="942871"/>
-                <a:gridCol w="942876"/>
+                <a:gridCol w="942871">
+                  <a:extLst>
+                    <a:ext uri="{9D8B030D-6E8A-4147-A177-3AD203B41FA5}">
+                      <a16:colId xmlns:a16="http://schemas.microsoft.com/office/drawing/2014/main" val="20000"/>
+                    </a:ext>
+                  </a:extLst>
+                </a:gridCol>
+                <a:gridCol w="942871">
+                  <a:extLst>
+                    <a:ext uri="{9D8B030D-6E8A-4147-A177-3AD203B41FA5}">
+                      <a16:colId xmlns:a16="http://schemas.microsoft.com/office/drawing/2014/main" val="20001"/>
+                    </a:ext>
+                  </a:extLst>
+                </a:gridCol>
+                <a:gridCol w="942871">
+                  <a:extLst>
+                    <a:ext uri="{9D8B030D-6E8A-4147-A177-3AD203B41FA5}">
+                      <a16:colId xmlns:a16="http://schemas.microsoft.com/office/drawing/2014/main" val="20002"/>
+                    </a:ext>
+                  </a:extLst>
+                </a:gridCol>
+                <a:gridCol w="942871">
+                  <a:extLst>
+                    <a:ext uri="{9D8B030D-6E8A-4147-A177-3AD203B41FA5}">
+                      <a16:colId xmlns:a16="http://schemas.microsoft.com/office/drawing/2014/main" val="20003"/>
+                    </a:ext>
+                  </a:extLst>
+                </a:gridCol>
+                <a:gridCol w="942871">
+                  <a:extLst>
+                    <a:ext uri="{9D8B030D-6E8A-4147-A177-3AD203B41FA5}">
+                      <a16:colId xmlns:a16="http://schemas.microsoft.com/office/drawing/2014/main" val="20004"/>
+                    </a:ext>
+                  </a:extLst>
+                </a:gridCol>
+                <a:gridCol w="942871">
+                  <a:extLst>
+                    <a:ext uri="{9D8B030D-6E8A-4147-A177-3AD203B41FA5}">
+                      <a16:colId xmlns:a16="http://schemas.microsoft.com/office/drawing/2014/main" val="20005"/>
+                    </a:ext>
+                  </a:extLst>
+                </a:gridCol>
+                <a:gridCol w="942876">
+                  <a:extLst>
+                    <a:ext uri="{9D8B030D-6E8A-4147-A177-3AD203B41FA5}">
+                      <a16:colId xmlns:a16="http://schemas.microsoft.com/office/drawing/2014/main" val="20006"/>
+                    </a:ext>
+                  </a:extLst>
+                </a:gridCol>
               </a:tblGrid>
-              <a:tr h="507059">
+              <a:tr h="488003">
                 <a:tc>
                   <a:txBody>
-                    <a:bodyPr anchor="t" rtlCol="false"/>
+                    <a:bodyPr/>
                     <a:lstStyle/>
                     <a:p>
                       <a:pPr algn="ctr">
@@ -3437,51 +3502,51 @@
                         <a:defRPr/>
                       </a:pPr>
                       <a:r>
-                        <a:rPr lang="en-US" sz="902" b="true">
+                        <a:rPr lang="en-US" sz="902" b="1">
                           <a:solidFill>
-                            <a:srgbClr val="8E8E93"/>
+                            <a:srgbClr val="2D2D2D"/>
                           </a:solidFill>
-                          <a:latin typeface="Arimo Bold"/>
-                          <a:ea typeface="Arimo Bold"/>
-                          <a:cs typeface="Arimo Bold"/>
-                          <a:sym typeface="Arimo Bold"/>
+                          <a:latin typeface="Avenir Bold"/>
+                          <a:ea typeface="Avenir Bold"/>
+                          <a:cs typeface="Avenir Bold"/>
+                          <a:sym typeface="Avenir Bold"/>
                         </a:rPr>
                         <a:t>MTD Rentals</a:t>
                       </a:r>
                       <a:endParaRPr lang="en-US" sz="1100"/>
                     </a:p>
                   </a:txBody>
-                  <a:tcPr marL="91440" marR="91440" marT="91440" marB="91440" anchor="ctr">
-                    <a:lnL cmpd="sng" algn="ctr" cap="flat" w="4762">
-                      <a:solidFill>
-                        <a:srgbClr val="000000"/>
+                  <a:tcPr marT="91440" marB="91440" anchor="ctr">
+                    <a:lnL w="4762" cap="flat" cmpd="sng" algn="ctr">
+                      <a:solidFill>
+                        <a:srgbClr val="3B52A1"/>
                       </a:solidFill>
                       <a:prstDash val="solid"/>
                       <a:round/>
                       <a:headEnd type="none" w="med" len="med"/>
                       <a:tailEnd type="none" w="med" len="med"/>
                     </a:lnL>
-                    <a:lnR cmpd="sng" algn="ctr" cap="flat" w="4762">
-                      <a:solidFill>
-                        <a:srgbClr val="000000"/>
+                    <a:lnR w="4762" cap="flat" cmpd="sng" algn="ctr">
+                      <a:solidFill>
+                        <a:srgbClr val="3B52A1"/>
                       </a:solidFill>
                       <a:prstDash val="solid"/>
                       <a:round/>
                       <a:headEnd type="none" w="med" len="med"/>
                       <a:tailEnd type="none" w="med" len="med"/>
                     </a:lnR>
-                    <a:lnT cmpd="sng" algn="ctr" cap="flat" w="4762">
-                      <a:solidFill>
-                        <a:srgbClr val="000000"/>
+                    <a:lnT w="4762" cap="flat" cmpd="sng" algn="ctr">
+                      <a:solidFill>
+                        <a:srgbClr val="3B52A1"/>
                       </a:solidFill>
                       <a:prstDash val="solid"/>
                       <a:round/>
                       <a:headEnd type="none" w="med" len="med"/>
                       <a:tailEnd type="none" w="med" len="med"/>
                     </a:lnT>
-                    <a:lnB cmpd="sng" algn="ctr" cap="flat" w="4762">
-                      <a:solidFill>
-                        <a:srgbClr val="000000"/>
+                    <a:lnB w="4762" cap="flat" cmpd="sng" algn="ctr">
+                      <a:solidFill>
+                        <a:srgbClr val="3B52A1"/>
                       </a:solidFill>
                       <a:prstDash val="solid"/>
                       <a:round/>
@@ -3495,7 +3560,7 @@
                 </a:tc>
                 <a:tc>
                   <a:txBody>
-                    <a:bodyPr anchor="t" rtlCol="false"/>
+                    <a:bodyPr/>
                     <a:lstStyle/>
                     <a:p>
                       <a:pPr algn="ctr">
@@ -3505,51 +3570,51 @@
                         <a:defRPr/>
                       </a:pPr>
                       <a:r>
-                        <a:rPr lang="en-US" sz="902" b="true">
+                        <a:rPr lang="en-US" sz="902" b="1">
                           <a:solidFill>
-                            <a:srgbClr val="8E8E93"/>
+                            <a:srgbClr val="2D2D2D"/>
                           </a:solidFill>
-                          <a:latin typeface="Arimo Bold"/>
-                          <a:ea typeface="Arimo Bold"/>
-                          <a:cs typeface="Arimo Bold"/>
-                          <a:sym typeface="Arimo Bold"/>
+                          <a:latin typeface="Avenir Bold"/>
+                          <a:ea typeface="Avenir Bold"/>
+                          <a:cs typeface="Avenir Bold"/>
+                          <a:sym typeface="Avenir Bold"/>
                         </a:rPr>
                         <a:t>Daily Rentals</a:t>
                       </a:r>
                       <a:endParaRPr lang="en-US" sz="1100"/>
                     </a:p>
                   </a:txBody>
-                  <a:tcPr marL="91440" marR="91440" marT="91440" marB="91440" anchor="ctr">
-                    <a:lnL cmpd="sng" algn="ctr" cap="flat" w="4762">
-                      <a:solidFill>
-                        <a:srgbClr val="000000"/>
+                  <a:tcPr marT="91440" marB="91440" anchor="ctr">
+                    <a:lnL w="4762" cap="flat" cmpd="sng" algn="ctr">
+                      <a:solidFill>
+                        <a:srgbClr val="3B52A1"/>
                       </a:solidFill>
                       <a:prstDash val="solid"/>
                       <a:round/>
                       <a:headEnd type="none" w="med" len="med"/>
                       <a:tailEnd type="none" w="med" len="med"/>
                     </a:lnL>
-                    <a:lnR cmpd="sng" algn="ctr" cap="flat" w="4762">
-                      <a:solidFill>
-                        <a:srgbClr val="000000"/>
+                    <a:lnR w="4762" cap="flat" cmpd="sng" algn="ctr">
+                      <a:solidFill>
+                        <a:srgbClr val="3B52A1"/>
                       </a:solidFill>
                       <a:prstDash val="solid"/>
                       <a:round/>
                       <a:headEnd type="none" w="med" len="med"/>
                       <a:tailEnd type="none" w="med" len="med"/>
                     </a:lnR>
-                    <a:lnT cmpd="sng" algn="ctr" cap="flat" w="4762">
-                      <a:solidFill>
-                        <a:srgbClr val="000000"/>
+                    <a:lnT w="4762" cap="flat" cmpd="sng" algn="ctr">
+                      <a:solidFill>
+                        <a:srgbClr val="3B52A1"/>
                       </a:solidFill>
                       <a:prstDash val="solid"/>
                       <a:round/>
                       <a:headEnd type="none" w="med" len="med"/>
                       <a:tailEnd type="none" w="med" len="med"/>
                     </a:lnT>
-                    <a:lnB cmpd="sng" algn="ctr" cap="flat" w="4762">
-                      <a:solidFill>
-                        <a:srgbClr val="000000"/>
+                    <a:lnB w="4762" cap="flat" cmpd="sng" algn="ctr">
+                      <a:solidFill>
+                        <a:srgbClr val="3B52A1"/>
                       </a:solidFill>
                       <a:prstDash val="solid"/>
                       <a:round/>
@@ -3563,7 +3628,7 @@
                 </a:tc>
                 <a:tc>
                   <a:txBody>
-                    <a:bodyPr anchor="t" rtlCol="false"/>
+                    <a:bodyPr/>
                     <a:lstStyle/>
                     <a:p>
                       <a:pPr algn="ctr">
@@ -3573,51 +3638,51 @@
                         <a:defRPr/>
                       </a:pPr>
                       <a:r>
-                        <a:rPr lang="en-US" sz="902" b="true">
+                        <a:rPr lang="en-US" sz="902" b="1">
                           <a:solidFill>
-                            <a:srgbClr val="8E8E93"/>
+                            <a:srgbClr val="2D2D2D"/>
                           </a:solidFill>
-                          <a:latin typeface="Arimo Bold"/>
-                          <a:ea typeface="Arimo Bold"/>
-                          <a:cs typeface="Arimo Bold"/>
-                          <a:sym typeface="Arimo Bold"/>
+                          <a:latin typeface="Avenir Bold"/>
+                          <a:ea typeface="Avenir Bold"/>
+                          <a:cs typeface="Avenir Bold"/>
+                          <a:sym typeface="Avenir Bold"/>
                         </a:rPr>
                         <a:t>Leads (MTD)</a:t>
                       </a:r>
                       <a:endParaRPr lang="en-US" sz="1100"/>
                     </a:p>
                   </a:txBody>
-                  <a:tcPr marL="91440" marR="91440" marT="91440" marB="91440" anchor="ctr">
-                    <a:lnL cmpd="sng" algn="ctr" cap="flat" w="4762">
-                      <a:solidFill>
-                        <a:srgbClr val="000000"/>
+                  <a:tcPr marT="91440" marB="91440" anchor="ctr">
+                    <a:lnL w="4762" cap="flat" cmpd="sng" algn="ctr">
+                      <a:solidFill>
+                        <a:srgbClr val="3B52A1"/>
                       </a:solidFill>
                       <a:prstDash val="solid"/>
                       <a:round/>
                       <a:headEnd type="none" w="med" len="med"/>
                       <a:tailEnd type="none" w="med" len="med"/>
                     </a:lnL>
-                    <a:lnR cmpd="sng" algn="ctr" cap="flat" w="4762">
-                      <a:solidFill>
-                        <a:srgbClr val="000000"/>
+                    <a:lnR w="4762" cap="flat" cmpd="sng" algn="ctr">
+                      <a:solidFill>
+                        <a:srgbClr val="3B52A1"/>
                       </a:solidFill>
                       <a:prstDash val="solid"/>
                       <a:round/>
                       <a:headEnd type="none" w="med" len="med"/>
                       <a:tailEnd type="none" w="med" len="med"/>
                     </a:lnR>
-                    <a:lnT cmpd="sng" algn="ctr" cap="flat" w="4762">
-                      <a:solidFill>
-                        <a:srgbClr val="000000"/>
+                    <a:lnT w="4762" cap="flat" cmpd="sng" algn="ctr">
+                      <a:solidFill>
+                        <a:srgbClr val="3B52A1"/>
                       </a:solidFill>
                       <a:prstDash val="solid"/>
                       <a:round/>
                       <a:headEnd type="none" w="med" len="med"/>
                       <a:tailEnd type="none" w="med" len="med"/>
                     </a:lnT>
-                    <a:lnB cmpd="sng" algn="ctr" cap="flat" w="4762">
-                      <a:solidFill>
-                        <a:srgbClr val="000000"/>
+                    <a:lnB w="4762" cap="flat" cmpd="sng" algn="ctr">
+                      <a:solidFill>
+                        <a:srgbClr val="3B52A1"/>
                       </a:solidFill>
                       <a:prstDash val="solid"/>
                       <a:round/>
@@ -3631,7 +3696,7 @@
                 </a:tc>
                 <a:tc>
                   <a:txBody>
-                    <a:bodyPr anchor="t" rtlCol="false"/>
+                    <a:bodyPr/>
                     <a:lstStyle/>
                     <a:p>
                       <a:pPr algn="ctr">
@@ -3641,51 +3706,51 @@
                         <a:defRPr/>
                       </a:pPr>
                       <a:r>
-                        <a:rPr lang="en-US" sz="902" b="true">
+                        <a:rPr lang="en-US" sz="902" b="1">
                           <a:solidFill>
-                            <a:srgbClr val="8E8E93"/>
+                            <a:srgbClr val="2D2D2D"/>
                           </a:solidFill>
-                          <a:latin typeface="Arimo Bold"/>
-                          <a:ea typeface="Arimo Bold"/>
-                          <a:cs typeface="Arimo Bold"/>
-                          <a:sym typeface="Arimo Bold"/>
+                          <a:latin typeface="Avenir Bold"/>
+                          <a:ea typeface="Avenir Bold"/>
+                          <a:cs typeface="Avenir Bold"/>
+                          <a:sym typeface="Avenir Bold"/>
                         </a:rPr>
                         <a:t>Lead Conversion</a:t>
                       </a:r>
                       <a:endParaRPr lang="en-US" sz="1100"/>
                     </a:p>
                   </a:txBody>
-                  <a:tcPr marL="91440" marR="91440" marT="91440" marB="91440" anchor="ctr">
-                    <a:lnL cmpd="sng" algn="ctr" cap="flat" w="4762">
-                      <a:solidFill>
-                        <a:srgbClr val="000000"/>
+                  <a:tcPr marT="91440" marB="91440" anchor="ctr">
+                    <a:lnL w="4762" cap="flat" cmpd="sng" algn="ctr">
+                      <a:solidFill>
+                        <a:srgbClr val="3B52A1"/>
                       </a:solidFill>
                       <a:prstDash val="solid"/>
                       <a:round/>
                       <a:headEnd type="none" w="med" len="med"/>
                       <a:tailEnd type="none" w="med" len="med"/>
                     </a:lnL>
-                    <a:lnR cmpd="sng" algn="ctr" cap="flat" w="4762">
-                      <a:solidFill>
-                        <a:srgbClr val="000000"/>
+                    <a:lnR w="4762" cap="flat" cmpd="sng" algn="ctr">
+                      <a:solidFill>
+                        <a:srgbClr val="3B52A1"/>
                       </a:solidFill>
                       <a:prstDash val="solid"/>
                       <a:round/>
                       <a:headEnd type="none" w="med" len="med"/>
                       <a:tailEnd type="none" w="med" len="med"/>
                     </a:lnR>
-                    <a:lnT cmpd="sng" algn="ctr" cap="flat" w="4762">
-                      <a:solidFill>
-                        <a:srgbClr val="000000"/>
+                    <a:lnT w="4762" cap="flat" cmpd="sng" algn="ctr">
+                      <a:solidFill>
+                        <a:srgbClr val="3B52A1"/>
                       </a:solidFill>
                       <a:prstDash val="solid"/>
                       <a:round/>
                       <a:headEnd type="none" w="med" len="med"/>
                       <a:tailEnd type="none" w="med" len="med"/>
                     </a:lnT>
-                    <a:lnB cmpd="sng" algn="ctr" cap="flat" w="4762">
-                      <a:solidFill>
-                        <a:srgbClr val="000000"/>
+                    <a:lnB w="4762" cap="flat" cmpd="sng" algn="ctr">
+                      <a:solidFill>
+                        <a:srgbClr val="3B52A1"/>
                       </a:solidFill>
                       <a:prstDash val="solid"/>
                       <a:round/>
@@ -3699,7 +3764,7 @@
                 </a:tc>
                 <a:tc>
                   <a:txBody>
-                    <a:bodyPr anchor="t" rtlCol="false"/>
+                    <a:bodyPr/>
                     <a:lstStyle/>
                     <a:p>
                       <a:pPr algn="ctr">
@@ -3709,51 +3774,51 @@
                         <a:defRPr/>
                       </a:pPr>
                       <a:r>
-                        <a:rPr lang="en-US" sz="902" b="true">
+                        <a:rPr lang="en-US" sz="902" b="1">
                           <a:solidFill>
-                            <a:srgbClr val="8E8E93"/>
+                            <a:srgbClr val="2D2D2D"/>
                           </a:solidFill>
-                          <a:latin typeface="Arimo Bold"/>
-                          <a:ea typeface="Arimo Bold"/>
-                          <a:cs typeface="Arimo Bold"/>
-                          <a:sym typeface="Arimo Bold"/>
+                          <a:latin typeface="Avenir Bold"/>
+                          <a:ea typeface="Avenir Bold"/>
+                          <a:cs typeface="Avenir Bold"/>
+                          <a:sym typeface="Avenir Bold"/>
                         </a:rPr>
                         <a:t>MTD Vacates</a:t>
                       </a:r>
                       <a:endParaRPr lang="en-US" sz="1100"/>
                     </a:p>
                   </a:txBody>
-                  <a:tcPr marL="91440" marR="91440" marT="91440" marB="91440" anchor="ctr">
-                    <a:lnL cmpd="sng" algn="ctr" cap="flat" w="4762">
-                      <a:solidFill>
-                        <a:srgbClr val="000000"/>
+                  <a:tcPr marT="91440" marB="91440" anchor="ctr">
+                    <a:lnL w="4762" cap="flat" cmpd="sng" algn="ctr">
+                      <a:solidFill>
+                        <a:srgbClr val="3B52A1"/>
                       </a:solidFill>
                       <a:prstDash val="solid"/>
                       <a:round/>
                       <a:headEnd type="none" w="med" len="med"/>
                       <a:tailEnd type="none" w="med" len="med"/>
                     </a:lnL>
-                    <a:lnR cmpd="sng" algn="ctr" cap="flat" w="4762">
-                      <a:solidFill>
-                        <a:srgbClr val="000000"/>
+                    <a:lnR w="4762" cap="flat" cmpd="sng" algn="ctr">
+                      <a:solidFill>
+                        <a:srgbClr val="3B52A1"/>
                       </a:solidFill>
                       <a:prstDash val="solid"/>
                       <a:round/>
                       <a:headEnd type="none" w="med" len="med"/>
                       <a:tailEnd type="none" w="med" len="med"/>
                     </a:lnR>
-                    <a:lnT cmpd="sng" algn="ctr" cap="flat" w="4762">
-                      <a:solidFill>
-                        <a:srgbClr val="000000"/>
+                    <a:lnT w="4762" cap="flat" cmpd="sng" algn="ctr">
+                      <a:solidFill>
+                        <a:srgbClr val="3B52A1"/>
                       </a:solidFill>
                       <a:prstDash val="solid"/>
                       <a:round/>
                       <a:headEnd type="none" w="med" len="med"/>
                       <a:tailEnd type="none" w="med" len="med"/>
                     </a:lnT>
-                    <a:lnB cmpd="sng" algn="ctr" cap="flat" w="4762">
-                      <a:solidFill>
-                        <a:srgbClr val="000000"/>
+                    <a:lnB w="4762" cap="flat" cmpd="sng" algn="ctr">
+                      <a:solidFill>
+                        <a:srgbClr val="3B52A1"/>
                       </a:solidFill>
                       <a:prstDash val="solid"/>
                       <a:round/>
@@ -3767,7 +3832,7 @@
                 </a:tc>
                 <a:tc>
                   <a:txBody>
-                    <a:bodyPr anchor="t" rtlCol="false"/>
+                    <a:bodyPr/>
                     <a:lstStyle/>
                     <a:p>
                       <a:pPr algn="ctr">
@@ -3777,51 +3842,51 @@
                         <a:defRPr/>
                       </a:pPr>
                       <a:r>
-                        <a:rPr lang="en-US" sz="902" b="true">
+                        <a:rPr lang="en-US" sz="902" b="1">
                           <a:solidFill>
-                            <a:srgbClr val="8E8E93"/>
+                            <a:srgbClr val="2D2D2D"/>
                           </a:solidFill>
-                          <a:latin typeface="Arimo Bold"/>
-                          <a:ea typeface="Arimo Bold"/>
-                          <a:cs typeface="Arimo Bold"/>
-                          <a:sym typeface="Arimo Bold"/>
+                          <a:latin typeface="Avenir Bold"/>
+                          <a:ea typeface="Avenir Bold"/>
+                          <a:cs typeface="Avenir Bold"/>
+                          <a:sym typeface="Avenir Bold"/>
                         </a:rPr>
                         <a:t>Daily Vacates</a:t>
                       </a:r>
                       <a:endParaRPr lang="en-US" sz="1100"/>
                     </a:p>
                   </a:txBody>
-                  <a:tcPr marL="91440" marR="91440" marT="91440" marB="91440" anchor="ctr">
-                    <a:lnL cmpd="sng" algn="ctr" cap="flat" w="4762">
-                      <a:solidFill>
-                        <a:srgbClr val="000000"/>
+                  <a:tcPr marT="91440" marB="91440" anchor="ctr">
+                    <a:lnL w="4762" cap="flat" cmpd="sng" algn="ctr">
+                      <a:solidFill>
+                        <a:srgbClr val="3B52A1"/>
                       </a:solidFill>
                       <a:prstDash val="solid"/>
                       <a:round/>
                       <a:headEnd type="none" w="med" len="med"/>
                       <a:tailEnd type="none" w="med" len="med"/>
                     </a:lnL>
-                    <a:lnR cmpd="sng" algn="ctr" cap="flat" w="4762">
-                      <a:solidFill>
-                        <a:srgbClr val="000000"/>
+                    <a:lnR w="4762" cap="flat" cmpd="sng" algn="ctr">
+                      <a:solidFill>
+                        <a:srgbClr val="3B52A1"/>
                       </a:solidFill>
                       <a:prstDash val="solid"/>
                       <a:round/>
                       <a:headEnd type="none" w="med" len="med"/>
                       <a:tailEnd type="none" w="med" len="med"/>
                     </a:lnR>
-                    <a:lnT cmpd="sng" algn="ctr" cap="flat" w="4762">
-                      <a:solidFill>
-                        <a:srgbClr val="000000"/>
+                    <a:lnT w="4762" cap="flat" cmpd="sng" algn="ctr">
+                      <a:solidFill>
+                        <a:srgbClr val="3B52A1"/>
                       </a:solidFill>
                       <a:prstDash val="solid"/>
                       <a:round/>
                       <a:headEnd type="none" w="med" len="med"/>
                       <a:tailEnd type="none" w="med" len="med"/>
                     </a:lnT>
-                    <a:lnB cmpd="sng" algn="ctr" cap="flat" w="4762">
-                      <a:solidFill>
-                        <a:srgbClr val="000000"/>
+                    <a:lnB w="4762" cap="flat" cmpd="sng" algn="ctr">
+                      <a:solidFill>
+                        <a:srgbClr val="3B52A1"/>
                       </a:solidFill>
                       <a:prstDash val="solid"/>
                       <a:round/>
@@ -3835,7 +3900,7 @@
                 </a:tc>
                 <a:tc>
                   <a:txBody>
-                    <a:bodyPr anchor="t" rtlCol="false"/>
+                    <a:bodyPr/>
                     <a:lstStyle/>
                     <a:p>
                       <a:pPr algn="ctr">
@@ -3845,51 +3910,51 @@
                         <a:defRPr/>
                       </a:pPr>
                       <a:r>
-                        <a:rPr lang="en-US" sz="902" b="true">
+                        <a:rPr lang="en-US" sz="902" b="1">
                           <a:solidFill>
-                            <a:srgbClr val="8E8E93"/>
+                            <a:srgbClr val="2D2D2D"/>
                           </a:solidFill>
-                          <a:latin typeface="Arimo Bold"/>
-                          <a:ea typeface="Arimo Bold"/>
-                          <a:cs typeface="Arimo Bold"/>
-                          <a:sym typeface="Arimo Bold"/>
+                          <a:latin typeface="Avenir Bold"/>
+                          <a:ea typeface="Avenir Bold"/>
+                          <a:cs typeface="Avenir Bold"/>
+                          <a:sym typeface="Avenir Bold"/>
                         </a:rPr>
                         <a:t>MTD Net</a:t>
                       </a:r>
                       <a:endParaRPr lang="en-US" sz="1100"/>
                     </a:p>
                   </a:txBody>
-                  <a:tcPr marL="91440" marR="91440" marT="91440" marB="91440" anchor="ctr">
-                    <a:lnL cmpd="sng" algn="ctr" cap="flat" w="4762">
-                      <a:solidFill>
-                        <a:srgbClr val="000000"/>
+                  <a:tcPr marT="91440" marB="91440" anchor="ctr">
+                    <a:lnL w="4762" cap="flat" cmpd="sng" algn="ctr">
+                      <a:solidFill>
+                        <a:srgbClr val="3B52A1"/>
                       </a:solidFill>
                       <a:prstDash val="solid"/>
                       <a:round/>
                       <a:headEnd type="none" w="med" len="med"/>
                       <a:tailEnd type="none" w="med" len="med"/>
                     </a:lnL>
-                    <a:lnR cmpd="sng" algn="ctr" cap="flat" w="4762">
-                      <a:solidFill>
-                        <a:srgbClr val="000000"/>
+                    <a:lnR w="4762" cap="flat" cmpd="sng" algn="ctr">
+                      <a:solidFill>
+                        <a:srgbClr val="3B52A1"/>
                       </a:solidFill>
                       <a:prstDash val="solid"/>
                       <a:round/>
                       <a:headEnd type="none" w="med" len="med"/>
                       <a:tailEnd type="none" w="med" len="med"/>
                     </a:lnR>
-                    <a:lnT cmpd="sng" algn="ctr" cap="flat" w="4762">
-                      <a:solidFill>
-                        <a:srgbClr val="000000"/>
+                    <a:lnT w="4762" cap="flat" cmpd="sng" algn="ctr">
+                      <a:solidFill>
+                        <a:srgbClr val="3B52A1"/>
                       </a:solidFill>
                       <a:prstDash val="solid"/>
                       <a:round/>
                       <a:headEnd type="none" w="med" len="med"/>
                       <a:tailEnd type="none" w="med" len="med"/>
                     </a:lnT>
-                    <a:lnB cmpd="sng" algn="ctr" cap="flat" w="4762">
-                      <a:solidFill>
-                        <a:srgbClr val="000000"/>
+                    <a:lnB w="4762" cap="flat" cmpd="sng" algn="ctr">
+                      <a:solidFill>
+                        <a:srgbClr val="3B52A1"/>
                       </a:solidFill>
                       <a:prstDash val="solid"/>
                       <a:round/>
@@ -3901,11 +3966,16 @@
                     </a:solidFill>
                   </a:tcPr>
                 </a:tc>
+                <a:extLst>
+                  <a:ext uri="{0D108BD9-81ED-4DB2-BD59-A6C34878D82A}">
+                    <a16:rowId xmlns:a16="http://schemas.microsoft.com/office/drawing/2014/main" val="10000"/>
+                  </a:ext>
+                </a:extLst>
               </a:tr>
-              <a:tr h="574029">
+              <a:tr h="554984">
                 <a:tc>
                   <a:txBody>
-                    <a:bodyPr anchor="t" rtlCol="false"/>
+                    <a:bodyPr/>
                     <a:lstStyle/>
                     <a:p>
                       <a:pPr algn="ctr">
@@ -3917,49 +3987,49 @@
                       <a:r>
                         <a:rPr lang="en-US" sz="1103">
                           <a:solidFill>
-                            <a:srgbClr val="2C2C2E"/>
+                            <a:srgbClr val="4A4A4A"/>
                           </a:solidFill>
-                          <a:latin typeface="Arimo"/>
-                          <a:ea typeface="Arimo"/>
-                          <a:cs typeface="Arimo"/>
-                          <a:sym typeface="Arimo"/>
+                          <a:latin typeface="Avenir"/>
+                          <a:ea typeface="Avenir"/>
+                          <a:cs typeface="Avenir"/>
+                          <a:sym typeface="Avenir"/>
                         </a:rPr>
                         <a:t>{{MTDRENTALS}}</a:t>
                       </a:r>
                       <a:endParaRPr lang="en-US" sz="1100"/>
                     </a:p>
                   </a:txBody>
-                  <a:tcPr marL="91440" marR="91440" marT="91440" marB="91440" anchor="ctr">
-                    <a:lnL cmpd="sng" algn="ctr" cap="flat" w="4762">
-                      <a:solidFill>
-                        <a:srgbClr val="000000"/>
+                  <a:tcPr marT="91440" marB="91440" anchor="ctr">
+                    <a:lnL w="4762" cap="flat" cmpd="sng" algn="ctr">
+                      <a:solidFill>
+                        <a:srgbClr val="3B52A1"/>
                       </a:solidFill>
                       <a:prstDash val="solid"/>
                       <a:round/>
                       <a:headEnd type="none" w="med" len="med"/>
                       <a:tailEnd type="none" w="med" len="med"/>
                     </a:lnL>
-                    <a:lnR cmpd="sng" algn="ctr" cap="flat" w="4762">
-                      <a:solidFill>
-                        <a:srgbClr val="000000"/>
+                    <a:lnR w="4762" cap="flat" cmpd="sng" algn="ctr">
+                      <a:solidFill>
+                        <a:srgbClr val="3B52A1"/>
                       </a:solidFill>
                       <a:prstDash val="solid"/>
                       <a:round/>
                       <a:headEnd type="none" w="med" len="med"/>
                       <a:tailEnd type="none" w="med" len="med"/>
                     </a:lnR>
-                    <a:lnT cmpd="sng" algn="ctr" cap="flat" w="4762">
-                      <a:solidFill>
-                        <a:srgbClr val="000000"/>
+                    <a:lnT w="4762" cap="flat" cmpd="sng" algn="ctr">
+                      <a:solidFill>
+                        <a:srgbClr val="3B52A1"/>
                       </a:solidFill>
                       <a:prstDash val="solid"/>
                       <a:round/>
                       <a:headEnd type="none" w="med" len="med"/>
                       <a:tailEnd type="none" w="med" len="med"/>
                     </a:lnT>
-                    <a:lnB cmpd="sng" algn="ctr" cap="flat" w="4762">
-                      <a:solidFill>
-                        <a:srgbClr val="000000"/>
+                    <a:lnB w="4762" cap="flat" cmpd="sng" algn="ctr">
+                      <a:solidFill>
+                        <a:srgbClr val="3B52A1"/>
                       </a:solidFill>
                       <a:prstDash val="solid"/>
                       <a:round/>
@@ -3973,7 +4043,7 @@
                 </a:tc>
                 <a:tc>
                   <a:txBody>
-                    <a:bodyPr anchor="t" rtlCol="false"/>
+                    <a:bodyPr/>
                     <a:lstStyle/>
                     <a:p>
                       <a:pPr algn="ctr">
@@ -3985,49 +4055,49 @@
                       <a:r>
                         <a:rPr lang="en-US" sz="1103">
                           <a:solidFill>
-                            <a:srgbClr val="2C2C2E"/>
+                            <a:srgbClr val="4A4A4A"/>
                           </a:solidFill>
-                          <a:latin typeface="Arimo"/>
-                          <a:ea typeface="Arimo"/>
-                          <a:cs typeface="Arimo"/>
-                          <a:sym typeface="Arimo"/>
+                          <a:latin typeface="Avenir"/>
+                          <a:ea typeface="Avenir"/>
+                          <a:cs typeface="Avenir"/>
+                          <a:sym typeface="Avenir"/>
                         </a:rPr>
                         <a:t>{{DAILYRENTALS}}</a:t>
                       </a:r>
                       <a:endParaRPr lang="en-US" sz="1100"/>
                     </a:p>
                   </a:txBody>
-                  <a:tcPr marL="91440" marR="91440" marT="91440" marB="91440" anchor="ctr">
-                    <a:lnL cmpd="sng" algn="ctr" cap="flat" w="4762">
-                      <a:solidFill>
-                        <a:srgbClr val="000000"/>
+                  <a:tcPr marT="91440" marB="91440" anchor="ctr">
+                    <a:lnL w="4762" cap="flat" cmpd="sng" algn="ctr">
+                      <a:solidFill>
+                        <a:srgbClr val="3B52A1"/>
                       </a:solidFill>
                       <a:prstDash val="solid"/>
                       <a:round/>
                       <a:headEnd type="none" w="med" len="med"/>
                       <a:tailEnd type="none" w="med" len="med"/>
                     </a:lnL>
-                    <a:lnR cmpd="sng" algn="ctr" cap="flat" w="4762">
-                      <a:solidFill>
-                        <a:srgbClr val="000000"/>
+                    <a:lnR w="4762" cap="flat" cmpd="sng" algn="ctr">
+                      <a:solidFill>
+                        <a:srgbClr val="3B52A1"/>
                       </a:solidFill>
                       <a:prstDash val="solid"/>
                       <a:round/>
                       <a:headEnd type="none" w="med" len="med"/>
                       <a:tailEnd type="none" w="med" len="med"/>
                     </a:lnR>
-                    <a:lnT cmpd="sng" algn="ctr" cap="flat" w="4762">
-                      <a:solidFill>
-                        <a:srgbClr val="000000"/>
+                    <a:lnT w="4762" cap="flat" cmpd="sng" algn="ctr">
+                      <a:solidFill>
+                        <a:srgbClr val="3B52A1"/>
                       </a:solidFill>
                       <a:prstDash val="solid"/>
                       <a:round/>
                       <a:headEnd type="none" w="med" len="med"/>
                       <a:tailEnd type="none" w="med" len="med"/>
                     </a:lnT>
-                    <a:lnB cmpd="sng" algn="ctr" cap="flat" w="4762">
-                      <a:solidFill>
-                        <a:srgbClr val="000000"/>
+                    <a:lnB w="4762" cap="flat" cmpd="sng" algn="ctr">
+                      <a:solidFill>
+                        <a:srgbClr val="3B52A1"/>
                       </a:solidFill>
                       <a:prstDash val="solid"/>
                       <a:round/>
@@ -4041,7 +4111,7 @@
                 </a:tc>
                 <a:tc>
                   <a:txBody>
-                    <a:bodyPr anchor="t" rtlCol="false"/>
+                    <a:bodyPr/>
                     <a:lstStyle/>
                     <a:p>
                       <a:pPr algn="ctr">
@@ -4053,49 +4123,49 @@
                       <a:r>
                         <a:rPr lang="en-US" sz="1103">
                           <a:solidFill>
-                            <a:srgbClr val="2C2C2E"/>
+                            <a:srgbClr val="4A4A4A"/>
                           </a:solidFill>
-                          <a:latin typeface="Arimo"/>
-                          <a:ea typeface="Arimo"/>
-                          <a:cs typeface="Arimo"/>
-                          <a:sym typeface="Arimo"/>
+                          <a:latin typeface="Avenir"/>
+                          <a:ea typeface="Avenir"/>
+                          <a:cs typeface="Avenir"/>
+                          <a:sym typeface="Avenir"/>
                         </a:rPr>
                         <a:t>{{LEADSMTD}}</a:t>
                       </a:r>
                       <a:endParaRPr lang="en-US" sz="1100"/>
                     </a:p>
                   </a:txBody>
-                  <a:tcPr marL="91440" marR="91440" marT="91440" marB="91440" anchor="ctr">
-                    <a:lnL cmpd="sng" algn="ctr" cap="flat" w="4762">
-                      <a:solidFill>
-                        <a:srgbClr val="000000"/>
+                  <a:tcPr marT="91440" marB="91440" anchor="ctr">
+                    <a:lnL w="4762" cap="flat" cmpd="sng" algn="ctr">
+                      <a:solidFill>
+                        <a:srgbClr val="3B52A1"/>
                       </a:solidFill>
                       <a:prstDash val="solid"/>
                       <a:round/>
                       <a:headEnd type="none" w="med" len="med"/>
                       <a:tailEnd type="none" w="med" len="med"/>
                     </a:lnL>
-                    <a:lnR cmpd="sng" algn="ctr" cap="flat" w="4762">
-                      <a:solidFill>
-                        <a:srgbClr val="000000"/>
+                    <a:lnR w="4762" cap="flat" cmpd="sng" algn="ctr">
+                      <a:solidFill>
+                        <a:srgbClr val="3B52A1"/>
                       </a:solidFill>
                       <a:prstDash val="solid"/>
                       <a:round/>
                       <a:headEnd type="none" w="med" len="med"/>
                       <a:tailEnd type="none" w="med" len="med"/>
                     </a:lnR>
-                    <a:lnT cmpd="sng" algn="ctr" cap="flat" w="4762">
-                      <a:solidFill>
-                        <a:srgbClr val="000000"/>
+                    <a:lnT w="4762" cap="flat" cmpd="sng" algn="ctr">
+                      <a:solidFill>
+                        <a:srgbClr val="3B52A1"/>
                       </a:solidFill>
                       <a:prstDash val="solid"/>
                       <a:round/>
                       <a:headEnd type="none" w="med" len="med"/>
                       <a:tailEnd type="none" w="med" len="med"/>
                     </a:lnT>
-                    <a:lnB cmpd="sng" algn="ctr" cap="flat" w="4762">
-                      <a:solidFill>
-                        <a:srgbClr val="000000"/>
+                    <a:lnB w="4762" cap="flat" cmpd="sng" algn="ctr">
+                      <a:solidFill>
+                        <a:srgbClr val="3B52A1"/>
                       </a:solidFill>
                       <a:prstDash val="solid"/>
                       <a:round/>
@@ -4109,7 +4179,7 @@
                 </a:tc>
                 <a:tc>
                   <a:txBody>
-                    <a:bodyPr anchor="t" rtlCol="false"/>
+                    <a:bodyPr/>
                     <a:lstStyle/>
                     <a:p>
                       <a:pPr algn="ctr">
@@ -4121,49 +4191,49 @@
                       <a:r>
                         <a:rPr lang="en-US" sz="1103">
                           <a:solidFill>
-                            <a:srgbClr val="2C2C2E"/>
+                            <a:srgbClr val="4A4A4A"/>
                           </a:solidFill>
-                          <a:latin typeface="Arimo"/>
-                          <a:ea typeface="Arimo"/>
-                          <a:cs typeface="Arimo"/>
-                          <a:sym typeface="Arimo"/>
+                          <a:latin typeface="Avenir"/>
+                          <a:ea typeface="Avenir"/>
+                          <a:cs typeface="Avenir"/>
+                          <a:sym typeface="Avenir"/>
                         </a:rPr>
                         <a:t>{{CONV}}</a:t>
                       </a:r>
                       <a:endParaRPr lang="en-US" sz="1100"/>
                     </a:p>
                   </a:txBody>
-                  <a:tcPr marL="91440" marR="91440" marT="91440" marB="91440" anchor="ctr">
-                    <a:lnL cmpd="sng" algn="ctr" cap="flat" w="4762">
-                      <a:solidFill>
-                        <a:srgbClr val="000000"/>
+                  <a:tcPr marT="91440" marB="91440" anchor="ctr">
+                    <a:lnL w="4762" cap="flat" cmpd="sng" algn="ctr">
+                      <a:solidFill>
+                        <a:srgbClr val="3B52A1"/>
                       </a:solidFill>
                       <a:prstDash val="solid"/>
                       <a:round/>
                       <a:headEnd type="none" w="med" len="med"/>
                       <a:tailEnd type="none" w="med" len="med"/>
                     </a:lnL>
-                    <a:lnR cmpd="sng" algn="ctr" cap="flat" w="4762">
-                      <a:solidFill>
-                        <a:srgbClr val="000000"/>
+                    <a:lnR w="4762" cap="flat" cmpd="sng" algn="ctr">
+                      <a:solidFill>
+                        <a:srgbClr val="3B52A1"/>
                       </a:solidFill>
                       <a:prstDash val="solid"/>
                       <a:round/>
                       <a:headEnd type="none" w="med" len="med"/>
                       <a:tailEnd type="none" w="med" len="med"/>
                     </a:lnR>
-                    <a:lnT cmpd="sng" algn="ctr" cap="flat" w="4762">
-                      <a:solidFill>
-                        <a:srgbClr val="000000"/>
+                    <a:lnT w="4762" cap="flat" cmpd="sng" algn="ctr">
+                      <a:solidFill>
+                        <a:srgbClr val="3B52A1"/>
                       </a:solidFill>
                       <a:prstDash val="solid"/>
                       <a:round/>
                       <a:headEnd type="none" w="med" len="med"/>
                       <a:tailEnd type="none" w="med" len="med"/>
                     </a:lnT>
-                    <a:lnB cmpd="sng" algn="ctr" cap="flat" w="4762">
-                      <a:solidFill>
-                        <a:srgbClr val="000000"/>
+                    <a:lnB w="4762" cap="flat" cmpd="sng" algn="ctr">
+                      <a:solidFill>
+                        <a:srgbClr val="3B52A1"/>
                       </a:solidFill>
                       <a:prstDash val="solid"/>
                       <a:round/>
@@ -4177,7 +4247,7 @@
                 </a:tc>
                 <a:tc>
                   <a:txBody>
-                    <a:bodyPr anchor="t" rtlCol="false"/>
+                    <a:bodyPr/>
                     <a:lstStyle/>
                     <a:p>
                       <a:pPr algn="ctr">
@@ -4189,49 +4259,49 @@
                       <a:r>
                         <a:rPr lang="en-US" sz="1103">
                           <a:solidFill>
-                            <a:srgbClr val="2C2C2E"/>
+                            <a:srgbClr val="4A4A4A"/>
                           </a:solidFill>
-                          <a:latin typeface="Arimo"/>
-                          <a:ea typeface="Arimo"/>
-                          <a:cs typeface="Arimo"/>
-                          <a:sym typeface="Arimo"/>
+                          <a:latin typeface="Avenir"/>
+                          <a:ea typeface="Avenir"/>
+                          <a:cs typeface="Avenir"/>
+                          <a:sym typeface="Avenir"/>
                         </a:rPr>
                         <a:t>{{MTDVACATES}}</a:t>
                       </a:r>
                       <a:endParaRPr lang="en-US" sz="1100"/>
                     </a:p>
                   </a:txBody>
-                  <a:tcPr marL="91440" marR="91440" marT="91440" marB="91440" anchor="ctr">
-                    <a:lnL cmpd="sng" algn="ctr" cap="flat" w="4762">
-                      <a:solidFill>
-                        <a:srgbClr val="000000"/>
+                  <a:tcPr marT="91440" marB="91440" anchor="ctr">
+                    <a:lnL w="4762" cap="flat" cmpd="sng" algn="ctr">
+                      <a:solidFill>
+                        <a:srgbClr val="3B52A1"/>
                       </a:solidFill>
                       <a:prstDash val="solid"/>
                       <a:round/>
                       <a:headEnd type="none" w="med" len="med"/>
                       <a:tailEnd type="none" w="med" len="med"/>
                     </a:lnL>
-                    <a:lnR cmpd="sng" algn="ctr" cap="flat" w="4762">
-                      <a:solidFill>
-                        <a:srgbClr val="000000"/>
+                    <a:lnR w="4762" cap="flat" cmpd="sng" algn="ctr">
+                      <a:solidFill>
+                        <a:srgbClr val="3B52A1"/>
                       </a:solidFill>
                       <a:prstDash val="solid"/>
                       <a:round/>
                       <a:headEnd type="none" w="med" len="med"/>
                       <a:tailEnd type="none" w="med" len="med"/>
                     </a:lnR>
-                    <a:lnT cmpd="sng" algn="ctr" cap="flat" w="4762">
-                      <a:solidFill>
-                        <a:srgbClr val="000000"/>
+                    <a:lnT w="4762" cap="flat" cmpd="sng" algn="ctr">
+                      <a:solidFill>
+                        <a:srgbClr val="3B52A1"/>
                       </a:solidFill>
                       <a:prstDash val="solid"/>
                       <a:round/>
                       <a:headEnd type="none" w="med" len="med"/>
                       <a:tailEnd type="none" w="med" len="med"/>
                     </a:lnT>
-                    <a:lnB cmpd="sng" algn="ctr" cap="flat" w="4762">
-                      <a:solidFill>
-                        <a:srgbClr val="000000"/>
+                    <a:lnB w="4762" cap="flat" cmpd="sng" algn="ctr">
+                      <a:solidFill>
+                        <a:srgbClr val="3B52A1"/>
                       </a:solidFill>
                       <a:prstDash val="solid"/>
                       <a:round/>
@@ -4245,7 +4315,7 @@
                 </a:tc>
                 <a:tc>
                   <a:txBody>
-                    <a:bodyPr anchor="t" rtlCol="false"/>
+                    <a:bodyPr/>
                     <a:lstStyle/>
                     <a:p>
                       <a:pPr algn="ctr">
@@ -4257,49 +4327,49 @@
                       <a:r>
                         <a:rPr lang="en-US" sz="1103">
                           <a:solidFill>
-                            <a:srgbClr val="2C2C2E"/>
+                            <a:srgbClr val="4A4A4A"/>
                           </a:solidFill>
-                          <a:latin typeface="Arimo"/>
-                          <a:ea typeface="Arimo"/>
-                          <a:cs typeface="Arimo"/>
-                          <a:sym typeface="Arimo"/>
+                          <a:latin typeface="Avenir"/>
+                          <a:ea typeface="Avenir"/>
+                          <a:cs typeface="Avenir"/>
+                          <a:sym typeface="Avenir"/>
                         </a:rPr>
                         <a:t>{{DAILYVACATES}}</a:t>
                       </a:r>
                       <a:endParaRPr lang="en-US" sz="1100"/>
                     </a:p>
                   </a:txBody>
-                  <a:tcPr marL="91440" marR="91440" marT="91440" marB="91440" anchor="ctr">
-                    <a:lnL cmpd="sng" algn="ctr" cap="flat" w="4762">
-                      <a:solidFill>
-                        <a:srgbClr val="000000"/>
+                  <a:tcPr marT="91440" marB="91440" anchor="ctr">
+                    <a:lnL w="4762" cap="flat" cmpd="sng" algn="ctr">
+                      <a:solidFill>
+                        <a:srgbClr val="3B52A1"/>
                       </a:solidFill>
                       <a:prstDash val="solid"/>
                       <a:round/>
                       <a:headEnd type="none" w="med" len="med"/>
                       <a:tailEnd type="none" w="med" len="med"/>
                     </a:lnL>
-                    <a:lnR cmpd="sng" algn="ctr" cap="flat" w="4762">
-                      <a:solidFill>
-                        <a:srgbClr val="000000"/>
+                    <a:lnR w="4762" cap="flat" cmpd="sng" algn="ctr">
+                      <a:solidFill>
+                        <a:srgbClr val="3B52A1"/>
                       </a:solidFill>
                       <a:prstDash val="solid"/>
                       <a:round/>
                       <a:headEnd type="none" w="med" len="med"/>
                       <a:tailEnd type="none" w="med" len="med"/>
                     </a:lnR>
-                    <a:lnT cmpd="sng" algn="ctr" cap="flat" w="4762">
-                      <a:solidFill>
-                        <a:srgbClr val="000000"/>
+                    <a:lnT w="4762" cap="flat" cmpd="sng" algn="ctr">
+                      <a:solidFill>
+                        <a:srgbClr val="3B52A1"/>
                       </a:solidFill>
                       <a:prstDash val="solid"/>
                       <a:round/>
                       <a:headEnd type="none" w="med" len="med"/>
                       <a:tailEnd type="none" w="med" len="med"/>
                     </a:lnT>
-                    <a:lnB cmpd="sng" algn="ctr" cap="flat" w="4762">
-                      <a:solidFill>
-                        <a:srgbClr val="000000"/>
+                    <a:lnB w="4762" cap="flat" cmpd="sng" algn="ctr">
+                      <a:solidFill>
+                        <a:srgbClr val="3B52A1"/>
                       </a:solidFill>
                       <a:prstDash val="solid"/>
                       <a:round/>
@@ -4313,7 +4383,7 @@
                 </a:tc>
                 <a:tc>
                   <a:txBody>
-                    <a:bodyPr anchor="t" rtlCol="false"/>
+                    <a:bodyPr/>
                     <a:lstStyle/>
                     <a:p>
                       <a:pPr algn="ctr">
@@ -4325,49 +4395,49 @@
                       <a:r>
                         <a:rPr lang="en-US" sz="1103">
                           <a:solidFill>
-                            <a:srgbClr val="2C2C2E"/>
+                            <a:srgbClr val="4A4A4A"/>
                           </a:solidFill>
-                          <a:latin typeface="Arimo"/>
-                          <a:ea typeface="Arimo"/>
-                          <a:cs typeface="Arimo"/>
-                          <a:sym typeface="Arimo"/>
+                          <a:latin typeface="Avenir"/>
+                          <a:ea typeface="Avenir"/>
+                          <a:cs typeface="Avenir"/>
+                          <a:sym typeface="Avenir"/>
                         </a:rPr>
                         <a:t>{{MTDNETRENTALS}}</a:t>
                       </a:r>
                       <a:endParaRPr lang="en-US" sz="1100"/>
                     </a:p>
                   </a:txBody>
-                  <a:tcPr marL="91440" marR="91440" marT="91440" marB="91440" anchor="ctr">
-                    <a:lnL cmpd="sng" algn="ctr" cap="flat" w="4762">
-                      <a:solidFill>
-                        <a:srgbClr val="000000"/>
+                  <a:tcPr marT="91440" marB="91440" anchor="ctr">
+                    <a:lnL w="4762" cap="flat" cmpd="sng" algn="ctr">
+                      <a:solidFill>
+                        <a:srgbClr val="3B52A1"/>
                       </a:solidFill>
                       <a:prstDash val="solid"/>
                       <a:round/>
                       <a:headEnd type="none" w="med" len="med"/>
                       <a:tailEnd type="none" w="med" len="med"/>
                     </a:lnL>
-                    <a:lnR cmpd="sng" algn="ctr" cap="flat" w="4762">
-                      <a:solidFill>
-                        <a:srgbClr val="000000"/>
+                    <a:lnR w="4762" cap="flat" cmpd="sng" algn="ctr">
+                      <a:solidFill>
+                        <a:srgbClr val="3B52A1"/>
                       </a:solidFill>
                       <a:prstDash val="solid"/>
                       <a:round/>
                       <a:headEnd type="none" w="med" len="med"/>
                       <a:tailEnd type="none" w="med" len="med"/>
                     </a:lnR>
-                    <a:lnT cmpd="sng" algn="ctr" cap="flat" w="4762">
-                      <a:solidFill>
-                        <a:srgbClr val="000000"/>
+                    <a:lnT w="4762" cap="flat" cmpd="sng" algn="ctr">
+                      <a:solidFill>
+                        <a:srgbClr val="3B52A1"/>
                       </a:solidFill>
                       <a:prstDash val="solid"/>
                       <a:round/>
                       <a:headEnd type="none" w="med" len="med"/>
                       <a:tailEnd type="none" w="med" len="med"/>
                     </a:lnT>
-                    <a:lnB cmpd="sng" algn="ctr" cap="flat" w="4762">
-                      <a:solidFill>
-                        <a:srgbClr val="000000"/>
+                    <a:lnB w="4762" cap="flat" cmpd="sng" algn="ctr">
+                      <a:solidFill>
+                        <a:srgbClr val="3B52A1"/>
                       </a:solidFill>
                       <a:prstDash val="solid"/>
                       <a:round/>
@@ -4379,6 +4449,11 @@
                     </a:solidFill>
                   </a:tcPr>
                 </a:tc>
+                <a:extLst>
+                  <a:ext uri="{0D108BD9-81ED-4DB2-BD59-A6C34878D82A}">
+                    <a16:rowId xmlns:a16="http://schemas.microsoft.com/office/drawing/2014/main" val="10001"/>
+                  </a:ext>
+                </a:extLst>
               </a:tr>
             </a:tbl>
           </a:graphicData>
@@ -4386,33 +4461,75 @@
       </p:graphicFrame>
       <p:graphicFrame>
         <p:nvGraphicFramePr>
-          <p:cNvPr name="Table 9" id="9"/>
+          <p:cNvPr id="9" name="Table 9"/>
           <p:cNvGraphicFramePr>
-            <a:graphicFrameLocks noGrp="true"/>
+            <a:graphicFrameLocks noGrp="1"/>
           </p:cNvGraphicFramePr>
           <p:nvPr/>
         </p:nvGraphicFramePr>
         <p:xfrm>
           <a:off x="596302" y="4648885"/>
-          <a:ext cx="6600099" cy="1243012"/>
+          <a:ext cx="6600102" cy="1204913"/>
         </p:xfrm>
         <a:graphic>
           <a:graphicData uri="http://schemas.openxmlformats.org/drawingml/2006/table">
             <a:tbl>
               <a:tblPr/>
               <a:tblGrid>
-                <a:gridCol w="942871"/>
-                <a:gridCol w="942871"/>
-                <a:gridCol w="942871"/>
-                <a:gridCol w="942871"/>
-                <a:gridCol w="942871"/>
-                <a:gridCol w="942871"/>
-                <a:gridCol w="942876"/>
+                <a:gridCol w="942871">
+                  <a:extLst>
+                    <a:ext uri="{9D8B030D-6E8A-4147-A177-3AD203B41FA5}">
+                      <a16:colId xmlns:a16="http://schemas.microsoft.com/office/drawing/2014/main" val="20000"/>
+                    </a:ext>
+                  </a:extLst>
+                </a:gridCol>
+                <a:gridCol w="942871">
+                  <a:extLst>
+                    <a:ext uri="{9D8B030D-6E8A-4147-A177-3AD203B41FA5}">
+                      <a16:colId xmlns:a16="http://schemas.microsoft.com/office/drawing/2014/main" val="20001"/>
+                    </a:ext>
+                  </a:extLst>
+                </a:gridCol>
+                <a:gridCol w="942871">
+                  <a:extLst>
+                    <a:ext uri="{9D8B030D-6E8A-4147-A177-3AD203B41FA5}">
+                      <a16:colId xmlns:a16="http://schemas.microsoft.com/office/drawing/2014/main" val="20002"/>
+                    </a:ext>
+                  </a:extLst>
+                </a:gridCol>
+                <a:gridCol w="942871">
+                  <a:extLst>
+                    <a:ext uri="{9D8B030D-6E8A-4147-A177-3AD203B41FA5}">
+                      <a16:colId xmlns:a16="http://schemas.microsoft.com/office/drawing/2014/main" val="20003"/>
+                    </a:ext>
+                  </a:extLst>
+                </a:gridCol>
+                <a:gridCol w="942871">
+                  <a:extLst>
+                    <a:ext uri="{9D8B030D-6E8A-4147-A177-3AD203B41FA5}">
+                      <a16:colId xmlns:a16="http://schemas.microsoft.com/office/drawing/2014/main" val="20004"/>
+                    </a:ext>
+                  </a:extLst>
+                </a:gridCol>
+                <a:gridCol w="942871">
+                  <a:extLst>
+                    <a:ext uri="{9D8B030D-6E8A-4147-A177-3AD203B41FA5}">
+                      <a16:colId xmlns:a16="http://schemas.microsoft.com/office/drawing/2014/main" val="20005"/>
+                    </a:ext>
+                  </a:extLst>
+                </a:gridCol>
+                <a:gridCol w="942876">
+                  <a:extLst>
+                    <a:ext uri="{9D8B030D-6E8A-4147-A177-3AD203B41FA5}">
+                      <a16:colId xmlns:a16="http://schemas.microsoft.com/office/drawing/2014/main" val="20006"/>
+                    </a:ext>
+                  </a:extLst>
+                </a:gridCol>
               </a:tblGrid>
-              <a:tr h="506767">
+              <a:tr h="487703">
                 <a:tc>
                   <a:txBody>
-                    <a:bodyPr anchor="t" rtlCol="false"/>
+                    <a:bodyPr/>
                     <a:lstStyle/>
                     <a:p>
                       <a:pPr algn="ctr">
@@ -4422,51 +4539,51 @@
                         <a:defRPr/>
                       </a:pPr>
                       <a:r>
-                        <a:rPr lang="en-US" sz="902" b="true">
+                        <a:rPr lang="en-US" sz="902" b="1">
                           <a:solidFill>
-                            <a:srgbClr val="8E8E93"/>
+                            <a:srgbClr val="2D2D2D"/>
                           </a:solidFill>
-                          <a:latin typeface="Arimo Bold"/>
-                          <a:ea typeface="Arimo Bold"/>
-                          <a:cs typeface="Arimo Bold"/>
-                          <a:sym typeface="Arimo Bold"/>
+                          <a:latin typeface="Avenir Bold"/>
+                          <a:ea typeface="Avenir Bold"/>
+                          <a:cs typeface="Avenir Bold"/>
+                          <a:sym typeface="Avenir Bold"/>
                         </a:rPr>
                         <a:t>Total RSF</a:t>
                       </a:r>
                       <a:endParaRPr lang="en-US" sz="1100"/>
                     </a:p>
                   </a:txBody>
-                  <a:tcPr marL="91440" marR="91440" marT="91440" marB="91440" anchor="ctr">
-                    <a:lnL cmpd="sng" algn="ctr" cap="flat" w="4762">
-                      <a:solidFill>
-                        <a:srgbClr val="000000"/>
+                  <a:tcPr marT="91440" marB="91440" anchor="ctr">
+                    <a:lnL w="4762" cap="flat" cmpd="sng" algn="ctr">
+                      <a:solidFill>
+                        <a:srgbClr val="3B52A1"/>
                       </a:solidFill>
                       <a:prstDash val="solid"/>
                       <a:round/>
                       <a:headEnd type="none" w="med" len="med"/>
                       <a:tailEnd type="none" w="med" len="med"/>
                     </a:lnL>
-                    <a:lnR cmpd="sng" algn="ctr" cap="flat" w="4762">
-                      <a:solidFill>
-                        <a:srgbClr val="000000"/>
+                    <a:lnR w="4762" cap="flat" cmpd="sng" algn="ctr">
+                      <a:solidFill>
+                        <a:srgbClr val="3B52A1"/>
                       </a:solidFill>
                       <a:prstDash val="solid"/>
                       <a:round/>
                       <a:headEnd type="none" w="med" len="med"/>
                       <a:tailEnd type="none" w="med" len="med"/>
                     </a:lnR>
-                    <a:lnT cmpd="sng" algn="ctr" cap="flat" w="4762">
-                      <a:solidFill>
-                        <a:srgbClr val="000000"/>
+                    <a:lnT w="4762" cap="flat" cmpd="sng" algn="ctr">
+                      <a:solidFill>
+                        <a:srgbClr val="3B52A1"/>
                       </a:solidFill>
                       <a:prstDash val="solid"/>
                       <a:round/>
                       <a:headEnd type="none" w="med" len="med"/>
                       <a:tailEnd type="none" w="med" len="med"/>
                     </a:lnT>
-                    <a:lnB cmpd="sng" algn="ctr" cap="flat" w="4762">
-                      <a:solidFill>
-                        <a:srgbClr val="000000"/>
+                    <a:lnB w="4762" cap="flat" cmpd="sng" algn="ctr">
+                      <a:solidFill>
+                        <a:srgbClr val="3B52A1"/>
                       </a:solidFill>
                       <a:prstDash val="solid"/>
                       <a:round/>
@@ -4480,7 +4597,7 @@
                 </a:tc>
                 <a:tc>
                   <a:txBody>
-                    <a:bodyPr anchor="t" rtlCol="false"/>
+                    <a:bodyPr/>
                     <a:lstStyle/>
                     <a:p>
                       <a:pPr algn="ctr">
@@ -4490,51 +4607,51 @@
                         <a:defRPr/>
                       </a:pPr>
                       <a:r>
-                        <a:rPr lang="en-US" sz="902" b="true">
+                        <a:rPr lang="en-US" sz="902" b="1">
                           <a:solidFill>
-                            <a:srgbClr val="8E8E93"/>
+                            <a:srgbClr val="2D2D2D"/>
                           </a:solidFill>
-                          <a:latin typeface="Arimo Bold"/>
-                          <a:ea typeface="Arimo Bold"/>
-                          <a:cs typeface="Arimo Bold"/>
-                          <a:sym typeface="Arimo Bold"/>
+                          <a:latin typeface="Avenir Bold"/>
+                          <a:ea typeface="Avenir Bold"/>
+                          <a:cs typeface="Avenir Bold"/>
+                          <a:sym typeface="Avenir Bold"/>
                         </a:rPr>
                         <a:t>Occ RSF</a:t>
                       </a:r>
                       <a:endParaRPr lang="en-US" sz="1100"/>
                     </a:p>
                   </a:txBody>
-                  <a:tcPr marL="91440" marR="91440" marT="91440" marB="91440" anchor="ctr">
-                    <a:lnL cmpd="sng" algn="ctr" cap="flat" w="4762">
-                      <a:solidFill>
-                        <a:srgbClr val="000000"/>
+                  <a:tcPr marT="91440" marB="91440" anchor="ctr">
+                    <a:lnL w="4762" cap="flat" cmpd="sng" algn="ctr">
+                      <a:solidFill>
+                        <a:srgbClr val="3B52A1"/>
                       </a:solidFill>
                       <a:prstDash val="solid"/>
                       <a:round/>
                       <a:headEnd type="none" w="med" len="med"/>
                       <a:tailEnd type="none" w="med" len="med"/>
                     </a:lnL>
-                    <a:lnR cmpd="sng" algn="ctr" cap="flat" w="4762">
-                      <a:solidFill>
-                        <a:srgbClr val="000000"/>
+                    <a:lnR w="4762" cap="flat" cmpd="sng" algn="ctr">
+                      <a:solidFill>
+                        <a:srgbClr val="3B52A1"/>
                       </a:solidFill>
                       <a:prstDash val="solid"/>
                       <a:round/>
                       <a:headEnd type="none" w="med" len="med"/>
                       <a:tailEnd type="none" w="med" len="med"/>
                     </a:lnR>
-                    <a:lnT cmpd="sng" algn="ctr" cap="flat" w="4762">
-                      <a:solidFill>
-                        <a:srgbClr val="000000"/>
+                    <a:lnT w="4762" cap="flat" cmpd="sng" algn="ctr">
+                      <a:solidFill>
+                        <a:srgbClr val="3B52A1"/>
                       </a:solidFill>
                       <a:prstDash val="solid"/>
                       <a:round/>
                       <a:headEnd type="none" w="med" len="med"/>
                       <a:tailEnd type="none" w="med" len="med"/>
                     </a:lnT>
-                    <a:lnB cmpd="sng" algn="ctr" cap="flat" w="4762">
-                      <a:solidFill>
-                        <a:srgbClr val="000000"/>
+                    <a:lnB w="4762" cap="flat" cmpd="sng" algn="ctr">
+                      <a:solidFill>
+                        <a:srgbClr val="3B52A1"/>
                       </a:solidFill>
                       <a:prstDash val="solid"/>
                       <a:round/>
@@ -4548,7 +4665,7 @@
                 </a:tc>
                 <a:tc>
                   <a:txBody>
-                    <a:bodyPr anchor="t" rtlCol="false"/>
+                    <a:bodyPr/>
                     <a:lstStyle/>
                     <a:p>
                       <a:pPr algn="ctr">
@@ -4558,51 +4675,51 @@
                         <a:defRPr/>
                       </a:pPr>
                       <a:r>
-                        <a:rPr lang="en-US" sz="902" b="true">
+                        <a:rPr lang="en-US" sz="902" b="1">
                           <a:solidFill>
-                            <a:srgbClr val="8E8E93"/>
+                            <a:srgbClr val="2D2D2D"/>
                           </a:solidFill>
-                          <a:latin typeface="Arimo Bold"/>
-                          <a:ea typeface="Arimo Bold"/>
-                          <a:cs typeface="Arimo Bold"/>
-                          <a:sym typeface="Arimo Bold"/>
+                          <a:latin typeface="Avenir Bold"/>
+                          <a:ea typeface="Avenir Bold"/>
+                          <a:cs typeface="Avenir Bold"/>
+                          <a:sym typeface="Avenir Bold"/>
                         </a:rPr>
                         <a:t>RSF Occ %</a:t>
                       </a:r>
                       <a:endParaRPr lang="en-US" sz="1100"/>
                     </a:p>
                   </a:txBody>
-                  <a:tcPr marL="91440" marR="91440" marT="91440" marB="91440" anchor="ctr">
-                    <a:lnL cmpd="sng" algn="ctr" cap="flat" w="4762">
-                      <a:solidFill>
-                        <a:srgbClr val="000000"/>
+                  <a:tcPr marT="91440" marB="91440" anchor="ctr">
+                    <a:lnL w="4762" cap="flat" cmpd="sng" algn="ctr">
+                      <a:solidFill>
+                        <a:srgbClr val="3B52A1"/>
                       </a:solidFill>
                       <a:prstDash val="solid"/>
                       <a:round/>
                       <a:headEnd type="none" w="med" len="med"/>
                       <a:tailEnd type="none" w="med" len="med"/>
                     </a:lnL>
-                    <a:lnR cmpd="sng" algn="ctr" cap="flat" w="4762">
-                      <a:solidFill>
-                        <a:srgbClr val="000000"/>
+                    <a:lnR w="4762" cap="flat" cmpd="sng" algn="ctr">
+                      <a:solidFill>
+                        <a:srgbClr val="3B52A1"/>
                       </a:solidFill>
                       <a:prstDash val="solid"/>
                       <a:round/>
                       <a:headEnd type="none" w="med" len="med"/>
                       <a:tailEnd type="none" w="med" len="med"/>
                     </a:lnR>
-                    <a:lnT cmpd="sng" algn="ctr" cap="flat" w="4762">
-                      <a:solidFill>
-                        <a:srgbClr val="000000"/>
+                    <a:lnT w="4762" cap="flat" cmpd="sng" algn="ctr">
+                      <a:solidFill>
+                        <a:srgbClr val="3B52A1"/>
                       </a:solidFill>
                       <a:prstDash val="solid"/>
                       <a:round/>
                       <a:headEnd type="none" w="med" len="med"/>
                       <a:tailEnd type="none" w="med" len="med"/>
                     </a:lnT>
-                    <a:lnB cmpd="sng" algn="ctr" cap="flat" w="4762">
-                      <a:solidFill>
-                        <a:srgbClr val="000000"/>
+                    <a:lnB w="4762" cap="flat" cmpd="sng" algn="ctr">
+                      <a:solidFill>
+                        <a:srgbClr val="3B52A1"/>
                       </a:solidFill>
                       <a:prstDash val="solid"/>
                       <a:round/>
@@ -4616,7 +4733,7 @@
                 </a:tc>
                 <a:tc>
                   <a:txBody>
-                    <a:bodyPr anchor="t" rtlCol="false"/>
+                    <a:bodyPr/>
                     <a:lstStyle/>
                     <a:p>
                       <a:pPr algn="ctr">
@@ -4626,51 +4743,51 @@
                         <a:defRPr/>
                       </a:pPr>
                       <a:r>
-                        <a:rPr lang="en-US" sz="902" b="true">
+                        <a:rPr lang="en-US" sz="902" b="1">
                           <a:solidFill>
-                            <a:srgbClr val="8E8E93"/>
+                            <a:srgbClr val="2D2D2D"/>
                           </a:solidFill>
-                          <a:latin typeface="Arimo Bold"/>
-                          <a:ea typeface="Arimo Bold"/>
-                          <a:cs typeface="Arimo Bold"/>
-                          <a:sym typeface="Arimo Bold"/>
+                          <a:latin typeface="Avenir Bold"/>
+                          <a:ea typeface="Avenir Bold"/>
+                          <a:cs typeface="Avenir Bold"/>
+                          <a:sym typeface="Avenir Bold"/>
                         </a:rPr>
                         <a:t>Occ Units</a:t>
                       </a:r>
                       <a:endParaRPr lang="en-US" sz="1100"/>
                     </a:p>
                   </a:txBody>
-                  <a:tcPr marL="91440" marR="91440" marT="91440" marB="91440" anchor="ctr">
-                    <a:lnL cmpd="sng" algn="ctr" cap="flat" w="4762">
-                      <a:solidFill>
-                        <a:srgbClr val="000000"/>
+                  <a:tcPr marT="91440" marB="91440" anchor="ctr">
+                    <a:lnL w="4762" cap="flat" cmpd="sng" algn="ctr">
+                      <a:solidFill>
+                        <a:srgbClr val="3B52A1"/>
                       </a:solidFill>
                       <a:prstDash val="solid"/>
                       <a:round/>
                       <a:headEnd type="none" w="med" len="med"/>
                       <a:tailEnd type="none" w="med" len="med"/>
                     </a:lnL>
-                    <a:lnR cmpd="sng" algn="ctr" cap="flat" w="4762">
-                      <a:solidFill>
-                        <a:srgbClr val="000000"/>
+                    <a:lnR w="4762" cap="flat" cmpd="sng" algn="ctr">
+                      <a:solidFill>
+                        <a:srgbClr val="3B52A1"/>
                       </a:solidFill>
                       <a:prstDash val="solid"/>
                       <a:round/>
                       <a:headEnd type="none" w="med" len="med"/>
                       <a:tailEnd type="none" w="med" len="med"/>
                     </a:lnR>
-                    <a:lnT cmpd="sng" algn="ctr" cap="flat" w="4762">
-                      <a:solidFill>
-                        <a:srgbClr val="000000"/>
+                    <a:lnT w="4762" cap="flat" cmpd="sng" algn="ctr">
+                      <a:solidFill>
+                        <a:srgbClr val="3B52A1"/>
                       </a:solidFill>
                       <a:prstDash val="solid"/>
                       <a:round/>
                       <a:headEnd type="none" w="med" len="med"/>
                       <a:tailEnd type="none" w="med" len="med"/>
                     </a:lnT>
-                    <a:lnB cmpd="sng" algn="ctr" cap="flat" w="4762">
-                      <a:solidFill>
-                        <a:srgbClr val="000000"/>
+                    <a:lnB w="4762" cap="flat" cmpd="sng" algn="ctr">
+                      <a:solidFill>
+                        <a:srgbClr val="3B52A1"/>
                       </a:solidFill>
                       <a:prstDash val="solid"/>
                       <a:round/>
@@ -4684,7 +4801,7 @@
                 </a:tc>
                 <a:tc>
                   <a:txBody>
-                    <a:bodyPr anchor="t" rtlCol="false"/>
+                    <a:bodyPr/>
                     <a:lstStyle/>
                     <a:p>
                       <a:pPr algn="ctr">
@@ -4694,63 +4811,51 @@
                         <a:defRPr/>
                       </a:pPr>
                       <a:r>
-                        <a:rPr lang="en-US" sz="902" b="true">
+                        <a:rPr lang="en-US" sz="902" b="1">
                           <a:solidFill>
-                            <a:srgbClr val="8E8E93"/>
+                            <a:srgbClr val="2D2D2D"/>
                           </a:solidFill>
-                          <a:latin typeface="Arimo Bold"/>
-                          <a:ea typeface="Arimo Bold"/>
-                          <a:cs typeface="Arimo Bold"/>
-                          <a:sym typeface="Arimo Bold"/>
+                          <a:latin typeface="Avenir Bold"/>
+                          <a:ea typeface="Avenir Bold"/>
+                          <a:cs typeface="Avenir Bold"/>
+                          <a:sym typeface="Avenir Bold"/>
                         </a:rPr>
-                        <a:t>TPP Coverage</a:t>
-                      </a:r>
-                      <a:r>
-                        <a:rPr lang="en-US" sz="902" b="true">
-                          <a:solidFill>
-                            <a:srgbClr val="8E8E93"/>
-                          </a:solidFill>
-                          <a:latin typeface="Arimo Bold"/>
-                          <a:ea typeface="Arimo Bold"/>
-                          <a:cs typeface="Arimo Bold"/>
-                          <a:sym typeface="Arimo Bold"/>
-                        </a:rPr>
-                        <a:t> %</a:t>
+                        <a:t>TPP Coverage %</a:t>
                       </a:r>
                       <a:endParaRPr lang="en-US" sz="1100"/>
                     </a:p>
                   </a:txBody>
-                  <a:tcPr marL="91440" marR="91440" marT="91440" marB="91440" anchor="ctr">
-                    <a:lnL cmpd="sng" algn="ctr" cap="flat" w="4762">
-                      <a:solidFill>
-                        <a:srgbClr val="000000"/>
+                  <a:tcPr marT="91440" marB="91440" anchor="ctr">
+                    <a:lnL w="4762" cap="flat" cmpd="sng" algn="ctr">
+                      <a:solidFill>
+                        <a:srgbClr val="3B52A1"/>
                       </a:solidFill>
                       <a:prstDash val="solid"/>
                       <a:round/>
                       <a:headEnd type="none" w="med" len="med"/>
                       <a:tailEnd type="none" w="med" len="med"/>
                     </a:lnL>
-                    <a:lnR cmpd="sng" algn="ctr" cap="flat" w="4762">
-                      <a:solidFill>
-                        <a:srgbClr val="000000"/>
+                    <a:lnR w="4762" cap="flat" cmpd="sng" algn="ctr">
+                      <a:solidFill>
+                        <a:srgbClr val="3B52A1"/>
                       </a:solidFill>
                       <a:prstDash val="solid"/>
                       <a:round/>
                       <a:headEnd type="none" w="med" len="med"/>
                       <a:tailEnd type="none" w="med" len="med"/>
                     </a:lnR>
-                    <a:lnT cmpd="sng" algn="ctr" cap="flat" w="4762">
-                      <a:solidFill>
-                        <a:srgbClr val="000000"/>
+                    <a:lnT w="4762" cap="flat" cmpd="sng" algn="ctr">
+                      <a:solidFill>
+                        <a:srgbClr val="3B52A1"/>
                       </a:solidFill>
                       <a:prstDash val="solid"/>
                       <a:round/>
                       <a:headEnd type="none" w="med" len="med"/>
                       <a:tailEnd type="none" w="med" len="med"/>
                     </a:lnT>
-                    <a:lnB cmpd="sng" algn="ctr" cap="flat" w="4762">
-                      <a:solidFill>
-                        <a:srgbClr val="000000"/>
+                    <a:lnB w="4762" cap="flat" cmpd="sng" algn="ctr">
+                      <a:solidFill>
+                        <a:srgbClr val="3B52A1"/>
                       </a:solidFill>
                       <a:prstDash val="solid"/>
                       <a:round/>
@@ -4764,7 +4869,7 @@
                 </a:tc>
                 <a:tc>
                   <a:txBody>
-                    <a:bodyPr anchor="t" rtlCol="false"/>
+                    <a:bodyPr/>
                     <a:lstStyle/>
                     <a:p>
                       <a:pPr algn="ctr">
@@ -4774,51 +4879,51 @@
                         <a:defRPr/>
                       </a:pPr>
                       <a:r>
-                        <a:rPr lang="en-US" sz="902" b="true">
+                        <a:rPr lang="en-US" sz="902" b="1">
                           <a:solidFill>
-                            <a:srgbClr val="8E8E93"/>
+                            <a:srgbClr val="2D2D2D"/>
                           </a:solidFill>
-                          <a:latin typeface="Arimo Bold"/>
-                          <a:ea typeface="Arimo Bold"/>
-                          <a:cs typeface="Arimo Bold"/>
-                          <a:sym typeface="Arimo Bold"/>
+                          <a:latin typeface="Avenir Bold"/>
+                          <a:ea typeface="Avenir Bold"/>
+                          <a:cs typeface="Avenir Bold"/>
+                          <a:sym typeface="Avenir Bold"/>
                         </a:rPr>
                         <a:t>AR &gt; 30d %</a:t>
                       </a:r>
                       <a:endParaRPr lang="en-US" sz="1100"/>
                     </a:p>
                   </a:txBody>
-                  <a:tcPr marL="91440" marR="91440" marT="91440" marB="91440" anchor="ctr">
-                    <a:lnL cmpd="sng" algn="ctr" cap="flat" w="4762">
-                      <a:solidFill>
-                        <a:srgbClr val="000000"/>
+                  <a:tcPr marT="91440" marB="91440" anchor="ctr">
+                    <a:lnL w="4762" cap="flat" cmpd="sng" algn="ctr">
+                      <a:solidFill>
+                        <a:srgbClr val="3B52A1"/>
                       </a:solidFill>
                       <a:prstDash val="solid"/>
                       <a:round/>
                       <a:headEnd type="none" w="med" len="med"/>
                       <a:tailEnd type="none" w="med" len="med"/>
                     </a:lnL>
-                    <a:lnR cmpd="sng" algn="ctr" cap="flat" w="4762">
-                      <a:solidFill>
-                        <a:srgbClr val="000000"/>
+                    <a:lnR w="4762" cap="flat" cmpd="sng" algn="ctr">
+                      <a:solidFill>
+                        <a:srgbClr val="3B52A1"/>
                       </a:solidFill>
                       <a:prstDash val="solid"/>
                       <a:round/>
                       <a:headEnd type="none" w="med" len="med"/>
                       <a:tailEnd type="none" w="med" len="med"/>
                     </a:lnR>
-                    <a:lnT cmpd="sng" algn="ctr" cap="flat" w="4762">
-                      <a:solidFill>
-                        <a:srgbClr val="000000"/>
+                    <a:lnT w="4762" cap="flat" cmpd="sng" algn="ctr">
+                      <a:solidFill>
+                        <a:srgbClr val="3B52A1"/>
                       </a:solidFill>
                       <a:prstDash val="solid"/>
                       <a:round/>
                       <a:headEnd type="none" w="med" len="med"/>
                       <a:tailEnd type="none" w="med" len="med"/>
                     </a:lnT>
-                    <a:lnB cmpd="sng" algn="ctr" cap="flat" w="4762">
-                      <a:solidFill>
-                        <a:srgbClr val="000000"/>
+                    <a:lnB w="4762" cap="flat" cmpd="sng" algn="ctr">
+                      <a:solidFill>
+                        <a:srgbClr val="3B52A1"/>
                       </a:solidFill>
                       <a:prstDash val="solid"/>
                       <a:round/>
@@ -4832,7 +4937,7 @@
                 </a:tc>
                 <a:tc>
                   <a:txBody>
-                    <a:bodyPr anchor="t" rtlCol="false"/>
+                    <a:bodyPr/>
                     <a:lstStyle/>
                     <a:p>
                       <a:pPr algn="ctr">
@@ -4842,51 +4947,51 @@
                         <a:defRPr/>
                       </a:pPr>
                       <a:r>
-                        <a:rPr lang="en-US" sz="902" b="true">
+                        <a:rPr lang="en-US" sz="902" b="1">
                           <a:solidFill>
-                            <a:srgbClr val="8E8E93"/>
+                            <a:srgbClr val="2D2D2D"/>
                           </a:solidFill>
-                          <a:latin typeface="Arimo Bold"/>
-                          <a:ea typeface="Arimo Bold"/>
-                          <a:cs typeface="Arimo Bold"/>
-                          <a:sym typeface="Arimo Bold"/>
+                          <a:latin typeface="Avenir Bold"/>
+                          <a:ea typeface="Avenir Bold"/>
+                          <a:cs typeface="Avenir Bold"/>
+                          <a:sym typeface="Avenir Bold"/>
                         </a:rPr>
                         <a:t>AR &gt; 60d %</a:t>
                       </a:r>
                       <a:endParaRPr lang="en-US" sz="1100"/>
                     </a:p>
                   </a:txBody>
-                  <a:tcPr marL="91440" marR="91440" marT="91440" marB="91440" anchor="ctr">
-                    <a:lnL cmpd="sng" algn="ctr" cap="flat" w="4762">
-                      <a:solidFill>
-                        <a:srgbClr val="000000"/>
+                  <a:tcPr marT="91440" marB="91440" anchor="ctr">
+                    <a:lnL w="4762" cap="flat" cmpd="sng" algn="ctr">
+                      <a:solidFill>
+                        <a:srgbClr val="3B52A1"/>
                       </a:solidFill>
                       <a:prstDash val="solid"/>
                       <a:round/>
                       <a:headEnd type="none" w="med" len="med"/>
                       <a:tailEnd type="none" w="med" len="med"/>
                     </a:lnL>
-                    <a:lnR cmpd="sng" algn="ctr" cap="flat" w="4762">
-                      <a:solidFill>
-                        <a:srgbClr val="000000"/>
+                    <a:lnR w="4762" cap="flat" cmpd="sng" algn="ctr">
+                      <a:solidFill>
+                        <a:srgbClr val="3B52A1"/>
                       </a:solidFill>
                       <a:prstDash val="solid"/>
                       <a:round/>
                       <a:headEnd type="none" w="med" len="med"/>
                       <a:tailEnd type="none" w="med" len="med"/>
                     </a:lnR>
-                    <a:lnT cmpd="sng" algn="ctr" cap="flat" w="4762">
-                      <a:solidFill>
-                        <a:srgbClr val="000000"/>
+                    <a:lnT w="4762" cap="flat" cmpd="sng" algn="ctr">
+                      <a:solidFill>
+                        <a:srgbClr val="3B52A1"/>
                       </a:solidFill>
                       <a:prstDash val="solid"/>
                       <a:round/>
                       <a:headEnd type="none" w="med" len="med"/>
                       <a:tailEnd type="none" w="med" len="med"/>
                     </a:lnT>
-                    <a:lnB cmpd="sng" algn="ctr" cap="flat" w="4762">
-                      <a:solidFill>
-                        <a:srgbClr val="000000"/>
+                    <a:lnB w="4762" cap="flat" cmpd="sng" algn="ctr">
+                      <a:solidFill>
+                        <a:srgbClr val="3B52A1"/>
                       </a:solidFill>
                       <a:prstDash val="solid"/>
                       <a:round/>
@@ -4898,11 +5003,16 @@
                     </a:solidFill>
                   </a:tcPr>
                 </a:tc>
+                <a:extLst>
+                  <a:ext uri="{0D108BD9-81ED-4DB2-BD59-A6C34878D82A}">
+                    <a16:rowId xmlns:a16="http://schemas.microsoft.com/office/drawing/2014/main" val="10000"/>
+                  </a:ext>
+                </a:extLst>
               </a:tr>
-              <a:tr h="736246">
+              <a:tr h="717210">
                 <a:tc>
                   <a:txBody>
-                    <a:bodyPr anchor="t" rtlCol="false"/>
+                    <a:bodyPr/>
                     <a:lstStyle/>
                     <a:p>
                       <a:pPr algn="ctr">
@@ -4914,49 +5024,49 @@
                       <a:r>
                         <a:rPr lang="en-US" sz="1103">
                           <a:solidFill>
-                            <a:srgbClr val="2C2C2E"/>
+                            <a:srgbClr val="4A4A4A"/>
                           </a:solidFill>
-                          <a:latin typeface="Arimo"/>
-                          <a:ea typeface="Arimo"/>
-                          <a:cs typeface="Arimo"/>
-                          <a:sym typeface="Arimo"/>
+                          <a:latin typeface="Avenir"/>
+                          <a:ea typeface="Avenir"/>
+                          <a:cs typeface="Avenir"/>
+                          <a:sym typeface="Avenir"/>
                         </a:rPr>
                         <a:t>{{TOTALRSF}}</a:t>
                       </a:r>
                       <a:endParaRPr lang="en-US" sz="1100"/>
                     </a:p>
                   </a:txBody>
-                  <a:tcPr marL="91440" marR="91440" marT="91440" marB="91440" anchor="ctr">
-                    <a:lnL cmpd="sng" algn="ctr" cap="flat" w="4762">
-                      <a:solidFill>
-                        <a:srgbClr val="000000"/>
+                  <a:tcPr marT="91440" marB="91440" anchor="ctr">
+                    <a:lnL w="4762" cap="flat" cmpd="sng" algn="ctr">
+                      <a:solidFill>
+                        <a:srgbClr val="3B52A1"/>
                       </a:solidFill>
                       <a:prstDash val="solid"/>
                       <a:round/>
                       <a:headEnd type="none" w="med" len="med"/>
                       <a:tailEnd type="none" w="med" len="med"/>
                     </a:lnL>
-                    <a:lnR cmpd="sng" algn="ctr" cap="flat" w="4762">
-                      <a:solidFill>
-                        <a:srgbClr val="000000"/>
+                    <a:lnR w="4762" cap="flat" cmpd="sng" algn="ctr">
+                      <a:solidFill>
+                        <a:srgbClr val="3B52A1"/>
                       </a:solidFill>
                       <a:prstDash val="solid"/>
                       <a:round/>
                       <a:headEnd type="none" w="med" len="med"/>
                       <a:tailEnd type="none" w="med" len="med"/>
                     </a:lnR>
-                    <a:lnT cmpd="sng" algn="ctr" cap="flat" w="4762">
-                      <a:solidFill>
-                        <a:srgbClr val="000000"/>
+                    <a:lnT w="4762" cap="flat" cmpd="sng" algn="ctr">
+                      <a:solidFill>
+                        <a:srgbClr val="3B52A1"/>
                       </a:solidFill>
                       <a:prstDash val="solid"/>
                       <a:round/>
                       <a:headEnd type="none" w="med" len="med"/>
                       <a:tailEnd type="none" w="med" len="med"/>
                     </a:lnT>
-                    <a:lnB cmpd="sng" algn="ctr" cap="flat" w="4762">
-                      <a:solidFill>
-                        <a:srgbClr val="000000"/>
+                    <a:lnB w="4762" cap="flat" cmpd="sng" algn="ctr">
+                      <a:solidFill>
+                        <a:srgbClr val="3B52A1"/>
                       </a:solidFill>
                       <a:prstDash val="solid"/>
                       <a:round/>
@@ -4970,7 +5080,7 @@
                 </a:tc>
                 <a:tc>
                   <a:txBody>
-                    <a:bodyPr anchor="t" rtlCol="false"/>
+                    <a:bodyPr/>
                     <a:lstStyle/>
                     <a:p>
                       <a:pPr algn="ctr">
@@ -4982,49 +5092,49 @@
                       <a:r>
                         <a:rPr lang="en-US" sz="1103">
                           <a:solidFill>
-                            <a:srgbClr val="2C2C2E"/>
+                            <a:srgbClr val="4A4A4A"/>
                           </a:solidFill>
-                          <a:latin typeface="Arimo"/>
-                          <a:ea typeface="Arimo"/>
-                          <a:cs typeface="Arimo"/>
-                          <a:sym typeface="Arimo"/>
+                          <a:latin typeface="Avenir"/>
+                          <a:ea typeface="Avenir"/>
+                          <a:cs typeface="Avenir"/>
+                          <a:sym typeface="Avenir"/>
                         </a:rPr>
                         <a:t>{{OCCRSF}}</a:t>
                       </a:r>
                       <a:endParaRPr lang="en-US" sz="1100"/>
                     </a:p>
                   </a:txBody>
-                  <a:tcPr marL="91440" marR="91440" marT="91440" marB="91440" anchor="ctr">
-                    <a:lnL cmpd="sng" algn="ctr" cap="flat" w="4762">
-                      <a:solidFill>
-                        <a:srgbClr val="000000"/>
+                  <a:tcPr marT="91440" marB="91440" anchor="ctr">
+                    <a:lnL w="4762" cap="flat" cmpd="sng" algn="ctr">
+                      <a:solidFill>
+                        <a:srgbClr val="3B52A1"/>
                       </a:solidFill>
                       <a:prstDash val="solid"/>
                       <a:round/>
                       <a:headEnd type="none" w="med" len="med"/>
                       <a:tailEnd type="none" w="med" len="med"/>
                     </a:lnL>
-                    <a:lnR cmpd="sng" algn="ctr" cap="flat" w="4762">
-                      <a:solidFill>
-                        <a:srgbClr val="000000"/>
+                    <a:lnR w="4762" cap="flat" cmpd="sng" algn="ctr">
+                      <a:solidFill>
+                        <a:srgbClr val="3B52A1"/>
                       </a:solidFill>
                       <a:prstDash val="solid"/>
                       <a:round/>
                       <a:headEnd type="none" w="med" len="med"/>
                       <a:tailEnd type="none" w="med" len="med"/>
                     </a:lnR>
-                    <a:lnT cmpd="sng" algn="ctr" cap="flat" w="4762">
-                      <a:solidFill>
-                        <a:srgbClr val="000000"/>
+                    <a:lnT w="4762" cap="flat" cmpd="sng" algn="ctr">
+                      <a:solidFill>
+                        <a:srgbClr val="3B52A1"/>
                       </a:solidFill>
                       <a:prstDash val="solid"/>
                       <a:round/>
                       <a:headEnd type="none" w="med" len="med"/>
                       <a:tailEnd type="none" w="med" len="med"/>
                     </a:lnT>
-                    <a:lnB cmpd="sng" algn="ctr" cap="flat" w="4762">
-                      <a:solidFill>
-                        <a:srgbClr val="000000"/>
+                    <a:lnB w="4762" cap="flat" cmpd="sng" algn="ctr">
+                      <a:solidFill>
+                        <a:srgbClr val="3B52A1"/>
                       </a:solidFill>
                       <a:prstDash val="solid"/>
                       <a:round/>
@@ -5038,7 +5148,7 @@
                 </a:tc>
                 <a:tc>
                   <a:txBody>
-                    <a:bodyPr anchor="t" rtlCol="false"/>
+                    <a:bodyPr/>
                     <a:lstStyle/>
                     <a:p>
                       <a:pPr algn="ctr">
@@ -5050,49 +5160,49 @@
                       <a:r>
                         <a:rPr lang="en-US" sz="1103">
                           <a:solidFill>
-                            <a:srgbClr val="2C2C2E"/>
+                            <a:srgbClr val="4A4A4A"/>
                           </a:solidFill>
-                          <a:latin typeface="Arimo"/>
-                          <a:ea typeface="Arimo"/>
-                          <a:cs typeface="Arimo"/>
-                          <a:sym typeface="Arimo"/>
+                          <a:latin typeface="Avenir"/>
+                          <a:ea typeface="Avenir"/>
+                          <a:cs typeface="Avenir"/>
+                          <a:sym typeface="Avenir"/>
                         </a:rPr>
                         <a:t>{{RSFOCCPCT}}</a:t>
                       </a:r>
                       <a:endParaRPr lang="en-US" sz="1100"/>
                     </a:p>
                   </a:txBody>
-                  <a:tcPr marL="91440" marR="91440" marT="91440" marB="91440" anchor="ctr">
-                    <a:lnL cmpd="sng" algn="ctr" cap="flat" w="4762">
-                      <a:solidFill>
-                        <a:srgbClr val="000000"/>
+                  <a:tcPr marT="91440" marB="91440" anchor="ctr">
+                    <a:lnL w="4762" cap="flat" cmpd="sng" algn="ctr">
+                      <a:solidFill>
+                        <a:srgbClr val="3B52A1"/>
                       </a:solidFill>
                       <a:prstDash val="solid"/>
                       <a:round/>
                       <a:headEnd type="none" w="med" len="med"/>
                       <a:tailEnd type="none" w="med" len="med"/>
                     </a:lnL>
-                    <a:lnR cmpd="sng" algn="ctr" cap="flat" w="4762">
-                      <a:solidFill>
-                        <a:srgbClr val="000000"/>
+                    <a:lnR w="4762" cap="flat" cmpd="sng" algn="ctr">
+                      <a:solidFill>
+                        <a:srgbClr val="3B52A1"/>
                       </a:solidFill>
                       <a:prstDash val="solid"/>
                       <a:round/>
                       <a:headEnd type="none" w="med" len="med"/>
                       <a:tailEnd type="none" w="med" len="med"/>
                     </a:lnR>
-                    <a:lnT cmpd="sng" algn="ctr" cap="flat" w="4762">
-                      <a:solidFill>
-                        <a:srgbClr val="000000"/>
+                    <a:lnT w="4762" cap="flat" cmpd="sng" algn="ctr">
+                      <a:solidFill>
+                        <a:srgbClr val="3B52A1"/>
                       </a:solidFill>
                       <a:prstDash val="solid"/>
                       <a:round/>
                       <a:headEnd type="none" w="med" len="med"/>
                       <a:tailEnd type="none" w="med" len="med"/>
                     </a:lnT>
-                    <a:lnB cmpd="sng" algn="ctr" cap="flat" w="4762">
-                      <a:solidFill>
-                        <a:srgbClr val="000000"/>
+                    <a:lnB w="4762" cap="flat" cmpd="sng" algn="ctr">
+                      <a:solidFill>
+                        <a:srgbClr val="3B52A1"/>
                       </a:solidFill>
                       <a:prstDash val="solid"/>
                       <a:round/>
@@ -5106,7 +5216,7 @@
                 </a:tc>
                 <a:tc>
                   <a:txBody>
-                    <a:bodyPr anchor="t" rtlCol="false"/>
+                    <a:bodyPr/>
                     <a:lstStyle/>
                     <a:p>
                       <a:pPr algn="ctr">
@@ -5118,49 +5228,49 @@
                       <a:r>
                         <a:rPr lang="en-US" sz="1103">
                           <a:solidFill>
-                            <a:srgbClr val="2C2C2E"/>
+                            <a:srgbClr val="4A4A4A"/>
                           </a:solidFill>
-                          <a:latin typeface="Arimo"/>
-                          <a:ea typeface="Arimo"/>
-                          <a:cs typeface="Arimo"/>
-                          <a:sym typeface="Arimo"/>
+                          <a:latin typeface="Avenir"/>
+                          <a:ea typeface="Avenir"/>
+                          <a:cs typeface="Avenir"/>
+                          <a:sym typeface="Avenir"/>
                         </a:rPr>
                         <a:t>{{OCCUNITS}}</a:t>
                       </a:r>
                       <a:endParaRPr lang="en-US" sz="1100"/>
                     </a:p>
                   </a:txBody>
-                  <a:tcPr marL="91440" marR="91440" marT="91440" marB="91440" anchor="ctr">
-                    <a:lnL cmpd="sng" algn="ctr" cap="flat" w="4762">
-                      <a:solidFill>
-                        <a:srgbClr val="000000"/>
+                  <a:tcPr marT="91440" marB="91440" anchor="ctr">
+                    <a:lnL w="4762" cap="flat" cmpd="sng" algn="ctr">
+                      <a:solidFill>
+                        <a:srgbClr val="3B52A1"/>
                       </a:solidFill>
                       <a:prstDash val="solid"/>
                       <a:round/>
                       <a:headEnd type="none" w="med" len="med"/>
                       <a:tailEnd type="none" w="med" len="med"/>
                     </a:lnL>
-                    <a:lnR cmpd="sng" algn="ctr" cap="flat" w="4762">
-                      <a:solidFill>
-                        <a:srgbClr val="000000"/>
+                    <a:lnR w="4762" cap="flat" cmpd="sng" algn="ctr">
+                      <a:solidFill>
+                        <a:srgbClr val="3B52A1"/>
                       </a:solidFill>
                       <a:prstDash val="solid"/>
                       <a:round/>
                       <a:headEnd type="none" w="med" len="med"/>
                       <a:tailEnd type="none" w="med" len="med"/>
                     </a:lnR>
-                    <a:lnT cmpd="sng" algn="ctr" cap="flat" w="4762">
-                      <a:solidFill>
-                        <a:srgbClr val="000000"/>
+                    <a:lnT w="4762" cap="flat" cmpd="sng" algn="ctr">
+                      <a:solidFill>
+                        <a:srgbClr val="3B52A1"/>
                       </a:solidFill>
                       <a:prstDash val="solid"/>
                       <a:round/>
                       <a:headEnd type="none" w="med" len="med"/>
                       <a:tailEnd type="none" w="med" len="med"/>
                     </a:lnT>
-                    <a:lnB cmpd="sng" algn="ctr" cap="flat" w="4762">
-                      <a:solidFill>
-                        <a:srgbClr val="000000"/>
+                    <a:lnB w="4762" cap="flat" cmpd="sng" algn="ctr">
+                      <a:solidFill>
+                        <a:srgbClr val="3B52A1"/>
                       </a:solidFill>
                       <a:prstDash val="solid"/>
                       <a:round/>
@@ -5174,7 +5284,7 @@
                 </a:tc>
                 <a:tc>
                   <a:txBody>
-                    <a:bodyPr anchor="t" rtlCol="false"/>
+                    <a:bodyPr/>
                     <a:lstStyle/>
                     <a:p>
                       <a:pPr algn="ctr">
@@ -5186,49 +5296,49 @@
                       <a:r>
                         <a:rPr lang="en-US" sz="1103">
                           <a:solidFill>
-                            <a:srgbClr val="2C2C2E"/>
+                            <a:srgbClr val="4A4A4A"/>
                           </a:solidFill>
-                          <a:latin typeface="Arimo"/>
-                          <a:ea typeface="Arimo"/>
-                          <a:cs typeface="Arimo"/>
-                          <a:sym typeface="Arimo"/>
+                          <a:latin typeface="Avenir"/>
+                          <a:ea typeface="Avenir"/>
+                          <a:cs typeface="Avenir"/>
+                          <a:sym typeface="Avenir"/>
                         </a:rPr>
                         <a:t>{{COVERAGE}}</a:t>
                       </a:r>
                       <a:endParaRPr lang="en-US" sz="1100"/>
                     </a:p>
                   </a:txBody>
-                  <a:tcPr marL="91440" marR="91440" marT="91440" marB="91440" anchor="ctr">
-                    <a:lnL cmpd="sng" algn="ctr" cap="flat" w="4762">
-                      <a:solidFill>
-                        <a:srgbClr val="000000"/>
+                  <a:tcPr marT="91440" marB="91440" anchor="ctr">
+                    <a:lnL w="4762" cap="flat" cmpd="sng" algn="ctr">
+                      <a:solidFill>
+                        <a:srgbClr val="3B52A1"/>
                       </a:solidFill>
                       <a:prstDash val="solid"/>
                       <a:round/>
                       <a:headEnd type="none" w="med" len="med"/>
                       <a:tailEnd type="none" w="med" len="med"/>
                     </a:lnL>
-                    <a:lnR cmpd="sng" algn="ctr" cap="flat" w="4762">
-                      <a:solidFill>
-                        <a:srgbClr val="000000"/>
+                    <a:lnR w="4762" cap="flat" cmpd="sng" algn="ctr">
+                      <a:solidFill>
+                        <a:srgbClr val="3B52A1"/>
                       </a:solidFill>
                       <a:prstDash val="solid"/>
                       <a:round/>
                       <a:headEnd type="none" w="med" len="med"/>
                       <a:tailEnd type="none" w="med" len="med"/>
                     </a:lnR>
-                    <a:lnT cmpd="sng" algn="ctr" cap="flat" w="4762">
-                      <a:solidFill>
-                        <a:srgbClr val="000000"/>
+                    <a:lnT w="4762" cap="flat" cmpd="sng" algn="ctr">
+                      <a:solidFill>
+                        <a:srgbClr val="3B52A1"/>
                       </a:solidFill>
                       <a:prstDash val="solid"/>
                       <a:round/>
                       <a:headEnd type="none" w="med" len="med"/>
                       <a:tailEnd type="none" w="med" len="med"/>
                     </a:lnT>
-                    <a:lnB cmpd="sng" algn="ctr" cap="flat" w="4762">
-                      <a:solidFill>
-                        <a:srgbClr val="000000"/>
+                    <a:lnB w="4762" cap="flat" cmpd="sng" algn="ctr">
+                      <a:solidFill>
+                        <a:srgbClr val="3B52A1"/>
                       </a:solidFill>
                       <a:prstDash val="solid"/>
                       <a:round/>
@@ -5242,7 +5352,7 @@
                 </a:tc>
                 <a:tc>
                   <a:txBody>
-                    <a:bodyPr anchor="t" rtlCol="false"/>
+                    <a:bodyPr/>
                     <a:lstStyle/>
                     <a:p>
                       <a:pPr algn="ctr">
@@ -5254,49 +5364,49 @@
                       <a:r>
                         <a:rPr lang="en-US" sz="1103">
                           <a:solidFill>
-                            <a:srgbClr val="2C2C2E"/>
+                            <a:srgbClr val="4A4A4A"/>
                           </a:solidFill>
-                          <a:latin typeface="Arimo"/>
-                          <a:ea typeface="Arimo"/>
-                          <a:cs typeface="Arimo"/>
-                          <a:sym typeface="Arimo"/>
+                          <a:latin typeface="Avenir"/>
+                          <a:ea typeface="Avenir"/>
+                          <a:cs typeface="Avenir"/>
+                          <a:sym typeface="Avenir"/>
                         </a:rPr>
                         <a:t>{{AROVER30DAYSPCT}}</a:t>
                       </a:r>
                       <a:endParaRPr lang="en-US" sz="1100"/>
                     </a:p>
                   </a:txBody>
-                  <a:tcPr marL="91440" marR="91440" marT="91440" marB="91440" anchor="ctr">
-                    <a:lnL cmpd="sng" algn="ctr" cap="flat" w="4762">
-                      <a:solidFill>
-                        <a:srgbClr val="000000"/>
+                  <a:tcPr marT="91440" marB="91440" anchor="ctr">
+                    <a:lnL w="4762" cap="flat" cmpd="sng" algn="ctr">
+                      <a:solidFill>
+                        <a:srgbClr val="3B52A1"/>
                       </a:solidFill>
                       <a:prstDash val="solid"/>
                       <a:round/>
                       <a:headEnd type="none" w="med" len="med"/>
                       <a:tailEnd type="none" w="med" len="med"/>
                     </a:lnL>
-                    <a:lnR cmpd="sng" algn="ctr" cap="flat" w="4762">
-                      <a:solidFill>
-                        <a:srgbClr val="000000"/>
+                    <a:lnR w="4762" cap="flat" cmpd="sng" algn="ctr">
+                      <a:solidFill>
+                        <a:srgbClr val="3B52A1"/>
                       </a:solidFill>
                       <a:prstDash val="solid"/>
                       <a:round/>
                       <a:headEnd type="none" w="med" len="med"/>
                       <a:tailEnd type="none" w="med" len="med"/>
                     </a:lnR>
-                    <a:lnT cmpd="sng" algn="ctr" cap="flat" w="4762">
-                      <a:solidFill>
-                        <a:srgbClr val="000000"/>
+                    <a:lnT w="4762" cap="flat" cmpd="sng" algn="ctr">
+                      <a:solidFill>
+                        <a:srgbClr val="3B52A1"/>
                       </a:solidFill>
                       <a:prstDash val="solid"/>
                       <a:round/>
                       <a:headEnd type="none" w="med" len="med"/>
                       <a:tailEnd type="none" w="med" len="med"/>
                     </a:lnT>
-                    <a:lnB cmpd="sng" algn="ctr" cap="flat" w="4762">
-                      <a:solidFill>
-                        <a:srgbClr val="000000"/>
+                    <a:lnB w="4762" cap="flat" cmpd="sng" algn="ctr">
+                      <a:solidFill>
+                        <a:srgbClr val="3B52A1"/>
                       </a:solidFill>
                       <a:prstDash val="solid"/>
                       <a:round/>
@@ -5310,7 +5420,7 @@
                 </a:tc>
                 <a:tc>
                   <a:txBody>
-                    <a:bodyPr anchor="t" rtlCol="false"/>
+                    <a:bodyPr/>
                     <a:lstStyle/>
                     <a:p>
                       <a:pPr algn="ctr">
@@ -5322,49 +5432,49 @@
                       <a:r>
                         <a:rPr lang="en-US" sz="1103">
                           <a:solidFill>
-                            <a:srgbClr val="2C2C2E"/>
+                            <a:srgbClr val="4A4A4A"/>
                           </a:solidFill>
-                          <a:latin typeface="Arimo"/>
-                          <a:ea typeface="Arimo"/>
-                          <a:cs typeface="Arimo"/>
-                          <a:sym typeface="Arimo"/>
+                          <a:latin typeface="Avenir"/>
+                          <a:ea typeface="Avenir"/>
+                          <a:cs typeface="Avenir"/>
+                          <a:sym typeface="Avenir"/>
                         </a:rPr>
                         <a:t>{{AROVER60DAYSPCT}}</a:t>
                       </a:r>
                       <a:endParaRPr lang="en-US" sz="1100"/>
                     </a:p>
                   </a:txBody>
-                  <a:tcPr marL="91440" marR="91440" marT="91440" marB="91440" anchor="ctr">
-                    <a:lnL cmpd="sng" algn="ctr" cap="flat" w="4762">
-                      <a:solidFill>
-                        <a:srgbClr val="000000"/>
+                  <a:tcPr marT="91440" marB="91440" anchor="ctr">
+                    <a:lnL w="4762" cap="flat" cmpd="sng" algn="ctr">
+                      <a:solidFill>
+                        <a:srgbClr val="3B52A1"/>
                       </a:solidFill>
                       <a:prstDash val="solid"/>
                       <a:round/>
                       <a:headEnd type="none" w="med" len="med"/>
                       <a:tailEnd type="none" w="med" len="med"/>
                     </a:lnL>
-                    <a:lnR cmpd="sng" algn="ctr" cap="flat" w="4762">
-                      <a:solidFill>
-                        <a:srgbClr val="000000"/>
+                    <a:lnR w="4762" cap="flat" cmpd="sng" algn="ctr">
+                      <a:solidFill>
+                        <a:srgbClr val="3B52A1"/>
                       </a:solidFill>
                       <a:prstDash val="solid"/>
                       <a:round/>
                       <a:headEnd type="none" w="med" len="med"/>
                       <a:tailEnd type="none" w="med" len="med"/>
                     </a:lnR>
-                    <a:lnT cmpd="sng" algn="ctr" cap="flat" w="4762">
-                      <a:solidFill>
-                        <a:srgbClr val="000000"/>
+                    <a:lnT w="4762" cap="flat" cmpd="sng" algn="ctr">
+                      <a:solidFill>
+                        <a:srgbClr val="3B52A1"/>
                       </a:solidFill>
                       <a:prstDash val="solid"/>
                       <a:round/>
                       <a:headEnd type="none" w="med" len="med"/>
                       <a:tailEnd type="none" w="med" len="med"/>
                     </a:lnT>
-                    <a:lnB cmpd="sng" algn="ctr" cap="flat" w="4762">
-                      <a:solidFill>
-                        <a:srgbClr val="000000"/>
+                    <a:lnB w="4762" cap="flat" cmpd="sng" algn="ctr">
+                      <a:solidFill>
+                        <a:srgbClr val="3B52A1"/>
                       </a:solidFill>
                       <a:prstDash val="solid"/>
                       <a:round/>
@@ -5376,6 +5486,11 @@
                     </a:solidFill>
                   </a:tcPr>
                 </a:tc>
+                <a:extLst>
+                  <a:ext uri="{0D108BD9-81ED-4DB2-BD59-A6C34878D82A}">
+                    <a16:rowId xmlns:a16="http://schemas.microsoft.com/office/drawing/2014/main" val="10001"/>
+                  </a:ext>
+                </a:extLst>
               </a:tr>
             </a:tbl>
           </a:graphicData>
@@ -5383,33 +5498,75 @@
       </p:graphicFrame>
       <p:graphicFrame>
         <p:nvGraphicFramePr>
-          <p:cNvPr name="Table 10" id="10"/>
+          <p:cNvPr id="10" name="Table 10"/>
           <p:cNvGraphicFramePr>
-            <a:graphicFrameLocks noGrp="true"/>
+            <a:graphicFrameLocks noGrp="1"/>
           </p:cNvGraphicFramePr>
           <p:nvPr/>
         </p:nvGraphicFramePr>
         <p:xfrm>
           <a:off x="586151" y="8284048"/>
-          <a:ext cx="6600099" cy="1243012"/>
+          <a:ext cx="6600102" cy="1204913"/>
         </p:xfrm>
         <a:graphic>
           <a:graphicData uri="http://schemas.openxmlformats.org/drawingml/2006/table">
             <a:tbl>
               <a:tblPr/>
               <a:tblGrid>
-                <a:gridCol w="942871"/>
-                <a:gridCol w="942871"/>
-                <a:gridCol w="942871"/>
-                <a:gridCol w="942871"/>
-                <a:gridCol w="942871"/>
-                <a:gridCol w="942871"/>
-                <a:gridCol w="942876"/>
+                <a:gridCol w="942871">
+                  <a:extLst>
+                    <a:ext uri="{9D8B030D-6E8A-4147-A177-3AD203B41FA5}">
+                      <a16:colId xmlns:a16="http://schemas.microsoft.com/office/drawing/2014/main" val="20000"/>
+                    </a:ext>
+                  </a:extLst>
+                </a:gridCol>
+                <a:gridCol w="942871">
+                  <a:extLst>
+                    <a:ext uri="{9D8B030D-6E8A-4147-A177-3AD203B41FA5}">
+                      <a16:colId xmlns:a16="http://schemas.microsoft.com/office/drawing/2014/main" val="20001"/>
+                    </a:ext>
+                  </a:extLst>
+                </a:gridCol>
+                <a:gridCol w="942871">
+                  <a:extLst>
+                    <a:ext uri="{9D8B030D-6E8A-4147-A177-3AD203B41FA5}">
+                      <a16:colId xmlns:a16="http://schemas.microsoft.com/office/drawing/2014/main" val="20002"/>
+                    </a:ext>
+                  </a:extLst>
+                </a:gridCol>
+                <a:gridCol w="942871">
+                  <a:extLst>
+                    <a:ext uri="{9D8B030D-6E8A-4147-A177-3AD203B41FA5}">
+                      <a16:colId xmlns:a16="http://schemas.microsoft.com/office/drawing/2014/main" val="20003"/>
+                    </a:ext>
+                  </a:extLst>
+                </a:gridCol>
+                <a:gridCol w="942871">
+                  <a:extLst>
+                    <a:ext uri="{9D8B030D-6E8A-4147-A177-3AD203B41FA5}">
+                      <a16:colId xmlns:a16="http://schemas.microsoft.com/office/drawing/2014/main" val="20004"/>
+                    </a:ext>
+                  </a:extLst>
+                </a:gridCol>
+                <a:gridCol w="942871">
+                  <a:extLst>
+                    <a:ext uri="{9D8B030D-6E8A-4147-A177-3AD203B41FA5}">
+                      <a16:colId xmlns:a16="http://schemas.microsoft.com/office/drawing/2014/main" val="20005"/>
+                    </a:ext>
+                  </a:extLst>
+                </a:gridCol>
+                <a:gridCol w="942876">
+                  <a:extLst>
+                    <a:ext uri="{9D8B030D-6E8A-4147-A177-3AD203B41FA5}">
+                      <a16:colId xmlns:a16="http://schemas.microsoft.com/office/drawing/2014/main" val="20006"/>
+                    </a:ext>
+                  </a:extLst>
+                </a:gridCol>
               </a:tblGrid>
-              <a:tr h="506767">
+              <a:tr h="487703">
                 <a:tc>
                   <a:txBody>
-                    <a:bodyPr anchor="t" rtlCol="false"/>
+                    <a:bodyPr/>
                     <a:lstStyle/>
                     <a:p>
                       <a:pPr algn="ctr">
@@ -5419,51 +5576,51 @@
                         <a:defRPr/>
                       </a:pPr>
                       <a:r>
-                        <a:rPr lang="en-US" sz="902" b="true">
+                        <a:rPr lang="en-US" sz="902" b="1">
                           <a:solidFill>
-                            <a:srgbClr val="8E8E93"/>
+                            <a:srgbClr val="2D2D2D"/>
                           </a:solidFill>
-                          <a:latin typeface="Arimo Bold"/>
-                          <a:ea typeface="Arimo Bold"/>
-                          <a:cs typeface="Arimo Bold"/>
-                          <a:sym typeface="Arimo Bold"/>
+                          <a:latin typeface="Avenir Bold"/>
+                          <a:ea typeface="Avenir Bold"/>
+                          <a:cs typeface="Avenir Bold"/>
+                          <a:sym typeface="Avenir Bold"/>
                         </a:rPr>
                         <a:t>Proj. Rent</a:t>
                       </a:r>
                       <a:endParaRPr lang="en-US" sz="1100"/>
                     </a:p>
                   </a:txBody>
-                  <a:tcPr marL="91440" marR="91440" marT="91440" marB="91440" anchor="ctr">
-                    <a:lnL cmpd="sng" algn="ctr" cap="flat" w="4762">
-                      <a:solidFill>
-                        <a:srgbClr val="000000"/>
+                  <a:tcPr marT="91440" marB="91440" anchor="ctr">
+                    <a:lnL w="4762" cap="flat" cmpd="sng" algn="ctr">
+                      <a:solidFill>
+                        <a:srgbClr val="3B52A1"/>
                       </a:solidFill>
                       <a:prstDash val="solid"/>
                       <a:round/>
                       <a:headEnd type="none" w="med" len="med"/>
                       <a:tailEnd type="none" w="med" len="med"/>
                     </a:lnL>
-                    <a:lnR cmpd="sng" algn="ctr" cap="flat" w="4762">
-                      <a:solidFill>
-                        <a:srgbClr val="000000"/>
+                    <a:lnR w="4762" cap="flat" cmpd="sng" algn="ctr">
+                      <a:solidFill>
+                        <a:srgbClr val="3B52A1"/>
                       </a:solidFill>
                       <a:prstDash val="solid"/>
                       <a:round/>
                       <a:headEnd type="none" w="med" len="med"/>
                       <a:tailEnd type="none" w="med" len="med"/>
                     </a:lnR>
-                    <a:lnT cmpd="sng" algn="ctr" cap="flat" w="4762">
-                      <a:solidFill>
-                        <a:srgbClr val="000000"/>
+                    <a:lnT w="4762" cap="flat" cmpd="sng" algn="ctr">
+                      <a:solidFill>
+                        <a:srgbClr val="3B52A1"/>
                       </a:solidFill>
                       <a:prstDash val="solid"/>
                       <a:round/>
                       <a:headEnd type="none" w="med" len="med"/>
                       <a:tailEnd type="none" w="med" len="med"/>
                     </a:lnT>
-                    <a:lnB cmpd="sng" algn="ctr" cap="flat" w="4762">
-                      <a:solidFill>
-                        <a:srgbClr val="000000"/>
+                    <a:lnB w="4762" cap="flat" cmpd="sng" algn="ctr">
+                      <a:solidFill>
+                        <a:srgbClr val="3B52A1"/>
                       </a:solidFill>
                       <a:prstDash val="solid"/>
                       <a:round/>
@@ -5477,7 +5634,7 @@
                 </a:tc>
                 <a:tc>
                   <a:txBody>
-                    <a:bodyPr anchor="t" rtlCol="false"/>
+                    <a:bodyPr/>
                     <a:lstStyle/>
                     <a:p>
                       <a:pPr algn="ctr">
@@ -5487,51 +5644,51 @@
                         <a:defRPr/>
                       </a:pPr>
                       <a:r>
-                        <a:rPr lang="en-US" sz="902" b="true">
+                        <a:rPr lang="en-US" sz="902" b="1">
                           <a:solidFill>
-                            <a:srgbClr val="8E8E93"/>
+                            <a:srgbClr val="2D2D2D"/>
                           </a:solidFill>
-                          <a:latin typeface="Arimo Bold"/>
-                          <a:ea typeface="Arimo Bold"/>
-                          <a:cs typeface="Arimo Bold"/>
-                          <a:sym typeface="Arimo Bold"/>
+                          <a:latin typeface="Avenir Bold"/>
+                          <a:ea typeface="Avenir Bold"/>
+                          <a:cs typeface="Avenir Bold"/>
+                          <a:sym typeface="Avenir Bold"/>
                         </a:rPr>
                         <a:t>Proj. Rent / SF</a:t>
                       </a:r>
                       <a:endParaRPr lang="en-US" sz="1100"/>
                     </a:p>
                   </a:txBody>
-                  <a:tcPr marL="91440" marR="91440" marT="91440" marB="91440" anchor="ctr">
-                    <a:lnL cmpd="sng" algn="ctr" cap="flat" w="4762">
-                      <a:solidFill>
-                        <a:srgbClr val="000000"/>
+                  <a:tcPr marT="91440" marB="91440" anchor="ctr">
+                    <a:lnL w="4762" cap="flat" cmpd="sng" algn="ctr">
+                      <a:solidFill>
+                        <a:srgbClr val="3B52A1"/>
                       </a:solidFill>
                       <a:prstDash val="solid"/>
                       <a:round/>
                       <a:headEnd type="none" w="med" len="med"/>
                       <a:tailEnd type="none" w="med" len="med"/>
                     </a:lnL>
-                    <a:lnR cmpd="sng" algn="ctr" cap="flat" w="4762">
-                      <a:solidFill>
-                        <a:srgbClr val="000000"/>
+                    <a:lnR w="4762" cap="flat" cmpd="sng" algn="ctr">
+                      <a:solidFill>
+                        <a:srgbClr val="3B52A1"/>
                       </a:solidFill>
                       <a:prstDash val="solid"/>
                       <a:round/>
                       <a:headEnd type="none" w="med" len="med"/>
                       <a:tailEnd type="none" w="med" len="med"/>
                     </a:lnR>
-                    <a:lnT cmpd="sng" algn="ctr" cap="flat" w="4762">
-                      <a:solidFill>
-                        <a:srgbClr val="000000"/>
+                    <a:lnT w="4762" cap="flat" cmpd="sng" algn="ctr">
+                      <a:solidFill>
+                        <a:srgbClr val="3B52A1"/>
                       </a:solidFill>
                       <a:prstDash val="solid"/>
                       <a:round/>
                       <a:headEnd type="none" w="med" len="med"/>
                       <a:tailEnd type="none" w="med" len="med"/>
                     </a:lnT>
-                    <a:lnB cmpd="sng" algn="ctr" cap="flat" w="4762">
-                      <a:solidFill>
-                        <a:srgbClr val="000000"/>
+                    <a:lnB w="4762" cap="flat" cmpd="sng" algn="ctr">
+                      <a:solidFill>
+                        <a:srgbClr val="3B52A1"/>
                       </a:solidFill>
                       <a:prstDash val="solid"/>
                       <a:round/>
@@ -5545,7 +5702,7 @@
                 </a:tc>
                 <a:tc>
                   <a:txBody>
-                    <a:bodyPr anchor="t" rtlCol="false"/>
+                    <a:bodyPr/>
                     <a:lstStyle/>
                     <a:p>
                       <a:pPr algn="ctr">
@@ -5555,51 +5712,51 @@
                         <a:defRPr/>
                       </a:pPr>
                       <a:r>
-                        <a:rPr lang="en-US" sz="902" b="true">
+                        <a:rPr lang="en-US" sz="902" b="1">
                           <a:solidFill>
-                            <a:srgbClr val="8E8E93"/>
+                            <a:srgbClr val="2D2D2D"/>
                           </a:solidFill>
-                          <a:latin typeface="Arimo Bold"/>
-                          <a:ea typeface="Arimo Bold"/>
-                          <a:cs typeface="Arimo Bold"/>
-                          <a:sym typeface="Arimo Bold"/>
+                          <a:latin typeface="Avenir Bold"/>
+                          <a:ea typeface="Avenir Bold"/>
+                          <a:cs typeface="Avenir Bold"/>
+                          <a:sym typeface="Avenir Bold"/>
                         </a:rPr>
                         <a:t>Proj. Rent MoM</a:t>
                       </a:r>
                       <a:endParaRPr lang="en-US" sz="1100"/>
                     </a:p>
                   </a:txBody>
-                  <a:tcPr marL="91440" marR="91440" marT="91440" marB="91440" anchor="ctr">
-                    <a:lnL cmpd="sng" algn="ctr" cap="flat" w="4762">
-                      <a:solidFill>
-                        <a:srgbClr val="000000"/>
+                  <a:tcPr marT="91440" marB="91440" anchor="ctr">
+                    <a:lnL w="4762" cap="flat" cmpd="sng" algn="ctr">
+                      <a:solidFill>
+                        <a:srgbClr val="3B52A1"/>
                       </a:solidFill>
                       <a:prstDash val="solid"/>
                       <a:round/>
                       <a:headEnd type="none" w="med" len="med"/>
                       <a:tailEnd type="none" w="med" len="med"/>
                     </a:lnL>
-                    <a:lnR cmpd="sng" algn="ctr" cap="flat" w="4762">
-                      <a:solidFill>
-                        <a:srgbClr val="000000"/>
+                    <a:lnR w="4762" cap="flat" cmpd="sng" algn="ctr">
+                      <a:solidFill>
+                        <a:srgbClr val="3B52A1"/>
                       </a:solidFill>
                       <a:prstDash val="solid"/>
                       <a:round/>
                       <a:headEnd type="none" w="med" len="med"/>
                       <a:tailEnd type="none" w="med" len="med"/>
                     </a:lnR>
-                    <a:lnT cmpd="sng" algn="ctr" cap="flat" w="4762">
-                      <a:solidFill>
-                        <a:srgbClr val="000000"/>
+                    <a:lnT w="4762" cap="flat" cmpd="sng" algn="ctr">
+                      <a:solidFill>
+                        <a:srgbClr val="3B52A1"/>
                       </a:solidFill>
                       <a:prstDash val="solid"/>
                       <a:round/>
                       <a:headEnd type="none" w="med" len="med"/>
                       <a:tailEnd type="none" w="med" len="med"/>
                     </a:lnT>
-                    <a:lnB cmpd="sng" algn="ctr" cap="flat" w="4762">
-                      <a:solidFill>
-                        <a:srgbClr val="000000"/>
+                    <a:lnB w="4762" cap="flat" cmpd="sng" algn="ctr">
+                      <a:solidFill>
+                        <a:srgbClr val="3B52A1"/>
                       </a:solidFill>
                       <a:prstDash val="solid"/>
                       <a:round/>
@@ -5613,7 +5770,7 @@
                 </a:tc>
                 <a:tc>
                   <a:txBody>
-                    <a:bodyPr anchor="t" rtlCol="false"/>
+                    <a:bodyPr/>
                     <a:lstStyle/>
                     <a:p>
                       <a:pPr algn="ctr">
@@ -5623,51 +5780,51 @@
                         <a:defRPr/>
                       </a:pPr>
                       <a:r>
-                        <a:rPr lang="en-US" sz="902" b="true">
+                        <a:rPr lang="en-US" sz="902" b="1">
                           <a:solidFill>
-                            <a:srgbClr val="8E8E93"/>
+                            <a:srgbClr val="2D2D2D"/>
                           </a:solidFill>
-                          <a:latin typeface="Arimo Bold"/>
-                          <a:ea typeface="Arimo Bold"/>
-                          <a:cs typeface="Arimo Bold"/>
-                          <a:sym typeface="Arimo Bold"/>
+                          <a:latin typeface="Avenir Bold"/>
+                          <a:ea typeface="Avenir Bold"/>
+                          <a:cs typeface="Avenir Bold"/>
+                          <a:sym typeface="Avenir Bold"/>
                         </a:rPr>
                         <a:t>Gross Pot. Rent</a:t>
                       </a:r>
                       <a:endParaRPr lang="en-US" sz="1100"/>
                     </a:p>
                   </a:txBody>
-                  <a:tcPr marL="91440" marR="91440" marT="91440" marB="91440" anchor="ctr">
-                    <a:lnL cmpd="sng" algn="ctr" cap="flat" w="4762">
-                      <a:solidFill>
-                        <a:srgbClr val="000000"/>
+                  <a:tcPr marT="91440" marB="91440" anchor="ctr">
+                    <a:lnL w="4762" cap="flat" cmpd="sng" algn="ctr">
+                      <a:solidFill>
+                        <a:srgbClr val="3B52A1"/>
                       </a:solidFill>
                       <a:prstDash val="solid"/>
                       <a:round/>
                       <a:headEnd type="none" w="med" len="med"/>
                       <a:tailEnd type="none" w="med" len="med"/>
                     </a:lnL>
-                    <a:lnR cmpd="sng" algn="ctr" cap="flat" w="4762">
-                      <a:solidFill>
-                        <a:srgbClr val="000000"/>
+                    <a:lnR w="4762" cap="flat" cmpd="sng" algn="ctr">
+                      <a:solidFill>
+                        <a:srgbClr val="3B52A1"/>
                       </a:solidFill>
                       <a:prstDash val="solid"/>
                       <a:round/>
                       <a:headEnd type="none" w="med" len="med"/>
                       <a:tailEnd type="none" w="med" len="med"/>
                     </a:lnR>
-                    <a:lnT cmpd="sng" algn="ctr" cap="flat" w="4762">
-                      <a:solidFill>
-                        <a:srgbClr val="000000"/>
+                    <a:lnT w="4762" cap="flat" cmpd="sng" algn="ctr">
+                      <a:solidFill>
+                        <a:srgbClr val="3B52A1"/>
                       </a:solidFill>
                       <a:prstDash val="solid"/>
                       <a:round/>
                       <a:headEnd type="none" w="med" len="med"/>
                       <a:tailEnd type="none" w="med" len="med"/>
                     </a:lnT>
-                    <a:lnB cmpd="sng" algn="ctr" cap="flat" w="4762">
-                      <a:solidFill>
-                        <a:srgbClr val="000000"/>
+                    <a:lnB w="4762" cap="flat" cmpd="sng" algn="ctr">
+                      <a:solidFill>
+                        <a:srgbClr val="3B52A1"/>
                       </a:solidFill>
                       <a:prstDash val="solid"/>
                       <a:round/>
@@ -5681,7 +5838,7 @@
                 </a:tc>
                 <a:tc>
                   <a:txBody>
-                    <a:bodyPr anchor="t" rtlCol="false"/>
+                    <a:bodyPr/>
                     <a:lstStyle/>
                     <a:p>
                       <a:pPr algn="ctr">
@@ -5691,51 +5848,51 @@
                         <a:defRPr/>
                       </a:pPr>
                       <a:r>
-                        <a:rPr lang="en-US" sz="902" b="true">
+                        <a:rPr lang="en-US" sz="902" b="1">
                           <a:solidFill>
-                            <a:srgbClr val="8E8E93"/>
+                            <a:srgbClr val="2D2D2D"/>
                           </a:solidFill>
-                          <a:latin typeface="Arimo Bold"/>
-                          <a:ea typeface="Arimo Bold"/>
-                          <a:cs typeface="Arimo Bold"/>
-                          <a:sym typeface="Arimo Bold"/>
+                          <a:latin typeface="Avenir Bold"/>
+                          <a:ea typeface="Avenir Bold"/>
+                          <a:cs typeface="Avenir Bold"/>
+                          <a:sym typeface="Avenir Bold"/>
                         </a:rPr>
                         <a:t>GPR / SF</a:t>
                       </a:r>
                       <a:endParaRPr lang="en-US" sz="1100"/>
                     </a:p>
                   </a:txBody>
-                  <a:tcPr marL="91440" marR="91440" marT="91440" marB="91440" anchor="ctr">
-                    <a:lnL cmpd="sng" algn="ctr" cap="flat" w="4762">
-                      <a:solidFill>
-                        <a:srgbClr val="000000"/>
+                  <a:tcPr marT="91440" marB="91440" anchor="ctr">
+                    <a:lnL w="4762" cap="flat" cmpd="sng" algn="ctr">
+                      <a:solidFill>
+                        <a:srgbClr val="3B52A1"/>
                       </a:solidFill>
                       <a:prstDash val="solid"/>
                       <a:round/>
                       <a:headEnd type="none" w="med" len="med"/>
                       <a:tailEnd type="none" w="med" len="med"/>
                     </a:lnL>
-                    <a:lnR cmpd="sng" algn="ctr" cap="flat" w="4762">
-                      <a:solidFill>
-                        <a:srgbClr val="000000"/>
+                    <a:lnR w="4762" cap="flat" cmpd="sng" algn="ctr">
+                      <a:solidFill>
+                        <a:srgbClr val="3B52A1"/>
                       </a:solidFill>
                       <a:prstDash val="solid"/>
                       <a:round/>
                       <a:headEnd type="none" w="med" len="med"/>
                       <a:tailEnd type="none" w="med" len="med"/>
                     </a:lnR>
-                    <a:lnT cmpd="sng" algn="ctr" cap="flat" w="4762">
-                      <a:solidFill>
-                        <a:srgbClr val="000000"/>
+                    <a:lnT w="4762" cap="flat" cmpd="sng" algn="ctr">
+                      <a:solidFill>
+                        <a:srgbClr val="3B52A1"/>
                       </a:solidFill>
                       <a:prstDash val="solid"/>
                       <a:round/>
                       <a:headEnd type="none" w="med" len="med"/>
                       <a:tailEnd type="none" w="med" len="med"/>
                     </a:lnT>
-                    <a:lnB cmpd="sng" algn="ctr" cap="flat" w="4762">
-                      <a:solidFill>
-                        <a:srgbClr val="000000"/>
+                    <a:lnB w="4762" cap="flat" cmpd="sng" algn="ctr">
+                      <a:solidFill>
+                        <a:srgbClr val="3B52A1"/>
                       </a:solidFill>
                       <a:prstDash val="solid"/>
                       <a:round/>
@@ -5749,7 +5906,7 @@
                 </a:tc>
                 <a:tc>
                   <a:txBody>
-                    <a:bodyPr anchor="t" rtlCol="false"/>
+                    <a:bodyPr/>
                     <a:lstStyle/>
                     <a:p>
                       <a:pPr algn="ctr">
@@ -5759,51 +5916,51 @@
                         <a:defRPr/>
                       </a:pPr>
                       <a:r>
-                        <a:rPr lang="en-US" sz="902" b="true">
+                        <a:rPr lang="en-US" sz="902" b="1">
                           <a:solidFill>
-                            <a:srgbClr val="8E8E93"/>
+                            <a:srgbClr val="2D2D2D"/>
                           </a:solidFill>
-                          <a:latin typeface="Arimo Bold"/>
-                          <a:ea typeface="Arimo Bold"/>
-                          <a:cs typeface="Arimo Bold"/>
-                          <a:sym typeface="Arimo Bold"/>
+                          <a:latin typeface="Avenir Bold"/>
+                          <a:ea typeface="Avenir Bold"/>
+                          <a:cs typeface="Avenir Bold"/>
+                          <a:sym typeface="Avenir Bold"/>
                         </a:rPr>
                         <a:t>GPR MoM%</a:t>
                       </a:r>
                       <a:endParaRPr lang="en-US" sz="1100"/>
                     </a:p>
                   </a:txBody>
-                  <a:tcPr marL="91440" marR="91440" marT="91440" marB="91440" anchor="ctr">
-                    <a:lnL cmpd="sng" algn="ctr" cap="flat" w="4762">
-                      <a:solidFill>
-                        <a:srgbClr val="000000"/>
+                  <a:tcPr marT="91440" marB="91440" anchor="ctr">
+                    <a:lnL w="4762" cap="flat" cmpd="sng" algn="ctr">
+                      <a:solidFill>
+                        <a:srgbClr val="3B52A1"/>
                       </a:solidFill>
                       <a:prstDash val="solid"/>
                       <a:round/>
                       <a:headEnd type="none" w="med" len="med"/>
                       <a:tailEnd type="none" w="med" len="med"/>
                     </a:lnL>
-                    <a:lnR cmpd="sng" algn="ctr" cap="flat" w="4762">
-                      <a:solidFill>
-                        <a:srgbClr val="000000"/>
+                    <a:lnR w="4762" cap="flat" cmpd="sng" algn="ctr">
+                      <a:solidFill>
+                        <a:srgbClr val="3B52A1"/>
                       </a:solidFill>
                       <a:prstDash val="solid"/>
                       <a:round/>
                       <a:headEnd type="none" w="med" len="med"/>
                       <a:tailEnd type="none" w="med" len="med"/>
                     </a:lnR>
-                    <a:lnT cmpd="sng" algn="ctr" cap="flat" w="4762">
-                      <a:solidFill>
-                        <a:srgbClr val="000000"/>
+                    <a:lnT w="4762" cap="flat" cmpd="sng" algn="ctr">
+                      <a:solidFill>
+                        <a:srgbClr val="3B52A1"/>
                       </a:solidFill>
                       <a:prstDash val="solid"/>
                       <a:round/>
                       <a:headEnd type="none" w="med" len="med"/>
                       <a:tailEnd type="none" w="med" len="med"/>
                     </a:lnT>
-                    <a:lnB cmpd="sng" algn="ctr" cap="flat" w="4762">
-                      <a:solidFill>
-                        <a:srgbClr val="000000"/>
+                    <a:lnB w="4762" cap="flat" cmpd="sng" algn="ctr">
+                      <a:solidFill>
+                        <a:srgbClr val="3B52A1"/>
                       </a:solidFill>
                       <a:prstDash val="solid"/>
                       <a:round/>
@@ -5817,7 +5974,7 @@
                 </a:tc>
                 <a:tc>
                   <a:txBody>
-                    <a:bodyPr anchor="t" rtlCol="false"/>
+                    <a:bodyPr/>
                     <a:lstStyle/>
                     <a:p>
                       <a:pPr algn="ctr">
@@ -5827,51 +5984,51 @@
                         <a:defRPr/>
                       </a:pPr>
                       <a:r>
-                        <a:rPr lang="en-US" sz="902" b="true">
+                        <a:rPr lang="en-US" sz="902" b="1">
                           <a:solidFill>
-                            <a:srgbClr val="8E8E93"/>
+                            <a:srgbClr val="2D2D2D"/>
                           </a:solidFill>
-                          <a:latin typeface="Arimo Bold"/>
-                          <a:ea typeface="Arimo Bold"/>
-                          <a:cs typeface="Arimo Bold"/>
-                          <a:sym typeface="Arimo Bold"/>
+                          <a:latin typeface="Avenir Bold"/>
+                          <a:ea typeface="Avenir Bold"/>
+                          <a:cs typeface="Avenir Bold"/>
+                          <a:sym typeface="Avenir Bold"/>
                         </a:rPr>
                         <a:t>Econ Occ.</a:t>
                       </a:r>
                       <a:endParaRPr lang="en-US" sz="1100"/>
                     </a:p>
                   </a:txBody>
-                  <a:tcPr marL="91440" marR="91440" marT="91440" marB="91440" anchor="ctr">
-                    <a:lnL cmpd="sng" algn="ctr" cap="flat" w="4762">
-                      <a:solidFill>
-                        <a:srgbClr val="000000"/>
+                  <a:tcPr marT="91440" marB="91440" anchor="ctr">
+                    <a:lnL w="4762" cap="flat" cmpd="sng" algn="ctr">
+                      <a:solidFill>
+                        <a:srgbClr val="3B52A1"/>
                       </a:solidFill>
                       <a:prstDash val="solid"/>
                       <a:round/>
                       <a:headEnd type="none" w="med" len="med"/>
                       <a:tailEnd type="none" w="med" len="med"/>
                     </a:lnL>
-                    <a:lnR cmpd="sng" algn="ctr" cap="flat" w="4762">
-                      <a:solidFill>
-                        <a:srgbClr val="000000"/>
+                    <a:lnR w="4762" cap="flat" cmpd="sng" algn="ctr">
+                      <a:solidFill>
+                        <a:srgbClr val="3B52A1"/>
                       </a:solidFill>
                       <a:prstDash val="solid"/>
                       <a:round/>
                       <a:headEnd type="none" w="med" len="med"/>
                       <a:tailEnd type="none" w="med" len="med"/>
                     </a:lnR>
-                    <a:lnT cmpd="sng" algn="ctr" cap="flat" w="4762">
-                      <a:solidFill>
-                        <a:srgbClr val="000000"/>
+                    <a:lnT w="4762" cap="flat" cmpd="sng" algn="ctr">
+                      <a:solidFill>
+                        <a:srgbClr val="3B52A1"/>
                       </a:solidFill>
                       <a:prstDash val="solid"/>
                       <a:round/>
                       <a:headEnd type="none" w="med" len="med"/>
                       <a:tailEnd type="none" w="med" len="med"/>
                     </a:lnT>
-                    <a:lnB cmpd="sng" algn="ctr" cap="flat" w="4762">
-                      <a:solidFill>
-                        <a:srgbClr val="000000"/>
+                    <a:lnB w="4762" cap="flat" cmpd="sng" algn="ctr">
+                      <a:solidFill>
+                        <a:srgbClr val="3B52A1"/>
                       </a:solidFill>
                       <a:prstDash val="solid"/>
                       <a:round/>
@@ -5883,11 +6040,220 @@
                     </a:solidFill>
                   </a:tcPr>
                 </a:tc>
+                <a:extLst>
+                  <a:ext uri="{0D108BD9-81ED-4DB2-BD59-A6C34878D82A}">
+                    <a16:rowId xmlns:a16="http://schemas.microsoft.com/office/drawing/2014/main" val="10000"/>
+                  </a:ext>
+                </a:extLst>
               </a:tr>
-              <a:tr h="736246">
+              <a:tr h="717210">
                 <a:tc>
                   <a:txBody>
-                    <a:bodyPr anchor="t" rtlCol="false"/>
+                    <a:bodyPr/>
+                    <a:lstStyle/>
+                    <a:p>
+                      <a:pPr algn="ctr">
+                        <a:lnSpc>
+                          <a:spcPts val="1204"/>
+                        </a:lnSpc>
+                        <a:defRPr/>
+                      </a:pPr>
+                      <a:r>
+                        <a:rPr lang="en-US" sz="1003" dirty="0">
+                          <a:solidFill>
+                            <a:srgbClr val="4A4A4A"/>
+                          </a:solidFill>
+                          <a:latin typeface="Avenir"/>
+                          <a:ea typeface="Avenir"/>
+                          <a:cs typeface="Avenir"/>
+                          <a:sym typeface="Avenir"/>
+                        </a:rPr>
+                        <a:t>{{PROJRENT}}</a:t>
+                      </a:r>
+                      <a:endParaRPr lang="en-US" sz="1100" dirty="0"/>
+                    </a:p>
+                  </a:txBody>
+                  <a:tcPr marT="91440" marB="91440" anchor="ctr">
+                    <a:lnL w="4762" cap="flat" cmpd="sng" algn="ctr">
+                      <a:solidFill>
+                        <a:srgbClr val="3B52A1"/>
+                      </a:solidFill>
+                      <a:prstDash val="solid"/>
+                      <a:round/>
+                      <a:headEnd type="none" w="med" len="med"/>
+                      <a:tailEnd type="none" w="med" len="med"/>
+                    </a:lnL>
+                    <a:lnR w="4762" cap="flat" cmpd="sng" algn="ctr">
+                      <a:solidFill>
+                        <a:srgbClr val="3B52A1"/>
+                      </a:solidFill>
+                      <a:prstDash val="solid"/>
+                      <a:round/>
+                      <a:headEnd type="none" w="med" len="med"/>
+                      <a:tailEnd type="none" w="med" len="med"/>
+                    </a:lnR>
+                    <a:lnT w="4762" cap="flat" cmpd="sng" algn="ctr">
+                      <a:solidFill>
+                        <a:srgbClr val="3B52A1"/>
+                      </a:solidFill>
+                      <a:prstDash val="solid"/>
+                      <a:round/>
+                      <a:headEnd type="none" w="med" len="med"/>
+                      <a:tailEnd type="none" w="med" len="med"/>
+                    </a:lnT>
+                    <a:lnB w="4762" cap="flat" cmpd="sng" algn="ctr">
+                      <a:solidFill>
+                        <a:srgbClr val="3B52A1"/>
+                      </a:solidFill>
+                      <a:prstDash val="solid"/>
+                      <a:round/>
+                      <a:headEnd type="none" w="med" len="med"/>
+                      <a:tailEnd type="none" w="med" len="med"/>
+                    </a:lnB>
+                    <a:solidFill>
+                      <a:srgbClr val="FFFFFF"/>
+                    </a:solidFill>
+                  </a:tcPr>
+                </a:tc>
+                <a:tc>
+                  <a:txBody>
+                    <a:bodyPr/>
+                    <a:lstStyle/>
+                    <a:p>
+                      <a:pPr algn="ctr">
+                        <a:lnSpc>
+                          <a:spcPts val="1324"/>
+                        </a:lnSpc>
+                        <a:defRPr/>
+                      </a:pPr>
+                      <a:r>
+                        <a:rPr lang="en-US" sz="1103">
+                          <a:solidFill>
+                            <a:srgbClr val="4A4A4A"/>
+                          </a:solidFill>
+                          <a:latin typeface="Avenir"/>
+                          <a:ea typeface="Avenir"/>
+                          <a:cs typeface="Avenir"/>
+                          <a:sym typeface="Avenir"/>
+                        </a:rPr>
+                        <a:t>{{PROJRENTPERSF}}</a:t>
+                      </a:r>
+                      <a:endParaRPr lang="en-US" sz="1100"/>
+                    </a:p>
+                  </a:txBody>
+                  <a:tcPr marT="91440" marB="91440" anchor="ctr">
+                    <a:lnL w="4762" cap="flat" cmpd="sng" algn="ctr">
+                      <a:solidFill>
+                        <a:srgbClr val="3B52A1"/>
+                      </a:solidFill>
+                      <a:prstDash val="solid"/>
+                      <a:round/>
+                      <a:headEnd type="none" w="med" len="med"/>
+                      <a:tailEnd type="none" w="med" len="med"/>
+                    </a:lnL>
+                    <a:lnR w="4762" cap="flat" cmpd="sng" algn="ctr">
+                      <a:solidFill>
+                        <a:srgbClr val="3B52A1"/>
+                      </a:solidFill>
+                      <a:prstDash val="solid"/>
+                      <a:round/>
+                      <a:headEnd type="none" w="med" len="med"/>
+                      <a:tailEnd type="none" w="med" len="med"/>
+                    </a:lnR>
+                    <a:lnT w="4762" cap="flat" cmpd="sng" algn="ctr">
+                      <a:solidFill>
+                        <a:srgbClr val="3B52A1"/>
+                      </a:solidFill>
+                      <a:prstDash val="solid"/>
+                      <a:round/>
+                      <a:headEnd type="none" w="med" len="med"/>
+                      <a:tailEnd type="none" w="med" len="med"/>
+                    </a:lnT>
+                    <a:lnB w="4762" cap="flat" cmpd="sng" algn="ctr">
+                      <a:solidFill>
+                        <a:srgbClr val="3B52A1"/>
+                      </a:solidFill>
+                      <a:prstDash val="solid"/>
+                      <a:round/>
+                      <a:headEnd type="none" w="med" len="med"/>
+                      <a:tailEnd type="none" w="med" len="med"/>
+                    </a:lnB>
+                    <a:solidFill>
+                      <a:srgbClr val="FFFFFF"/>
+                    </a:solidFill>
+                  </a:tcPr>
+                </a:tc>
+                <a:tc>
+                  <a:txBody>
+                    <a:bodyPr/>
+                    <a:lstStyle/>
+                    <a:p>
+                      <a:pPr algn="ctr">
+                        <a:lnSpc>
+                          <a:spcPts val="1324"/>
+                        </a:lnSpc>
+                        <a:defRPr/>
+                      </a:pPr>
+                      <a:r>
+                        <a:rPr lang="en-US" sz="1103">
+                          <a:solidFill>
+                            <a:srgbClr val="4A4A4A"/>
+                          </a:solidFill>
+                          <a:latin typeface="Avenir"/>
+                          <a:ea typeface="Avenir"/>
+                          <a:cs typeface="Avenir"/>
+                          <a:sym typeface="Avenir"/>
+                        </a:rPr>
+                        <a:t>{{PROJRENTMOMPCT}}</a:t>
+                      </a:r>
+                      <a:endParaRPr lang="en-US" sz="1100"/>
+                    </a:p>
+                  </a:txBody>
+                  <a:tcPr marT="91440" marB="91440" anchor="ctr">
+                    <a:lnL w="4762" cap="flat" cmpd="sng" algn="ctr">
+                      <a:solidFill>
+                        <a:srgbClr val="3B52A1"/>
+                      </a:solidFill>
+                      <a:prstDash val="solid"/>
+                      <a:round/>
+                      <a:headEnd type="none" w="med" len="med"/>
+                      <a:tailEnd type="none" w="med" len="med"/>
+                    </a:lnL>
+                    <a:lnR w="4762" cap="flat" cmpd="sng" algn="ctr">
+                      <a:solidFill>
+                        <a:srgbClr val="3B52A1"/>
+                      </a:solidFill>
+                      <a:prstDash val="solid"/>
+                      <a:round/>
+                      <a:headEnd type="none" w="med" len="med"/>
+                      <a:tailEnd type="none" w="med" len="med"/>
+                    </a:lnR>
+                    <a:lnT w="4762" cap="flat" cmpd="sng" algn="ctr">
+                      <a:solidFill>
+                        <a:srgbClr val="3B52A1"/>
+                      </a:solidFill>
+                      <a:prstDash val="solid"/>
+                      <a:round/>
+                      <a:headEnd type="none" w="med" len="med"/>
+                      <a:tailEnd type="none" w="med" len="med"/>
+                    </a:lnT>
+                    <a:lnB w="4762" cap="flat" cmpd="sng" algn="ctr">
+                      <a:solidFill>
+                        <a:srgbClr val="3B52A1"/>
+                      </a:solidFill>
+                      <a:prstDash val="solid"/>
+                      <a:round/>
+                      <a:headEnd type="none" w="med" len="med"/>
+                      <a:tailEnd type="none" w="med" len="med"/>
+                    </a:lnB>
+                    <a:solidFill>
+                      <a:srgbClr val="FFFFFF"/>
+                    </a:solidFill>
+                  </a:tcPr>
+                </a:tc>
+                <a:tc>
+                  <a:txBody>
+                    <a:bodyPr/>
                     <a:lstStyle/>
                     <a:p>
                       <a:pPr algn="ctr">
@@ -5899,49 +6265,49 @@
                       <a:r>
                         <a:rPr lang="en-US" sz="1003">
                           <a:solidFill>
-                            <a:srgbClr val="2C2C2E"/>
+                            <a:srgbClr val="4A4A4A"/>
                           </a:solidFill>
-                          <a:latin typeface="Arimo"/>
-                          <a:ea typeface="Arimo"/>
-                          <a:cs typeface="Arimo"/>
-                          <a:sym typeface="Arimo"/>
+                          <a:latin typeface="Avenir"/>
+                          <a:ea typeface="Avenir"/>
+                          <a:cs typeface="Avenir"/>
+                          <a:sym typeface="Avenir"/>
                         </a:rPr>
-                        <a:t>{{PROJRENT}}</a:t>
+                        <a:t>{{GROSSPOTRENT}}</a:t>
                       </a:r>
                       <a:endParaRPr lang="en-US" sz="1100"/>
                     </a:p>
                   </a:txBody>
-                  <a:tcPr marL="91440" marR="91440" marT="91440" marB="91440" anchor="ctr">
-                    <a:lnL cmpd="sng" algn="ctr" cap="flat" w="4762">
-                      <a:solidFill>
-                        <a:srgbClr val="000000"/>
+                  <a:tcPr marT="91440" marB="91440" anchor="ctr">
+                    <a:lnL w="4762" cap="flat" cmpd="sng" algn="ctr">
+                      <a:solidFill>
+                        <a:srgbClr val="3B52A1"/>
                       </a:solidFill>
                       <a:prstDash val="solid"/>
                       <a:round/>
                       <a:headEnd type="none" w="med" len="med"/>
                       <a:tailEnd type="none" w="med" len="med"/>
                     </a:lnL>
-                    <a:lnR cmpd="sng" algn="ctr" cap="flat" w="4762">
-                      <a:solidFill>
-                        <a:srgbClr val="000000"/>
+                    <a:lnR w="4762" cap="flat" cmpd="sng" algn="ctr">
+                      <a:solidFill>
+                        <a:srgbClr val="3B52A1"/>
                       </a:solidFill>
                       <a:prstDash val="solid"/>
                       <a:round/>
                       <a:headEnd type="none" w="med" len="med"/>
                       <a:tailEnd type="none" w="med" len="med"/>
                     </a:lnR>
-                    <a:lnT cmpd="sng" algn="ctr" cap="flat" w="4762">
-                      <a:solidFill>
-                        <a:srgbClr val="000000"/>
+                    <a:lnT w="4762" cap="flat" cmpd="sng" algn="ctr">
+                      <a:solidFill>
+                        <a:srgbClr val="3B52A1"/>
                       </a:solidFill>
                       <a:prstDash val="solid"/>
                       <a:round/>
                       <a:headEnd type="none" w="med" len="med"/>
                       <a:tailEnd type="none" w="med" len="med"/>
                     </a:lnT>
-                    <a:lnB cmpd="sng" algn="ctr" cap="flat" w="4762">
-                      <a:solidFill>
-                        <a:srgbClr val="000000"/>
+                    <a:lnB w="4762" cap="flat" cmpd="sng" algn="ctr">
+                      <a:solidFill>
+                        <a:srgbClr val="3B52A1"/>
                       </a:solidFill>
                       <a:prstDash val="solid"/>
                       <a:round/>
@@ -5955,7 +6321,7 @@
                 </a:tc>
                 <a:tc>
                   <a:txBody>
-                    <a:bodyPr anchor="t" rtlCol="false"/>
+                    <a:bodyPr/>
                     <a:lstStyle/>
                     <a:p>
                       <a:pPr algn="ctr">
@@ -5967,49 +6333,49 @@
                       <a:r>
                         <a:rPr lang="en-US" sz="1103">
                           <a:solidFill>
-                            <a:srgbClr val="2C2C2E"/>
+                            <a:srgbClr val="4A4A4A"/>
                           </a:solidFill>
-                          <a:latin typeface="Arimo"/>
-                          <a:ea typeface="Arimo"/>
-                          <a:cs typeface="Arimo"/>
-                          <a:sym typeface="Arimo"/>
+                          <a:latin typeface="Avenir"/>
+                          <a:ea typeface="Avenir"/>
+                          <a:cs typeface="Avenir"/>
+                          <a:sym typeface="Avenir"/>
                         </a:rPr>
-                        <a:t>{{PROJRENTPERSF}}</a:t>
+                        <a:t>{{GPRPERSF}}</a:t>
                       </a:r>
                       <a:endParaRPr lang="en-US" sz="1100"/>
                     </a:p>
                   </a:txBody>
-                  <a:tcPr marL="91440" marR="91440" marT="91440" marB="91440" anchor="ctr">
-                    <a:lnL cmpd="sng" algn="ctr" cap="flat" w="4762">
-                      <a:solidFill>
-                        <a:srgbClr val="000000"/>
+                  <a:tcPr marT="91440" marB="91440" anchor="ctr">
+                    <a:lnL w="4762" cap="flat" cmpd="sng" algn="ctr">
+                      <a:solidFill>
+                        <a:srgbClr val="3B52A1"/>
                       </a:solidFill>
                       <a:prstDash val="solid"/>
                       <a:round/>
                       <a:headEnd type="none" w="med" len="med"/>
                       <a:tailEnd type="none" w="med" len="med"/>
                     </a:lnL>
-                    <a:lnR cmpd="sng" algn="ctr" cap="flat" w="4762">
-                      <a:solidFill>
-                        <a:srgbClr val="000000"/>
+                    <a:lnR w="4762" cap="flat" cmpd="sng" algn="ctr">
+                      <a:solidFill>
+                        <a:srgbClr val="3B52A1"/>
                       </a:solidFill>
                       <a:prstDash val="solid"/>
                       <a:round/>
                       <a:headEnd type="none" w="med" len="med"/>
                       <a:tailEnd type="none" w="med" len="med"/>
                     </a:lnR>
-                    <a:lnT cmpd="sng" algn="ctr" cap="flat" w="4762">
-                      <a:solidFill>
-                        <a:srgbClr val="000000"/>
+                    <a:lnT w="4762" cap="flat" cmpd="sng" algn="ctr">
+                      <a:solidFill>
+                        <a:srgbClr val="3B52A1"/>
                       </a:solidFill>
                       <a:prstDash val="solid"/>
                       <a:round/>
                       <a:headEnd type="none" w="med" len="med"/>
                       <a:tailEnd type="none" w="med" len="med"/>
                     </a:lnT>
-                    <a:lnB cmpd="sng" algn="ctr" cap="flat" w="4762">
-                      <a:solidFill>
-                        <a:srgbClr val="000000"/>
+                    <a:lnB w="4762" cap="flat" cmpd="sng" algn="ctr">
+                      <a:solidFill>
+                        <a:srgbClr val="3B52A1"/>
                       </a:solidFill>
                       <a:prstDash val="solid"/>
                       <a:round/>
@@ -6023,7 +6389,7 @@
                 </a:tc>
                 <a:tc>
                   <a:txBody>
-                    <a:bodyPr anchor="t" rtlCol="false"/>
+                    <a:bodyPr/>
                     <a:lstStyle/>
                     <a:p>
                       <a:pPr algn="ctr">
@@ -6035,49 +6401,49 @@
                       <a:r>
                         <a:rPr lang="en-US" sz="1103">
                           <a:solidFill>
-                            <a:srgbClr val="2C2C2E"/>
+                            <a:srgbClr val="4A4A4A"/>
                           </a:solidFill>
-                          <a:latin typeface="Arimo"/>
-                          <a:ea typeface="Arimo"/>
-                          <a:cs typeface="Arimo"/>
-                          <a:sym typeface="Arimo"/>
+                          <a:latin typeface="Avenir"/>
+                          <a:ea typeface="Avenir"/>
+                          <a:cs typeface="Avenir"/>
+                          <a:sym typeface="Avenir"/>
                         </a:rPr>
-                        <a:t>{{PROJRENTMOMPCT}}</a:t>
+                        <a:t>{{GPRMOMPCT}}</a:t>
                       </a:r>
                       <a:endParaRPr lang="en-US" sz="1100"/>
                     </a:p>
                   </a:txBody>
-                  <a:tcPr marL="91440" marR="91440" marT="91440" marB="91440" anchor="ctr">
-                    <a:lnL cmpd="sng" algn="ctr" cap="flat" w="4762">
-                      <a:solidFill>
-                        <a:srgbClr val="000000"/>
+                  <a:tcPr marT="91440" marB="91440" anchor="ctr">
+                    <a:lnL w="4762" cap="flat" cmpd="sng" algn="ctr">
+                      <a:solidFill>
+                        <a:srgbClr val="3B52A1"/>
                       </a:solidFill>
                       <a:prstDash val="solid"/>
                       <a:round/>
                       <a:headEnd type="none" w="med" len="med"/>
                       <a:tailEnd type="none" w="med" len="med"/>
                     </a:lnL>
-                    <a:lnR cmpd="sng" algn="ctr" cap="flat" w="4762">
-                      <a:solidFill>
-                        <a:srgbClr val="000000"/>
+                    <a:lnR w="4762" cap="flat" cmpd="sng" algn="ctr">
+                      <a:solidFill>
+                        <a:srgbClr val="3B52A1"/>
                       </a:solidFill>
                       <a:prstDash val="solid"/>
                       <a:round/>
                       <a:headEnd type="none" w="med" len="med"/>
                       <a:tailEnd type="none" w="med" len="med"/>
                     </a:lnR>
-                    <a:lnT cmpd="sng" algn="ctr" cap="flat" w="4762">
-                      <a:solidFill>
-                        <a:srgbClr val="000000"/>
+                    <a:lnT w="4762" cap="flat" cmpd="sng" algn="ctr">
+                      <a:solidFill>
+                        <a:srgbClr val="3B52A1"/>
                       </a:solidFill>
                       <a:prstDash val="solid"/>
                       <a:round/>
                       <a:headEnd type="none" w="med" len="med"/>
                       <a:tailEnd type="none" w="med" len="med"/>
                     </a:lnT>
-                    <a:lnB cmpd="sng" algn="ctr" cap="flat" w="4762">
-                      <a:solidFill>
-                        <a:srgbClr val="000000"/>
+                    <a:lnB w="4762" cap="flat" cmpd="sng" algn="ctr">
+                      <a:solidFill>
+                        <a:srgbClr val="3B52A1"/>
                       </a:solidFill>
                       <a:prstDash val="solid"/>
                       <a:round/>
@@ -6091,75 +6457,7 @@
                 </a:tc>
                 <a:tc>
                   <a:txBody>
-                    <a:bodyPr anchor="t" rtlCol="false"/>
-                    <a:lstStyle/>
-                    <a:p>
-                      <a:pPr algn="ctr">
-                        <a:lnSpc>
-                          <a:spcPts val="1204"/>
-                        </a:lnSpc>
-                        <a:defRPr/>
-                      </a:pPr>
-                      <a:r>
-                        <a:rPr lang="en-US" sz="1003">
-                          <a:solidFill>
-                            <a:srgbClr val="2C2C2E"/>
-                          </a:solidFill>
-                          <a:latin typeface="Arimo"/>
-                          <a:ea typeface="Arimo"/>
-                          <a:cs typeface="Arimo"/>
-                          <a:sym typeface="Arimo"/>
-                        </a:rPr>
-                        <a:t>{{GROSSPOTRENT}}</a:t>
-                      </a:r>
-                      <a:endParaRPr lang="en-US" sz="1100"/>
-                    </a:p>
-                  </a:txBody>
-                  <a:tcPr marL="91440" marR="91440" marT="91440" marB="91440" anchor="ctr">
-                    <a:lnL cmpd="sng" algn="ctr" cap="flat" w="4762">
-                      <a:solidFill>
-                        <a:srgbClr val="000000"/>
-                      </a:solidFill>
-                      <a:prstDash val="solid"/>
-                      <a:round/>
-                      <a:headEnd type="none" w="med" len="med"/>
-                      <a:tailEnd type="none" w="med" len="med"/>
-                    </a:lnL>
-                    <a:lnR cmpd="sng" algn="ctr" cap="flat" w="4762">
-                      <a:solidFill>
-                        <a:srgbClr val="000000"/>
-                      </a:solidFill>
-                      <a:prstDash val="solid"/>
-                      <a:round/>
-                      <a:headEnd type="none" w="med" len="med"/>
-                      <a:tailEnd type="none" w="med" len="med"/>
-                    </a:lnR>
-                    <a:lnT cmpd="sng" algn="ctr" cap="flat" w="4762">
-                      <a:solidFill>
-                        <a:srgbClr val="000000"/>
-                      </a:solidFill>
-                      <a:prstDash val="solid"/>
-                      <a:round/>
-                      <a:headEnd type="none" w="med" len="med"/>
-                      <a:tailEnd type="none" w="med" len="med"/>
-                    </a:lnT>
-                    <a:lnB cmpd="sng" algn="ctr" cap="flat" w="4762">
-                      <a:solidFill>
-                        <a:srgbClr val="000000"/>
-                      </a:solidFill>
-                      <a:prstDash val="solid"/>
-                      <a:round/>
-                      <a:headEnd type="none" w="med" len="med"/>
-                      <a:tailEnd type="none" w="med" len="med"/>
-                    </a:lnB>
-                    <a:solidFill>
-                      <a:srgbClr val="FFFFFF"/>
-                    </a:solidFill>
-                  </a:tcPr>
-                </a:tc>
-                <a:tc>
-                  <a:txBody>
-                    <a:bodyPr anchor="t" rtlCol="false"/>
+                    <a:bodyPr/>
                     <a:lstStyle/>
                     <a:p>
                       <a:pPr algn="ctr">
@@ -6169,51 +6467,51 @@
                         <a:defRPr/>
                       </a:pPr>
                       <a:r>
-                        <a:rPr lang="en-US" sz="1103">
+                        <a:rPr lang="en-US" sz="1103" dirty="0">
                           <a:solidFill>
-                            <a:srgbClr val="2C2C2E"/>
+                            <a:srgbClr val="4A4A4A"/>
                           </a:solidFill>
-                          <a:latin typeface="Arimo"/>
-                          <a:ea typeface="Arimo"/>
-                          <a:cs typeface="Arimo"/>
-                          <a:sym typeface="Arimo"/>
+                          <a:latin typeface="Avenir"/>
+                          <a:ea typeface="Avenir"/>
+                          <a:cs typeface="Avenir"/>
+                          <a:sym typeface="Avenir"/>
                         </a:rPr>
-                        <a:t>{{GPRPERSF}}</a:t>
+                        <a:t>{{ECONOCCPCT}}</a:t>
                       </a:r>
-                      <a:endParaRPr lang="en-US" sz="1100"/>
+                      <a:endParaRPr lang="en-US" sz="1100" dirty="0"/>
                     </a:p>
                   </a:txBody>
-                  <a:tcPr marL="91440" marR="91440" marT="91440" marB="91440" anchor="ctr">
-                    <a:lnL cmpd="sng" algn="ctr" cap="flat" w="4762">
-                      <a:solidFill>
-                        <a:srgbClr val="000000"/>
+                  <a:tcPr marT="91440" marB="91440" anchor="ctr">
+                    <a:lnL w="4762" cap="flat" cmpd="sng" algn="ctr">
+                      <a:solidFill>
+                        <a:srgbClr val="3B52A1"/>
                       </a:solidFill>
                       <a:prstDash val="solid"/>
                       <a:round/>
                       <a:headEnd type="none" w="med" len="med"/>
                       <a:tailEnd type="none" w="med" len="med"/>
                     </a:lnL>
-                    <a:lnR cmpd="sng" algn="ctr" cap="flat" w="4762">
-                      <a:solidFill>
-                        <a:srgbClr val="000000"/>
+                    <a:lnR w="4762" cap="flat" cmpd="sng" algn="ctr">
+                      <a:solidFill>
+                        <a:srgbClr val="3B52A1"/>
                       </a:solidFill>
                       <a:prstDash val="solid"/>
                       <a:round/>
                       <a:headEnd type="none" w="med" len="med"/>
                       <a:tailEnd type="none" w="med" len="med"/>
                     </a:lnR>
-                    <a:lnT cmpd="sng" algn="ctr" cap="flat" w="4762">
-                      <a:solidFill>
-                        <a:srgbClr val="000000"/>
+                    <a:lnT w="4762" cap="flat" cmpd="sng" algn="ctr">
+                      <a:solidFill>
+                        <a:srgbClr val="3B52A1"/>
                       </a:solidFill>
                       <a:prstDash val="solid"/>
                       <a:round/>
                       <a:headEnd type="none" w="med" len="med"/>
                       <a:tailEnd type="none" w="med" len="med"/>
                     </a:lnT>
-                    <a:lnB cmpd="sng" algn="ctr" cap="flat" w="4762">
-                      <a:solidFill>
-                        <a:srgbClr val="000000"/>
+                    <a:lnB w="4762" cap="flat" cmpd="sng" algn="ctr">
+                      <a:solidFill>
+                        <a:srgbClr val="3B52A1"/>
                       </a:solidFill>
                       <a:prstDash val="solid"/>
                       <a:round/>
@@ -6225,142 +6523,11 @@
                     </a:solidFill>
                   </a:tcPr>
                 </a:tc>
-                <a:tc>
-                  <a:txBody>
-                    <a:bodyPr anchor="t" rtlCol="false"/>
-                    <a:lstStyle/>
-                    <a:p>
-                      <a:pPr algn="ctr">
-                        <a:lnSpc>
-                          <a:spcPts val="1324"/>
-                        </a:lnSpc>
-                        <a:defRPr/>
-                      </a:pPr>
-                      <a:r>
-                        <a:rPr lang="en-US" sz="1103">
-                          <a:solidFill>
-                            <a:srgbClr val="2C2C2E"/>
-                          </a:solidFill>
-                          <a:latin typeface="Arimo"/>
-                          <a:ea typeface="Arimo"/>
-                          <a:cs typeface="Arimo"/>
-                          <a:sym typeface="Arimo"/>
-                        </a:rPr>
-                        <a:t>{{GPRMOMPCT}}</a:t>
-                      </a:r>
-                      <a:endParaRPr lang="en-US" sz="1100"/>
-                    </a:p>
-                  </a:txBody>
-                  <a:tcPr marL="91440" marR="91440" marT="91440" marB="91440" anchor="ctr">
-                    <a:lnL cmpd="sng" algn="ctr" cap="flat" w="4762">
-                      <a:solidFill>
-                        <a:srgbClr val="000000"/>
-                      </a:solidFill>
-                      <a:prstDash val="solid"/>
-                      <a:round/>
-                      <a:headEnd type="none" w="med" len="med"/>
-                      <a:tailEnd type="none" w="med" len="med"/>
-                    </a:lnL>
-                    <a:lnR cmpd="sng" algn="ctr" cap="flat" w="4762">
-                      <a:solidFill>
-                        <a:srgbClr val="000000"/>
-                      </a:solidFill>
-                      <a:prstDash val="solid"/>
-                      <a:round/>
-                      <a:headEnd type="none" w="med" len="med"/>
-                      <a:tailEnd type="none" w="med" len="med"/>
-                    </a:lnR>
-                    <a:lnT cmpd="sng" algn="ctr" cap="flat" w="4762">
-                      <a:solidFill>
-                        <a:srgbClr val="000000"/>
-                      </a:solidFill>
-                      <a:prstDash val="solid"/>
-                      <a:round/>
-                      <a:headEnd type="none" w="med" len="med"/>
-                      <a:tailEnd type="none" w="med" len="med"/>
-                    </a:lnT>
-                    <a:lnB cmpd="sng" algn="ctr" cap="flat" w="4762">
-                      <a:solidFill>
-                        <a:srgbClr val="000000"/>
-                      </a:solidFill>
-                      <a:prstDash val="solid"/>
-                      <a:round/>
-                      <a:headEnd type="none" w="med" len="med"/>
-                      <a:tailEnd type="none" w="med" len="med"/>
-                    </a:lnB>
-                    <a:solidFill>
-                      <a:srgbClr val="FFFFFF"/>
-                    </a:solidFill>
-                  </a:tcPr>
-                </a:tc>
-                <a:tc>
-                  <a:txBody>
-                    <a:bodyPr anchor="t" rtlCol="false"/>
-                    <a:lstStyle/>
-                    <a:p>
-                      <a:pPr algn="ctr">
-                        <a:lnSpc>
-                          <a:spcPts val="1324"/>
-                        </a:lnSpc>
-                        <a:defRPr/>
-                      </a:pPr>
-                      <a:r>
-                        <a:rPr lang="en-US" sz="1103">
-                          <a:solidFill>
-                            <a:srgbClr val="2C2C2E"/>
-                          </a:solidFill>
-                          <a:latin typeface="Arimo"/>
-                          <a:ea typeface="Arimo"/>
-                          <a:cs typeface="Arimo"/>
-                          <a:sym typeface="Arimo"/>
-                        </a:rPr>
-                        <a:t>{{ECONOCCPCT}}</a:t>
-                      </a:r>
-                      <a:endParaRPr lang="en-US" sz="1100"/>
-                    </a:p>
-                  </a:txBody>
-                  <a:tcPr marL="91440" marR="91440" marT="91440" marB="91440" anchor="ctr">
-                    <a:lnL cmpd="sng" algn="ctr" cap="flat" w="4762">
-                      <a:solidFill>
-                        <a:srgbClr val="000000"/>
-                      </a:solidFill>
-                      <a:prstDash val="solid"/>
-                      <a:round/>
-                      <a:headEnd type="none" w="med" len="med"/>
-                      <a:tailEnd type="none" w="med" len="med"/>
-                    </a:lnL>
-                    <a:lnR cmpd="sng" algn="ctr" cap="flat" w="4762">
-                      <a:solidFill>
-                        <a:srgbClr val="000000"/>
-                      </a:solidFill>
-                      <a:prstDash val="solid"/>
-                      <a:round/>
-                      <a:headEnd type="none" w="med" len="med"/>
-                      <a:tailEnd type="none" w="med" len="med"/>
-                    </a:lnR>
-                    <a:lnT cmpd="sng" algn="ctr" cap="flat" w="4762">
-                      <a:solidFill>
-                        <a:srgbClr val="000000"/>
-                      </a:solidFill>
-                      <a:prstDash val="solid"/>
-                      <a:round/>
-                      <a:headEnd type="none" w="med" len="med"/>
-                      <a:tailEnd type="none" w="med" len="med"/>
-                    </a:lnT>
-                    <a:lnB cmpd="sng" algn="ctr" cap="flat" w="4762">
-                      <a:solidFill>
-                        <a:srgbClr val="000000"/>
-                      </a:solidFill>
-                      <a:prstDash val="solid"/>
-                      <a:round/>
-                      <a:headEnd type="none" w="med" len="med"/>
-                      <a:tailEnd type="none" w="med" len="med"/>
-                    </a:lnB>
-                    <a:solidFill>
-                      <a:srgbClr val="FFFFFF"/>
-                    </a:solidFill>
-                  </a:tcPr>
-                </a:tc>
+                <a:extLst>
+                  <a:ext uri="{0D108BD9-81ED-4DB2-BD59-A6C34878D82A}">
+                    <a16:rowId xmlns:a16="http://schemas.microsoft.com/office/drawing/2014/main" val="10001"/>
+                  </a:ext>
+                </a:extLst>
               </a:tr>
             </a:tbl>
           </a:graphicData>
@@ -6368,21 +6535,21 @@
       </p:graphicFrame>
       <p:sp>
         <p:nvSpPr>
-          <p:cNvPr name="TextBox 11" id="11"/>
-          <p:cNvSpPr txBox="true"/>
+          <p:cNvPr id="11" name="TextBox 11"/>
+          <p:cNvSpPr txBox="1"/>
           <p:nvPr/>
         </p:nvSpPr>
         <p:spPr>
-          <a:xfrm rot="0">
-            <a:off x="1834478" y="531234"/>
-            <a:ext cx="5275580" cy="409521"/>
+          <a:xfrm>
+            <a:off x="1834478" y="512184"/>
+            <a:ext cx="5275580" cy="428625"/>
           </a:xfrm>
           <a:prstGeom prst="rect">
             <a:avLst/>
           </a:prstGeom>
         </p:spPr>
         <p:txBody>
-          <a:bodyPr anchor="t" rtlCol="false" tIns="0" lIns="0" bIns="0" rIns="0">
+          <a:bodyPr lIns="0" tIns="0" rIns="0" bIns="0" rtlCol="0" anchor="t">
             <a:spAutoFit/>
           </a:bodyPr>
           <a:lstStyle/>
@@ -6393,14 +6560,14 @@
               </a:lnSpc>
             </a:pPr>
             <a:r>
-              <a:rPr lang="en-US" sz="1605" b="true">
+              <a:rPr lang="en-US" sz="1605" b="1">
                 <a:solidFill>
-                  <a:srgbClr val="2C2C2E"/>
+                  <a:srgbClr val="4A4A4A"/>
                 </a:solidFill>
-                <a:latin typeface="Arimo Bold"/>
-                <a:ea typeface="Arimo Bold"/>
-                <a:cs typeface="Arimo Bold"/>
-                <a:sym typeface="Arimo Bold"/>
+                <a:latin typeface="Avenir Bold"/>
+                <a:ea typeface="Avenir Bold"/>
+                <a:cs typeface="Avenir Bold"/>
+                <a:sym typeface="Avenir Bold"/>
               </a:rPr>
               <a:t>Daily Flash Report</a:t>
             </a:r>
@@ -6414,12 +6581,12 @@
             <a:r>
               <a:rPr lang="en-US" sz="1003">
                 <a:solidFill>
-                  <a:srgbClr val="8E8E93"/>
+                  <a:srgbClr val="2D2D2D"/>
                 </a:solidFill>
-                <a:latin typeface="Arimo"/>
-                <a:ea typeface="Arimo"/>
-                <a:cs typeface="Arimo"/>
-                <a:sym typeface="Arimo"/>
+                <a:latin typeface="Avenir"/>
+                <a:ea typeface="Avenir"/>
+                <a:cs typeface="Avenir"/>
+                <a:sym typeface="Avenir"/>
               </a:rPr>
               <a:t>{{FACILITYSHORTNAME}}  ·  As of {{ASOFDATE}}</a:t>
             </a:r>
@@ -6428,12 +6595,12 @@
       </p:sp>
       <p:sp>
         <p:nvSpPr>
-          <p:cNvPr name="Freeform 12" id="12"/>
+          <p:cNvPr id="12" name="Freeform 12"/>
           <p:cNvSpPr/>
           <p:nvPr/>
         </p:nvSpPr>
         <p:spPr>
-          <a:xfrm flipH="false" flipV="false" rot="0">
+          <a:xfrm>
             <a:off x="596302" y="160084"/>
             <a:ext cx="2168529" cy="780670"/>
           </a:xfrm>
@@ -6442,9 +6609,9 @@
             <a:gdLst/>
             <a:ahLst/>
             <a:cxnLst/>
-            <a:rect r="r" b="b" t="t" l="l"/>
+            <a:rect l="l" t="t" r="r" b="b"/>
             <a:pathLst>
-              <a:path h="780670" w="2168529">
+              <a:path w="2168529" h="780670">
                 <a:moveTo>
                   <a:pt x="0" y="0"/>
                 </a:moveTo>
@@ -6467,19 +6634,26 @@
           <a:blipFill>
             <a:blip r:embed="rId2"/>
             <a:stretch>
-              <a:fillRect l="0" t="0" r="0" b="0"/>
+              <a:fillRect/>
             </a:stretch>
           </a:blipFill>
         </p:spPr>
+        <p:txBody>
+          <a:bodyPr/>
+          <a:lstStyle/>
+          <a:p>
+            <a:endParaRPr lang="en-US"/>
+          </a:p>
+        </p:txBody>
       </p:sp>
       <p:sp>
         <p:nvSpPr>
-          <p:cNvPr name="Freeform 13" id="13"/>
+          <p:cNvPr id="13" name="Freeform 13"/>
           <p:cNvSpPr/>
           <p:nvPr/>
         </p:nvSpPr>
         <p:spPr>
-          <a:xfrm flipH="false" flipV="false" rot="0">
+          <a:xfrm>
             <a:off x="596302" y="1722752"/>
             <a:ext cx="6609973" cy="1782411"/>
           </a:xfrm>
@@ -6488,9 +6662,9 @@
             <a:gdLst/>
             <a:ahLst/>
             <a:cxnLst/>
-            <a:rect r="r" b="b" t="t" l="l"/>
+            <a:rect l="l" t="t" r="r" b="b"/>
             <a:pathLst>
-              <a:path h="1782411" w="6609973">
+              <a:path w="6609973" h="1782411">
                 <a:moveTo>
                   <a:pt x="0" y="0"/>
                 </a:moveTo>
@@ -6517,26 +6691,33 @@
             </a:stretch>
           </a:blipFill>
         </p:spPr>
+        <p:txBody>
+          <a:bodyPr/>
+          <a:lstStyle/>
+          <a:p>
+            <a:endParaRPr lang="en-US"/>
+          </a:p>
+        </p:txBody>
       </p:sp>
       <p:sp>
         <p:nvSpPr>
-          <p:cNvPr name="Freeform 14" id="14"/>
+          <p:cNvPr id="14" name="Freeform 14"/>
           <p:cNvSpPr/>
           <p:nvPr/>
         </p:nvSpPr>
         <p:spPr>
-          <a:xfrm flipH="false" flipV="false" rot="0">
-            <a:off x="596302" y="5958572"/>
-            <a:ext cx="3229035" cy="2229669"/>
+          <a:xfrm>
+            <a:off x="596302" y="6196038"/>
+            <a:ext cx="3229035" cy="2058878"/>
           </a:xfrm>
           <a:custGeom>
             <a:avLst/>
             <a:gdLst/>
             <a:ahLst/>
             <a:cxnLst/>
-            <a:rect r="r" b="b" t="t" l="l"/>
+            <a:rect l="l" t="t" r="r" b="b"/>
             <a:pathLst>
-              <a:path h="2229669" w="3229035">
+              <a:path w="3229035" h="2058878">
                 <a:moveTo>
                   <a:pt x="0" y="0"/>
                 </a:moveTo>
@@ -6544,10 +6725,10 @@
                   <a:pt x="3229036" y="0"/>
                 </a:lnTo>
                 <a:lnTo>
-                  <a:pt x="3229036" y="2229670"/>
+                  <a:pt x="3229036" y="2058879"/>
                 </a:lnTo>
                 <a:lnTo>
-                  <a:pt x="0" y="2229670"/>
+                  <a:pt x="0" y="2058879"/>
                 </a:lnTo>
                 <a:lnTo>
                   <a:pt x="0" y="0"/>
@@ -6559,30 +6740,37 @@
           <a:blipFill>
             <a:blip r:embed="rId4"/>
             <a:stretch>
-              <a:fillRect l="0" t="0" r="-3575" b="0"/>
+              <a:fillRect l="-2349" t="-13384" r="-6093"/>
             </a:stretch>
           </a:blipFill>
         </p:spPr>
+        <p:txBody>
+          <a:bodyPr/>
+          <a:lstStyle/>
+          <a:p>
+            <a:endParaRPr lang="en-US"/>
+          </a:p>
+        </p:txBody>
       </p:sp>
       <p:sp>
         <p:nvSpPr>
-          <p:cNvPr name="Freeform 15" id="15"/>
+          <p:cNvPr id="15" name="Freeform 15"/>
           <p:cNvSpPr/>
           <p:nvPr/>
         </p:nvSpPr>
         <p:spPr>
-          <a:xfrm flipH="false" flipV="false" rot="0">
-            <a:off x="3957214" y="5958572"/>
-            <a:ext cx="3229035" cy="2229669"/>
+          <a:xfrm>
+            <a:off x="3957214" y="6196038"/>
+            <a:ext cx="3229035" cy="2058878"/>
           </a:xfrm>
           <a:custGeom>
             <a:avLst/>
             <a:gdLst/>
             <a:ahLst/>
             <a:cxnLst/>
-            <a:rect r="r" b="b" t="t" l="l"/>
+            <a:rect l="l" t="t" r="r" b="b"/>
             <a:pathLst>
-              <a:path h="2229669" w="3229035">
+              <a:path w="3229035" h="2058878">
                 <a:moveTo>
                   <a:pt x="0" y="0"/>
                 </a:moveTo>
@@ -6590,10 +6778,10 @@
                   <a:pt x="3229035" y="0"/>
                 </a:lnTo>
                 <a:lnTo>
-                  <a:pt x="3229035" y="2229670"/>
+                  <a:pt x="3229035" y="2058879"/>
                 </a:lnTo>
                 <a:lnTo>
-                  <a:pt x="0" y="2229670"/>
+                  <a:pt x="0" y="2058879"/>
                 </a:lnTo>
                 <a:lnTo>
                   <a:pt x="0" y="0"/>
@@ -6605,28 +6793,35 @@
           <a:blipFill>
             <a:blip r:embed="rId5"/>
             <a:stretch>
-              <a:fillRect l="-1793" t="0" r="-1793" b="0"/>
+              <a:fillRect l="-4227" t="-13384" r="-4227"/>
             </a:stretch>
           </a:blipFill>
         </p:spPr>
+        <p:txBody>
+          <a:bodyPr/>
+          <a:lstStyle/>
+          <a:p>
+            <a:endParaRPr lang="en-US"/>
+          </a:p>
+        </p:txBody>
       </p:sp>
       <p:sp>
         <p:nvSpPr>
-          <p:cNvPr name="TextBox 16" id="16"/>
-          <p:cNvSpPr txBox="true"/>
+          <p:cNvPr id="16" name="TextBox 16"/>
+          <p:cNvSpPr txBox="1"/>
           <p:nvPr/>
         </p:nvSpPr>
         <p:spPr>
-          <a:xfrm rot="0">
-            <a:off x="108000" y="9826548"/>
-            <a:ext cx="6422315" cy="123852"/>
+          <a:xfrm>
+            <a:off x="108000" y="9817023"/>
+            <a:ext cx="6422315" cy="133350"/>
           </a:xfrm>
           <a:prstGeom prst="rect">
             <a:avLst/>
           </a:prstGeom>
         </p:spPr>
         <p:txBody>
-          <a:bodyPr anchor="t" rtlCol="false" tIns="0" lIns="0" bIns="0" rIns="0">
+          <a:bodyPr lIns="0" tIns="0" rIns="0" bIns="0" rtlCol="0" anchor="t">
             <a:spAutoFit/>
           </a:bodyPr>
           <a:lstStyle/>
@@ -6639,26 +6834,96 @@
             <a:r>
               <a:rPr lang="en-US" sz="802">
                 <a:solidFill>
-                  <a:srgbClr val="8E8E93"/>
+                  <a:srgbClr val="2D2D2D"/>
                 </a:solidFill>
-                <a:latin typeface="Arimo"/>
-                <a:ea typeface="Arimo"/>
-                <a:cs typeface="Arimo"/>
-                <a:sym typeface="Arimo"/>
+                <a:latin typeface="Avenir"/>
+                <a:ea typeface="Avenir"/>
+                <a:cs typeface="Avenir"/>
+                <a:sym typeface="Avenir"/>
               </a:rPr>
-              <a:t>STORE Managed since</a:t>
+              <a:t>STORE Managed since {{FACILITYOPENDATE}}</a:t>
             </a:r>
+          </a:p>
+        </p:txBody>
+      </p:sp>
+      <p:sp>
+        <p:nvSpPr>
+          <p:cNvPr id="17" name="TextBox 17"/>
+          <p:cNvSpPr txBox="1"/>
+          <p:nvPr/>
+        </p:nvSpPr>
+        <p:spPr>
+          <a:xfrm>
+            <a:off x="1974754" y="5983083"/>
+            <a:ext cx="472132" cy="133377"/>
+          </a:xfrm>
+          <a:prstGeom prst="rect">
+            <a:avLst/>
+          </a:prstGeom>
+        </p:spPr>
+        <p:txBody>
+          <a:bodyPr lIns="0" tIns="0" rIns="0" bIns="0" rtlCol="0" anchor="t">
+            <a:spAutoFit/>
+          </a:bodyPr>
+          <a:lstStyle/>
+          <a:p>
+            <a:pPr algn="l">
+              <a:lnSpc>
+                <a:spcPts val="963"/>
+              </a:lnSpc>
+            </a:pPr>
             <a:r>
               <a:rPr lang="en-US" sz="802">
                 <a:solidFill>
-                  <a:srgbClr val="8E8E93"/>
+                  <a:srgbClr val="2D2D2D"/>
                 </a:solidFill>
-                <a:latin typeface="Arimo"/>
-                <a:ea typeface="Arimo"/>
-                <a:cs typeface="Arimo"/>
-                <a:sym typeface="Arimo"/>
+                <a:latin typeface="Avenir"/>
+                <a:ea typeface="Avenir"/>
+                <a:cs typeface="Avenir"/>
+                <a:sym typeface="Avenir"/>
               </a:rPr>
-              <a:t> {{FACILITYOPENDATE}}</a:t>
+              <a:t>AR Aging</a:t>
+            </a:r>
+          </a:p>
+        </p:txBody>
+      </p:sp>
+      <p:sp>
+        <p:nvSpPr>
+          <p:cNvPr id="18" name="TextBox 18"/>
+          <p:cNvSpPr txBox="1"/>
+          <p:nvPr/>
+        </p:nvSpPr>
+        <p:spPr>
+          <a:xfrm>
+            <a:off x="5315253" y="5983083"/>
+            <a:ext cx="512957" cy="133377"/>
+          </a:xfrm>
+          <a:prstGeom prst="rect">
+            <a:avLst/>
+          </a:prstGeom>
+        </p:spPr>
+        <p:txBody>
+          <a:bodyPr lIns="0" tIns="0" rIns="0" bIns="0" rtlCol="0" anchor="t">
+            <a:spAutoFit/>
+          </a:bodyPr>
+          <a:lstStyle/>
+          <a:p>
+            <a:pPr algn="l">
+              <a:lnSpc>
+                <a:spcPts val="963"/>
+              </a:lnSpc>
+            </a:pPr>
+            <a:r>
+              <a:rPr lang="en-US" sz="802">
+                <a:solidFill>
+                  <a:srgbClr val="2D2D2D"/>
+                </a:solidFill>
+                <a:latin typeface="Avenir"/>
+                <a:ea typeface="Avenir"/>
+                <a:cs typeface="Avenir"/>
+                <a:sym typeface="Avenir"/>
+              </a:rPr>
+              <a:t>Occupancy</a:t>
             </a:r>
           </a:p>
         </p:txBody>

--- a/storeinsight/public/FLASHTEMPLATE.pptx
+++ b/storeinsight/public/FLASHTEMPLATE.pptx
@@ -313,7 +313,7 @@
             <a:fld id="{1D8BD707-D9CF-40AE-B4C6-C98DA3205C09}" type="datetimeFigureOut">
               <a:rPr lang="en-US" smtClean="0"/>
               <a:pPr/>
-              <a:t>11/19/2025</a:t>
+              <a:t>11/20/2025</a:t>
             </a:fld>
             <a:endParaRPr lang="en-US"/>
           </a:p>
@@ -478,7 +478,7 @@
             <a:fld id="{1D8BD707-D9CF-40AE-B4C6-C98DA3205C09}" type="datetimeFigureOut">
               <a:rPr lang="en-US" smtClean="0"/>
               <a:pPr/>
-              <a:t>11/19/2025</a:t>
+              <a:t>11/20/2025</a:t>
             </a:fld>
             <a:endParaRPr lang="en-US"/>
           </a:p>
@@ -653,7 +653,7 @@
             <a:fld id="{1D8BD707-D9CF-40AE-B4C6-C98DA3205C09}" type="datetimeFigureOut">
               <a:rPr lang="en-US" smtClean="0"/>
               <a:pPr/>
-              <a:t>11/19/2025</a:t>
+              <a:t>11/20/2025</a:t>
             </a:fld>
             <a:endParaRPr lang="en-US"/>
           </a:p>
@@ -818,7 +818,7 @@
             <a:fld id="{1D8BD707-D9CF-40AE-B4C6-C98DA3205C09}" type="datetimeFigureOut">
               <a:rPr lang="en-US" smtClean="0"/>
               <a:pPr/>
-              <a:t>11/19/2025</a:t>
+              <a:t>11/20/2025</a:t>
             </a:fld>
             <a:endParaRPr lang="en-US"/>
           </a:p>
@@ -1060,7 +1060,7 @@
             <a:fld id="{1D8BD707-D9CF-40AE-B4C6-C98DA3205C09}" type="datetimeFigureOut">
               <a:rPr lang="en-US" smtClean="0"/>
               <a:pPr/>
-              <a:t>11/19/2025</a:t>
+              <a:t>11/20/2025</a:t>
             </a:fld>
             <a:endParaRPr lang="en-US"/>
           </a:p>
@@ -1342,7 +1342,7 @@
             <a:fld id="{1D8BD707-D9CF-40AE-B4C6-C98DA3205C09}" type="datetimeFigureOut">
               <a:rPr lang="en-US" smtClean="0"/>
               <a:pPr/>
-              <a:t>11/19/2025</a:t>
+              <a:t>11/20/2025</a:t>
             </a:fld>
             <a:endParaRPr lang="en-US"/>
           </a:p>
@@ -1758,7 +1758,7 @@
             <a:fld id="{1D8BD707-D9CF-40AE-B4C6-C98DA3205C09}" type="datetimeFigureOut">
               <a:rPr lang="en-US" smtClean="0"/>
               <a:pPr/>
-              <a:t>11/19/2025</a:t>
+              <a:t>11/20/2025</a:t>
             </a:fld>
             <a:endParaRPr lang="en-US"/>
           </a:p>
@@ -1872,7 +1872,7 @@
             <a:fld id="{1D8BD707-D9CF-40AE-B4C6-C98DA3205C09}" type="datetimeFigureOut">
               <a:rPr lang="en-US" smtClean="0"/>
               <a:pPr/>
-              <a:t>11/19/2025</a:t>
+              <a:t>11/20/2025</a:t>
             </a:fld>
             <a:endParaRPr lang="en-US"/>
           </a:p>
@@ -1964,7 +1964,7 @@
             <a:fld id="{1D8BD707-D9CF-40AE-B4C6-C98DA3205C09}" type="datetimeFigureOut">
               <a:rPr lang="en-US" smtClean="0"/>
               <a:pPr/>
-              <a:t>11/19/2025</a:t>
+              <a:t>11/20/2025</a:t>
             </a:fld>
             <a:endParaRPr lang="en-US"/>
           </a:p>
@@ -2236,7 +2236,7 @@
             <a:fld id="{1D8BD707-D9CF-40AE-B4C6-C98DA3205C09}" type="datetimeFigureOut">
               <a:rPr lang="en-US" smtClean="0"/>
               <a:pPr/>
-              <a:t>11/19/2025</a:t>
+              <a:t>11/20/2025</a:t>
             </a:fld>
             <a:endParaRPr lang="en-US"/>
           </a:p>
@@ -2485,7 +2485,7 @@
             <a:fld id="{1D8BD707-D9CF-40AE-B4C6-C98DA3205C09}" type="datetimeFigureOut">
               <a:rPr lang="en-US" smtClean="0"/>
               <a:pPr/>
-              <a:t>11/19/2025</a:t>
+              <a:t>11/20/2025</a:t>
             </a:fld>
             <a:endParaRPr lang="en-US"/>
           </a:p>
@@ -2693,7 +2693,7 @@
             <a:fld id="{1D8BD707-D9CF-40AE-B4C6-C98DA3205C09}" type="datetimeFigureOut">
               <a:rPr lang="en-US" smtClean="0"/>
               <a:pPr/>
-              <a:t>11/19/2025</a:t>
+              <a:t>11/20/2025</a:t>
             </a:fld>
             <a:endParaRPr lang="en-US"/>
           </a:p>
@@ -5502,7 +5502,13 @@
           <p:cNvGraphicFramePr>
             <a:graphicFrameLocks noGrp="1"/>
           </p:cNvGraphicFramePr>
-          <p:nvPr/>
+          <p:nvPr>
+            <p:extLst>
+              <p:ext uri="{D42A27DB-BD31-4B8C-83A1-F6EECF244321}">
+                <p14:modId xmlns:p14="http://schemas.microsoft.com/office/powerpoint/2010/main" val="1791546576"/>
+              </p:ext>
+            </p:extLst>
+          </p:nvPr>
         </p:nvGraphicFramePr>
         <p:xfrm>
           <a:off x="586151" y="8284048"/>
@@ -5780,7 +5786,7 @@
                         <a:defRPr/>
                       </a:pPr>
                       <a:r>
-                        <a:rPr lang="en-US" sz="902" b="1">
+                        <a:rPr lang="en-US" sz="902" b="1" dirty="0">
                           <a:solidFill>
                             <a:srgbClr val="2D2D2D"/>
                           </a:solidFill>
@@ -5789,9 +5795,9 @@
                           <a:cs typeface="Avenir Bold"/>
                           <a:sym typeface="Avenir Bold"/>
                         </a:rPr>
-                        <a:t>Gross Pot. Rent</a:t>
+                        <a:t>*Gross Pot. Rent</a:t>
                       </a:r>
-                      <a:endParaRPr lang="en-US" sz="1100"/>
+                      <a:endParaRPr lang="en-US" sz="1100" dirty="0"/>
                     </a:p>
                   </a:txBody>
                   <a:tcPr marT="91440" marB="91440" anchor="ctr">
@@ -6813,15 +6819,15 @@
         </p:nvSpPr>
         <p:spPr>
           <a:xfrm>
-            <a:off x="108000" y="9817023"/>
-            <a:ext cx="6422315" cy="133350"/>
+            <a:off x="108001" y="9817023"/>
+            <a:ext cx="2254200" cy="121252"/>
           </a:xfrm>
           <a:prstGeom prst="rect">
             <a:avLst/>
           </a:prstGeom>
         </p:spPr>
         <p:txBody>
-          <a:bodyPr lIns="0" tIns="0" rIns="0" bIns="0" rtlCol="0" anchor="t">
+          <a:bodyPr wrap="square" lIns="0" tIns="0" rIns="0" bIns="0" rtlCol="0" anchor="t">
             <a:spAutoFit/>
           </a:bodyPr>
           <a:lstStyle/>
@@ -6832,7 +6838,7 @@
               </a:lnSpc>
             </a:pPr>
             <a:r>
-              <a:rPr lang="en-US" sz="802">
+              <a:rPr lang="en-US" sz="802" dirty="0">
                 <a:solidFill>
                   <a:srgbClr val="2D2D2D"/>
                 </a:solidFill>
@@ -6925,6 +6931,74 @@
               </a:rPr>
               <a:t>Occupancy</a:t>
             </a:r>
+          </a:p>
+        </p:txBody>
+      </p:sp>
+      <p:sp>
+        <p:nvSpPr>
+          <p:cNvPr id="23" name="TextBox 16">
+            <a:extLst>
+              <a:ext uri="{FF2B5EF4-FFF2-40B4-BE49-F238E27FC236}">
+                <a16:creationId xmlns:a16="http://schemas.microsoft.com/office/drawing/2014/main" id="{27240F43-9CF5-672C-57EE-5C8B36A704D0}"/>
+              </a:ext>
+            </a:extLst>
+          </p:cNvPr>
+          <p:cNvSpPr txBox="1"/>
+          <p:nvPr/>
+        </p:nvSpPr>
+        <p:spPr>
+          <a:xfrm>
+            <a:off x="3870803" y="9817023"/>
+            <a:ext cx="3879850" cy="121252"/>
+          </a:xfrm>
+          <a:prstGeom prst="rect">
+            <a:avLst/>
+          </a:prstGeom>
+        </p:spPr>
+        <p:txBody>
+          <a:bodyPr wrap="square" lIns="0" tIns="0" rIns="0" bIns="0" rtlCol="0" anchor="t">
+            <a:spAutoFit/>
+          </a:bodyPr>
+          <a:lstStyle/>
+          <a:p>
+            <a:pPr algn="l">
+              <a:lnSpc>
+                <a:spcPts val="963"/>
+              </a:lnSpc>
+            </a:pPr>
+            <a:r>
+              <a:rPr lang="en-US" sz="802" dirty="0">
+                <a:solidFill>
+                  <a:srgbClr val="2D2D2D"/>
+                </a:solidFill>
+                <a:latin typeface="Avenir"/>
+                <a:ea typeface="Avenir"/>
+                <a:cs typeface="Avenir"/>
+                <a:sym typeface="Avenir"/>
+              </a:rPr>
+              <a:t>*Value reflects a 10% uplift to reported rent to account for scheduled </a:t>
+            </a:r>
+            <a:r>
+              <a:rPr lang="en-US" sz="802">
+                <a:solidFill>
+                  <a:srgbClr val="2D2D2D"/>
+                </a:solidFill>
+                <a:latin typeface="Avenir"/>
+                <a:ea typeface="Avenir"/>
+                <a:cs typeface="Avenir"/>
+                <a:sym typeface="Avenir"/>
+              </a:rPr>
+              <a:t>rent increases</a:t>
+            </a:r>
+            <a:endParaRPr lang="en-US" sz="802" dirty="0">
+              <a:solidFill>
+                <a:srgbClr val="2D2D2D"/>
+              </a:solidFill>
+              <a:latin typeface="Avenir"/>
+              <a:ea typeface="Avenir"/>
+              <a:cs typeface="Avenir"/>
+              <a:sym typeface="Avenir"/>
+            </a:endParaRPr>
           </a:p>
         </p:txBody>
       </p:sp>

--- a/storeinsight/public/FLASHTEMPLATE.pptx
+++ b/storeinsight/public/FLASHTEMPLATE.pptx
@@ -5505,7 +5505,7 @@
           <p:nvPr>
             <p:extLst>
               <p:ext uri="{D42A27DB-BD31-4B8C-83A1-F6EECF244321}">
-                <p14:modId xmlns:p14="http://schemas.microsoft.com/office/powerpoint/2010/main" val="1791546576"/>
+                <p14:modId xmlns:p14="http://schemas.microsoft.com/office/powerpoint/2010/main" val="1864296957"/>
               </p:ext>
             </p:extLst>
           </p:nvPr>
@@ -5990,7 +5990,7 @@
                         <a:defRPr/>
                       </a:pPr>
                       <a:r>
-                        <a:rPr lang="en-US" sz="902" b="1">
+                        <a:rPr lang="en-US" sz="902" b="1" dirty="0">
                           <a:solidFill>
                             <a:srgbClr val="2D2D2D"/>
                           </a:solidFill>
@@ -5999,9 +5999,9 @@
                           <a:cs typeface="Avenir Bold"/>
                           <a:sym typeface="Avenir Bold"/>
                         </a:rPr>
-                        <a:t>Econ Occ.</a:t>
+                        <a:t>**Econ Occ.</a:t>
                       </a:r>
-                      <a:endParaRPr lang="en-US" sz="1100"/>
+                      <a:endParaRPr lang="en-US" sz="1100" dirty="0"/>
                     </a:p>
                   </a:txBody>
                   <a:tcPr marT="91440" marB="91440" anchor="ctr">
@@ -6948,8 +6948,8 @@
         </p:nvSpPr>
         <p:spPr>
           <a:xfrm>
-            <a:off x="3870803" y="9817023"/>
-            <a:ext cx="3879850" cy="121252"/>
+            <a:off x="3886200" y="9656431"/>
+            <a:ext cx="3879850" cy="114968"/>
           </a:xfrm>
           <a:prstGeom prst="rect">
             <a:avLst/>
@@ -6967,7 +6967,7 @@
               </a:lnSpc>
             </a:pPr>
             <a:r>
-              <a:rPr lang="en-US" sz="802" dirty="0">
+              <a:rPr lang="en-US" sz="600" dirty="0">
                 <a:solidFill>
                   <a:srgbClr val="2D2D2D"/>
                 </a:solidFill>
@@ -6976,25 +6976,57 @@
                 <a:cs typeface="Avenir"/>
                 <a:sym typeface="Avenir"/>
               </a:rPr>
-              <a:t>*Value reflects a 10% uplift to reported rent to account for scheduled </a:t>
+              <a:t>*The total posted rates at 100% occupancy, including projected rate increases</a:t>
             </a:r>
+          </a:p>
+        </p:txBody>
+      </p:sp>
+      <p:sp>
+        <p:nvSpPr>
+          <p:cNvPr id="19" name="TextBox 16">
+            <a:extLst>
+              <a:ext uri="{FF2B5EF4-FFF2-40B4-BE49-F238E27FC236}">
+                <a16:creationId xmlns:a16="http://schemas.microsoft.com/office/drawing/2014/main" id="{BADF2C1C-763C-28CB-4970-4515BBBDE0F1}"/>
+              </a:ext>
+            </a:extLst>
+          </p:cNvPr>
+          <p:cNvSpPr txBox="1"/>
+          <p:nvPr/>
+        </p:nvSpPr>
+        <p:spPr>
+          <a:xfrm>
+            <a:off x="3896203" y="9776256"/>
+            <a:ext cx="3876197" cy="243208"/>
+          </a:xfrm>
+          <a:prstGeom prst="rect">
+            <a:avLst/>
+          </a:prstGeom>
+        </p:spPr>
+        <p:txBody>
+          <a:bodyPr wrap="square" lIns="0" tIns="0" rIns="0" bIns="0" rtlCol="0" anchor="t">
+            <a:spAutoFit/>
+          </a:bodyPr>
+          <a:lstStyle/>
+          <a:p>
+            <a:pPr>
+              <a:lnSpc>
+                <a:spcPts val="963"/>
+              </a:lnSpc>
+            </a:pPr>
             <a:r>
-              <a:rPr lang="en-US" sz="802">
+              <a:rPr lang="en-US" sz="600" dirty="0">
                 <a:solidFill>
                   <a:srgbClr val="2D2D2D"/>
                 </a:solidFill>
-                <a:latin typeface="Avenir"/>
-                <a:ea typeface="Avenir"/>
-                <a:cs typeface="Avenir"/>
-                <a:sym typeface="Avenir"/>
+                <a:latin typeface="Avenir" panose="020B0604020202020204" charset="0"/>
               </a:rPr>
-              <a:t>rent increases</a:t>
+              <a:t>**The ratio of occupied revenue (the sum of the current rent for all occupied spaces) to potential revenue (the sum of the sell rates for all spaces), expressed as a percentage</a:t>
             </a:r>
-            <a:endParaRPr lang="en-US" sz="802" dirty="0">
+            <a:endParaRPr lang="en-US" sz="600" dirty="0">
               <a:solidFill>
                 <a:srgbClr val="2D2D2D"/>
               </a:solidFill>
-              <a:latin typeface="Avenir"/>
+              <a:latin typeface="Avenir" panose="020B0604020202020204" charset="0"/>
               <a:ea typeface="Avenir"/>
               <a:cs typeface="Avenir"/>
               <a:sym typeface="Avenir"/>

--- a/storeinsight/public/FLASHTEMPLATE.pptx
+++ b/storeinsight/public/FLASHTEMPLATE.pptx
@@ -313,7 +313,7 @@
             <a:fld id="{1D8BD707-D9CF-40AE-B4C6-C98DA3205C09}" type="datetimeFigureOut">
               <a:rPr lang="en-US" smtClean="0"/>
               <a:pPr/>
-              <a:t>11/20/2025</a:t>
+              <a:t>11/21/2025</a:t>
             </a:fld>
             <a:endParaRPr lang="en-US"/>
           </a:p>
@@ -478,7 +478,7 @@
             <a:fld id="{1D8BD707-D9CF-40AE-B4C6-C98DA3205C09}" type="datetimeFigureOut">
               <a:rPr lang="en-US" smtClean="0"/>
               <a:pPr/>
-              <a:t>11/20/2025</a:t>
+              <a:t>11/21/2025</a:t>
             </a:fld>
             <a:endParaRPr lang="en-US"/>
           </a:p>
@@ -653,7 +653,7 @@
             <a:fld id="{1D8BD707-D9CF-40AE-B4C6-C98DA3205C09}" type="datetimeFigureOut">
               <a:rPr lang="en-US" smtClean="0"/>
               <a:pPr/>
-              <a:t>11/20/2025</a:t>
+              <a:t>11/21/2025</a:t>
             </a:fld>
             <a:endParaRPr lang="en-US"/>
           </a:p>
@@ -818,7 +818,7 @@
             <a:fld id="{1D8BD707-D9CF-40AE-B4C6-C98DA3205C09}" type="datetimeFigureOut">
               <a:rPr lang="en-US" smtClean="0"/>
               <a:pPr/>
-              <a:t>11/20/2025</a:t>
+              <a:t>11/21/2025</a:t>
             </a:fld>
             <a:endParaRPr lang="en-US"/>
           </a:p>
@@ -1060,7 +1060,7 @@
             <a:fld id="{1D8BD707-D9CF-40AE-B4C6-C98DA3205C09}" type="datetimeFigureOut">
               <a:rPr lang="en-US" smtClean="0"/>
               <a:pPr/>
-              <a:t>11/20/2025</a:t>
+              <a:t>11/21/2025</a:t>
             </a:fld>
             <a:endParaRPr lang="en-US"/>
           </a:p>
@@ -1342,7 +1342,7 @@
             <a:fld id="{1D8BD707-D9CF-40AE-B4C6-C98DA3205C09}" type="datetimeFigureOut">
               <a:rPr lang="en-US" smtClean="0"/>
               <a:pPr/>
-              <a:t>11/20/2025</a:t>
+              <a:t>11/21/2025</a:t>
             </a:fld>
             <a:endParaRPr lang="en-US"/>
           </a:p>
@@ -1758,7 +1758,7 @@
             <a:fld id="{1D8BD707-D9CF-40AE-B4C6-C98DA3205C09}" type="datetimeFigureOut">
               <a:rPr lang="en-US" smtClean="0"/>
               <a:pPr/>
-              <a:t>11/20/2025</a:t>
+              <a:t>11/21/2025</a:t>
             </a:fld>
             <a:endParaRPr lang="en-US"/>
           </a:p>
@@ -1872,7 +1872,7 @@
             <a:fld id="{1D8BD707-D9CF-40AE-B4C6-C98DA3205C09}" type="datetimeFigureOut">
               <a:rPr lang="en-US" smtClean="0"/>
               <a:pPr/>
-              <a:t>11/20/2025</a:t>
+              <a:t>11/21/2025</a:t>
             </a:fld>
             <a:endParaRPr lang="en-US"/>
           </a:p>
@@ -1964,7 +1964,7 @@
             <a:fld id="{1D8BD707-D9CF-40AE-B4C6-C98DA3205C09}" type="datetimeFigureOut">
               <a:rPr lang="en-US" smtClean="0"/>
               <a:pPr/>
-              <a:t>11/20/2025</a:t>
+              <a:t>11/21/2025</a:t>
             </a:fld>
             <a:endParaRPr lang="en-US"/>
           </a:p>
@@ -2236,7 +2236,7 @@
             <a:fld id="{1D8BD707-D9CF-40AE-B4C6-C98DA3205C09}" type="datetimeFigureOut">
               <a:rPr lang="en-US" smtClean="0"/>
               <a:pPr/>
-              <a:t>11/20/2025</a:t>
+              <a:t>11/21/2025</a:t>
             </a:fld>
             <a:endParaRPr lang="en-US"/>
           </a:p>
@@ -2485,7 +2485,7 @@
             <a:fld id="{1D8BD707-D9CF-40AE-B4C6-C98DA3205C09}" type="datetimeFigureOut">
               <a:rPr lang="en-US" smtClean="0"/>
               <a:pPr/>
-              <a:t>11/20/2025</a:t>
+              <a:t>11/21/2025</a:t>
             </a:fld>
             <a:endParaRPr lang="en-US"/>
           </a:p>
@@ -2693,7 +2693,7 @@
             <a:fld id="{1D8BD707-D9CF-40AE-B4C6-C98DA3205C09}" type="datetimeFigureOut">
               <a:rPr lang="en-US" smtClean="0"/>
               <a:pPr/>
-              <a:t>11/20/2025</a:t>
+              <a:t>11/21/2025</a:t>
             </a:fld>
             <a:endParaRPr lang="en-US"/>
           </a:p>
@@ -4393,7 +4393,7 @@
                         <a:defRPr/>
                       </a:pPr>
                       <a:r>
-                        <a:rPr lang="en-US" sz="1103">
+                        <a:rPr lang="en-US" sz="1103" dirty="0">
                           <a:solidFill>
                             <a:srgbClr val="4A4A4A"/>
                           </a:solidFill>
@@ -4404,7 +4404,7 @@
                         </a:rPr>
                         <a:t>{{MTDNETRENTALS}}</a:t>
                       </a:r>
-                      <a:endParaRPr lang="en-US" sz="1100"/>
+                      <a:endParaRPr lang="en-US" sz="1100" dirty="0"/>
                     </a:p>
                   </a:txBody>
                   <a:tcPr marT="91440" marB="91440" anchor="ctr">
@@ -4465,11 +4465,17 @@
           <p:cNvGraphicFramePr>
             <a:graphicFrameLocks noGrp="1"/>
           </p:cNvGraphicFramePr>
-          <p:nvPr/>
+          <p:nvPr>
+            <p:extLst>
+              <p:ext uri="{D42A27DB-BD31-4B8C-83A1-F6EECF244321}">
+                <p14:modId xmlns:p14="http://schemas.microsoft.com/office/powerpoint/2010/main" val="960059415"/>
+              </p:ext>
+            </p:extLst>
+          </p:nvPr>
         </p:nvGraphicFramePr>
         <p:xfrm>
           <a:off x="596302" y="4648885"/>
-          <a:ext cx="6600102" cy="1204913"/>
+          <a:ext cx="6600102" cy="1313983"/>
         </p:xfrm>
         <a:graphic>
           <a:graphicData uri="http://schemas.openxmlformats.org/drawingml/2006/table">
@@ -4811,7 +4817,7 @@
                         <a:defRPr/>
                       </a:pPr>
                       <a:r>
-                        <a:rPr lang="en-US" sz="902" b="1">
+                        <a:rPr lang="en-US" sz="902" b="1" dirty="0">
                           <a:solidFill>
                             <a:srgbClr val="2D2D2D"/>
                           </a:solidFill>
@@ -4820,9 +4826,9 @@
                           <a:cs typeface="Avenir Bold"/>
                           <a:sym typeface="Avenir Bold"/>
                         </a:rPr>
-                        <a:t>TPP Coverage %</a:t>
+                        <a:t>Net SqFt Activity (MTD)</a:t>
                       </a:r>
-                      <a:endParaRPr lang="en-US" sz="1100"/>
+                      <a:endParaRPr lang="en-US" sz="1100" dirty="0"/>
                     </a:p>
                   </a:txBody>
                   <a:tcPr marT="91440" marB="91440" anchor="ctr">
@@ -4879,7 +4885,7 @@
                         <a:defRPr/>
                       </a:pPr>
                       <a:r>
-                        <a:rPr lang="en-US" sz="902" b="1">
+                        <a:rPr lang="en-US" sz="902" b="1" dirty="0">
                           <a:solidFill>
                             <a:srgbClr val="2D2D2D"/>
                           </a:solidFill>
@@ -4888,9 +4894,9 @@
                           <a:cs typeface="Avenir Bold"/>
                           <a:sym typeface="Avenir Bold"/>
                         </a:rPr>
-                        <a:t>AR &gt; 30d %</a:t>
+                        <a:t>TPP Coverage %</a:t>
                       </a:r>
-                      <a:endParaRPr lang="en-US" sz="1100"/>
+                      <a:endParaRPr lang="en-US" sz="1100" dirty="0"/>
                     </a:p>
                   </a:txBody>
                   <a:tcPr marT="91440" marB="91440" anchor="ctr">
@@ -4947,7 +4953,7 @@
                         <a:defRPr/>
                       </a:pPr>
                       <a:r>
-                        <a:rPr lang="en-US" sz="902" b="1">
+                        <a:rPr lang="en-US" sz="902" b="1" dirty="0">
                           <a:solidFill>
                             <a:srgbClr val="2D2D2D"/>
                           </a:solidFill>
@@ -4956,9 +4962,9 @@
                           <a:cs typeface="Avenir Bold"/>
                           <a:sym typeface="Avenir Bold"/>
                         </a:rPr>
-                        <a:t>AR &gt; 60d %</a:t>
+                        <a:t>AR &gt; 30d %</a:t>
                       </a:r>
-                      <a:endParaRPr lang="en-US" sz="1100"/>
+                      <a:endParaRPr lang="en-US" sz="1100" dirty="0"/>
                     </a:p>
                   </a:txBody>
                   <a:tcPr marT="91440" marB="91440" anchor="ctr">
@@ -5294,7 +5300,7 @@
                         <a:defRPr/>
                       </a:pPr>
                       <a:r>
-                        <a:rPr lang="en-US" sz="1103">
+                        <a:rPr lang="en-US" sz="1103" dirty="0">
                           <a:solidFill>
                             <a:srgbClr val="4A4A4A"/>
                           </a:solidFill>
@@ -5303,9 +5309,9 @@
                           <a:cs typeface="Avenir"/>
                           <a:sym typeface="Avenir"/>
                         </a:rPr>
-                        <a:t>{{COVERAGE}}</a:t>
+                        <a:t>{{NETSQFTACTMTD}}</a:t>
                       </a:r>
-                      <a:endParaRPr lang="en-US" sz="1100"/>
+                      <a:endParaRPr lang="en-US" sz="1100" dirty="0"/>
                     </a:p>
                   </a:txBody>
                   <a:tcPr marT="91440" marB="91440" anchor="ctr">
@@ -5362,7 +5368,7 @@
                         <a:defRPr/>
                       </a:pPr>
                       <a:r>
-                        <a:rPr lang="en-US" sz="1103">
+                        <a:rPr lang="en-US" sz="1103" dirty="0">
                           <a:solidFill>
                             <a:srgbClr val="4A4A4A"/>
                           </a:solidFill>
@@ -5371,9 +5377,9 @@
                           <a:cs typeface="Avenir"/>
                           <a:sym typeface="Avenir"/>
                         </a:rPr>
-                        <a:t>{{AROVER30DAYSPCT}}</a:t>
+                        <a:t>{{COVERAGE}}</a:t>
                       </a:r>
-                      <a:endParaRPr lang="en-US" sz="1100"/>
+                      <a:endParaRPr lang="en-US" sz="1100" dirty="0"/>
                     </a:p>
                   </a:txBody>
                   <a:tcPr marT="91440" marB="91440" anchor="ctr">
@@ -5430,7 +5436,7 @@
                         <a:defRPr/>
                       </a:pPr>
                       <a:r>
-                        <a:rPr lang="en-US" sz="1103">
+                        <a:rPr lang="en-US" sz="1103" dirty="0">
                           <a:solidFill>
                             <a:srgbClr val="4A4A4A"/>
                           </a:solidFill>
@@ -5439,9 +5445,9 @@
                           <a:cs typeface="Avenir"/>
                           <a:sym typeface="Avenir"/>
                         </a:rPr>
-                        <a:t>{{AROVER60DAYSPCT}}</a:t>
+                        <a:t>{{AROVER30DAYSPCT}}</a:t>
                       </a:r>
-                      <a:endParaRPr lang="en-US" sz="1100"/>
+                      <a:endParaRPr lang="en-US" sz="1100" dirty="0"/>
                     </a:p>
                   </a:txBody>
                   <a:tcPr marT="91440" marB="91440" anchor="ctr">
@@ -6201,7 +6207,7 @@
                         <a:defRPr/>
                       </a:pPr>
                       <a:r>
-                        <a:rPr lang="en-US" sz="1103">
+                        <a:rPr lang="en-US" sz="1103" dirty="0">
                           <a:solidFill>
                             <a:srgbClr val="4A4A4A"/>
                           </a:solidFill>
@@ -6212,7 +6218,7 @@
                         </a:rPr>
                         <a:t>{{PROJRENTMOMPCT}}</a:t>
                       </a:r>
-                      <a:endParaRPr lang="en-US" sz="1100"/>
+                      <a:endParaRPr lang="en-US" sz="1100" dirty="0"/>
                     </a:p>
                   </a:txBody>
                   <a:tcPr marT="91440" marB="91440" anchor="ctr">
@@ -6976,7 +6982,7 @@
                 <a:cs typeface="Avenir"/>
                 <a:sym typeface="Avenir"/>
               </a:rPr>
-              <a:t>*The total posted rates at 100% occupancy, including projected rate increases</a:t>
+              <a:t>*The total income of all spaces rented at posted rates including projected rate increases</a:t>
             </a:r>
           </a:p>
         </p:txBody>

--- a/storeinsight/public/FLASHTEMPLATE.pptx
+++ b/storeinsight/public/FLASHTEMPLATE.pptx
@@ -313,7 +313,7 @@
             <a:fld id="{1D8BD707-D9CF-40AE-B4C6-C98DA3205C09}" type="datetimeFigureOut">
               <a:rPr lang="en-US" smtClean="0"/>
               <a:pPr/>
-              <a:t>11/21/2025</a:t>
+              <a:t>11/24/2025</a:t>
             </a:fld>
             <a:endParaRPr lang="en-US"/>
           </a:p>
@@ -478,7 +478,7 @@
             <a:fld id="{1D8BD707-D9CF-40AE-B4C6-C98DA3205C09}" type="datetimeFigureOut">
               <a:rPr lang="en-US" smtClean="0"/>
               <a:pPr/>
-              <a:t>11/21/2025</a:t>
+              <a:t>11/24/2025</a:t>
             </a:fld>
             <a:endParaRPr lang="en-US"/>
           </a:p>
@@ -653,7 +653,7 @@
             <a:fld id="{1D8BD707-D9CF-40AE-B4C6-C98DA3205C09}" type="datetimeFigureOut">
               <a:rPr lang="en-US" smtClean="0"/>
               <a:pPr/>
-              <a:t>11/21/2025</a:t>
+              <a:t>11/24/2025</a:t>
             </a:fld>
             <a:endParaRPr lang="en-US"/>
           </a:p>
@@ -818,7 +818,7 @@
             <a:fld id="{1D8BD707-D9CF-40AE-B4C6-C98DA3205C09}" type="datetimeFigureOut">
               <a:rPr lang="en-US" smtClean="0"/>
               <a:pPr/>
-              <a:t>11/21/2025</a:t>
+              <a:t>11/24/2025</a:t>
             </a:fld>
             <a:endParaRPr lang="en-US"/>
           </a:p>
@@ -1060,7 +1060,7 @@
             <a:fld id="{1D8BD707-D9CF-40AE-B4C6-C98DA3205C09}" type="datetimeFigureOut">
               <a:rPr lang="en-US" smtClean="0"/>
               <a:pPr/>
-              <a:t>11/21/2025</a:t>
+              <a:t>11/24/2025</a:t>
             </a:fld>
             <a:endParaRPr lang="en-US"/>
           </a:p>
@@ -1342,7 +1342,7 @@
             <a:fld id="{1D8BD707-D9CF-40AE-B4C6-C98DA3205C09}" type="datetimeFigureOut">
               <a:rPr lang="en-US" smtClean="0"/>
               <a:pPr/>
-              <a:t>11/21/2025</a:t>
+              <a:t>11/24/2025</a:t>
             </a:fld>
             <a:endParaRPr lang="en-US"/>
           </a:p>
@@ -1758,7 +1758,7 @@
             <a:fld id="{1D8BD707-D9CF-40AE-B4C6-C98DA3205C09}" type="datetimeFigureOut">
               <a:rPr lang="en-US" smtClean="0"/>
               <a:pPr/>
-              <a:t>11/21/2025</a:t>
+              <a:t>11/24/2025</a:t>
             </a:fld>
             <a:endParaRPr lang="en-US"/>
           </a:p>
@@ -1872,7 +1872,7 @@
             <a:fld id="{1D8BD707-D9CF-40AE-B4C6-C98DA3205C09}" type="datetimeFigureOut">
               <a:rPr lang="en-US" smtClean="0"/>
               <a:pPr/>
-              <a:t>11/21/2025</a:t>
+              <a:t>11/24/2025</a:t>
             </a:fld>
             <a:endParaRPr lang="en-US"/>
           </a:p>
@@ -1964,7 +1964,7 @@
             <a:fld id="{1D8BD707-D9CF-40AE-B4C6-C98DA3205C09}" type="datetimeFigureOut">
               <a:rPr lang="en-US" smtClean="0"/>
               <a:pPr/>
-              <a:t>11/21/2025</a:t>
+              <a:t>11/24/2025</a:t>
             </a:fld>
             <a:endParaRPr lang="en-US"/>
           </a:p>
@@ -2236,7 +2236,7 @@
             <a:fld id="{1D8BD707-D9CF-40AE-B4C6-C98DA3205C09}" type="datetimeFigureOut">
               <a:rPr lang="en-US" smtClean="0"/>
               <a:pPr/>
-              <a:t>11/21/2025</a:t>
+              <a:t>11/24/2025</a:t>
             </a:fld>
             <a:endParaRPr lang="en-US"/>
           </a:p>
@@ -2485,7 +2485,7 @@
             <a:fld id="{1D8BD707-D9CF-40AE-B4C6-C98DA3205C09}" type="datetimeFigureOut">
               <a:rPr lang="en-US" smtClean="0"/>
               <a:pPr/>
-              <a:t>11/21/2025</a:t>
+              <a:t>11/24/2025</a:t>
             </a:fld>
             <a:endParaRPr lang="en-US"/>
           </a:p>
@@ -2693,7 +2693,7 @@
             <a:fld id="{1D8BD707-D9CF-40AE-B4C6-C98DA3205C09}" type="datetimeFigureOut">
               <a:rPr lang="en-US" smtClean="0"/>
               <a:pPr/>
-              <a:t>11/21/2025</a:t>
+              <a:t>11/24/2025</a:t>
             </a:fld>
             <a:endParaRPr lang="en-US"/>
           </a:p>
@@ -5511,7 +5511,7 @@
           <p:nvPr>
             <p:extLst>
               <p:ext uri="{D42A27DB-BD31-4B8C-83A1-F6EECF244321}">
-                <p14:modId xmlns:p14="http://schemas.microsoft.com/office/powerpoint/2010/main" val="1864296957"/>
+                <p14:modId xmlns:p14="http://schemas.microsoft.com/office/powerpoint/2010/main" val="478071839"/>
               </p:ext>
             </p:extLst>
           </p:nvPr>
@@ -5928,18 +5928,16 @@
                         <a:defRPr/>
                       </a:pPr>
                       <a:r>
-                        <a:rPr lang="en-US" sz="902" b="1">
+                        <a:rPr lang="en-US" sz="902" b="1" dirty="0">
                           <a:solidFill>
                             <a:srgbClr val="2D2D2D"/>
                           </a:solidFill>
                           <a:latin typeface="Avenir Bold"/>
-                          <a:ea typeface="Avenir Bold"/>
-                          <a:cs typeface="Avenir Bold"/>
                           <a:sym typeface="Avenir Bold"/>
                         </a:rPr>
-                        <a:t>GPR MoM%</a:t>
+                        <a:t>Sell Rate</a:t>
                       </a:r>
-                      <a:endParaRPr lang="en-US" sz="1100"/>
+                      <a:endParaRPr lang="en-US" sz="1100" dirty="0"/>
                     </a:p>
                   </a:txBody>
                   <a:tcPr marT="91440" marB="91440" anchor="ctr">
@@ -6411,7 +6409,7 @@
                         <a:defRPr/>
                       </a:pPr>
                       <a:r>
-                        <a:rPr lang="en-US" sz="1103">
+                        <a:rPr lang="en-US" sz="1103" dirty="0">
                           <a:solidFill>
                             <a:srgbClr val="4A4A4A"/>
                           </a:solidFill>
@@ -6422,7 +6420,7 @@
                         </a:rPr>
                         <a:t>{{GPRMOMPCT}}</a:t>
                       </a:r>
-                      <a:endParaRPr lang="en-US" sz="1100"/>
+                      <a:endParaRPr lang="en-US" sz="1100" dirty="0"/>
                     </a:p>
                   </a:txBody>
                   <a:tcPr marT="91440" marB="91440" anchor="ctr">

--- a/storeinsight/public/FLASHTEMPLATE.pptx
+++ b/storeinsight/public/FLASHTEMPLATE.pptx
@@ -3910,7 +3910,7 @@
                         <a:defRPr/>
                       </a:pPr>
                       <a:r>
-                        <a:rPr lang="en-US" sz="902" b="1">
+                        <a:rPr lang="en-US" sz="902" b="1" dirty="0">
                           <a:solidFill>
                             <a:srgbClr val="2D2D2D"/>
                           </a:solidFill>
@@ -3921,7 +3921,7 @@
                         </a:rPr>
                         <a:t>MTD Net</a:t>
                       </a:r>
-                      <a:endParaRPr lang="en-US" sz="1100"/>
+                      <a:endParaRPr lang="en-US" sz="1100" dirty="0"/>
                     </a:p>
                   </a:txBody>
                   <a:tcPr marT="91440" marB="91440" anchor="ctr">
@@ -5511,7 +5511,7 @@
           <p:nvPr>
             <p:extLst>
               <p:ext uri="{D42A27DB-BD31-4B8C-83A1-F6EECF244321}">
-                <p14:modId xmlns:p14="http://schemas.microsoft.com/office/powerpoint/2010/main" val="478071839"/>
+                <p14:modId xmlns:p14="http://schemas.microsoft.com/office/powerpoint/2010/main" val="2110138682"/>
               </p:ext>
             </p:extLst>
           </p:nvPr>
@@ -5724,18 +5724,16 @@
                         <a:defRPr/>
                       </a:pPr>
                       <a:r>
-                        <a:rPr lang="en-US" sz="902" b="1">
+                        <a:rPr lang="en-US" sz="902" b="1" dirty="0">
                           <a:solidFill>
                             <a:srgbClr val="2D2D2D"/>
                           </a:solidFill>
                           <a:latin typeface="Avenir Bold"/>
-                          <a:ea typeface="Avenir Bold"/>
-                          <a:cs typeface="Avenir Bold"/>
                           <a:sym typeface="Avenir Bold"/>
                         </a:rPr>
-                        <a:t>Proj. Rent MoM</a:t>
+                        <a:t>Effective Pot. Rent</a:t>
                       </a:r>
-                      <a:endParaRPr lang="en-US" sz="1100"/>
+                      <a:endParaRPr lang="en-US" sz="1100" dirty="0"/>
                     </a:p>
                   </a:txBody>
                   <a:tcPr marT="91440" marB="91440" anchor="ctr">
@@ -5801,7 +5799,19 @@
                           <a:cs typeface="Avenir Bold"/>
                           <a:sym typeface="Avenir Bold"/>
                         </a:rPr>
-                        <a:t>*Gross Pot. Rent</a:t>
+                        <a:t>Effective / </a:t>
+                      </a:r>
+                      <a:r>
+                        <a:rPr lang="en-US" sz="902" b="1" dirty="0" err="1">
+                          <a:solidFill>
+                            <a:srgbClr val="2D2D2D"/>
+                          </a:solidFill>
+                          <a:latin typeface="Avenir Bold"/>
+                          <a:ea typeface="Avenir Bold"/>
+                          <a:cs typeface="Avenir Bold"/>
+                          <a:sym typeface="Avenir Bold"/>
+                        </a:rPr>
+                        <a:t>SqFt</a:t>
                       </a:r>
                       <a:endParaRPr lang="en-US" sz="1100" dirty="0"/>
                     </a:p>
@@ -5869,73 +5879,19 @@
                           <a:cs typeface="Avenir Bold"/>
                           <a:sym typeface="Avenir Bold"/>
                         </a:rPr>
-                        <a:t>GPR / SF</a:t>
+                        <a:t>*Gross </a:t>
                       </a:r>
-                      <a:endParaRPr lang="en-US" sz="1100"/>
-                    </a:p>
-                  </a:txBody>
-                  <a:tcPr marT="91440" marB="91440" anchor="ctr">
-                    <a:lnL w="4762" cap="flat" cmpd="sng" algn="ctr">
-                      <a:solidFill>
-                        <a:srgbClr val="3B52A1"/>
-                      </a:solidFill>
-                      <a:prstDash val="solid"/>
-                      <a:round/>
-                      <a:headEnd type="none" w="med" len="med"/>
-                      <a:tailEnd type="none" w="med" len="med"/>
-                    </a:lnL>
-                    <a:lnR w="4762" cap="flat" cmpd="sng" algn="ctr">
-                      <a:solidFill>
-                        <a:srgbClr val="3B52A1"/>
-                      </a:solidFill>
-                      <a:prstDash val="solid"/>
-                      <a:round/>
-                      <a:headEnd type="none" w="med" len="med"/>
-                      <a:tailEnd type="none" w="med" len="med"/>
-                    </a:lnR>
-                    <a:lnT w="4762" cap="flat" cmpd="sng" algn="ctr">
-                      <a:solidFill>
-                        <a:srgbClr val="3B52A1"/>
-                      </a:solidFill>
-                      <a:prstDash val="solid"/>
-                      <a:round/>
-                      <a:headEnd type="none" w="med" len="med"/>
-                      <a:tailEnd type="none" w="med" len="med"/>
-                    </a:lnT>
-                    <a:lnB w="4762" cap="flat" cmpd="sng" algn="ctr">
-                      <a:solidFill>
-                        <a:srgbClr val="3B52A1"/>
-                      </a:solidFill>
-                      <a:prstDash val="solid"/>
-                      <a:round/>
-                      <a:headEnd type="none" w="med" len="med"/>
-                      <a:tailEnd type="none" w="med" len="med"/>
-                    </a:lnB>
-                    <a:solidFill>
-                      <a:srgbClr val="FFFFFF"/>
-                    </a:solidFill>
-                  </a:tcPr>
-                </a:tc>
-                <a:tc>
-                  <a:txBody>
-                    <a:bodyPr/>
-                    <a:lstStyle/>
-                    <a:p>
-                      <a:pPr algn="ctr">
-                        <a:lnSpc>
-                          <a:spcPts val="1083"/>
-                        </a:lnSpc>
-                        <a:defRPr/>
-                      </a:pPr>
                       <a:r>
                         <a:rPr lang="en-US" sz="902" b="1" dirty="0">
                           <a:solidFill>
                             <a:srgbClr val="2D2D2D"/>
                           </a:solidFill>
                           <a:latin typeface="Avenir Bold"/>
+                          <a:ea typeface="Avenir Bold"/>
+                          <a:cs typeface="Avenir Bold"/>
                           <a:sym typeface="Avenir Bold"/>
                         </a:rPr>
-                        <a:t>Sell Rate</a:t>
+                        <a:t>Pot. Rent</a:t>
                       </a:r>
                       <a:endParaRPr lang="en-US" sz="1100" dirty="0"/>
                     </a:p>
@@ -6003,7 +5959,111 @@
                           <a:cs typeface="Avenir Bold"/>
                           <a:sym typeface="Avenir Bold"/>
                         </a:rPr>
-                        <a:t>**Econ Occ.</a:t>
+                        <a:t>GPR / </a:t>
+                      </a:r>
+                      <a:r>
+                        <a:rPr lang="en-US" sz="902" b="1" dirty="0" err="1">
+                          <a:solidFill>
+                            <a:srgbClr val="2D2D2D"/>
+                          </a:solidFill>
+                          <a:latin typeface="Avenir Bold"/>
+                          <a:ea typeface="Avenir Bold"/>
+                          <a:cs typeface="Avenir Bold"/>
+                          <a:sym typeface="Avenir Bold"/>
+                        </a:rPr>
+                        <a:t>SqFt</a:t>
+                      </a:r>
+                      <a:endParaRPr lang="en-US" sz="1100" dirty="0"/>
+                    </a:p>
+                  </a:txBody>
+                  <a:tcPr marT="91440" marB="91440" anchor="ctr">
+                    <a:lnL w="4762" cap="flat" cmpd="sng" algn="ctr">
+                      <a:solidFill>
+                        <a:srgbClr val="3B52A1"/>
+                      </a:solidFill>
+                      <a:prstDash val="solid"/>
+                      <a:round/>
+                      <a:headEnd type="none" w="med" len="med"/>
+                      <a:tailEnd type="none" w="med" len="med"/>
+                    </a:lnL>
+                    <a:lnR w="4762" cap="flat" cmpd="sng" algn="ctr">
+                      <a:solidFill>
+                        <a:srgbClr val="3B52A1"/>
+                      </a:solidFill>
+                      <a:prstDash val="solid"/>
+                      <a:round/>
+                      <a:headEnd type="none" w="med" len="med"/>
+                      <a:tailEnd type="none" w="med" len="med"/>
+                    </a:lnR>
+                    <a:lnT w="4762" cap="flat" cmpd="sng" algn="ctr">
+                      <a:solidFill>
+                        <a:srgbClr val="3B52A1"/>
+                      </a:solidFill>
+                      <a:prstDash val="solid"/>
+                      <a:round/>
+                      <a:headEnd type="none" w="med" len="med"/>
+                      <a:tailEnd type="none" w="med" len="med"/>
+                    </a:lnT>
+                    <a:lnB w="4762" cap="flat" cmpd="sng" algn="ctr">
+                      <a:solidFill>
+                        <a:srgbClr val="3B52A1"/>
+                      </a:solidFill>
+                      <a:prstDash val="solid"/>
+                      <a:round/>
+                      <a:headEnd type="none" w="med" len="med"/>
+                      <a:tailEnd type="none" w="med" len="med"/>
+                    </a:lnB>
+                    <a:solidFill>
+                      <a:srgbClr val="FFFFFF"/>
+                    </a:solidFill>
+                  </a:tcPr>
+                </a:tc>
+                <a:tc>
+                  <a:txBody>
+                    <a:bodyPr/>
+                    <a:lstStyle/>
+                    <a:p>
+                      <a:pPr algn="ctr">
+                        <a:lnSpc>
+                          <a:spcPts val="1083"/>
+                        </a:lnSpc>
+                        <a:defRPr/>
+                      </a:pPr>
+                      <a:r>
+                        <a:rPr lang="en-US" sz="902" b="1" dirty="0">
+                          <a:solidFill>
+                            <a:srgbClr val="2D2D2D"/>
+                          </a:solidFill>
+                          <a:latin typeface="Avenir Bold"/>
+                          <a:ea typeface="Avenir Bold"/>
+                          <a:cs typeface="Avenir Bold"/>
+                          <a:sym typeface="Avenir Bold"/>
+                        </a:rPr>
+                        <a:t>Avg. Rent / </a:t>
+                      </a:r>
+                      <a:r>
+                        <a:rPr lang="en-US" sz="902" b="1" dirty="0" err="1">
+                          <a:solidFill>
+                            <a:srgbClr val="2D2D2D"/>
+                          </a:solidFill>
+                          <a:latin typeface="Avenir Bold"/>
+                          <a:ea typeface="Avenir Bold"/>
+                          <a:cs typeface="Avenir Bold"/>
+                          <a:sym typeface="Avenir Bold"/>
+                        </a:rPr>
+                        <a:t>SqFt</a:t>
+                      </a:r>
+                      <a:r>
+                        <a:rPr lang="en-US" sz="902" b="1" dirty="0">
+                          <a:solidFill>
+                            <a:srgbClr val="2D2D2D"/>
+                          </a:solidFill>
+                          <a:latin typeface="Avenir Bold"/>
+                          <a:ea typeface="Avenir Bold"/>
+                          <a:cs typeface="Avenir Bold"/>
+                          <a:sym typeface="Avenir Bold"/>
+                        </a:rPr>
+                        <a:t> Vacant</a:t>
                       </a:r>
                       <a:endParaRPr lang="en-US" sz="1100" dirty="0"/>
                     </a:p>
@@ -6137,7 +6197,7 @@
                         <a:defRPr/>
                       </a:pPr>
                       <a:r>
-                        <a:rPr lang="en-US" sz="1103">
+                        <a:rPr lang="en-US" sz="1103" dirty="0">
                           <a:solidFill>
                             <a:srgbClr val="4A4A4A"/>
                           </a:solidFill>
@@ -6148,7 +6208,211 @@
                         </a:rPr>
                         <a:t>{{PROJRENTPERSF}}</a:t>
                       </a:r>
-                      <a:endParaRPr lang="en-US" sz="1100"/>
+                      <a:endParaRPr lang="en-US" sz="1100" dirty="0"/>
+                    </a:p>
+                  </a:txBody>
+                  <a:tcPr marT="91440" marB="91440" anchor="ctr">
+                    <a:lnL w="4762" cap="flat" cmpd="sng" algn="ctr">
+                      <a:solidFill>
+                        <a:srgbClr val="3B52A1"/>
+                      </a:solidFill>
+                      <a:prstDash val="solid"/>
+                      <a:round/>
+                      <a:headEnd type="none" w="med" len="med"/>
+                      <a:tailEnd type="none" w="med" len="med"/>
+                    </a:lnL>
+                    <a:lnR w="4762" cap="flat" cmpd="sng" algn="ctr">
+                      <a:solidFill>
+                        <a:srgbClr val="3B52A1"/>
+                      </a:solidFill>
+                      <a:prstDash val="solid"/>
+                      <a:round/>
+                      <a:headEnd type="none" w="med" len="med"/>
+                      <a:tailEnd type="none" w="med" len="med"/>
+                    </a:lnR>
+                    <a:lnT w="4762" cap="flat" cmpd="sng" algn="ctr">
+                      <a:solidFill>
+                        <a:srgbClr val="3B52A1"/>
+                      </a:solidFill>
+                      <a:prstDash val="solid"/>
+                      <a:round/>
+                      <a:headEnd type="none" w="med" len="med"/>
+                      <a:tailEnd type="none" w="med" len="med"/>
+                    </a:lnT>
+                    <a:lnB w="4762" cap="flat" cmpd="sng" algn="ctr">
+                      <a:solidFill>
+                        <a:srgbClr val="3B52A1"/>
+                      </a:solidFill>
+                      <a:prstDash val="solid"/>
+                      <a:round/>
+                      <a:headEnd type="none" w="med" len="med"/>
+                      <a:tailEnd type="none" w="med" len="med"/>
+                    </a:lnB>
+                    <a:solidFill>
+                      <a:srgbClr val="FFFFFF"/>
+                    </a:solidFill>
+                  </a:tcPr>
+                </a:tc>
+                <a:tc>
+                  <a:txBody>
+                    <a:bodyPr/>
+                    <a:lstStyle/>
+                    <a:p>
+                      <a:pPr algn="ctr">
+                        <a:lnSpc>
+                          <a:spcPts val="1204"/>
+                        </a:lnSpc>
+                        <a:defRPr/>
+                      </a:pPr>
+                      <a:r>
+                        <a:rPr lang="en-US" sz="1000" dirty="0">
+                          <a:solidFill>
+                            <a:srgbClr val="4A4A4A"/>
+                          </a:solidFill>
+                          <a:latin typeface="Avenir"/>
+                          <a:ea typeface="Avenir"/>
+                          <a:cs typeface="Avenir"/>
+                          <a:sym typeface="Avenir"/>
+                        </a:rPr>
+                        <a:t>{{EFFPOTRENT}}</a:t>
+                      </a:r>
+                      <a:endParaRPr lang="en-US" sz="1000" dirty="0"/>
+                    </a:p>
+                  </a:txBody>
+                  <a:tcPr marT="91440" marB="91440" anchor="ctr">
+                    <a:lnL w="4762" cap="flat" cmpd="sng" algn="ctr">
+                      <a:solidFill>
+                        <a:srgbClr val="3B52A1"/>
+                      </a:solidFill>
+                      <a:prstDash val="solid"/>
+                      <a:round/>
+                      <a:headEnd type="none" w="med" len="med"/>
+                      <a:tailEnd type="none" w="med" len="med"/>
+                    </a:lnL>
+                    <a:lnR w="4762" cap="flat" cmpd="sng" algn="ctr">
+                      <a:solidFill>
+                        <a:srgbClr val="3B52A1"/>
+                      </a:solidFill>
+                      <a:prstDash val="solid"/>
+                      <a:round/>
+                      <a:headEnd type="none" w="med" len="med"/>
+                      <a:tailEnd type="none" w="med" len="med"/>
+                    </a:lnR>
+                    <a:lnT w="4762" cap="flat" cmpd="sng" algn="ctr">
+                      <a:solidFill>
+                        <a:srgbClr val="3B52A1"/>
+                      </a:solidFill>
+                      <a:prstDash val="solid"/>
+                      <a:round/>
+                      <a:headEnd type="none" w="med" len="med"/>
+                      <a:tailEnd type="none" w="med" len="med"/>
+                    </a:lnT>
+                    <a:lnB w="4762" cap="flat" cmpd="sng" algn="ctr">
+                      <a:solidFill>
+                        <a:srgbClr val="3B52A1"/>
+                      </a:solidFill>
+                      <a:prstDash val="solid"/>
+                      <a:round/>
+                      <a:headEnd type="none" w="med" len="med"/>
+                      <a:tailEnd type="none" w="med" len="med"/>
+                    </a:lnB>
+                    <a:solidFill>
+                      <a:srgbClr val="FFFFFF"/>
+                    </a:solidFill>
+                  </a:tcPr>
+                </a:tc>
+                <a:tc>
+                  <a:txBody>
+                    <a:bodyPr/>
+                    <a:lstStyle/>
+                    <a:p>
+                      <a:pPr algn="ctr">
+                        <a:lnSpc>
+                          <a:spcPts val="1204"/>
+                        </a:lnSpc>
+                        <a:defRPr/>
+                      </a:pPr>
+                      <a:r>
+                        <a:rPr lang="en-US" sz="1100" dirty="0">
+                          <a:solidFill>
+                            <a:srgbClr val="4A4A4A"/>
+                          </a:solidFill>
+                          <a:latin typeface="Avenir"/>
+                          <a:ea typeface="Avenir"/>
+                          <a:cs typeface="Avenir"/>
+                          <a:sym typeface="Avenir"/>
+                        </a:rPr>
+                        <a:t>{{EFFRENTSF}}</a:t>
+                      </a:r>
+                      <a:endParaRPr lang="en-US" sz="1100" dirty="0"/>
+                    </a:p>
+                  </a:txBody>
+                  <a:tcPr marT="91440" marB="91440" anchor="ctr">
+                    <a:lnL w="4762" cap="flat" cmpd="sng" algn="ctr">
+                      <a:solidFill>
+                        <a:srgbClr val="3B52A1"/>
+                      </a:solidFill>
+                      <a:prstDash val="solid"/>
+                      <a:round/>
+                      <a:headEnd type="none" w="med" len="med"/>
+                      <a:tailEnd type="none" w="med" len="med"/>
+                    </a:lnL>
+                    <a:lnR w="4762" cap="flat" cmpd="sng" algn="ctr">
+                      <a:solidFill>
+                        <a:srgbClr val="3B52A1"/>
+                      </a:solidFill>
+                      <a:prstDash val="solid"/>
+                      <a:round/>
+                      <a:headEnd type="none" w="med" len="med"/>
+                      <a:tailEnd type="none" w="med" len="med"/>
+                    </a:lnR>
+                    <a:lnT w="4762" cap="flat" cmpd="sng" algn="ctr">
+                      <a:solidFill>
+                        <a:srgbClr val="3B52A1"/>
+                      </a:solidFill>
+                      <a:prstDash val="solid"/>
+                      <a:round/>
+                      <a:headEnd type="none" w="med" len="med"/>
+                      <a:tailEnd type="none" w="med" len="med"/>
+                    </a:lnT>
+                    <a:lnB w="4762" cap="flat" cmpd="sng" algn="ctr">
+                      <a:solidFill>
+                        <a:srgbClr val="3B52A1"/>
+                      </a:solidFill>
+                      <a:prstDash val="solid"/>
+                      <a:round/>
+                      <a:headEnd type="none" w="med" len="med"/>
+                      <a:tailEnd type="none" w="med" len="med"/>
+                    </a:lnB>
+                    <a:solidFill>
+                      <a:srgbClr val="FFFFFF"/>
+                    </a:solidFill>
+                  </a:tcPr>
+                </a:tc>
+                <a:tc>
+                  <a:txBody>
+                    <a:bodyPr/>
+                    <a:lstStyle/>
+                    <a:p>
+                      <a:pPr algn="ctr">
+                        <a:lnSpc>
+                          <a:spcPts val="1324"/>
+                        </a:lnSpc>
+                        <a:defRPr/>
+                      </a:pPr>
+                      <a:r>
+                        <a:rPr lang="en-US" sz="1000" dirty="0">
+                          <a:solidFill>
+                            <a:srgbClr val="4A4A4A"/>
+                          </a:solidFill>
+                          <a:latin typeface="Avenir"/>
+                          <a:ea typeface="Avenir"/>
+                          <a:cs typeface="Avenir"/>
+                          <a:sym typeface="Avenir"/>
+                        </a:rPr>
+                        <a:t>{{GROSSPOTRENT}}</a:t>
+                      </a:r>
+                      <a:endParaRPr lang="en-US" sz="1000" dirty="0"/>
                     </a:p>
                   </a:txBody>
                   <a:tcPr marT="91440" marB="91440" anchor="ctr">
@@ -6214,145 +6478,9 @@
                           <a:cs typeface="Avenir"/>
                           <a:sym typeface="Avenir"/>
                         </a:rPr>
-                        <a:t>{{PROJRENTMOMPCT}}</a:t>
+                        <a:t>{{GROSSPOTSFT}}</a:t>
                       </a:r>
                       <a:endParaRPr lang="en-US" sz="1100" dirty="0"/>
-                    </a:p>
-                  </a:txBody>
-                  <a:tcPr marT="91440" marB="91440" anchor="ctr">
-                    <a:lnL w="4762" cap="flat" cmpd="sng" algn="ctr">
-                      <a:solidFill>
-                        <a:srgbClr val="3B52A1"/>
-                      </a:solidFill>
-                      <a:prstDash val="solid"/>
-                      <a:round/>
-                      <a:headEnd type="none" w="med" len="med"/>
-                      <a:tailEnd type="none" w="med" len="med"/>
-                    </a:lnL>
-                    <a:lnR w="4762" cap="flat" cmpd="sng" algn="ctr">
-                      <a:solidFill>
-                        <a:srgbClr val="3B52A1"/>
-                      </a:solidFill>
-                      <a:prstDash val="solid"/>
-                      <a:round/>
-                      <a:headEnd type="none" w="med" len="med"/>
-                      <a:tailEnd type="none" w="med" len="med"/>
-                    </a:lnR>
-                    <a:lnT w="4762" cap="flat" cmpd="sng" algn="ctr">
-                      <a:solidFill>
-                        <a:srgbClr val="3B52A1"/>
-                      </a:solidFill>
-                      <a:prstDash val="solid"/>
-                      <a:round/>
-                      <a:headEnd type="none" w="med" len="med"/>
-                      <a:tailEnd type="none" w="med" len="med"/>
-                    </a:lnT>
-                    <a:lnB w="4762" cap="flat" cmpd="sng" algn="ctr">
-                      <a:solidFill>
-                        <a:srgbClr val="3B52A1"/>
-                      </a:solidFill>
-                      <a:prstDash val="solid"/>
-                      <a:round/>
-                      <a:headEnd type="none" w="med" len="med"/>
-                      <a:tailEnd type="none" w="med" len="med"/>
-                    </a:lnB>
-                    <a:solidFill>
-                      <a:srgbClr val="FFFFFF"/>
-                    </a:solidFill>
-                  </a:tcPr>
-                </a:tc>
-                <a:tc>
-                  <a:txBody>
-                    <a:bodyPr/>
-                    <a:lstStyle/>
-                    <a:p>
-                      <a:pPr algn="ctr">
-                        <a:lnSpc>
-                          <a:spcPts val="1204"/>
-                        </a:lnSpc>
-                        <a:defRPr/>
-                      </a:pPr>
-                      <a:r>
-                        <a:rPr lang="en-US" sz="1003">
-                          <a:solidFill>
-                            <a:srgbClr val="4A4A4A"/>
-                          </a:solidFill>
-                          <a:latin typeface="Avenir"/>
-                          <a:ea typeface="Avenir"/>
-                          <a:cs typeface="Avenir"/>
-                          <a:sym typeface="Avenir"/>
-                        </a:rPr>
-                        <a:t>{{GROSSPOTRENT}}</a:t>
-                      </a:r>
-                      <a:endParaRPr lang="en-US" sz="1100"/>
-                    </a:p>
-                  </a:txBody>
-                  <a:tcPr marT="91440" marB="91440" anchor="ctr">
-                    <a:lnL w="4762" cap="flat" cmpd="sng" algn="ctr">
-                      <a:solidFill>
-                        <a:srgbClr val="3B52A1"/>
-                      </a:solidFill>
-                      <a:prstDash val="solid"/>
-                      <a:round/>
-                      <a:headEnd type="none" w="med" len="med"/>
-                      <a:tailEnd type="none" w="med" len="med"/>
-                    </a:lnL>
-                    <a:lnR w="4762" cap="flat" cmpd="sng" algn="ctr">
-                      <a:solidFill>
-                        <a:srgbClr val="3B52A1"/>
-                      </a:solidFill>
-                      <a:prstDash val="solid"/>
-                      <a:round/>
-                      <a:headEnd type="none" w="med" len="med"/>
-                      <a:tailEnd type="none" w="med" len="med"/>
-                    </a:lnR>
-                    <a:lnT w="4762" cap="flat" cmpd="sng" algn="ctr">
-                      <a:solidFill>
-                        <a:srgbClr val="3B52A1"/>
-                      </a:solidFill>
-                      <a:prstDash val="solid"/>
-                      <a:round/>
-                      <a:headEnd type="none" w="med" len="med"/>
-                      <a:tailEnd type="none" w="med" len="med"/>
-                    </a:lnT>
-                    <a:lnB w="4762" cap="flat" cmpd="sng" algn="ctr">
-                      <a:solidFill>
-                        <a:srgbClr val="3B52A1"/>
-                      </a:solidFill>
-                      <a:prstDash val="solid"/>
-                      <a:round/>
-                      <a:headEnd type="none" w="med" len="med"/>
-                      <a:tailEnd type="none" w="med" len="med"/>
-                    </a:lnB>
-                    <a:solidFill>
-                      <a:srgbClr val="FFFFFF"/>
-                    </a:solidFill>
-                  </a:tcPr>
-                </a:tc>
-                <a:tc>
-                  <a:txBody>
-                    <a:bodyPr/>
-                    <a:lstStyle/>
-                    <a:p>
-                      <a:pPr algn="ctr">
-                        <a:lnSpc>
-                          <a:spcPts val="1324"/>
-                        </a:lnSpc>
-                        <a:defRPr/>
-                      </a:pPr>
-                      <a:r>
-                        <a:rPr lang="en-US" sz="1103">
-                          <a:solidFill>
-                            <a:srgbClr val="4A4A4A"/>
-                          </a:solidFill>
-                          <a:latin typeface="Avenir"/>
-                          <a:ea typeface="Avenir"/>
-                          <a:cs typeface="Avenir"/>
-                          <a:sym typeface="Avenir"/>
-                        </a:rPr>
-                        <a:t>{{GPRPERSF}}</a:t>
-                      </a:r>
-                      <a:endParaRPr lang="en-US" sz="1100"/>
                     </a:p>
                   </a:txBody>
                   <a:tcPr marT="91440" marB="91440" anchor="ctr">
@@ -6418,75 +6546,7 @@
                           <a:cs typeface="Avenir"/>
                           <a:sym typeface="Avenir"/>
                         </a:rPr>
-                        <a:t>{{GPRMOMPCT}}</a:t>
-                      </a:r>
-                      <a:endParaRPr lang="en-US" sz="1100" dirty="0"/>
-                    </a:p>
-                  </a:txBody>
-                  <a:tcPr marT="91440" marB="91440" anchor="ctr">
-                    <a:lnL w="4762" cap="flat" cmpd="sng" algn="ctr">
-                      <a:solidFill>
-                        <a:srgbClr val="3B52A1"/>
-                      </a:solidFill>
-                      <a:prstDash val="solid"/>
-                      <a:round/>
-                      <a:headEnd type="none" w="med" len="med"/>
-                      <a:tailEnd type="none" w="med" len="med"/>
-                    </a:lnL>
-                    <a:lnR w="4762" cap="flat" cmpd="sng" algn="ctr">
-                      <a:solidFill>
-                        <a:srgbClr val="3B52A1"/>
-                      </a:solidFill>
-                      <a:prstDash val="solid"/>
-                      <a:round/>
-                      <a:headEnd type="none" w="med" len="med"/>
-                      <a:tailEnd type="none" w="med" len="med"/>
-                    </a:lnR>
-                    <a:lnT w="4762" cap="flat" cmpd="sng" algn="ctr">
-                      <a:solidFill>
-                        <a:srgbClr val="3B52A1"/>
-                      </a:solidFill>
-                      <a:prstDash val="solid"/>
-                      <a:round/>
-                      <a:headEnd type="none" w="med" len="med"/>
-                      <a:tailEnd type="none" w="med" len="med"/>
-                    </a:lnT>
-                    <a:lnB w="4762" cap="flat" cmpd="sng" algn="ctr">
-                      <a:solidFill>
-                        <a:srgbClr val="3B52A1"/>
-                      </a:solidFill>
-                      <a:prstDash val="solid"/>
-                      <a:round/>
-                      <a:headEnd type="none" w="med" len="med"/>
-                      <a:tailEnd type="none" w="med" len="med"/>
-                    </a:lnB>
-                    <a:solidFill>
-                      <a:srgbClr val="FFFFFF"/>
-                    </a:solidFill>
-                  </a:tcPr>
-                </a:tc>
-                <a:tc>
-                  <a:txBody>
-                    <a:bodyPr/>
-                    <a:lstStyle/>
-                    <a:p>
-                      <a:pPr algn="ctr">
-                        <a:lnSpc>
-                          <a:spcPts val="1324"/>
-                        </a:lnSpc>
-                        <a:defRPr/>
-                      </a:pPr>
-                      <a:r>
-                        <a:rPr lang="en-US" sz="1103" dirty="0">
-                          <a:solidFill>
-                            <a:srgbClr val="4A4A4A"/>
-                          </a:solidFill>
-                          <a:latin typeface="Avenir"/>
-                          <a:ea typeface="Avenir"/>
-                          <a:cs typeface="Avenir"/>
-                          <a:sym typeface="Avenir"/>
-                        </a:rPr>
-                        <a:t>{{ECONOCCPCT}}</a:t>
+                        <a:t>{{AVGSFVACA}}</a:t>
                       </a:r>
                       <a:endParaRPr lang="en-US" sz="1100" dirty="0"/>
                     </a:p>
@@ -6717,8 +6777,8 @@
         </p:nvSpPr>
         <p:spPr>
           <a:xfrm>
-            <a:off x="596302" y="6196038"/>
-            <a:ext cx="3229035" cy="2058878"/>
+            <a:off x="586152" y="6196038"/>
+            <a:ext cx="3244266" cy="2058878"/>
           </a:xfrm>
           <a:custGeom>
             <a:avLst/>
@@ -6952,7 +7012,7 @@
         </p:nvSpPr>
         <p:spPr>
           <a:xfrm>
-            <a:off x="3886200" y="9656431"/>
+            <a:off x="4648200" y="9881048"/>
             <a:ext cx="3879850" cy="114968"/>
           </a:xfrm>
           <a:prstGeom prst="rect">
@@ -6982,59 +7042,6 @@
               </a:rPr>
               <a:t>*The total income of all spaces rented at posted rates including projected rate increases</a:t>
             </a:r>
-          </a:p>
-        </p:txBody>
-      </p:sp>
-      <p:sp>
-        <p:nvSpPr>
-          <p:cNvPr id="19" name="TextBox 16">
-            <a:extLst>
-              <a:ext uri="{FF2B5EF4-FFF2-40B4-BE49-F238E27FC236}">
-                <a16:creationId xmlns:a16="http://schemas.microsoft.com/office/drawing/2014/main" id="{BADF2C1C-763C-28CB-4970-4515BBBDE0F1}"/>
-              </a:ext>
-            </a:extLst>
-          </p:cNvPr>
-          <p:cNvSpPr txBox="1"/>
-          <p:nvPr/>
-        </p:nvSpPr>
-        <p:spPr>
-          <a:xfrm>
-            <a:off x="3896203" y="9776256"/>
-            <a:ext cx="3876197" cy="243208"/>
-          </a:xfrm>
-          <a:prstGeom prst="rect">
-            <a:avLst/>
-          </a:prstGeom>
-        </p:spPr>
-        <p:txBody>
-          <a:bodyPr wrap="square" lIns="0" tIns="0" rIns="0" bIns="0" rtlCol="0" anchor="t">
-            <a:spAutoFit/>
-          </a:bodyPr>
-          <a:lstStyle/>
-          <a:p>
-            <a:pPr>
-              <a:lnSpc>
-                <a:spcPts val="963"/>
-              </a:lnSpc>
-            </a:pPr>
-            <a:r>
-              <a:rPr lang="en-US" sz="600" dirty="0">
-                <a:solidFill>
-                  <a:srgbClr val="2D2D2D"/>
-                </a:solidFill>
-                <a:latin typeface="Avenir" panose="020B0604020202020204" charset="0"/>
-              </a:rPr>
-              <a:t>**The ratio of occupied revenue (the sum of the current rent for all occupied spaces) to potential revenue (the sum of the sell rates for all spaces), expressed as a percentage</a:t>
-            </a:r>
-            <a:endParaRPr lang="en-US" sz="600" dirty="0">
-              <a:solidFill>
-                <a:srgbClr val="2D2D2D"/>
-              </a:solidFill>
-              <a:latin typeface="Avenir" panose="020B0604020202020204" charset="0"/>
-              <a:ea typeface="Avenir"/>
-              <a:cs typeface="Avenir"/>
-              <a:sym typeface="Avenir"/>
-            </a:endParaRPr>
           </a:p>
         </p:txBody>
       </p:sp>

--- a/storeinsight/public/FLASHTEMPLATE.pptx
+++ b/storeinsight/public/FLASHTEMPLATE.pptx
@@ -313,7 +313,7 @@
             <a:fld id="{1D8BD707-D9CF-40AE-B4C6-C98DA3205C09}" type="datetimeFigureOut">
               <a:rPr lang="en-US" smtClean="0"/>
               <a:pPr/>
-              <a:t>11/24/2025</a:t>
+              <a:t>12/2/2025</a:t>
             </a:fld>
             <a:endParaRPr lang="en-US"/>
           </a:p>
@@ -478,7 +478,7 @@
             <a:fld id="{1D8BD707-D9CF-40AE-B4C6-C98DA3205C09}" type="datetimeFigureOut">
               <a:rPr lang="en-US" smtClean="0"/>
               <a:pPr/>
-              <a:t>11/24/2025</a:t>
+              <a:t>12/2/2025</a:t>
             </a:fld>
             <a:endParaRPr lang="en-US"/>
           </a:p>
@@ -653,7 +653,7 @@
             <a:fld id="{1D8BD707-D9CF-40AE-B4C6-C98DA3205C09}" type="datetimeFigureOut">
               <a:rPr lang="en-US" smtClean="0"/>
               <a:pPr/>
-              <a:t>11/24/2025</a:t>
+              <a:t>12/2/2025</a:t>
             </a:fld>
             <a:endParaRPr lang="en-US"/>
           </a:p>
@@ -818,7 +818,7 @@
             <a:fld id="{1D8BD707-D9CF-40AE-B4C6-C98DA3205C09}" type="datetimeFigureOut">
               <a:rPr lang="en-US" smtClean="0"/>
               <a:pPr/>
-              <a:t>11/24/2025</a:t>
+              <a:t>12/2/2025</a:t>
             </a:fld>
             <a:endParaRPr lang="en-US"/>
           </a:p>
@@ -1060,7 +1060,7 @@
             <a:fld id="{1D8BD707-D9CF-40AE-B4C6-C98DA3205C09}" type="datetimeFigureOut">
               <a:rPr lang="en-US" smtClean="0"/>
               <a:pPr/>
-              <a:t>11/24/2025</a:t>
+              <a:t>12/2/2025</a:t>
             </a:fld>
             <a:endParaRPr lang="en-US"/>
           </a:p>
@@ -1342,7 +1342,7 @@
             <a:fld id="{1D8BD707-D9CF-40AE-B4C6-C98DA3205C09}" type="datetimeFigureOut">
               <a:rPr lang="en-US" smtClean="0"/>
               <a:pPr/>
-              <a:t>11/24/2025</a:t>
+              <a:t>12/2/2025</a:t>
             </a:fld>
             <a:endParaRPr lang="en-US"/>
           </a:p>
@@ -1758,7 +1758,7 @@
             <a:fld id="{1D8BD707-D9CF-40AE-B4C6-C98DA3205C09}" type="datetimeFigureOut">
               <a:rPr lang="en-US" smtClean="0"/>
               <a:pPr/>
-              <a:t>11/24/2025</a:t>
+              <a:t>12/2/2025</a:t>
             </a:fld>
             <a:endParaRPr lang="en-US"/>
           </a:p>
@@ -1872,7 +1872,7 @@
             <a:fld id="{1D8BD707-D9CF-40AE-B4C6-C98DA3205C09}" type="datetimeFigureOut">
               <a:rPr lang="en-US" smtClean="0"/>
               <a:pPr/>
-              <a:t>11/24/2025</a:t>
+              <a:t>12/2/2025</a:t>
             </a:fld>
             <a:endParaRPr lang="en-US"/>
           </a:p>
@@ -1964,7 +1964,7 @@
             <a:fld id="{1D8BD707-D9CF-40AE-B4C6-C98DA3205C09}" type="datetimeFigureOut">
               <a:rPr lang="en-US" smtClean="0"/>
               <a:pPr/>
-              <a:t>11/24/2025</a:t>
+              <a:t>12/2/2025</a:t>
             </a:fld>
             <a:endParaRPr lang="en-US"/>
           </a:p>
@@ -2236,7 +2236,7 @@
             <a:fld id="{1D8BD707-D9CF-40AE-B4C6-C98DA3205C09}" type="datetimeFigureOut">
               <a:rPr lang="en-US" smtClean="0"/>
               <a:pPr/>
-              <a:t>11/24/2025</a:t>
+              <a:t>12/2/2025</a:t>
             </a:fld>
             <a:endParaRPr lang="en-US"/>
           </a:p>
@@ -2485,7 +2485,7 @@
             <a:fld id="{1D8BD707-D9CF-40AE-B4C6-C98DA3205C09}" type="datetimeFigureOut">
               <a:rPr lang="en-US" smtClean="0"/>
               <a:pPr/>
-              <a:t>11/24/2025</a:t>
+              <a:t>12/2/2025</a:t>
             </a:fld>
             <a:endParaRPr lang="en-US"/>
           </a:p>
@@ -2693,7 +2693,7 @@
             <a:fld id="{1D8BD707-D9CF-40AE-B4C6-C98DA3205C09}" type="datetimeFigureOut">
               <a:rPr lang="en-US" smtClean="0"/>
               <a:pPr/>
-              <a:t>11/24/2025</a:t>
+              <a:t>12/2/2025</a:t>
             </a:fld>
             <a:endParaRPr lang="en-US"/>
           </a:p>
@@ -5511,66 +5511,59 @@
           <p:nvPr>
             <p:extLst>
               <p:ext uri="{D42A27DB-BD31-4B8C-83A1-F6EECF244321}">
-                <p14:modId xmlns:p14="http://schemas.microsoft.com/office/powerpoint/2010/main" val="2110138682"/>
+                <p14:modId xmlns:p14="http://schemas.microsoft.com/office/powerpoint/2010/main" val="3786724966"/>
               </p:ext>
             </p:extLst>
           </p:nvPr>
         </p:nvGraphicFramePr>
         <p:xfrm>
-          <a:off x="586151" y="8284048"/>
-          <a:ext cx="6600102" cy="1204913"/>
+          <a:off x="586150" y="8284048"/>
+          <a:ext cx="6609972" cy="1204913"/>
         </p:xfrm>
         <a:graphic>
           <a:graphicData uri="http://schemas.openxmlformats.org/drawingml/2006/table">
             <a:tbl>
               <a:tblPr/>
               <a:tblGrid>
-                <a:gridCol w="942871">
+                <a:gridCol w="1101662">
                   <a:extLst>
                     <a:ext uri="{9D8B030D-6E8A-4147-A177-3AD203B41FA5}">
                       <a16:colId xmlns:a16="http://schemas.microsoft.com/office/drawing/2014/main" val="20000"/>
                     </a:ext>
                   </a:extLst>
                 </a:gridCol>
-                <a:gridCol w="942871">
+                <a:gridCol w="1101662">
                   <a:extLst>
                     <a:ext uri="{9D8B030D-6E8A-4147-A177-3AD203B41FA5}">
                       <a16:colId xmlns:a16="http://schemas.microsoft.com/office/drawing/2014/main" val="20001"/>
                     </a:ext>
                   </a:extLst>
                 </a:gridCol>
-                <a:gridCol w="942871">
+                <a:gridCol w="1101662">
                   <a:extLst>
                     <a:ext uri="{9D8B030D-6E8A-4147-A177-3AD203B41FA5}">
                       <a16:colId xmlns:a16="http://schemas.microsoft.com/office/drawing/2014/main" val="20002"/>
                     </a:ext>
                   </a:extLst>
                 </a:gridCol>
-                <a:gridCol w="942871">
+                <a:gridCol w="1101662">
                   <a:extLst>
                     <a:ext uri="{9D8B030D-6E8A-4147-A177-3AD203B41FA5}">
                       <a16:colId xmlns:a16="http://schemas.microsoft.com/office/drawing/2014/main" val="20003"/>
                     </a:ext>
                   </a:extLst>
                 </a:gridCol>
-                <a:gridCol w="942871">
+                <a:gridCol w="1101662">
                   <a:extLst>
                     <a:ext uri="{9D8B030D-6E8A-4147-A177-3AD203B41FA5}">
                       <a16:colId xmlns:a16="http://schemas.microsoft.com/office/drawing/2014/main" val="20004"/>
                     </a:ext>
                   </a:extLst>
                 </a:gridCol>
-                <a:gridCol w="942871">
+                <a:gridCol w="1101662">
                   <a:extLst>
                     <a:ext uri="{9D8B030D-6E8A-4147-A177-3AD203B41FA5}">
                       <a16:colId xmlns:a16="http://schemas.microsoft.com/office/drawing/2014/main" val="20005"/>
-                    </a:ext>
-                  </a:extLst>
-                </a:gridCol>
-                <a:gridCol w="942876">
-                  <a:extLst>
-                    <a:ext uri="{9D8B030D-6E8A-4147-A177-3AD203B41FA5}">
-                      <a16:colId xmlns:a16="http://schemas.microsoft.com/office/drawing/2014/main" val="20006"/>
                     </a:ext>
                   </a:extLst>
                 </a:gridCol>
@@ -5588,7 +5581,7 @@
                         <a:defRPr/>
                       </a:pPr>
                       <a:r>
-                        <a:rPr lang="en-US" sz="902" b="1">
+                        <a:rPr lang="en-US" sz="902" b="1" dirty="0" err="1">
                           <a:solidFill>
                             <a:srgbClr val="2D2D2D"/>
                           </a:solidFill>
@@ -5597,9 +5590,24 @@
                           <a:cs typeface="Avenir Bold"/>
                           <a:sym typeface="Avenir Bold"/>
                         </a:rPr>
-                        <a:t>Proj. Rent</a:t>
+                        <a:t>Proj</a:t>
                       </a:r>
-                      <a:endParaRPr lang="en-US" sz="1100"/>
+                      <a:r>
+                        <a:rPr lang="en-US" sz="902" b="1" dirty="0">
+                          <a:solidFill>
+                            <a:srgbClr val="2D2D2D"/>
+                          </a:solidFill>
+                          <a:latin typeface="Avenir Bold"/>
+                          <a:ea typeface="Avenir Bold"/>
+                          <a:cs typeface="Avenir Bold"/>
+                          <a:sym typeface="Avenir Bold"/>
+                        </a:rPr>
+                        <a:t>. Rent</a:t>
+                      </a:r>
+                      <a:r>
+                        <a:rPr lang="en-US" sz="1100" dirty="0"/>
+                        <a:t>¹</a:t>
+                      </a:r>
                     </a:p>
                   </a:txBody>
                   <a:tcPr marT="91440" marB="91440" anchor="ctr">
@@ -5656,7 +5664,7 @@
                         <a:defRPr/>
                       </a:pPr>
                       <a:r>
-                        <a:rPr lang="en-US" sz="902" b="1">
+                        <a:rPr lang="en-US" sz="902" b="1" dirty="0" err="1">
                           <a:solidFill>
                             <a:srgbClr val="2D2D2D"/>
                           </a:solidFill>
@@ -5665,9 +5673,24 @@
                           <a:cs typeface="Avenir Bold"/>
                           <a:sym typeface="Avenir Bold"/>
                         </a:rPr>
-                        <a:t>Proj. Rent / SF</a:t>
+                        <a:t>Proj</a:t>
                       </a:r>
-                      <a:endParaRPr lang="en-US" sz="1100"/>
+                      <a:r>
+                        <a:rPr lang="en-US" sz="902" b="1" dirty="0">
+                          <a:solidFill>
+                            <a:srgbClr val="2D2D2D"/>
+                          </a:solidFill>
+                          <a:latin typeface="Avenir Bold"/>
+                          <a:ea typeface="Avenir Bold"/>
+                          <a:cs typeface="Avenir Bold"/>
+                          <a:sym typeface="Avenir Bold"/>
+                        </a:rPr>
+                        <a:t>. Rent / SF</a:t>
+                      </a:r>
+                      <a:r>
+                        <a:rPr lang="en-US" sz="1100" dirty="0"/>
+                        <a:t>¹</a:t>
+                      </a:r>
                     </a:p>
                   </a:txBody>
                   <a:tcPr marT="91440" marB="91440" anchor="ctr">
@@ -5731,9 +5754,12 @@
                           <a:latin typeface="Avenir Bold"/>
                           <a:sym typeface="Avenir Bold"/>
                         </a:rPr>
-                        <a:t>Effective Pot. Rent</a:t>
+                        <a:t>Sell Rate Pot. Rent</a:t>
                       </a:r>
-                      <a:endParaRPr lang="en-US" sz="1100" dirty="0"/>
+                      <a:r>
+                        <a:rPr lang="en-US" sz="1100" dirty="0"/>
+                        <a:t>²</a:t>
+                      </a:r>
                     </a:p>
                   </a:txBody>
                   <a:tcPr marT="91440" marB="91440" anchor="ctr">
@@ -5799,101 +5825,12 @@
                           <a:cs typeface="Avenir Bold"/>
                           <a:sym typeface="Avenir Bold"/>
                         </a:rPr>
-                        <a:t>Effective / </a:t>
+                        <a:t>Sell Rate / SqFt</a:t>
                       </a:r>
                       <a:r>
-                        <a:rPr lang="en-US" sz="902" b="1" dirty="0" err="1">
-                          <a:solidFill>
-                            <a:srgbClr val="2D2D2D"/>
-                          </a:solidFill>
-                          <a:latin typeface="Avenir Bold"/>
-                          <a:ea typeface="Avenir Bold"/>
-                          <a:cs typeface="Avenir Bold"/>
-                          <a:sym typeface="Avenir Bold"/>
-                        </a:rPr>
-                        <a:t>SqFt</a:t>
+                        <a:rPr lang="en-US" sz="1100" dirty="0"/>
+                        <a:t>²</a:t>
                       </a:r>
-                      <a:endParaRPr lang="en-US" sz="1100" dirty="0"/>
-                    </a:p>
-                  </a:txBody>
-                  <a:tcPr marT="91440" marB="91440" anchor="ctr">
-                    <a:lnL w="4762" cap="flat" cmpd="sng" algn="ctr">
-                      <a:solidFill>
-                        <a:srgbClr val="3B52A1"/>
-                      </a:solidFill>
-                      <a:prstDash val="solid"/>
-                      <a:round/>
-                      <a:headEnd type="none" w="med" len="med"/>
-                      <a:tailEnd type="none" w="med" len="med"/>
-                    </a:lnL>
-                    <a:lnR w="4762" cap="flat" cmpd="sng" algn="ctr">
-                      <a:solidFill>
-                        <a:srgbClr val="3B52A1"/>
-                      </a:solidFill>
-                      <a:prstDash val="solid"/>
-                      <a:round/>
-                      <a:headEnd type="none" w="med" len="med"/>
-                      <a:tailEnd type="none" w="med" len="med"/>
-                    </a:lnR>
-                    <a:lnT w="4762" cap="flat" cmpd="sng" algn="ctr">
-                      <a:solidFill>
-                        <a:srgbClr val="3B52A1"/>
-                      </a:solidFill>
-                      <a:prstDash val="solid"/>
-                      <a:round/>
-                      <a:headEnd type="none" w="med" len="med"/>
-                      <a:tailEnd type="none" w="med" len="med"/>
-                    </a:lnT>
-                    <a:lnB w="4762" cap="flat" cmpd="sng" algn="ctr">
-                      <a:solidFill>
-                        <a:srgbClr val="3B52A1"/>
-                      </a:solidFill>
-                      <a:prstDash val="solid"/>
-                      <a:round/>
-                      <a:headEnd type="none" w="med" len="med"/>
-                      <a:tailEnd type="none" w="med" len="med"/>
-                    </a:lnB>
-                    <a:solidFill>
-                      <a:srgbClr val="FFFFFF"/>
-                    </a:solidFill>
-                  </a:tcPr>
-                </a:tc>
-                <a:tc>
-                  <a:txBody>
-                    <a:bodyPr/>
-                    <a:lstStyle/>
-                    <a:p>
-                      <a:pPr algn="ctr">
-                        <a:lnSpc>
-                          <a:spcPts val="1083"/>
-                        </a:lnSpc>
-                        <a:defRPr/>
-                      </a:pPr>
-                      <a:r>
-                        <a:rPr lang="en-US" sz="902" b="1">
-                          <a:solidFill>
-                            <a:srgbClr val="2D2D2D"/>
-                          </a:solidFill>
-                          <a:latin typeface="Avenir Bold"/>
-                          <a:ea typeface="Avenir Bold"/>
-                          <a:cs typeface="Avenir Bold"/>
-                          <a:sym typeface="Avenir Bold"/>
-                        </a:rPr>
-                        <a:t>*Gross </a:t>
-                      </a:r>
-                      <a:r>
-                        <a:rPr lang="en-US" sz="902" b="1" dirty="0">
-                          <a:solidFill>
-                            <a:srgbClr val="2D2D2D"/>
-                          </a:solidFill>
-                          <a:latin typeface="Avenir Bold"/>
-                          <a:ea typeface="Avenir Bold"/>
-                          <a:cs typeface="Avenir Bold"/>
-                          <a:sym typeface="Avenir Bold"/>
-                        </a:rPr>
-                        <a:t>Pot. Rent</a:t>
-                      </a:r>
-                      <a:endParaRPr lang="en-US" sz="1100" dirty="0"/>
                     </a:p>
                   </a:txBody>
                   <a:tcPr marT="91440" marB="91440" anchor="ctr">
@@ -5959,21 +5896,12 @@
                           <a:cs typeface="Avenir Bold"/>
                           <a:sym typeface="Avenir Bold"/>
                         </a:rPr>
-                        <a:t>GPR / </a:t>
+                        <a:t>Gross Pot. Rent</a:t>
                       </a:r>
                       <a:r>
-                        <a:rPr lang="en-US" sz="902" b="1" dirty="0" err="1">
-                          <a:solidFill>
-                            <a:srgbClr val="2D2D2D"/>
-                          </a:solidFill>
-                          <a:latin typeface="Avenir Bold"/>
-                          <a:ea typeface="Avenir Bold"/>
-                          <a:cs typeface="Avenir Bold"/>
-                          <a:sym typeface="Avenir Bold"/>
-                        </a:rPr>
-                        <a:t>SqFt</a:t>
+                        <a:rPr lang="en-US" sz="1100" dirty="0"/>
+                        <a:t>³</a:t>
                       </a:r>
-                      <a:endParaRPr lang="en-US" sz="1100" dirty="0"/>
                     </a:p>
                   </a:txBody>
                   <a:tcPr marT="91440" marB="91440" anchor="ctr">
@@ -6039,33 +5967,12 @@
                           <a:cs typeface="Avenir Bold"/>
                           <a:sym typeface="Avenir Bold"/>
                         </a:rPr>
-                        <a:t>Avg. Rent / </a:t>
+                        <a:t>GPR / SqFt</a:t>
                       </a:r>
                       <a:r>
-                        <a:rPr lang="en-US" sz="902" b="1" dirty="0" err="1">
-                          <a:solidFill>
-                            <a:srgbClr val="2D2D2D"/>
-                          </a:solidFill>
-                          <a:latin typeface="Avenir Bold"/>
-                          <a:ea typeface="Avenir Bold"/>
-                          <a:cs typeface="Avenir Bold"/>
-                          <a:sym typeface="Avenir Bold"/>
-                        </a:rPr>
-                        <a:t>SqFt</a:t>
+                        <a:rPr lang="en-US" sz="1100" dirty="0"/>
+                        <a:t>³</a:t>
                       </a:r>
-                      <a:r>
-                        <a:rPr lang="en-US" sz="902" b="1" dirty="0">
-                          <a:solidFill>
-                            <a:srgbClr val="2D2D2D"/>
-                          </a:solidFill>
-                          <a:latin typeface="Avenir Bold"/>
-                          <a:ea typeface="Avenir Bold"/>
-                          <a:cs typeface="Avenir Bold"/>
-                          <a:sym typeface="Avenir Bold"/>
-                        </a:rPr>
-                        <a:t> Vacant</a:t>
-                      </a:r>
-                      <a:endParaRPr lang="en-US" sz="1100" dirty="0"/>
                     </a:p>
                   </a:txBody>
                   <a:tcPr marT="91440" marB="91440" anchor="ctr">
@@ -6342,7 +6249,7 @@
                           <a:cs typeface="Avenir"/>
                           <a:sym typeface="Avenir"/>
                         </a:rPr>
-                        <a:t>{{EFFRENTSF}}</a:t>
+                        <a:t>{{AVGSFVACA}}</a:t>
                       </a:r>
                       <a:endParaRPr lang="en-US" sz="1100" dirty="0"/>
                     </a:p>
@@ -6479,74 +6386,6 @@
                           <a:sym typeface="Avenir"/>
                         </a:rPr>
                         <a:t>{{GROSSPOTSFT}}</a:t>
-                      </a:r>
-                      <a:endParaRPr lang="en-US" sz="1100" dirty="0"/>
-                    </a:p>
-                  </a:txBody>
-                  <a:tcPr marT="91440" marB="91440" anchor="ctr">
-                    <a:lnL w="4762" cap="flat" cmpd="sng" algn="ctr">
-                      <a:solidFill>
-                        <a:srgbClr val="3B52A1"/>
-                      </a:solidFill>
-                      <a:prstDash val="solid"/>
-                      <a:round/>
-                      <a:headEnd type="none" w="med" len="med"/>
-                      <a:tailEnd type="none" w="med" len="med"/>
-                    </a:lnL>
-                    <a:lnR w="4762" cap="flat" cmpd="sng" algn="ctr">
-                      <a:solidFill>
-                        <a:srgbClr val="3B52A1"/>
-                      </a:solidFill>
-                      <a:prstDash val="solid"/>
-                      <a:round/>
-                      <a:headEnd type="none" w="med" len="med"/>
-                      <a:tailEnd type="none" w="med" len="med"/>
-                    </a:lnR>
-                    <a:lnT w="4762" cap="flat" cmpd="sng" algn="ctr">
-                      <a:solidFill>
-                        <a:srgbClr val="3B52A1"/>
-                      </a:solidFill>
-                      <a:prstDash val="solid"/>
-                      <a:round/>
-                      <a:headEnd type="none" w="med" len="med"/>
-                      <a:tailEnd type="none" w="med" len="med"/>
-                    </a:lnT>
-                    <a:lnB w="4762" cap="flat" cmpd="sng" algn="ctr">
-                      <a:solidFill>
-                        <a:srgbClr val="3B52A1"/>
-                      </a:solidFill>
-                      <a:prstDash val="solid"/>
-                      <a:round/>
-                      <a:headEnd type="none" w="med" len="med"/>
-                      <a:tailEnd type="none" w="med" len="med"/>
-                    </a:lnB>
-                    <a:solidFill>
-                      <a:srgbClr val="FFFFFF"/>
-                    </a:solidFill>
-                  </a:tcPr>
-                </a:tc>
-                <a:tc>
-                  <a:txBody>
-                    <a:bodyPr/>
-                    <a:lstStyle/>
-                    <a:p>
-                      <a:pPr algn="ctr">
-                        <a:lnSpc>
-                          <a:spcPts val="1324"/>
-                        </a:lnSpc>
-                        <a:defRPr/>
-                      </a:pPr>
-                      <a:r>
-                        <a:rPr lang="en-US" sz="1103" dirty="0">
-                          <a:solidFill>
-                            <a:srgbClr val="4A4A4A"/>
-                          </a:solidFill>
-                          <a:latin typeface="Avenir"/>
-                          <a:ea typeface="Avenir"/>
-                          <a:cs typeface="Avenir"/>
-                          <a:sym typeface="Avenir"/>
-                        </a:rPr>
-                        <a:t>{{AVGSFVACA}}</a:t>
                       </a:r>
                       <a:endParaRPr lang="en-US" sz="1100" dirty="0"/>
                     </a:p>
@@ -6778,7 +6617,7 @@
         <p:spPr>
           <a:xfrm>
             <a:off x="586152" y="6196038"/>
-            <a:ext cx="3244266" cy="2058878"/>
+            <a:ext cx="3223848" cy="2058878"/>
           </a:xfrm>
           <a:custGeom>
             <a:avLst/>
@@ -6830,8 +6669,8 @@
         </p:nvSpPr>
         <p:spPr>
           <a:xfrm>
-            <a:off x="3957214" y="6196038"/>
-            <a:ext cx="3229035" cy="2058878"/>
+            <a:off x="3962401" y="6196038"/>
+            <a:ext cx="3223848" cy="2058878"/>
           </a:xfrm>
           <a:custGeom>
             <a:avLst/>
@@ -7000,10 +6839,10 @@
       </p:sp>
       <p:sp>
         <p:nvSpPr>
-          <p:cNvPr id="23" name="TextBox 16">
+          <p:cNvPr id="19" name="TextBox 16">
             <a:extLst>
               <a:ext uri="{FF2B5EF4-FFF2-40B4-BE49-F238E27FC236}">
-                <a16:creationId xmlns:a16="http://schemas.microsoft.com/office/drawing/2014/main" id="{27240F43-9CF5-672C-57EE-5C8B36A704D0}"/>
+                <a16:creationId xmlns:a16="http://schemas.microsoft.com/office/drawing/2014/main" id="{4302E7E9-F453-4B4E-1E4F-2C5DF336E1A6}"/>
               </a:ext>
             </a:extLst>
           </p:cNvPr>
@@ -7012,8 +6851,8 @@
         </p:nvSpPr>
         <p:spPr>
           <a:xfrm>
-            <a:off x="4648200" y="9881048"/>
-            <a:ext cx="3879850" cy="114968"/>
+            <a:off x="4267200" y="9669495"/>
+            <a:ext cx="3567112" cy="379335"/>
           </a:xfrm>
           <a:prstGeom prst="rect">
             <a:avLst/>
@@ -7025,13 +6864,13 @@
           </a:bodyPr>
           <a:lstStyle/>
           <a:p>
-            <a:pPr algn="l">
+            <a:pPr>
               <a:lnSpc>
                 <a:spcPts val="963"/>
               </a:lnSpc>
             </a:pPr>
             <a:r>
-              <a:rPr lang="en-US" sz="600" dirty="0">
+              <a:rPr lang="en-US" sz="700" dirty="0">
                 <a:solidFill>
                   <a:srgbClr val="2D2D2D"/>
                 </a:solidFill>
@@ -7040,8 +6879,97 @@
                 <a:cs typeface="Avenir"/>
                 <a:sym typeface="Avenir"/>
               </a:rPr>
-              <a:t>*The total income of all spaces rented at posted rates including projected rate increases</a:t>
-            </a:r>
+              <a:t>Total income from occupied space at in-place rents, including approved rate increases</a:t>
+            </a:r>
+            <a:r>
+              <a:rPr lang="en-US" sz="700" dirty="0">
+                <a:solidFill>
+                  <a:srgbClr val="2D2D2D"/>
+                </a:solidFill>
+              </a:rPr>
+              <a:t>¹</a:t>
+            </a:r>
+          </a:p>
+          <a:p>
+            <a:pPr>
+              <a:lnSpc>
+                <a:spcPts val="963"/>
+              </a:lnSpc>
+            </a:pPr>
+            <a:r>
+              <a:rPr lang="en-US" sz="700" dirty="0">
+                <a:solidFill>
+                  <a:srgbClr val="2D2D2D"/>
+                </a:solidFill>
+                <a:latin typeface="Avenir"/>
+                <a:sym typeface="Avenir"/>
+              </a:rPr>
+              <a:t>Total income if all vacant spaces were leased at the sell (current) rate and </a:t>
+            </a:r>
+            <a:r>
+              <a:rPr lang="en-US" sz="700" dirty="0" err="1">
+                <a:solidFill>
+                  <a:srgbClr val="2D2D2D"/>
+                </a:solidFill>
+                <a:latin typeface="Avenir"/>
+                <a:sym typeface="Avenir"/>
+              </a:rPr>
+              <a:t>proj</a:t>
+            </a:r>
+            <a:r>
+              <a:rPr lang="en-US" sz="700" dirty="0">
+                <a:solidFill>
+                  <a:srgbClr val="2D2D2D"/>
+                </a:solidFill>
+                <a:latin typeface="Avenir"/>
+                <a:sym typeface="Avenir"/>
+              </a:rPr>
+              <a:t>. rent</a:t>
+            </a:r>
+            <a:r>
+              <a:rPr lang="en-US" sz="700" dirty="0">
+                <a:solidFill>
+                  <a:srgbClr val="2D2D2D"/>
+                </a:solidFill>
+              </a:rPr>
+              <a:t>²</a:t>
+            </a:r>
+          </a:p>
+          <a:p>
+            <a:pPr>
+              <a:lnSpc>
+                <a:spcPts val="963"/>
+              </a:lnSpc>
+            </a:pPr>
+            <a:r>
+              <a:rPr lang="en-US" sz="700" dirty="0">
+                <a:solidFill>
+                  <a:srgbClr val="2D2D2D"/>
+                </a:solidFill>
+                <a:latin typeface="Avenir"/>
+                <a:ea typeface="Avenir"/>
+                <a:cs typeface="Avenir"/>
+                <a:sym typeface="Avenir"/>
+              </a:rPr>
+              <a:t>Projected total income assuming 100% occupancy at the set (target) rental rates</a:t>
+            </a:r>
+            <a:r>
+              <a:rPr lang="en-US" sz="700" dirty="0">
+                <a:solidFill>
+                  <a:srgbClr val="2D2D2D"/>
+                </a:solidFill>
+              </a:rPr>
+              <a:t>³</a:t>
+            </a:r>
+            <a:endParaRPr lang="en-US" sz="700" dirty="0">
+              <a:solidFill>
+                <a:srgbClr val="2D2D2D"/>
+              </a:solidFill>
+              <a:latin typeface="Avenir"/>
+              <a:ea typeface="Avenir"/>
+              <a:cs typeface="Avenir"/>
+              <a:sym typeface="Avenir"/>
+            </a:endParaRPr>
           </a:p>
         </p:txBody>
       </p:sp>

--- a/storeinsight/public/FLASHTEMPLATE.pptx
+++ b/storeinsight/public/FLASHTEMPLATE.pptx
@@ -5511,7 +5511,7 @@
           <p:nvPr>
             <p:extLst>
               <p:ext uri="{D42A27DB-BD31-4B8C-83A1-F6EECF244321}">
-                <p14:modId xmlns:p14="http://schemas.microsoft.com/office/powerpoint/2010/main" val="3786724966"/>
+                <p14:modId xmlns:p14="http://schemas.microsoft.com/office/powerpoint/2010/main" val="3246744083"/>
               </p:ext>
             </p:extLst>
           </p:nvPr>
@@ -5687,10 +5687,7 @@
                         </a:rPr>
                         <a:t>. Rent / SF</a:t>
                       </a:r>
-                      <a:r>
-                        <a:rPr lang="en-US" sz="1100" dirty="0"/>
-                        <a:t>¹</a:t>
-                      </a:r>
+                      <a:endParaRPr lang="en-US" sz="1100" dirty="0"/>
                     </a:p>
                   </a:txBody>
                   <a:tcPr marT="91440" marB="91440" anchor="ctr">
@@ -5825,12 +5822,21 @@
                           <a:cs typeface="Avenir Bold"/>
                           <a:sym typeface="Avenir Bold"/>
                         </a:rPr>
-                        <a:t>Sell Rate / SqFt</a:t>
+                        <a:t>Sell Rate / </a:t>
                       </a:r>
                       <a:r>
-                        <a:rPr lang="en-US" sz="1100" dirty="0"/>
-                        <a:t>²</a:t>
+                        <a:rPr lang="en-US" sz="902" b="1" dirty="0" err="1">
+                          <a:solidFill>
+                            <a:srgbClr val="2D2D2D"/>
+                          </a:solidFill>
+                          <a:latin typeface="Avenir Bold"/>
+                          <a:ea typeface="Avenir Bold"/>
+                          <a:cs typeface="Avenir Bold"/>
+                          <a:sym typeface="Avenir Bold"/>
+                        </a:rPr>
+                        <a:t>SqFt</a:t>
                       </a:r>
+                      <a:endParaRPr lang="en-US" sz="1100" dirty="0"/>
                     </a:p>
                   </a:txBody>
                   <a:tcPr marT="91440" marB="91440" anchor="ctr">
@@ -5967,12 +5973,21 @@
                           <a:cs typeface="Avenir Bold"/>
                           <a:sym typeface="Avenir Bold"/>
                         </a:rPr>
-                        <a:t>GPR / SqFt</a:t>
+                        <a:t>GPR / </a:t>
                       </a:r>
                       <a:r>
-                        <a:rPr lang="en-US" sz="1100" dirty="0"/>
-                        <a:t>³</a:t>
+                        <a:rPr lang="en-US" sz="902" b="1" dirty="0" err="1">
+                          <a:solidFill>
+                            <a:srgbClr val="2D2D2D"/>
+                          </a:solidFill>
+                          <a:latin typeface="Avenir Bold"/>
+                          <a:ea typeface="Avenir Bold"/>
+                          <a:cs typeface="Avenir Bold"/>
+                          <a:sym typeface="Avenir Bold"/>
+                        </a:rPr>
+                        <a:t>SqFt</a:t>
                       </a:r>
+                      <a:endParaRPr lang="en-US" sz="1100" dirty="0"/>
                     </a:p>
                   </a:txBody>
                   <a:tcPr marT="91440" marB="91440" anchor="ctr">
@@ -6904,7 +6919,7 @@
                 <a:latin typeface="Avenir"/>
                 <a:sym typeface="Avenir"/>
               </a:rPr>
-              <a:t>Total income if all vacant spaces were leased at the sell (current) rate and </a:t>
+              <a:t>Total income if all vacant spaces were leased at the sell (current) rate plus </a:t>
             </a:r>
             <a:r>
               <a:rPr lang="en-US" sz="700" dirty="0" err="1">

--- a/storeinsight/public/FLASHTEMPLATE.pptx
+++ b/storeinsight/public/FLASHTEMPLATE.pptx
@@ -313,7 +313,7 @@
             <a:fld id="{1D8BD707-D9CF-40AE-B4C6-C98DA3205C09}" type="datetimeFigureOut">
               <a:rPr lang="en-US" smtClean="0"/>
               <a:pPr/>
-              <a:t>12/2/2025</a:t>
+              <a:t>12/9/2025</a:t>
             </a:fld>
             <a:endParaRPr lang="en-US"/>
           </a:p>
@@ -478,7 +478,7 @@
             <a:fld id="{1D8BD707-D9CF-40AE-B4C6-C98DA3205C09}" type="datetimeFigureOut">
               <a:rPr lang="en-US" smtClean="0"/>
               <a:pPr/>
-              <a:t>12/2/2025</a:t>
+              <a:t>12/9/2025</a:t>
             </a:fld>
             <a:endParaRPr lang="en-US"/>
           </a:p>
@@ -653,7 +653,7 @@
             <a:fld id="{1D8BD707-D9CF-40AE-B4C6-C98DA3205C09}" type="datetimeFigureOut">
               <a:rPr lang="en-US" smtClean="0"/>
               <a:pPr/>
-              <a:t>12/2/2025</a:t>
+              <a:t>12/9/2025</a:t>
             </a:fld>
             <a:endParaRPr lang="en-US"/>
           </a:p>
@@ -818,7 +818,7 @@
             <a:fld id="{1D8BD707-D9CF-40AE-B4C6-C98DA3205C09}" type="datetimeFigureOut">
               <a:rPr lang="en-US" smtClean="0"/>
               <a:pPr/>
-              <a:t>12/2/2025</a:t>
+              <a:t>12/9/2025</a:t>
             </a:fld>
             <a:endParaRPr lang="en-US"/>
           </a:p>
@@ -1060,7 +1060,7 @@
             <a:fld id="{1D8BD707-D9CF-40AE-B4C6-C98DA3205C09}" type="datetimeFigureOut">
               <a:rPr lang="en-US" smtClean="0"/>
               <a:pPr/>
-              <a:t>12/2/2025</a:t>
+              <a:t>12/9/2025</a:t>
             </a:fld>
             <a:endParaRPr lang="en-US"/>
           </a:p>
@@ -1342,7 +1342,7 @@
             <a:fld id="{1D8BD707-D9CF-40AE-B4C6-C98DA3205C09}" type="datetimeFigureOut">
               <a:rPr lang="en-US" smtClean="0"/>
               <a:pPr/>
-              <a:t>12/2/2025</a:t>
+              <a:t>12/9/2025</a:t>
             </a:fld>
             <a:endParaRPr lang="en-US"/>
           </a:p>
@@ -1758,7 +1758,7 @@
             <a:fld id="{1D8BD707-D9CF-40AE-B4C6-C98DA3205C09}" type="datetimeFigureOut">
               <a:rPr lang="en-US" smtClean="0"/>
               <a:pPr/>
-              <a:t>12/2/2025</a:t>
+              <a:t>12/9/2025</a:t>
             </a:fld>
             <a:endParaRPr lang="en-US"/>
           </a:p>
@@ -1872,7 +1872,7 @@
             <a:fld id="{1D8BD707-D9CF-40AE-B4C6-C98DA3205C09}" type="datetimeFigureOut">
               <a:rPr lang="en-US" smtClean="0"/>
               <a:pPr/>
-              <a:t>12/2/2025</a:t>
+              <a:t>12/9/2025</a:t>
             </a:fld>
             <a:endParaRPr lang="en-US"/>
           </a:p>
@@ -1964,7 +1964,7 @@
             <a:fld id="{1D8BD707-D9CF-40AE-B4C6-C98DA3205C09}" type="datetimeFigureOut">
               <a:rPr lang="en-US" smtClean="0"/>
               <a:pPr/>
-              <a:t>12/2/2025</a:t>
+              <a:t>12/9/2025</a:t>
             </a:fld>
             <a:endParaRPr lang="en-US"/>
           </a:p>
@@ -2236,7 +2236,7 @@
             <a:fld id="{1D8BD707-D9CF-40AE-B4C6-C98DA3205C09}" type="datetimeFigureOut">
               <a:rPr lang="en-US" smtClean="0"/>
               <a:pPr/>
-              <a:t>12/2/2025</a:t>
+              <a:t>12/9/2025</a:t>
             </a:fld>
             <a:endParaRPr lang="en-US"/>
           </a:p>
@@ -2485,7 +2485,7 @@
             <a:fld id="{1D8BD707-D9CF-40AE-B4C6-C98DA3205C09}" type="datetimeFigureOut">
               <a:rPr lang="en-US" smtClean="0"/>
               <a:pPr/>
-              <a:t>12/2/2025</a:t>
+              <a:t>12/9/2025</a:t>
             </a:fld>
             <a:endParaRPr lang="en-US"/>
           </a:p>
@@ -2693,7 +2693,7 @@
             <a:fld id="{1D8BD707-D9CF-40AE-B4C6-C98DA3205C09}" type="datetimeFigureOut">
               <a:rPr lang="en-US" smtClean="0"/>
               <a:pPr/>
-              <a:t>12/2/2025</a:t>
+              <a:t>12/9/2025</a:t>
             </a:fld>
             <a:endParaRPr lang="en-US"/>
           </a:p>
@@ -6866,7 +6866,7 @@
         </p:nvSpPr>
         <p:spPr>
           <a:xfrm>
-            <a:off x="4267200" y="9669495"/>
+            <a:off x="4267200" y="9535601"/>
             <a:ext cx="3567112" cy="379335"/>
           </a:xfrm>
           <a:prstGeom prst="rect">

--- a/storeinsight/public/FLASHTEMPLATE.pptx
+++ b/storeinsight/public/FLASHTEMPLATE.pptx
@@ -6820,14 +6820,14 @@
         <p:spPr>
           <a:xfrm>
             <a:off x="5315253" y="5983083"/>
-            <a:ext cx="512957" cy="133377"/>
+            <a:ext cx="704547" cy="121252"/>
           </a:xfrm>
           <a:prstGeom prst="rect">
             <a:avLst/>
           </a:prstGeom>
         </p:spPr>
         <p:txBody>
-          <a:bodyPr lIns="0" tIns="0" rIns="0" bIns="0" rtlCol="0" anchor="t">
+          <a:bodyPr wrap="square" lIns="0" tIns="0" rIns="0" bIns="0" rtlCol="0" anchor="t">
             <a:spAutoFit/>
           </a:bodyPr>
           <a:lstStyle/>
@@ -6838,7 +6838,7 @@
               </a:lnSpc>
             </a:pPr>
             <a:r>
-              <a:rPr lang="en-US" sz="802">
+              <a:rPr lang="en-US" sz="802" dirty="0">
                 <a:solidFill>
                   <a:srgbClr val="2D2D2D"/>
                 </a:solidFill>

--- a/storeinsight/public/FLASHTEMPLATE.pptx
+++ b/storeinsight/public/FLASHTEMPLATE.pptx
@@ -6866,8 +6866,8 @@
         </p:nvSpPr>
         <p:spPr>
           <a:xfrm>
-            <a:off x="4267200" y="9535601"/>
-            <a:ext cx="3567112" cy="379335"/>
+            <a:off x="3886201" y="9535601"/>
+            <a:ext cx="3948112" cy="379335"/>
           </a:xfrm>
           <a:prstGeom prst="rect">
             <a:avLst/>

--- a/storeinsight/public/FLASHTEMPLATE.pptx
+++ b/storeinsight/public/FLASHTEMPLATE.pptx
@@ -313,7 +313,7 @@
             <a:fld id="{1D8BD707-D9CF-40AE-B4C6-C98DA3205C09}" type="datetimeFigureOut">
               <a:rPr lang="en-US" smtClean="0"/>
               <a:pPr/>
-              <a:t>12/9/2025</a:t>
+              <a:t>12/10/2025</a:t>
             </a:fld>
             <a:endParaRPr lang="en-US"/>
           </a:p>
@@ -478,7 +478,7 @@
             <a:fld id="{1D8BD707-D9CF-40AE-B4C6-C98DA3205C09}" type="datetimeFigureOut">
               <a:rPr lang="en-US" smtClean="0"/>
               <a:pPr/>
-              <a:t>12/9/2025</a:t>
+              <a:t>12/10/2025</a:t>
             </a:fld>
             <a:endParaRPr lang="en-US"/>
           </a:p>
@@ -653,7 +653,7 @@
             <a:fld id="{1D8BD707-D9CF-40AE-B4C6-C98DA3205C09}" type="datetimeFigureOut">
               <a:rPr lang="en-US" smtClean="0"/>
               <a:pPr/>
-              <a:t>12/9/2025</a:t>
+              <a:t>12/10/2025</a:t>
             </a:fld>
             <a:endParaRPr lang="en-US"/>
           </a:p>
@@ -818,7 +818,7 @@
             <a:fld id="{1D8BD707-D9CF-40AE-B4C6-C98DA3205C09}" type="datetimeFigureOut">
               <a:rPr lang="en-US" smtClean="0"/>
               <a:pPr/>
-              <a:t>12/9/2025</a:t>
+              <a:t>12/10/2025</a:t>
             </a:fld>
             <a:endParaRPr lang="en-US"/>
           </a:p>
@@ -1060,7 +1060,7 @@
             <a:fld id="{1D8BD707-D9CF-40AE-B4C6-C98DA3205C09}" type="datetimeFigureOut">
               <a:rPr lang="en-US" smtClean="0"/>
               <a:pPr/>
-              <a:t>12/9/2025</a:t>
+              <a:t>12/10/2025</a:t>
             </a:fld>
             <a:endParaRPr lang="en-US"/>
           </a:p>
@@ -1342,7 +1342,7 @@
             <a:fld id="{1D8BD707-D9CF-40AE-B4C6-C98DA3205C09}" type="datetimeFigureOut">
               <a:rPr lang="en-US" smtClean="0"/>
               <a:pPr/>
-              <a:t>12/9/2025</a:t>
+              <a:t>12/10/2025</a:t>
             </a:fld>
             <a:endParaRPr lang="en-US"/>
           </a:p>
@@ -1758,7 +1758,7 @@
             <a:fld id="{1D8BD707-D9CF-40AE-B4C6-C98DA3205C09}" type="datetimeFigureOut">
               <a:rPr lang="en-US" smtClean="0"/>
               <a:pPr/>
-              <a:t>12/9/2025</a:t>
+              <a:t>12/10/2025</a:t>
             </a:fld>
             <a:endParaRPr lang="en-US"/>
           </a:p>
@@ -1872,7 +1872,7 @@
             <a:fld id="{1D8BD707-D9CF-40AE-B4C6-C98DA3205C09}" type="datetimeFigureOut">
               <a:rPr lang="en-US" smtClean="0"/>
               <a:pPr/>
-              <a:t>12/9/2025</a:t>
+              <a:t>12/10/2025</a:t>
             </a:fld>
             <a:endParaRPr lang="en-US"/>
           </a:p>
@@ -1964,7 +1964,7 @@
             <a:fld id="{1D8BD707-D9CF-40AE-B4C6-C98DA3205C09}" type="datetimeFigureOut">
               <a:rPr lang="en-US" smtClean="0"/>
               <a:pPr/>
-              <a:t>12/9/2025</a:t>
+              <a:t>12/10/2025</a:t>
             </a:fld>
             <a:endParaRPr lang="en-US"/>
           </a:p>
@@ -2236,7 +2236,7 @@
             <a:fld id="{1D8BD707-D9CF-40AE-B4C6-C98DA3205C09}" type="datetimeFigureOut">
               <a:rPr lang="en-US" smtClean="0"/>
               <a:pPr/>
-              <a:t>12/9/2025</a:t>
+              <a:t>12/10/2025</a:t>
             </a:fld>
             <a:endParaRPr lang="en-US"/>
           </a:p>
@@ -2485,7 +2485,7 @@
             <a:fld id="{1D8BD707-D9CF-40AE-B4C6-C98DA3205C09}" type="datetimeFigureOut">
               <a:rPr lang="en-US" smtClean="0"/>
               <a:pPr/>
-              <a:t>12/9/2025</a:t>
+              <a:t>12/10/2025</a:t>
             </a:fld>
             <a:endParaRPr lang="en-US"/>
           </a:p>
@@ -2693,7 +2693,7 @@
             <a:fld id="{1D8BD707-D9CF-40AE-B4C6-C98DA3205C09}" type="datetimeFigureOut">
               <a:rPr lang="en-US" smtClean="0"/>
               <a:pPr/>
-              <a:t>12/9/2025</a:t>
+              <a:t>12/10/2025</a:t>
             </a:fld>
             <a:endParaRPr lang="en-US"/>
           </a:p>
@@ -6866,7 +6866,7 @@
         </p:nvSpPr>
         <p:spPr>
           <a:xfrm>
-            <a:off x="3886201" y="9535601"/>
+            <a:off x="3962401" y="9558940"/>
             <a:ext cx="3948112" cy="379335"/>
           </a:xfrm>
           <a:prstGeom prst="rect">

--- a/storeinsight/public/FLASHTEMPLATE.pptx
+++ b/storeinsight/public/FLASHTEMPLATE.pptx
@@ -6885,7 +6885,7 @@
               </a:lnSpc>
             </a:pPr>
             <a:r>
-              <a:rPr lang="en-US" sz="700" dirty="0">
+              <a:rPr lang="en-US" sz="700" i="1" dirty="0">
                 <a:solidFill>
                   <a:srgbClr val="2D2D2D"/>
                 </a:solidFill>
@@ -6897,7 +6897,7 @@
               <a:t>Total income from occupied space at in-place rents, including approved rate increases</a:t>
             </a:r>
             <a:r>
-              <a:rPr lang="en-US" sz="700" dirty="0">
+              <a:rPr lang="en-US" sz="700" i="1" dirty="0">
                 <a:solidFill>
                   <a:srgbClr val="2D2D2D"/>
                 </a:solidFill>
@@ -6912,7 +6912,7 @@
               </a:lnSpc>
             </a:pPr>
             <a:r>
-              <a:rPr lang="en-US" sz="700" dirty="0">
+              <a:rPr lang="en-US" sz="700" i="1" dirty="0">
                 <a:solidFill>
                   <a:srgbClr val="2D2D2D"/>
                 </a:solidFill>
@@ -6922,7 +6922,7 @@
               <a:t>Total income if all vacant spaces were leased at the sell (current) rate plus </a:t>
             </a:r>
             <a:r>
-              <a:rPr lang="en-US" sz="700" dirty="0" err="1">
+              <a:rPr lang="en-US" sz="700" i="1" dirty="0" err="1">
                 <a:solidFill>
                   <a:srgbClr val="2D2D2D"/>
                 </a:solidFill>
@@ -6932,7 +6932,7 @@
               <a:t>proj</a:t>
             </a:r>
             <a:r>
-              <a:rPr lang="en-US" sz="700" dirty="0">
+              <a:rPr lang="en-US" sz="700" i="1" dirty="0">
                 <a:solidFill>
                   <a:srgbClr val="2D2D2D"/>
                 </a:solidFill>
@@ -6942,7 +6942,7 @@
               <a:t>. rent</a:t>
             </a:r>
             <a:r>
-              <a:rPr lang="en-US" sz="700" dirty="0">
+              <a:rPr lang="en-US" sz="700" i="1" dirty="0">
                 <a:solidFill>
                   <a:srgbClr val="2D2D2D"/>
                 </a:solidFill>
@@ -6957,7 +6957,7 @@
               </a:lnSpc>
             </a:pPr>
             <a:r>
-              <a:rPr lang="en-US" sz="700" dirty="0">
+              <a:rPr lang="en-US" sz="700" i="1" dirty="0">
                 <a:solidFill>
                   <a:srgbClr val="2D2D2D"/>
                 </a:solidFill>
@@ -6969,14 +6969,14 @@
               <a:t>Projected total income assuming 100% occupancy at the set (target) rental rates</a:t>
             </a:r>
             <a:r>
-              <a:rPr lang="en-US" sz="700" dirty="0">
+              <a:rPr lang="en-US" sz="700" i="1" dirty="0">
                 <a:solidFill>
                   <a:srgbClr val="2D2D2D"/>
                 </a:solidFill>
               </a:rPr>
               <a:t>³</a:t>
             </a:r>
-            <a:endParaRPr lang="en-US" sz="700" dirty="0">
+            <a:endParaRPr lang="en-US" sz="700" i="1" dirty="0">
               <a:solidFill>
                 <a:srgbClr val="2D2D2D"/>
               </a:solidFill>

--- a/storeinsight/public/FLASHTEMPLATE.pptx
+++ b/storeinsight/public/FLASHTEMPLATE.pptx
@@ -313,7 +313,7 @@
             <a:fld id="{1D8BD707-D9CF-40AE-B4C6-C98DA3205C09}" type="datetimeFigureOut">
               <a:rPr lang="en-US" smtClean="0"/>
               <a:pPr/>
-              <a:t>12/10/2025</a:t>
+              <a:t>1/6/2026</a:t>
             </a:fld>
             <a:endParaRPr lang="en-US"/>
           </a:p>
@@ -478,7 +478,7 @@
             <a:fld id="{1D8BD707-D9CF-40AE-B4C6-C98DA3205C09}" type="datetimeFigureOut">
               <a:rPr lang="en-US" smtClean="0"/>
               <a:pPr/>
-              <a:t>12/10/2025</a:t>
+              <a:t>1/6/2026</a:t>
             </a:fld>
             <a:endParaRPr lang="en-US"/>
           </a:p>
@@ -653,7 +653,7 @@
             <a:fld id="{1D8BD707-D9CF-40AE-B4C6-C98DA3205C09}" type="datetimeFigureOut">
               <a:rPr lang="en-US" smtClean="0"/>
               <a:pPr/>
-              <a:t>12/10/2025</a:t>
+              <a:t>1/6/2026</a:t>
             </a:fld>
             <a:endParaRPr lang="en-US"/>
           </a:p>
@@ -818,7 +818,7 @@
             <a:fld id="{1D8BD707-D9CF-40AE-B4C6-C98DA3205C09}" type="datetimeFigureOut">
               <a:rPr lang="en-US" smtClean="0"/>
               <a:pPr/>
-              <a:t>12/10/2025</a:t>
+              <a:t>1/6/2026</a:t>
             </a:fld>
             <a:endParaRPr lang="en-US"/>
           </a:p>
@@ -1060,7 +1060,7 @@
             <a:fld id="{1D8BD707-D9CF-40AE-B4C6-C98DA3205C09}" type="datetimeFigureOut">
               <a:rPr lang="en-US" smtClean="0"/>
               <a:pPr/>
-              <a:t>12/10/2025</a:t>
+              <a:t>1/6/2026</a:t>
             </a:fld>
             <a:endParaRPr lang="en-US"/>
           </a:p>
@@ -1342,7 +1342,7 @@
             <a:fld id="{1D8BD707-D9CF-40AE-B4C6-C98DA3205C09}" type="datetimeFigureOut">
               <a:rPr lang="en-US" smtClean="0"/>
               <a:pPr/>
-              <a:t>12/10/2025</a:t>
+              <a:t>1/6/2026</a:t>
             </a:fld>
             <a:endParaRPr lang="en-US"/>
           </a:p>
@@ -1758,7 +1758,7 @@
             <a:fld id="{1D8BD707-D9CF-40AE-B4C6-C98DA3205C09}" type="datetimeFigureOut">
               <a:rPr lang="en-US" smtClean="0"/>
               <a:pPr/>
-              <a:t>12/10/2025</a:t>
+              <a:t>1/6/2026</a:t>
             </a:fld>
             <a:endParaRPr lang="en-US"/>
           </a:p>
@@ -1872,7 +1872,7 @@
             <a:fld id="{1D8BD707-D9CF-40AE-B4C6-C98DA3205C09}" type="datetimeFigureOut">
               <a:rPr lang="en-US" smtClean="0"/>
               <a:pPr/>
-              <a:t>12/10/2025</a:t>
+              <a:t>1/6/2026</a:t>
             </a:fld>
             <a:endParaRPr lang="en-US"/>
           </a:p>
@@ -1964,7 +1964,7 @@
             <a:fld id="{1D8BD707-D9CF-40AE-B4C6-C98DA3205C09}" type="datetimeFigureOut">
               <a:rPr lang="en-US" smtClean="0"/>
               <a:pPr/>
-              <a:t>12/10/2025</a:t>
+              <a:t>1/6/2026</a:t>
             </a:fld>
             <a:endParaRPr lang="en-US"/>
           </a:p>
@@ -2236,7 +2236,7 @@
             <a:fld id="{1D8BD707-D9CF-40AE-B4C6-C98DA3205C09}" type="datetimeFigureOut">
               <a:rPr lang="en-US" smtClean="0"/>
               <a:pPr/>
-              <a:t>12/10/2025</a:t>
+              <a:t>1/6/2026</a:t>
             </a:fld>
             <a:endParaRPr lang="en-US"/>
           </a:p>
@@ -2485,7 +2485,7 @@
             <a:fld id="{1D8BD707-D9CF-40AE-B4C6-C98DA3205C09}" type="datetimeFigureOut">
               <a:rPr lang="en-US" smtClean="0"/>
               <a:pPr/>
-              <a:t>12/10/2025</a:t>
+              <a:t>1/6/2026</a:t>
             </a:fld>
             <a:endParaRPr lang="en-US"/>
           </a:p>
@@ -2693,7 +2693,7 @@
             <a:fld id="{1D8BD707-D9CF-40AE-B4C6-C98DA3205C09}" type="datetimeFigureOut">
               <a:rPr lang="en-US" smtClean="0"/>
               <a:pPr/>
-              <a:t>12/10/2025</a:t>
+              <a:t>1/6/2026</a:t>
             </a:fld>
             <a:endParaRPr lang="en-US"/>
           </a:p>
@@ -5164,7 +5164,7 @@
                         <a:defRPr/>
                       </a:pPr>
                       <a:r>
-                        <a:rPr lang="en-US" sz="1103">
+                        <a:rPr lang="en-US" sz="1103" dirty="0">
                           <a:solidFill>
                             <a:srgbClr val="4A4A4A"/>
                           </a:solidFill>
@@ -5175,7 +5175,7 @@
                         </a:rPr>
                         <a:t>{{RSFOCCPCT}}</a:t>
                       </a:r>
-                      <a:endParaRPr lang="en-US" sz="1100"/>
+                      <a:endParaRPr lang="en-US" sz="1100" dirty="0"/>
                     </a:p>
                   </a:txBody>
                   <a:tcPr marT="91440" marB="91440" anchor="ctr">
@@ -6778,15 +6778,15 @@
         </p:nvSpPr>
         <p:spPr>
           <a:xfrm>
-            <a:off x="1974754" y="5983083"/>
-            <a:ext cx="472132" cy="133377"/>
+            <a:off x="1834479" y="5983084"/>
+            <a:ext cx="930352" cy="121252"/>
           </a:xfrm>
           <a:prstGeom prst="rect">
             <a:avLst/>
           </a:prstGeom>
         </p:spPr>
         <p:txBody>
-          <a:bodyPr lIns="0" tIns="0" rIns="0" bIns="0" rtlCol="0" anchor="t">
+          <a:bodyPr wrap="square" lIns="0" tIns="0" rIns="0" bIns="0" rtlCol="0" anchor="t">
             <a:spAutoFit/>
           </a:bodyPr>
           <a:lstStyle/>
@@ -6797,7 +6797,7 @@
               </a:lnSpc>
             </a:pPr>
             <a:r>
-              <a:rPr lang="en-US" sz="802">
+              <a:rPr lang="en-US" sz="802" dirty="0">
                 <a:solidFill>
                   <a:srgbClr val="2D2D2D"/>
                 </a:solidFill>
@@ -6806,7 +6806,7 @@
                 <a:cs typeface="Avenir"/>
                 <a:sym typeface="Avenir"/>
               </a:rPr>
-              <a:t>AR Aging</a:t>
+              <a:t>Delinquency Aging</a:t>
             </a:r>
           </a:p>
         </p:txBody>

--- a/storeinsight/public/FLASHTEMPLATE.pptx
+++ b/storeinsight/public/FLASHTEMPLATE.pptx
@@ -313,7 +313,7 @@
             <a:fld id="{1D8BD707-D9CF-40AE-B4C6-C98DA3205C09}" type="datetimeFigureOut">
               <a:rPr lang="en-US" smtClean="0"/>
               <a:pPr/>
-              <a:t>1/6/2026</a:t>
+              <a:t>1/13/2026</a:t>
             </a:fld>
             <a:endParaRPr lang="en-US"/>
           </a:p>
@@ -478,7 +478,7 @@
             <a:fld id="{1D8BD707-D9CF-40AE-B4C6-C98DA3205C09}" type="datetimeFigureOut">
               <a:rPr lang="en-US" smtClean="0"/>
               <a:pPr/>
-              <a:t>1/6/2026</a:t>
+              <a:t>1/13/2026</a:t>
             </a:fld>
             <a:endParaRPr lang="en-US"/>
           </a:p>
@@ -653,7 +653,7 @@
             <a:fld id="{1D8BD707-D9CF-40AE-B4C6-C98DA3205C09}" type="datetimeFigureOut">
               <a:rPr lang="en-US" smtClean="0"/>
               <a:pPr/>
-              <a:t>1/6/2026</a:t>
+              <a:t>1/13/2026</a:t>
             </a:fld>
             <a:endParaRPr lang="en-US"/>
           </a:p>
@@ -818,7 +818,7 @@
             <a:fld id="{1D8BD707-D9CF-40AE-B4C6-C98DA3205C09}" type="datetimeFigureOut">
               <a:rPr lang="en-US" smtClean="0"/>
               <a:pPr/>
-              <a:t>1/6/2026</a:t>
+              <a:t>1/13/2026</a:t>
             </a:fld>
             <a:endParaRPr lang="en-US"/>
           </a:p>
@@ -1060,7 +1060,7 @@
             <a:fld id="{1D8BD707-D9CF-40AE-B4C6-C98DA3205C09}" type="datetimeFigureOut">
               <a:rPr lang="en-US" smtClean="0"/>
               <a:pPr/>
-              <a:t>1/6/2026</a:t>
+              <a:t>1/13/2026</a:t>
             </a:fld>
             <a:endParaRPr lang="en-US"/>
           </a:p>
@@ -1342,7 +1342,7 @@
             <a:fld id="{1D8BD707-D9CF-40AE-B4C6-C98DA3205C09}" type="datetimeFigureOut">
               <a:rPr lang="en-US" smtClean="0"/>
               <a:pPr/>
-              <a:t>1/6/2026</a:t>
+              <a:t>1/13/2026</a:t>
             </a:fld>
             <a:endParaRPr lang="en-US"/>
           </a:p>
@@ -1758,7 +1758,7 @@
             <a:fld id="{1D8BD707-D9CF-40AE-B4C6-C98DA3205C09}" type="datetimeFigureOut">
               <a:rPr lang="en-US" smtClean="0"/>
               <a:pPr/>
-              <a:t>1/6/2026</a:t>
+              <a:t>1/13/2026</a:t>
             </a:fld>
             <a:endParaRPr lang="en-US"/>
           </a:p>
@@ -1872,7 +1872,7 @@
             <a:fld id="{1D8BD707-D9CF-40AE-B4C6-C98DA3205C09}" type="datetimeFigureOut">
               <a:rPr lang="en-US" smtClean="0"/>
               <a:pPr/>
-              <a:t>1/6/2026</a:t>
+              <a:t>1/13/2026</a:t>
             </a:fld>
             <a:endParaRPr lang="en-US"/>
           </a:p>
@@ -1964,7 +1964,7 @@
             <a:fld id="{1D8BD707-D9CF-40AE-B4C6-C98DA3205C09}" type="datetimeFigureOut">
               <a:rPr lang="en-US" smtClean="0"/>
               <a:pPr/>
-              <a:t>1/6/2026</a:t>
+              <a:t>1/13/2026</a:t>
             </a:fld>
             <a:endParaRPr lang="en-US"/>
           </a:p>
@@ -2236,7 +2236,7 @@
             <a:fld id="{1D8BD707-D9CF-40AE-B4C6-C98DA3205C09}" type="datetimeFigureOut">
               <a:rPr lang="en-US" smtClean="0"/>
               <a:pPr/>
-              <a:t>1/6/2026</a:t>
+              <a:t>1/13/2026</a:t>
             </a:fld>
             <a:endParaRPr lang="en-US"/>
           </a:p>
@@ -2485,7 +2485,7 @@
             <a:fld id="{1D8BD707-D9CF-40AE-B4C6-C98DA3205C09}" type="datetimeFigureOut">
               <a:rPr lang="en-US" smtClean="0"/>
               <a:pPr/>
-              <a:t>1/6/2026</a:t>
+              <a:t>1/13/2026</a:t>
             </a:fld>
             <a:endParaRPr lang="en-US"/>
           </a:p>
@@ -2693,7 +2693,7 @@
             <a:fld id="{1D8BD707-D9CF-40AE-B4C6-C98DA3205C09}" type="datetimeFigureOut">
               <a:rPr lang="en-US" smtClean="0"/>
               <a:pPr/>
-              <a:t>1/6/2026</a:t>
+              <a:t>1/13/2026</a:t>
             </a:fld>
             <a:endParaRPr lang="en-US"/>
           </a:p>
@@ -5511,7 +5511,7 @@
           <p:nvPr>
             <p:extLst>
               <p:ext uri="{D42A27DB-BD31-4B8C-83A1-F6EECF244321}">
-                <p14:modId xmlns:p14="http://schemas.microsoft.com/office/powerpoint/2010/main" val="3246744083"/>
+                <p14:modId xmlns:p14="http://schemas.microsoft.com/office/powerpoint/2010/main" val="4013746302"/>
               </p:ext>
             </p:extLst>
           </p:nvPr>
@@ -5751,7 +5751,7 @@
                           <a:latin typeface="Avenir Bold"/>
                           <a:sym typeface="Avenir Bold"/>
                         </a:rPr>
-                        <a:t>Sell Rate Pot. Rent</a:t>
+                        <a:t>Sell Rate + Pot. Rent</a:t>
                       </a:r>
                       <a:r>
                         <a:rPr lang="en-US" sz="1100" dirty="0"/>

--- a/storeinsight/public/FLASHTEMPLATE.pptx
+++ b/storeinsight/public/FLASHTEMPLATE.pptx
@@ -313,7 +313,7 @@
             <a:fld id="{1D8BD707-D9CF-40AE-B4C6-C98DA3205C09}" type="datetimeFigureOut">
               <a:rPr lang="en-US" smtClean="0"/>
               <a:pPr/>
-              <a:t>1/13/2026</a:t>
+              <a:t>1/15/2026</a:t>
             </a:fld>
             <a:endParaRPr lang="en-US"/>
           </a:p>
@@ -478,7 +478,7 @@
             <a:fld id="{1D8BD707-D9CF-40AE-B4C6-C98DA3205C09}" type="datetimeFigureOut">
               <a:rPr lang="en-US" smtClean="0"/>
               <a:pPr/>
-              <a:t>1/13/2026</a:t>
+              <a:t>1/15/2026</a:t>
             </a:fld>
             <a:endParaRPr lang="en-US"/>
           </a:p>
@@ -653,7 +653,7 @@
             <a:fld id="{1D8BD707-D9CF-40AE-B4C6-C98DA3205C09}" type="datetimeFigureOut">
               <a:rPr lang="en-US" smtClean="0"/>
               <a:pPr/>
-              <a:t>1/13/2026</a:t>
+              <a:t>1/15/2026</a:t>
             </a:fld>
             <a:endParaRPr lang="en-US"/>
           </a:p>
@@ -818,7 +818,7 @@
             <a:fld id="{1D8BD707-D9CF-40AE-B4C6-C98DA3205C09}" type="datetimeFigureOut">
               <a:rPr lang="en-US" smtClean="0"/>
               <a:pPr/>
-              <a:t>1/13/2026</a:t>
+              <a:t>1/15/2026</a:t>
             </a:fld>
             <a:endParaRPr lang="en-US"/>
           </a:p>
@@ -1060,7 +1060,7 @@
             <a:fld id="{1D8BD707-D9CF-40AE-B4C6-C98DA3205C09}" type="datetimeFigureOut">
               <a:rPr lang="en-US" smtClean="0"/>
               <a:pPr/>
-              <a:t>1/13/2026</a:t>
+              <a:t>1/15/2026</a:t>
             </a:fld>
             <a:endParaRPr lang="en-US"/>
           </a:p>
@@ -1342,7 +1342,7 @@
             <a:fld id="{1D8BD707-D9CF-40AE-B4C6-C98DA3205C09}" type="datetimeFigureOut">
               <a:rPr lang="en-US" smtClean="0"/>
               <a:pPr/>
-              <a:t>1/13/2026</a:t>
+              <a:t>1/15/2026</a:t>
             </a:fld>
             <a:endParaRPr lang="en-US"/>
           </a:p>
@@ -1758,7 +1758,7 @@
             <a:fld id="{1D8BD707-D9CF-40AE-B4C6-C98DA3205C09}" type="datetimeFigureOut">
               <a:rPr lang="en-US" smtClean="0"/>
               <a:pPr/>
-              <a:t>1/13/2026</a:t>
+              <a:t>1/15/2026</a:t>
             </a:fld>
             <a:endParaRPr lang="en-US"/>
           </a:p>
@@ -1872,7 +1872,7 @@
             <a:fld id="{1D8BD707-D9CF-40AE-B4C6-C98DA3205C09}" type="datetimeFigureOut">
               <a:rPr lang="en-US" smtClean="0"/>
               <a:pPr/>
-              <a:t>1/13/2026</a:t>
+              <a:t>1/15/2026</a:t>
             </a:fld>
             <a:endParaRPr lang="en-US"/>
           </a:p>
@@ -1964,7 +1964,7 @@
             <a:fld id="{1D8BD707-D9CF-40AE-B4C6-C98DA3205C09}" type="datetimeFigureOut">
               <a:rPr lang="en-US" smtClean="0"/>
               <a:pPr/>
-              <a:t>1/13/2026</a:t>
+              <a:t>1/15/2026</a:t>
             </a:fld>
             <a:endParaRPr lang="en-US"/>
           </a:p>
@@ -2236,7 +2236,7 @@
             <a:fld id="{1D8BD707-D9CF-40AE-B4C6-C98DA3205C09}" type="datetimeFigureOut">
               <a:rPr lang="en-US" smtClean="0"/>
               <a:pPr/>
-              <a:t>1/13/2026</a:t>
+              <a:t>1/15/2026</a:t>
             </a:fld>
             <a:endParaRPr lang="en-US"/>
           </a:p>
@@ -2485,7 +2485,7 @@
             <a:fld id="{1D8BD707-D9CF-40AE-B4C6-C98DA3205C09}" type="datetimeFigureOut">
               <a:rPr lang="en-US" smtClean="0"/>
               <a:pPr/>
-              <a:t>1/13/2026</a:t>
+              <a:t>1/15/2026</a:t>
             </a:fld>
             <a:endParaRPr lang="en-US"/>
           </a:p>
@@ -2693,7 +2693,7 @@
             <a:fld id="{1D8BD707-D9CF-40AE-B4C6-C98DA3205C09}" type="datetimeFigureOut">
               <a:rPr lang="en-US" smtClean="0"/>
               <a:pPr/>
-              <a:t>1/13/2026</a:t>
+              <a:t>1/15/2026</a:t>
             </a:fld>
             <a:endParaRPr lang="en-US"/>
           </a:p>
@@ -6778,7 +6778,7 @@
         </p:nvSpPr>
         <p:spPr>
           <a:xfrm>
-            <a:off x="1834479" y="5983084"/>
+            <a:off x="1736648" y="6019800"/>
             <a:ext cx="930352" cy="121252"/>
           </a:xfrm>
           <a:prstGeom prst="rect">
@@ -6806,7 +6806,7 @@
                 <a:cs typeface="Avenir"/>
                 <a:sym typeface="Avenir"/>
               </a:rPr>
-              <a:t>Delinquency Aging</a:t>
+              <a:t>Net Rental Income</a:t>
             </a:r>
           </a:p>
         </p:txBody>
@@ -6819,8 +6819,8 @@
         </p:nvSpPr>
         <p:spPr>
           <a:xfrm>
-            <a:off x="5315253" y="5983083"/>
-            <a:ext cx="704547" cy="121252"/>
+            <a:off x="5181600" y="6019800"/>
+            <a:ext cx="930352" cy="121252"/>
           </a:xfrm>
           <a:prstGeom prst="rect">
             <a:avLst/>
@@ -6847,7 +6847,7 @@
                 <a:cs typeface="Avenir"/>
                 <a:sym typeface="Avenir"/>
               </a:rPr>
-              <a:t>Occupancy</a:t>
+              <a:t>Overall Occupancy</a:t>
             </a:r>
           </a:p>
         </p:txBody>
@@ -6867,7 +6867,7 @@
         <p:spPr>
           <a:xfrm>
             <a:off x="3962401" y="9558940"/>
-            <a:ext cx="3948112" cy="379335"/>
+            <a:ext cx="3948112" cy="389274"/>
           </a:xfrm>
           <a:prstGeom prst="rect">
             <a:avLst/>
@@ -6894,16 +6894,33 @@
                 <a:cs typeface="Avenir"/>
                 <a:sym typeface="Avenir"/>
               </a:rPr>
-              <a:t>Total income from occupied space at in-place rents, including approved rate increases</a:t>
-            </a:r>
-            <a:r>
-              <a:rPr lang="en-US" sz="700" i="1" dirty="0">
+              <a:t>Total income from occupied space at in-place rents, including approved </a:t>
+            </a:r>
+            <a:r>
+              <a:rPr lang="en-US" sz="700" i="1">
+                <a:solidFill>
+                  <a:srgbClr val="2D2D2D"/>
+                </a:solidFill>
+                <a:latin typeface="Avenir"/>
+                <a:ea typeface="Avenir"/>
+                <a:cs typeface="Avenir"/>
+                <a:sym typeface="Avenir"/>
+              </a:rPr>
+              <a:t>rate increases </a:t>
+            </a:r>
+            <a:r>
+              <a:rPr lang="en-US" sz="1000" i="1">
                 <a:solidFill>
                   <a:srgbClr val="2D2D2D"/>
                 </a:solidFill>
               </a:rPr>
               <a:t>¹</a:t>
             </a:r>
+            <a:endParaRPr lang="en-US" sz="1000" i="1" dirty="0">
+              <a:solidFill>
+                <a:srgbClr val="2D2D2D"/>
+              </a:solidFill>
+            </a:endParaRPr>
           </a:p>
           <a:p>
             <a:pPr>
@@ -6939,10 +6956,10 @@
                 <a:latin typeface="Avenir"/>
                 <a:sym typeface="Avenir"/>
               </a:rPr>
-              <a:t>. rent</a:t>
-            </a:r>
-            <a:r>
-              <a:rPr lang="en-US" sz="700" i="1" dirty="0">
+              <a:t>. rent </a:t>
+            </a:r>
+            <a:r>
+              <a:rPr lang="en-US" sz="1000" i="1" dirty="0">
                 <a:solidFill>
                   <a:srgbClr val="2D2D2D"/>
                 </a:solidFill>
@@ -6966,17 +6983,17 @@
                 <a:cs typeface="Avenir"/>
                 <a:sym typeface="Avenir"/>
               </a:rPr>
-              <a:t>Projected total income assuming 100% occupancy at the set (target) rental rates</a:t>
-            </a:r>
-            <a:r>
-              <a:rPr lang="en-US" sz="700" i="1" dirty="0">
+              <a:t>Projected total income assuming 100% occupancy at the set (target) rental rates </a:t>
+            </a:r>
+            <a:r>
+              <a:rPr lang="en-US" sz="1000" i="1" dirty="0">
                 <a:solidFill>
                   <a:srgbClr val="2D2D2D"/>
                 </a:solidFill>
               </a:rPr>
               <a:t>³</a:t>
             </a:r>
-            <a:endParaRPr lang="en-US" sz="700" i="1" dirty="0">
+            <a:endParaRPr lang="en-US" sz="1000" i="1" dirty="0">
               <a:solidFill>
                 <a:srgbClr val="2D2D2D"/>
               </a:solidFill>

--- a/storeinsight/public/FLASHTEMPLATE.pptx
+++ b/storeinsight/public/FLASHTEMPLATE.pptx
@@ -6631,8 +6631,8 @@
         </p:nvSpPr>
         <p:spPr>
           <a:xfrm>
-            <a:off x="586152" y="6196038"/>
-            <a:ext cx="3223848" cy="2058878"/>
+            <a:off x="586150" y="6196038"/>
+            <a:ext cx="3223850" cy="2058878"/>
           </a:xfrm>
           <a:custGeom>
             <a:avLst/>
@@ -6685,7 +6685,7 @@
         <p:spPr>
           <a:xfrm>
             <a:off x="3962401" y="6196038"/>
-            <a:ext cx="3223848" cy="2058878"/>
+            <a:ext cx="3233722" cy="2058878"/>
           </a:xfrm>
           <a:custGeom>
             <a:avLst/>

--- a/storeinsight/public/FLASHTEMPLATE.pptx
+++ b/storeinsight/public/FLASHTEMPLATE.pptx
@@ -313,7 +313,7 @@
             <a:fld id="{1D8BD707-D9CF-40AE-B4C6-C98DA3205C09}" type="datetimeFigureOut">
               <a:rPr lang="en-US" smtClean="0"/>
               <a:pPr/>
-              <a:t>1/15/2026</a:t>
+              <a:t>1/16/2026</a:t>
             </a:fld>
             <a:endParaRPr lang="en-US"/>
           </a:p>
@@ -478,7 +478,7 @@
             <a:fld id="{1D8BD707-D9CF-40AE-B4C6-C98DA3205C09}" type="datetimeFigureOut">
               <a:rPr lang="en-US" smtClean="0"/>
               <a:pPr/>
-              <a:t>1/15/2026</a:t>
+              <a:t>1/16/2026</a:t>
             </a:fld>
             <a:endParaRPr lang="en-US"/>
           </a:p>
@@ -653,7 +653,7 @@
             <a:fld id="{1D8BD707-D9CF-40AE-B4C6-C98DA3205C09}" type="datetimeFigureOut">
               <a:rPr lang="en-US" smtClean="0"/>
               <a:pPr/>
-              <a:t>1/15/2026</a:t>
+              <a:t>1/16/2026</a:t>
             </a:fld>
             <a:endParaRPr lang="en-US"/>
           </a:p>
@@ -818,7 +818,7 @@
             <a:fld id="{1D8BD707-D9CF-40AE-B4C6-C98DA3205C09}" type="datetimeFigureOut">
               <a:rPr lang="en-US" smtClean="0"/>
               <a:pPr/>
-              <a:t>1/15/2026</a:t>
+              <a:t>1/16/2026</a:t>
             </a:fld>
             <a:endParaRPr lang="en-US"/>
           </a:p>
@@ -1060,7 +1060,7 @@
             <a:fld id="{1D8BD707-D9CF-40AE-B4C6-C98DA3205C09}" type="datetimeFigureOut">
               <a:rPr lang="en-US" smtClean="0"/>
               <a:pPr/>
-              <a:t>1/15/2026</a:t>
+              <a:t>1/16/2026</a:t>
             </a:fld>
             <a:endParaRPr lang="en-US"/>
           </a:p>
@@ -1342,7 +1342,7 @@
             <a:fld id="{1D8BD707-D9CF-40AE-B4C6-C98DA3205C09}" type="datetimeFigureOut">
               <a:rPr lang="en-US" smtClean="0"/>
               <a:pPr/>
-              <a:t>1/15/2026</a:t>
+              <a:t>1/16/2026</a:t>
             </a:fld>
             <a:endParaRPr lang="en-US"/>
           </a:p>
@@ -1758,7 +1758,7 @@
             <a:fld id="{1D8BD707-D9CF-40AE-B4C6-C98DA3205C09}" type="datetimeFigureOut">
               <a:rPr lang="en-US" smtClean="0"/>
               <a:pPr/>
-              <a:t>1/15/2026</a:t>
+              <a:t>1/16/2026</a:t>
             </a:fld>
             <a:endParaRPr lang="en-US"/>
           </a:p>
@@ -1872,7 +1872,7 @@
             <a:fld id="{1D8BD707-D9CF-40AE-B4C6-C98DA3205C09}" type="datetimeFigureOut">
               <a:rPr lang="en-US" smtClean="0"/>
               <a:pPr/>
-              <a:t>1/15/2026</a:t>
+              <a:t>1/16/2026</a:t>
             </a:fld>
             <a:endParaRPr lang="en-US"/>
           </a:p>
@@ -1964,7 +1964,7 @@
             <a:fld id="{1D8BD707-D9CF-40AE-B4C6-C98DA3205C09}" type="datetimeFigureOut">
               <a:rPr lang="en-US" smtClean="0"/>
               <a:pPr/>
-              <a:t>1/15/2026</a:t>
+              <a:t>1/16/2026</a:t>
             </a:fld>
             <a:endParaRPr lang="en-US"/>
           </a:p>
@@ -2236,7 +2236,7 @@
             <a:fld id="{1D8BD707-D9CF-40AE-B4C6-C98DA3205C09}" type="datetimeFigureOut">
               <a:rPr lang="en-US" smtClean="0"/>
               <a:pPr/>
-              <a:t>1/15/2026</a:t>
+              <a:t>1/16/2026</a:t>
             </a:fld>
             <a:endParaRPr lang="en-US"/>
           </a:p>
@@ -2485,7 +2485,7 @@
             <a:fld id="{1D8BD707-D9CF-40AE-B4C6-C98DA3205C09}" type="datetimeFigureOut">
               <a:rPr lang="en-US" smtClean="0"/>
               <a:pPr/>
-              <a:t>1/15/2026</a:t>
+              <a:t>1/16/2026</a:t>
             </a:fld>
             <a:endParaRPr lang="en-US"/>
           </a:p>
@@ -2693,7 +2693,7 @@
             <a:fld id="{1D8BD707-D9CF-40AE-B4C6-C98DA3205C09}" type="datetimeFigureOut">
               <a:rPr lang="en-US" smtClean="0"/>
               <a:pPr/>
-              <a:t>1/15/2026</a:t>
+              <a:t>1/16/2026</a:t>
             </a:fld>
             <a:endParaRPr lang="en-US"/>
           </a:p>
@@ -6631,8 +6631,8 @@
         </p:nvSpPr>
         <p:spPr>
           <a:xfrm>
-            <a:off x="586150" y="6196038"/>
-            <a:ext cx="3223850" cy="2058878"/>
+            <a:off x="586150" y="6093984"/>
+            <a:ext cx="3223850" cy="2160932"/>
           </a:xfrm>
           <a:custGeom>
             <a:avLst/>
@@ -6684,8 +6684,8 @@
         </p:nvSpPr>
         <p:spPr>
           <a:xfrm>
-            <a:off x="3962401" y="6196038"/>
-            <a:ext cx="3233722" cy="2058878"/>
+            <a:off x="3962401" y="6093985"/>
+            <a:ext cx="3233722" cy="2160932"/>
           </a:xfrm>
           <a:custGeom>
             <a:avLst/>
@@ -6778,8 +6778,8 @@
         </p:nvSpPr>
         <p:spPr>
           <a:xfrm>
-            <a:off x="1736648" y="6019800"/>
-            <a:ext cx="930352" cy="121252"/>
+            <a:off x="1580499" y="5963233"/>
+            <a:ext cx="1238901" cy="121252"/>
           </a:xfrm>
           <a:prstGeom prst="rect">
             <a:avLst/>
@@ -6806,7 +6806,7 @@
                 <a:cs typeface="Avenir"/>
                 <a:sym typeface="Avenir"/>
               </a:rPr>
-              <a:t>Net Rental Income</a:t>
+              <a:t>Net Rental Income (MoM)</a:t>
             </a:r>
           </a:p>
         </p:txBody>
@@ -6819,8 +6819,8 @@
         </p:nvSpPr>
         <p:spPr>
           <a:xfrm>
-            <a:off x="5181600" y="6019800"/>
-            <a:ext cx="930352" cy="121252"/>
+            <a:off x="5029200" y="5965032"/>
+            <a:ext cx="1238901" cy="121252"/>
           </a:xfrm>
           <a:prstGeom prst="rect">
             <a:avLst/>
@@ -6847,7 +6847,7 @@
                 <a:cs typeface="Avenir"/>
                 <a:sym typeface="Avenir"/>
               </a:rPr>
-              <a:t>Overall Occupancy</a:t>
+              <a:t>Overall Occupancy (MoM)</a:t>
             </a:r>
           </a:p>
         </p:txBody>

--- a/storeinsight/public/FLASHTEMPLATE.pptx
+++ b/storeinsight/public/FLASHTEMPLATE.pptx
@@ -313,7 +313,7 @@
             <a:fld id="{1D8BD707-D9CF-40AE-B4C6-C98DA3205C09}" type="datetimeFigureOut">
               <a:rPr lang="en-US" smtClean="0"/>
               <a:pPr/>
-              <a:t>1/16/2026</a:t>
+              <a:t>2/6/2026</a:t>
             </a:fld>
             <a:endParaRPr lang="en-US"/>
           </a:p>
@@ -478,7 +478,7 @@
             <a:fld id="{1D8BD707-D9CF-40AE-B4C6-C98DA3205C09}" type="datetimeFigureOut">
               <a:rPr lang="en-US" smtClean="0"/>
               <a:pPr/>
-              <a:t>1/16/2026</a:t>
+              <a:t>2/6/2026</a:t>
             </a:fld>
             <a:endParaRPr lang="en-US"/>
           </a:p>
@@ -653,7 +653,7 @@
             <a:fld id="{1D8BD707-D9CF-40AE-B4C6-C98DA3205C09}" type="datetimeFigureOut">
               <a:rPr lang="en-US" smtClean="0"/>
               <a:pPr/>
-              <a:t>1/16/2026</a:t>
+              <a:t>2/6/2026</a:t>
             </a:fld>
             <a:endParaRPr lang="en-US"/>
           </a:p>
@@ -818,7 +818,7 @@
             <a:fld id="{1D8BD707-D9CF-40AE-B4C6-C98DA3205C09}" type="datetimeFigureOut">
               <a:rPr lang="en-US" smtClean="0"/>
               <a:pPr/>
-              <a:t>1/16/2026</a:t>
+              <a:t>2/6/2026</a:t>
             </a:fld>
             <a:endParaRPr lang="en-US"/>
           </a:p>
@@ -1060,7 +1060,7 @@
             <a:fld id="{1D8BD707-D9CF-40AE-B4C6-C98DA3205C09}" type="datetimeFigureOut">
               <a:rPr lang="en-US" smtClean="0"/>
               <a:pPr/>
-              <a:t>1/16/2026</a:t>
+              <a:t>2/6/2026</a:t>
             </a:fld>
             <a:endParaRPr lang="en-US"/>
           </a:p>
@@ -1342,7 +1342,7 @@
             <a:fld id="{1D8BD707-D9CF-40AE-B4C6-C98DA3205C09}" type="datetimeFigureOut">
               <a:rPr lang="en-US" smtClean="0"/>
               <a:pPr/>
-              <a:t>1/16/2026</a:t>
+              <a:t>2/6/2026</a:t>
             </a:fld>
             <a:endParaRPr lang="en-US"/>
           </a:p>
@@ -1758,7 +1758,7 @@
             <a:fld id="{1D8BD707-D9CF-40AE-B4C6-C98DA3205C09}" type="datetimeFigureOut">
               <a:rPr lang="en-US" smtClean="0"/>
               <a:pPr/>
-              <a:t>1/16/2026</a:t>
+              <a:t>2/6/2026</a:t>
             </a:fld>
             <a:endParaRPr lang="en-US"/>
           </a:p>
@@ -1872,7 +1872,7 @@
             <a:fld id="{1D8BD707-D9CF-40AE-B4C6-C98DA3205C09}" type="datetimeFigureOut">
               <a:rPr lang="en-US" smtClean="0"/>
               <a:pPr/>
-              <a:t>1/16/2026</a:t>
+              <a:t>2/6/2026</a:t>
             </a:fld>
             <a:endParaRPr lang="en-US"/>
           </a:p>
@@ -1964,7 +1964,7 @@
             <a:fld id="{1D8BD707-D9CF-40AE-B4C6-C98DA3205C09}" type="datetimeFigureOut">
               <a:rPr lang="en-US" smtClean="0"/>
               <a:pPr/>
-              <a:t>1/16/2026</a:t>
+              <a:t>2/6/2026</a:t>
             </a:fld>
             <a:endParaRPr lang="en-US"/>
           </a:p>
@@ -2236,7 +2236,7 @@
             <a:fld id="{1D8BD707-D9CF-40AE-B4C6-C98DA3205C09}" type="datetimeFigureOut">
               <a:rPr lang="en-US" smtClean="0"/>
               <a:pPr/>
-              <a:t>1/16/2026</a:t>
+              <a:t>2/6/2026</a:t>
             </a:fld>
             <a:endParaRPr lang="en-US"/>
           </a:p>
@@ -2485,7 +2485,7 @@
             <a:fld id="{1D8BD707-D9CF-40AE-B4C6-C98DA3205C09}" type="datetimeFigureOut">
               <a:rPr lang="en-US" smtClean="0"/>
               <a:pPr/>
-              <a:t>1/16/2026</a:t>
+              <a:t>2/6/2026</a:t>
             </a:fld>
             <a:endParaRPr lang="en-US"/>
           </a:p>
@@ -2693,7 +2693,7 @@
             <a:fld id="{1D8BD707-D9CF-40AE-B4C6-C98DA3205C09}" type="datetimeFigureOut">
               <a:rPr lang="en-US" smtClean="0"/>
               <a:pPr/>
-              <a:t>1/16/2026</a:t>
+              <a:t>2/6/2026</a:t>
             </a:fld>
             <a:endParaRPr lang="en-US"/>
           </a:p>
@@ -6838,7 +6838,7 @@
               </a:lnSpc>
             </a:pPr>
             <a:r>
-              <a:rPr lang="en-US" sz="802" dirty="0">
+              <a:rPr lang="en-US" sz="802">
                 <a:solidFill>
                   <a:srgbClr val="2D2D2D"/>
                 </a:solidFill>
@@ -6847,8 +6847,17 @@
                 <a:cs typeface="Avenir"/>
                 <a:sym typeface="Avenir"/>
               </a:rPr>
-              <a:t>Overall Occupancy (MoM)</a:t>
-            </a:r>
+              <a:t>Occupancy / RSF (MoM)</a:t>
+            </a:r>
+            <a:endParaRPr lang="en-US" sz="802" dirty="0">
+              <a:solidFill>
+                <a:srgbClr val="2D2D2D"/>
+              </a:solidFill>
+              <a:latin typeface="Avenir"/>
+              <a:ea typeface="Avenir"/>
+              <a:cs typeface="Avenir"/>
+              <a:sym typeface="Avenir"/>
+            </a:endParaRPr>
           </a:p>
         </p:txBody>
       </p:sp>

--- a/storeinsight/public/FLASHTEMPLATE.pptx
+++ b/storeinsight/public/FLASHTEMPLATE.pptx
@@ -313,7 +313,7 @@
             <a:fld id="{1D8BD707-D9CF-40AE-B4C6-C98DA3205C09}" type="datetimeFigureOut">
               <a:rPr lang="en-US" smtClean="0"/>
               <a:pPr/>
-              <a:t>2/6/2026</a:t>
+              <a:t>3/2/2026</a:t>
             </a:fld>
             <a:endParaRPr lang="en-US"/>
           </a:p>
@@ -478,7 +478,7 @@
             <a:fld id="{1D8BD707-D9CF-40AE-B4C6-C98DA3205C09}" type="datetimeFigureOut">
               <a:rPr lang="en-US" smtClean="0"/>
               <a:pPr/>
-              <a:t>2/6/2026</a:t>
+              <a:t>3/2/2026</a:t>
             </a:fld>
             <a:endParaRPr lang="en-US"/>
           </a:p>
@@ -653,7 +653,7 @@
             <a:fld id="{1D8BD707-D9CF-40AE-B4C6-C98DA3205C09}" type="datetimeFigureOut">
               <a:rPr lang="en-US" smtClean="0"/>
               <a:pPr/>
-              <a:t>2/6/2026</a:t>
+              <a:t>3/2/2026</a:t>
             </a:fld>
             <a:endParaRPr lang="en-US"/>
           </a:p>
@@ -818,7 +818,7 @@
             <a:fld id="{1D8BD707-D9CF-40AE-B4C6-C98DA3205C09}" type="datetimeFigureOut">
               <a:rPr lang="en-US" smtClean="0"/>
               <a:pPr/>
-              <a:t>2/6/2026</a:t>
+              <a:t>3/2/2026</a:t>
             </a:fld>
             <a:endParaRPr lang="en-US"/>
           </a:p>
@@ -1060,7 +1060,7 @@
             <a:fld id="{1D8BD707-D9CF-40AE-B4C6-C98DA3205C09}" type="datetimeFigureOut">
               <a:rPr lang="en-US" smtClean="0"/>
               <a:pPr/>
-              <a:t>2/6/2026</a:t>
+              <a:t>3/2/2026</a:t>
             </a:fld>
             <a:endParaRPr lang="en-US"/>
           </a:p>
@@ -1342,7 +1342,7 @@
             <a:fld id="{1D8BD707-D9CF-40AE-B4C6-C98DA3205C09}" type="datetimeFigureOut">
               <a:rPr lang="en-US" smtClean="0"/>
               <a:pPr/>
-              <a:t>2/6/2026</a:t>
+              <a:t>3/2/2026</a:t>
             </a:fld>
             <a:endParaRPr lang="en-US"/>
           </a:p>
@@ -1758,7 +1758,7 @@
             <a:fld id="{1D8BD707-D9CF-40AE-B4C6-C98DA3205C09}" type="datetimeFigureOut">
               <a:rPr lang="en-US" smtClean="0"/>
               <a:pPr/>
-              <a:t>2/6/2026</a:t>
+              <a:t>3/2/2026</a:t>
             </a:fld>
             <a:endParaRPr lang="en-US"/>
           </a:p>
@@ -1872,7 +1872,7 @@
             <a:fld id="{1D8BD707-D9CF-40AE-B4C6-C98DA3205C09}" type="datetimeFigureOut">
               <a:rPr lang="en-US" smtClean="0"/>
               <a:pPr/>
-              <a:t>2/6/2026</a:t>
+              <a:t>3/2/2026</a:t>
             </a:fld>
             <a:endParaRPr lang="en-US"/>
           </a:p>
@@ -1964,7 +1964,7 @@
             <a:fld id="{1D8BD707-D9CF-40AE-B4C6-C98DA3205C09}" type="datetimeFigureOut">
               <a:rPr lang="en-US" smtClean="0"/>
               <a:pPr/>
-              <a:t>2/6/2026</a:t>
+              <a:t>3/2/2026</a:t>
             </a:fld>
             <a:endParaRPr lang="en-US"/>
           </a:p>
@@ -2236,7 +2236,7 @@
             <a:fld id="{1D8BD707-D9CF-40AE-B4C6-C98DA3205C09}" type="datetimeFigureOut">
               <a:rPr lang="en-US" smtClean="0"/>
               <a:pPr/>
-              <a:t>2/6/2026</a:t>
+              <a:t>3/2/2026</a:t>
             </a:fld>
             <a:endParaRPr lang="en-US"/>
           </a:p>
@@ -2485,7 +2485,7 @@
             <a:fld id="{1D8BD707-D9CF-40AE-B4C6-C98DA3205C09}" type="datetimeFigureOut">
               <a:rPr lang="en-US" smtClean="0"/>
               <a:pPr/>
-              <a:t>2/6/2026</a:t>
+              <a:t>3/2/2026</a:t>
             </a:fld>
             <a:endParaRPr lang="en-US"/>
           </a:p>
@@ -2693,7 +2693,7 @@
             <a:fld id="{1D8BD707-D9CF-40AE-B4C6-C98DA3205C09}" type="datetimeFigureOut">
               <a:rPr lang="en-US" smtClean="0"/>
               <a:pPr/>
-              <a:t>2/6/2026</a:t>
+              <a:t>3/2/2026</a:t>
             </a:fld>
             <a:endParaRPr lang="en-US"/>
           </a:p>
@@ -6791,7 +6791,7 @@
           </a:bodyPr>
           <a:lstStyle/>
           <a:p>
-            <a:pPr algn="l">
+            <a:pPr algn="ctr">
               <a:lnSpc>
                 <a:spcPts val="963"/>
               </a:lnSpc>
@@ -6806,7 +6806,7 @@
                 <a:cs typeface="Avenir"/>
                 <a:sym typeface="Avenir"/>
               </a:rPr>
-              <a:t>Net Rental Income (MoM)</a:t>
+              <a:t>Net Rental Income</a:t>
             </a:r>
           </a:p>
         </p:txBody>
@@ -6832,13 +6832,13 @@
           </a:bodyPr>
           <a:lstStyle/>
           <a:p>
-            <a:pPr algn="l">
+            <a:pPr algn="ctr">
               <a:lnSpc>
                 <a:spcPts val="963"/>
               </a:lnSpc>
             </a:pPr>
             <a:r>
-              <a:rPr lang="en-US" sz="802">
+              <a:rPr lang="en-US" sz="802" dirty="0">
                 <a:solidFill>
                   <a:srgbClr val="2D2D2D"/>
                 </a:solidFill>
@@ -6847,17 +6847,8 @@
                 <a:cs typeface="Avenir"/>
                 <a:sym typeface="Avenir"/>
               </a:rPr>
-              <a:t>Occupancy / RSF (MoM)</a:t>
-            </a:r>
-            <a:endParaRPr lang="en-US" sz="802" dirty="0">
-              <a:solidFill>
-                <a:srgbClr val="2D2D2D"/>
-              </a:solidFill>
-              <a:latin typeface="Avenir"/>
-              <a:ea typeface="Avenir"/>
-              <a:cs typeface="Avenir"/>
-              <a:sym typeface="Avenir"/>
-            </a:endParaRPr>
+              <a:t>Occupancy / RSF</a:t>
+            </a:r>
           </a:p>
         </p:txBody>
       </p:sp>

--- a/storeinsight/public/FLASHTEMPLATE.pptx
+++ b/storeinsight/public/FLASHTEMPLATE.pptx
@@ -313,7 +313,7 @@
             <a:fld id="{1D8BD707-D9CF-40AE-B4C6-C98DA3205C09}" type="datetimeFigureOut">
               <a:rPr lang="en-US" smtClean="0"/>
               <a:pPr/>
-              <a:t>3/2/2026</a:t>
+              <a:t>4/6/2026</a:t>
             </a:fld>
             <a:endParaRPr lang="en-US"/>
           </a:p>
@@ -478,7 +478,7 @@
             <a:fld id="{1D8BD707-D9CF-40AE-B4C6-C98DA3205C09}" type="datetimeFigureOut">
               <a:rPr lang="en-US" smtClean="0"/>
               <a:pPr/>
-              <a:t>3/2/2026</a:t>
+              <a:t>4/6/2026</a:t>
             </a:fld>
             <a:endParaRPr lang="en-US"/>
           </a:p>
@@ -653,7 +653,7 @@
             <a:fld id="{1D8BD707-D9CF-40AE-B4C6-C98DA3205C09}" type="datetimeFigureOut">
               <a:rPr lang="en-US" smtClean="0"/>
               <a:pPr/>
-              <a:t>3/2/2026</a:t>
+              <a:t>4/6/2026</a:t>
             </a:fld>
             <a:endParaRPr lang="en-US"/>
           </a:p>
@@ -818,7 +818,7 @@
             <a:fld id="{1D8BD707-D9CF-40AE-B4C6-C98DA3205C09}" type="datetimeFigureOut">
               <a:rPr lang="en-US" smtClean="0"/>
               <a:pPr/>
-              <a:t>3/2/2026</a:t>
+              <a:t>4/6/2026</a:t>
             </a:fld>
             <a:endParaRPr lang="en-US"/>
           </a:p>
@@ -1060,7 +1060,7 @@
             <a:fld id="{1D8BD707-D9CF-40AE-B4C6-C98DA3205C09}" type="datetimeFigureOut">
               <a:rPr lang="en-US" smtClean="0"/>
               <a:pPr/>
-              <a:t>3/2/2026</a:t>
+              <a:t>4/6/2026</a:t>
             </a:fld>
             <a:endParaRPr lang="en-US"/>
           </a:p>
@@ -1342,7 +1342,7 @@
             <a:fld id="{1D8BD707-D9CF-40AE-B4C6-C98DA3205C09}" type="datetimeFigureOut">
               <a:rPr lang="en-US" smtClean="0"/>
               <a:pPr/>
-              <a:t>3/2/2026</a:t>
+              <a:t>4/6/2026</a:t>
             </a:fld>
             <a:endParaRPr lang="en-US"/>
           </a:p>
@@ -1758,7 +1758,7 @@
             <a:fld id="{1D8BD707-D9CF-40AE-B4C6-C98DA3205C09}" type="datetimeFigureOut">
               <a:rPr lang="en-US" smtClean="0"/>
               <a:pPr/>
-              <a:t>3/2/2026</a:t>
+              <a:t>4/6/2026</a:t>
             </a:fld>
             <a:endParaRPr lang="en-US"/>
           </a:p>
@@ -1872,7 +1872,7 @@
             <a:fld id="{1D8BD707-D9CF-40AE-B4C6-C98DA3205C09}" type="datetimeFigureOut">
               <a:rPr lang="en-US" smtClean="0"/>
               <a:pPr/>
-              <a:t>3/2/2026</a:t>
+              <a:t>4/6/2026</a:t>
             </a:fld>
             <a:endParaRPr lang="en-US"/>
           </a:p>
@@ -1964,7 +1964,7 @@
             <a:fld id="{1D8BD707-D9CF-40AE-B4C6-C98DA3205C09}" type="datetimeFigureOut">
               <a:rPr lang="en-US" smtClean="0"/>
               <a:pPr/>
-              <a:t>3/2/2026</a:t>
+              <a:t>4/6/2026</a:t>
             </a:fld>
             <a:endParaRPr lang="en-US"/>
           </a:p>
@@ -2236,7 +2236,7 @@
             <a:fld id="{1D8BD707-D9CF-40AE-B4C6-C98DA3205C09}" type="datetimeFigureOut">
               <a:rPr lang="en-US" smtClean="0"/>
               <a:pPr/>
-              <a:t>3/2/2026</a:t>
+              <a:t>4/6/2026</a:t>
             </a:fld>
             <a:endParaRPr lang="en-US"/>
           </a:p>
@@ -2485,7 +2485,7 @@
             <a:fld id="{1D8BD707-D9CF-40AE-B4C6-C98DA3205C09}" type="datetimeFigureOut">
               <a:rPr lang="en-US" smtClean="0"/>
               <a:pPr/>
-              <a:t>3/2/2026</a:t>
+              <a:t>4/6/2026</a:t>
             </a:fld>
             <a:endParaRPr lang="en-US"/>
           </a:p>
@@ -2693,7 +2693,7 @@
             <a:fld id="{1D8BD707-D9CF-40AE-B4C6-C98DA3205C09}" type="datetimeFigureOut">
               <a:rPr lang="en-US" smtClean="0"/>
               <a:pPr/>
-              <a:t>3/2/2026</a:t>
+              <a:t>4/6/2026</a:t>
             </a:fld>
             <a:endParaRPr lang="en-US"/>
           </a:p>
@@ -6894,33 +6894,17 @@
                 <a:cs typeface="Avenir"/>
                 <a:sym typeface="Avenir"/>
               </a:rPr>
-              <a:t>Total income from occupied space at in-place rents, including approved </a:t>
-            </a:r>
-            <a:r>
-              <a:rPr lang="en-US" sz="700" i="1">
+              <a:t>Total income from occupied space at in-place rents, including approved rate increases </a:t>
+            </a:r>
+            <a:r>
+              <a:rPr lang="en-US" sz="1000" dirty="0">
                 <a:solidFill>
                   <a:srgbClr val="2D2D2D"/>
                 </a:solidFill>
-                <a:latin typeface="Avenir"/>
-                <a:ea typeface="Avenir"/>
-                <a:cs typeface="Avenir"/>
-                <a:sym typeface="Avenir"/>
-              </a:rPr>
-              <a:t>rate increases </a:t>
-            </a:r>
-            <a:r>
-              <a:rPr lang="en-US" sz="1000" i="1">
-                <a:solidFill>
-                  <a:srgbClr val="2D2D2D"/>
-                </a:solidFill>
+                <a:latin typeface="Avenir" panose="020B0604020202020204" charset="0"/>
               </a:rPr>
               <a:t>¹</a:t>
             </a:r>
-            <a:endParaRPr lang="en-US" sz="1000" i="1" dirty="0">
-              <a:solidFill>
-                <a:srgbClr val="2D2D2D"/>
-              </a:solidFill>
-            </a:endParaRPr>
           </a:p>
           <a:p>
             <a:pPr>
@@ -6959,10 +6943,11 @@
               <a:t>. rent </a:t>
             </a:r>
             <a:r>
-              <a:rPr lang="en-US" sz="1000" i="1" dirty="0">
+              <a:rPr lang="en-US" sz="1000" dirty="0">
                 <a:solidFill>
                   <a:srgbClr val="2D2D2D"/>
                 </a:solidFill>
+                <a:latin typeface="Avenir" panose="020B0604020202020204" charset="0"/>
               </a:rPr>
               <a:t>²</a:t>
             </a:r>
@@ -6986,18 +6971,19 @@
               <a:t>Projected total income assuming 100% occupancy at the set (target) rental rates </a:t>
             </a:r>
             <a:r>
-              <a:rPr lang="en-US" sz="1000" i="1" dirty="0">
+              <a:rPr lang="en-US" sz="1000" dirty="0">
                 <a:solidFill>
                   <a:srgbClr val="2D2D2D"/>
                 </a:solidFill>
+                <a:latin typeface="Avenir" panose="020B0604020202020204" charset="0"/>
               </a:rPr>
               <a:t>³</a:t>
             </a:r>
-            <a:endParaRPr lang="en-US" sz="1000" i="1" dirty="0">
+            <a:endParaRPr lang="en-US" sz="1000" dirty="0">
               <a:solidFill>
                 <a:srgbClr val="2D2D2D"/>
               </a:solidFill>
-              <a:latin typeface="Avenir"/>
+              <a:latin typeface="Avenir" panose="020B0604020202020204" charset="0"/>
               <a:ea typeface="Avenir"/>
               <a:cs typeface="Avenir"/>
               <a:sym typeface="Avenir"/>

--- a/storeinsight/public/FLASHTEMPLATE.pptx
+++ b/storeinsight/public/FLASHTEMPLATE.pptx
@@ -6797,7 +6797,7 @@
               </a:lnSpc>
             </a:pPr>
             <a:r>
-              <a:rPr lang="en-US" sz="802" dirty="0">
+              <a:rPr lang="en-US" sz="802">
                 <a:solidFill>
                   <a:srgbClr val="2D2D2D"/>
                 </a:solidFill>
@@ -6806,8 +6806,17 @@
                 <a:cs typeface="Avenir"/>
                 <a:sym typeface="Avenir"/>
               </a:rPr>
-              <a:t>Net Rental Income</a:t>
-            </a:r>
+              <a:t>Net Revenue</a:t>
+            </a:r>
+            <a:endParaRPr lang="en-US" sz="802" dirty="0">
+              <a:solidFill>
+                <a:srgbClr val="2D2D2D"/>
+              </a:solidFill>
+              <a:latin typeface="Avenir"/>
+              <a:ea typeface="Avenir"/>
+              <a:cs typeface="Avenir"/>
+              <a:sym typeface="Avenir"/>
+            </a:endParaRPr>
           </a:p>
         </p:txBody>
       </p:sp>

--- a/storeinsight/public/FLASHTEMPLATE.pptx
+++ b/storeinsight/public/FLASHTEMPLATE.pptx
@@ -313,7 +313,7 @@
             <a:fld id="{1D8BD707-D9CF-40AE-B4C6-C98DA3205C09}" type="datetimeFigureOut">
               <a:rPr lang="en-US" smtClean="0"/>
               <a:pPr/>
-              <a:t>4/6/2026</a:t>
+              <a:t>4/7/2026</a:t>
             </a:fld>
             <a:endParaRPr lang="en-US"/>
           </a:p>
@@ -478,7 +478,7 @@
             <a:fld id="{1D8BD707-D9CF-40AE-B4C6-C98DA3205C09}" type="datetimeFigureOut">
               <a:rPr lang="en-US" smtClean="0"/>
               <a:pPr/>
-              <a:t>4/6/2026</a:t>
+              <a:t>4/7/2026</a:t>
             </a:fld>
             <a:endParaRPr lang="en-US"/>
           </a:p>
@@ -653,7 +653,7 @@
             <a:fld id="{1D8BD707-D9CF-40AE-B4C6-C98DA3205C09}" type="datetimeFigureOut">
               <a:rPr lang="en-US" smtClean="0"/>
               <a:pPr/>
-              <a:t>4/6/2026</a:t>
+              <a:t>4/7/2026</a:t>
             </a:fld>
             <a:endParaRPr lang="en-US"/>
           </a:p>
@@ -818,7 +818,7 @@
             <a:fld id="{1D8BD707-D9CF-40AE-B4C6-C98DA3205C09}" type="datetimeFigureOut">
               <a:rPr lang="en-US" smtClean="0"/>
               <a:pPr/>
-              <a:t>4/6/2026</a:t>
+              <a:t>4/7/2026</a:t>
             </a:fld>
             <a:endParaRPr lang="en-US"/>
           </a:p>
@@ -1060,7 +1060,7 @@
             <a:fld id="{1D8BD707-D9CF-40AE-B4C6-C98DA3205C09}" type="datetimeFigureOut">
               <a:rPr lang="en-US" smtClean="0"/>
               <a:pPr/>
-              <a:t>4/6/2026</a:t>
+              <a:t>4/7/2026</a:t>
             </a:fld>
             <a:endParaRPr lang="en-US"/>
           </a:p>
@@ -1342,7 +1342,7 @@
             <a:fld id="{1D8BD707-D9CF-40AE-B4C6-C98DA3205C09}" type="datetimeFigureOut">
               <a:rPr lang="en-US" smtClean="0"/>
               <a:pPr/>
-              <a:t>4/6/2026</a:t>
+              <a:t>4/7/2026</a:t>
             </a:fld>
             <a:endParaRPr lang="en-US"/>
           </a:p>
@@ -1758,7 +1758,7 @@
             <a:fld id="{1D8BD707-D9CF-40AE-B4C6-C98DA3205C09}" type="datetimeFigureOut">
               <a:rPr lang="en-US" smtClean="0"/>
               <a:pPr/>
-              <a:t>4/6/2026</a:t>
+              <a:t>4/7/2026</a:t>
             </a:fld>
             <a:endParaRPr lang="en-US"/>
           </a:p>
@@ -1872,7 +1872,7 @@
             <a:fld id="{1D8BD707-D9CF-40AE-B4C6-C98DA3205C09}" type="datetimeFigureOut">
               <a:rPr lang="en-US" smtClean="0"/>
               <a:pPr/>
-              <a:t>4/6/2026</a:t>
+              <a:t>4/7/2026</a:t>
             </a:fld>
             <a:endParaRPr lang="en-US"/>
           </a:p>
@@ -1964,7 +1964,7 @@
             <a:fld id="{1D8BD707-D9CF-40AE-B4C6-C98DA3205C09}" type="datetimeFigureOut">
               <a:rPr lang="en-US" smtClean="0"/>
               <a:pPr/>
-              <a:t>4/6/2026</a:t>
+              <a:t>4/7/2026</a:t>
             </a:fld>
             <a:endParaRPr lang="en-US"/>
           </a:p>
@@ -2236,7 +2236,7 @@
             <a:fld id="{1D8BD707-D9CF-40AE-B4C6-C98DA3205C09}" type="datetimeFigureOut">
               <a:rPr lang="en-US" smtClean="0"/>
               <a:pPr/>
-              <a:t>4/6/2026</a:t>
+              <a:t>4/7/2026</a:t>
             </a:fld>
             <a:endParaRPr lang="en-US"/>
           </a:p>
@@ -2485,7 +2485,7 @@
             <a:fld id="{1D8BD707-D9CF-40AE-B4C6-C98DA3205C09}" type="datetimeFigureOut">
               <a:rPr lang="en-US" smtClean="0"/>
               <a:pPr/>
-              <a:t>4/6/2026</a:t>
+              <a:t>4/7/2026</a:t>
             </a:fld>
             <a:endParaRPr lang="en-US"/>
           </a:p>
@@ -2693,7 +2693,7 @@
             <a:fld id="{1D8BD707-D9CF-40AE-B4C6-C98DA3205C09}" type="datetimeFigureOut">
               <a:rPr lang="en-US" smtClean="0"/>
               <a:pPr/>
-              <a:t>4/6/2026</a:t>
+              <a:t>4/7/2026</a:t>
             </a:fld>
             <a:endParaRPr lang="en-US"/>
           </a:p>
@@ -6797,6 +6797,18 @@
               </a:lnSpc>
             </a:pPr>
             <a:r>
+              <a:rPr lang="en-US" sz="802" dirty="0">
+                <a:solidFill>
+                  <a:srgbClr val="2D2D2D"/>
+                </a:solidFill>
+                <a:latin typeface="Avenir"/>
+                <a:ea typeface="Avenir"/>
+                <a:cs typeface="Avenir"/>
+                <a:sym typeface="Avenir"/>
+              </a:rPr>
+              <a:t>Net </a:t>
+            </a:r>
+            <a:r>
               <a:rPr lang="en-US" sz="802">
                 <a:solidFill>
                   <a:srgbClr val="2D2D2D"/>
@@ -6806,7 +6818,7 @@
                 <a:cs typeface="Avenir"/>
                 <a:sym typeface="Avenir"/>
               </a:rPr>
-              <a:t>Net Revenue</a:t>
+              <a:t>Rental Income</a:t>
             </a:r>
             <a:endParaRPr lang="en-US" sz="802" dirty="0">
               <a:solidFill>

--- a/storeinsight/public/FLASHTEMPLATE.pptx
+++ b/storeinsight/public/FLASHTEMPLATE.pptx
@@ -313,7 +313,7 @@
             <a:fld id="{1D8BD707-D9CF-40AE-B4C6-C98DA3205C09}" type="datetimeFigureOut">
               <a:rPr lang="en-US" smtClean="0"/>
               <a:pPr/>
-              <a:t>4/7/2026</a:t>
+              <a:t>4/29/2026</a:t>
             </a:fld>
             <a:endParaRPr lang="en-US"/>
           </a:p>
@@ -478,7 +478,7 @@
             <a:fld id="{1D8BD707-D9CF-40AE-B4C6-C98DA3205C09}" type="datetimeFigureOut">
               <a:rPr lang="en-US" smtClean="0"/>
               <a:pPr/>
-              <a:t>4/7/2026</a:t>
+              <a:t>4/29/2026</a:t>
             </a:fld>
             <a:endParaRPr lang="en-US"/>
           </a:p>
@@ -653,7 +653,7 @@
             <a:fld id="{1D8BD707-D9CF-40AE-B4C6-C98DA3205C09}" type="datetimeFigureOut">
               <a:rPr lang="en-US" smtClean="0"/>
               <a:pPr/>
-              <a:t>4/7/2026</a:t>
+              <a:t>4/29/2026</a:t>
             </a:fld>
             <a:endParaRPr lang="en-US"/>
           </a:p>
@@ -818,7 +818,7 @@
             <a:fld id="{1D8BD707-D9CF-40AE-B4C6-C98DA3205C09}" type="datetimeFigureOut">
               <a:rPr lang="en-US" smtClean="0"/>
               <a:pPr/>
-              <a:t>4/7/2026</a:t>
+              <a:t>4/29/2026</a:t>
             </a:fld>
             <a:endParaRPr lang="en-US"/>
           </a:p>
@@ -1060,7 +1060,7 @@
             <a:fld id="{1D8BD707-D9CF-40AE-B4C6-C98DA3205C09}" type="datetimeFigureOut">
               <a:rPr lang="en-US" smtClean="0"/>
               <a:pPr/>
-              <a:t>4/7/2026</a:t>
+              <a:t>4/29/2026</a:t>
             </a:fld>
             <a:endParaRPr lang="en-US"/>
           </a:p>
@@ -1342,7 +1342,7 @@
             <a:fld id="{1D8BD707-D9CF-40AE-B4C6-C98DA3205C09}" type="datetimeFigureOut">
               <a:rPr lang="en-US" smtClean="0"/>
               <a:pPr/>
-              <a:t>4/7/2026</a:t>
+              <a:t>4/29/2026</a:t>
             </a:fld>
             <a:endParaRPr lang="en-US"/>
           </a:p>
@@ -1758,7 +1758,7 @@
             <a:fld id="{1D8BD707-D9CF-40AE-B4C6-C98DA3205C09}" type="datetimeFigureOut">
               <a:rPr lang="en-US" smtClean="0"/>
               <a:pPr/>
-              <a:t>4/7/2026</a:t>
+              <a:t>4/29/2026</a:t>
             </a:fld>
             <a:endParaRPr lang="en-US"/>
           </a:p>
@@ -1872,7 +1872,7 @@
             <a:fld id="{1D8BD707-D9CF-40AE-B4C6-C98DA3205C09}" type="datetimeFigureOut">
               <a:rPr lang="en-US" smtClean="0"/>
               <a:pPr/>
-              <a:t>4/7/2026</a:t>
+              <a:t>4/29/2026</a:t>
             </a:fld>
             <a:endParaRPr lang="en-US"/>
           </a:p>
@@ -1964,7 +1964,7 @@
             <a:fld id="{1D8BD707-D9CF-40AE-B4C6-C98DA3205C09}" type="datetimeFigureOut">
               <a:rPr lang="en-US" smtClean="0"/>
               <a:pPr/>
-              <a:t>4/7/2026</a:t>
+              <a:t>4/29/2026</a:t>
             </a:fld>
             <a:endParaRPr lang="en-US"/>
           </a:p>
@@ -2236,7 +2236,7 @@
             <a:fld id="{1D8BD707-D9CF-40AE-B4C6-C98DA3205C09}" type="datetimeFigureOut">
               <a:rPr lang="en-US" smtClean="0"/>
               <a:pPr/>
-              <a:t>4/7/2026</a:t>
+              <a:t>4/29/2026</a:t>
             </a:fld>
             <a:endParaRPr lang="en-US"/>
           </a:p>
@@ -2485,7 +2485,7 @@
             <a:fld id="{1D8BD707-D9CF-40AE-B4C6-C98DA3205C09}" type="datetimeFigureOut">
               <a:rPr lang="en-US" smtClean="0"/>
               <a:pPr/>
-              <a:t>4/7/2026</a:t>
+              <a:t>4/29/2026</a:t>
             </a:fld>
             <a:endParaRPr lang="en-US"/>
           </a:p>
@@ -2693,7 +2693,7 @@
             <a:fld id="{1D8BD707-D9CF-40AE-B4C6-C98DA3205C09}" type="datetimeFigureOut">
               <a:rPr lang="en-US" smtClean="0"/>
               <a:pPr/>
-              <a:t>4/7/2026</a:t>
+              <a:t>4/29/2026</a:t>
             </a:fld>
             <a:endParaRPr lang="en-US"/>
           </a:p>
@@ -6806,29 +6806,8 @@
                 <a:cs typeface="Avenir"/>
                 <a:sym typeface="Avenir"/>
               </a:rPr>
-              <a:t>Net </a:t>
-            </a:r>
-            <a:r>
-              <a:rPr lang="en-US" sz="802">
-                <a:solidFill>
-                  <a:srgbClr val="2D2D2D"/>
-                </a:solidFill>
-                <a:latin typeface="Avenir"/>
-                <a:ea typeface="Avenir"/>
-                <a:cs typeface="Avenir"/>
-                <a:sym typeface="Avenir"/>
-              </a:rPr>
-              <a:t>Rental Income</a:t>
-            </a:r>
-            <a:endParaRPr lang="en-US" sz="802" dirty="0">
-              <a:solidFill>
-                <a:srgbClr val="2D2D2D"/>
-              </a:solidFill>
-              <a:latin typeface="Avenir"/>
-              <a:ea typeface="Avenir"/>
-              <a:cs typeface="Avenir"/>
-              <a:sym typeface="Avenir"/>
-            </a:endParaRPr>
+              <a:t>Net Revenue</a:t>
+            </a:r>
           </a:p>
         </p:txBody>
       </p:sp>

--- a/storeinsight/public/FLASHTEMPLATE.pptx
+++ b/storeinsight/public/FLASHTEMPLATE.pptx
@@ -17,6 +17,7 @@
     <p:embeddedFont>
       <p:font typeface="Avenir Bold" panose="020B0604020202020204" charset="0"/>
       <p:regular r:id="rId4"/>
+      <p:bold r:id="rId5"/>
     </p:embeddedFont>
   </p:embeddedFontLst>
   <p:defaultTextStyle>
@@ -313,7 +314,7 @@
             <a:fld id="{1D8BD707-D9CF-40AE-B4C6-C98DA3205C09}" type="datetimeFigureOut">
               <a:rPr lang="en-US" smtClean="0"/>
               <a:pPr/>
-              <a:t>4/29/2026</a:t>
+              <a:t>6/18/2026</a:t>
             </a:fld>
             <a:endParaRPr lang="en-US"/>
           </a:p>
@@ -478,7 +479,7 @@
             <a:fld id="{1D8BD707-D9CF-40AE-B4C6-C98DA3205C09}" type="datetimeFigureOut">
               <a:rPr lang="en-US" smtClean="0"/>
               <a:pPr/>
-              <a:t>4/29/2026</a:t>
+              <a:t>6/18/2026</a:t>
             </a:fld>
             <a:endParaRPr lang="en-US"/>
           </a:p>
@@ -653,7 +654,7 @@
             <a:fld id="{1D8BD707-D9CF-40AE-B4C6-C98DA3205C09}" type="datetimeFigureOut">
               <a:rPr lang="en-US" smtClean="0"/>
               <a:pPr/>
-              <a:t>4/29/2026</a:t>
+              <a:t>6/18/2026</a:t>
             </a:fld>
             <a:endParaRPr lang="en-US"/>
           </a:p>
@@ -818,7 +819,7 @@
             <a:fld id="{1D8BD707-D9CF-40AE-B4C6-C98DA3205C09}" type="datetimeFigureOut">
               <a:rPr lang="en-US" smtClean="0"/>
               <a:pPr/>
-              <a:t>4/29/2026</a:t>
+              <a:t>6/18/2026</a:t>
             </a:fld>
             <a:endParaRPr lang="en-US"/>
           </a:p>
@@ -1060,7 +1061,7 @@
             <a:fld id="{1D8BD707-D9CF-40AE-B4C6-C98DA3205C09}" type="datetimeFigureOut">
               <a:rPr lang="en-US" smtClean="0"/>
               <a:pPr/>
-              <a:t>4/29/2026</a:t>
+              <a:t>6/18/2026</a:t>
             </a:fld>
             <a:endParaRPr lang="en-US"/>
           </a:p>
@@ -1342,7 +1343,7 @@
             <a:fld id="{1D8BD707-D9CF-40AE-B4C6-C98DA3205C09}" type="datetimeFigureOut">
               <a:rPr lang="en-US" smtClean="0"/>
               <a:pPr/>
-              <a:t>4/29/2026</a:t>
+              <a:t>6/18/2026</a:t>
             </a:fld>
             <a:endParaRPr lang="en-US"/>
           </a:p>
@@ -1758,7 +1759,7 @@
             <a:fld id="{1D8BD707-D9CF-40AE-B4C6-C98DA3205C09}" type="datetimeFigureOut">
               <a:rPr lang="en-US" smtClean="0"/>
               <a:pPr/>
-              <a:t>4/29/2026</a:t>
+              <a:t>6/18/2026</a:t>
             </a:fld>
             <a:endParaRPr lang="en-US"/>
           </a:p>
@@ -1872,7 +1873,7 @@
             <a:fld id="{1D8BD707-D9CF-40AE-B4C6-C98DA3205C09}" type="datetimeFigureOut">
               <a:rPr lang="en-US" smtClean="0"/>
               <a:pPr/>
-              <a:t>4/29/2026</a:t>
+              <a:t>6/18/2026</a:t>
             </a:fld>
             <a:endParaRPr lang="en-US"/>
           </a:p>
@@ -1964,7 +1965,7 @@
             <a:fld id="{1D8BD707-D9CF-40AE-B4C6-C98DA3205C09}" type="datetimeFigureOut">
               <a:rPr lang="en-US" smtClean="0"/>
               <a:pPr/>
-              <a:t>4/29/2026</a:t>
+              <a:t>6/18/2026</a:t>
             </a:fld>
             <a:endParaRPr lang="en-US"/>
           </a:p>
@@ -2236,7 +2237,7 @@
             <a:fld id="{1D8BD707-D9CF-40AE-B4C6-C98DA3205C09}" type="datetimeFigureOut">
               <a:rPr lang="en-US" smtClean="0"/>
               <a:pPr/>
-              <a:t>4/29/2026</a:t>
+              <a:t>6/18/2026</a:t>
             </a:fld>
             <a:endParaRPr lang="en-US"/>
           </a:p>
@@ -2485,7 +2486,7 @@
             <a:fld id="{1D8BD707-D9CF-40AE-B4C6-C98DA3205C09}" type="datetimeFigureOut">
               <a:rPr lang="en-US" smtClean="0"/>
               <a:pPr/>
-              <a:t>4/29/2026</a:t>
+              <a:t>6/18/2026</a:t>
             </a:fld>
             <a:endParaRPr lang="en-US"/>
           </a:p>
@@ -2693,7 +2694,7 @@
             <a:fld id="{1D8BD707-D9CF-40AE-B4C6-C98DA3205C09}" type="datetimeFigureOut">
               <a:rPr lang="en-US" smtClean="0"/>
               <a:pPr/>
-              <a:t>4/29/2026</a:t>
+              <a:t>6/18/2026</a:t>
             </a:fld>
             <a:endParaRPr lang="en-US"/>
           </a:p>
@@ -6797,7 +6798,7 @@
               </a:lnSpc>
             </a:pPr>
             <a:r>
-              <a:rPr lang="en-US" sz="802" dirty="0">
+              <a:rPr lang="en-US" sz="802">
                 <a:solidFill>
                   <a:srgbClr val="2D2D2D"/>
                 </a:solidFill>
@@ -6806,8 +6807,17 @@
                 <a:cs typeface="Avenir"/>
                 <a:sym typeface="Avenir"/>
               </a:rPr>
-              <a:t>Net Revenue</a:t>
-            </a:r>
+              <a:t>Total Revenue</a:t>
+            </a:r>
+            <a:endParaRPr lang="en-US" sz="802" dirty="0">
+              <a:solidFill>
+                <a:srgbClr val="2D2D2D"/>
+              </a:solidFill>
+              <a:latin typeface="Avenir"/>
+              <a:ea typeface="Avenir"/>
+              <a:cs typeface="Avenir"/>
+              <a:sym typeface="Avenir"/>
+            </a:endParaRPr>
           </a:p>
         </p:txBody>
       </p:sp>
